--- a/Chapter 11 Image segmentation.pptx
+++ b/Chapter 11 Image segmentation.pptx
@@ -5,17 +5,17 @@
     <p:sldMasterId id="2147483660" r:id="rId1"/>
   </p:sldMasterIdLst>
   <p:notesMasterIdLst>
-    <p:notesMasterId r:id="rId29"/>
+    <p:notesMasterId r:id="rId30"/>
   </p:notesMasterIdLst>
   <p:handoutMasterIdLst>
-    <p:handoutMasterId r:id="rId30"/>
+    <p:handoutMasterId r:id="rId31"/>
   </p:handoutMasterIdLst>
   <p:sldIdLst>
     <p:sldId id="256" r:id="rId2"/>
     <p:sldId id="1139" r:id="rId3"/>
     <p:sldId id="1133" r:id="rId4"/>
-    <p:sldId id="1134" r:id="rId5"/>
-    <p:sldId id="1153" r:id="rId6"/>
+    <p:sldId id="1153" r:id="rId5"/>
+    <p:sldId id="1134" r:id="rId6"/>
     <p:sldId id="1146" r:id="rId7"/>
     <p:sldId id="1140" r:id="rId8"/>
     <p:sldId id="1145" r:id="rId9"/>
@@ -26,18 +26,19 @@
     <p:sldId id="1137" r:id="rId14"/>
     <p:sldId id="1136" r:id="rId15"/>
     <p:sldId id="1152" r:id="rId16"/>
-    <p:sldId id="1147" r:id="rId17"/>
-    <p:sldId id="1143" r:id="rId18"/>
-    <p:sldId id="1138" r:id="rId19"/>
-    <p:sldId id="1135" r:id="rId20"/>
-    <p:sldId id="1142" r:id="rId21"/>
-    <p:sldId id="1129" r:id="rId22"/>
-    <p:sldId id="1130" r:id="rId23"/>
-    <p:sldId id="1131" r:id="rId24"/>
-    <p:sldId id="1132" r:id="rId25"/>
-    <p:sldId id="1121" r:id="rId26"/>
-    <p:sldId id="1122" r:id="rId27"/>
-    <p:sldId id="1123" r:id="rId28"/>
+    <p:sldId id="1154" r:id="rId17"/>
+    <p:sldId id="1147" r:id="rId18"/>
+    <p:sldId id="1143" r:id="rId19"/>
+    <p:sldId id="1138" r:id="rId20"/>
+    <p:sldId id="1135" r:id="rId21"/>
+    <p:sldId id="1142" r:id="rId22"/>
+    <p:sldId id="1129" r:id="rId23"/>
+    <p:sldId id="1130" r:id="rId24"/>
+    <p:sldId id="1131" r:id="rId25"/>
+    <p:sldId id="1132" r:id="rId26"/>
+    <p:sldId id="1121" r:id="rId27"/>
+    <p:sldId id="1122" r:id="rId28"/>
+    <p:sldId id="1123" r:id="rId29"/>
   </p:sldIdLst>
   <p:sldSz cx="12192000" cy="6858000"/>
   <p:notesSz cx="6858000" cy="9144000"/>
@@ -148,8 +149,8 @@
           <p14:sldIdLst>
             <p14:sldId id="1139"/>
             <p14:sldId id="1133"/>
+            <p14:sldId id="1153"/>
             <p14:sldId id="1134"/>
-            <p14:sldId id="1153"/>
             <p14:sldId id="1146"/>
             <p14:sldId id="1140"/>
             <p14:sldId id="1145"/>
@@ -160,6 +161,7 @@
             <p14:sldId id="1137"/>
             <p14:sldId id="1136"/>
             <p14:sldId id="1152"/>
+            <p14:sldId id="1154"/>
             <p14:sldId id="1147"/>
             <p14:sldId id="1143"/>
             <p14:sldId id="1138"/>
@@ -965,7 +967,7 @@
                 <a:latin typeface="맑은 고딕" panose="020B0503020000020004" pitchFamily="50" charset="-127"/>
                 <a:ea typeface="맑은 고딕" panose="020B0503020000020004" pitchFamily="50" charset="-127"/>
               </a:rPr>
-              <a:t>5</a:t>
+              <a:t>4</a:t>
             </a:fld>
             <a:endParaRPr lang="ko-KR" altLang="en-US">
               <a:latin typeface="맑은 고딕" panose="020B0503020000020004" pitchFamily="50" charset="-127"/>
@@ -8059,6 +8061,1315 @@
         <p:cNvPr id="1" name="">
           <a:extLst>
             <a:ext uri="{FF2B5EF4-FFF2-40B4-BE49-F238E27FC236}">
+              <a16:creationId xmlns:a16="http://schemas.microsoft.com/office/drawing/2014/main" id="{7BF8AA10-ED67-0C44-9791-AB83B324D874}"/>
+            </a:ext>
+          </a:extLst>
+        </p:cNvPr>
+        <p:cNvGrpSpPr/>
+        <p:nvPr/>
+      </p:nvGrpSpPr>
+      <p:grpSpPr>
+        <a:xfrm>
+          <a:off x="0" y="0"/>
+          <a:ext cx="0" cy="0"/>
+          <a:chOff x="0" y="0"/>
+          <a:chExt cx="0" cy="0"/>
+        </a:xfrm>
+      </p:grpSpPr>
+      <p:sp>
+        <p:nvSpPr>
+          <p:cNvPr id="3" name="제목 1">
+            <a:extLst>
+              <a:ext uri="{FF2B5EF4-FFF2-40B4-BE49-F238E27FC236}">
+                <a16:creationId xmlns:a16="http://schemas.microsoft.com/office/drawing/2014/main" id="{F9ACB4C6-5563-2522-E4DE-4DBA90D7622D}"/>
+              </a:ext>
+            </a:extLst>
+          </p:cNvPr>
+          <p:cNvSpPr txBox="1">
+            <a:spLocks/>
+          </p:cNvSpPr>
+          <p:nvPr/>
+        </p:nvSpPr>
+        <p:spPr>
+          <a:xfrm>
+            <a:off x="475645" y="481983"/>
+            <a:ext cx="10353762" cy="766439"/>
+          </a:xfrm>
+          <a:prstGeom prst="rect">
+            <a:avLst/>
+          </a:prstGeom>
+        </p:spPr>
+        <p:txBody>
+          <a:bodyPr vert="horz" lIns="91440" tIns="45720" rIns="91440" bIns="45720" rtlCol="0" anchor="ctr">
+            <a:normAutofit/>
+          </a:bodyPr>
+          <a:lstStyle>
+            <a:lvl1pPr algn="ctr" defTabSz="914400" rtl="0" eaLnBrk="1" latinLnBrk="1" hangingPunct="1">
+              <a:lnSpc>
+                <a:spcPct val="90000"/>
+              </a:lnSpc>
+              <a:spcBef>
+                <a:spcPct val="0"/>
+              </a:spcBef>
+              <a:buNone/>
+              <a:defRPr sz="3200" kern="1200" cap="all" baseline="0">
+                <a:solidFill>
+                  <a:schemeClr val="tx1"/>
+                </a:solidFill>
+                <a:effectLst/>
+                <a:latin typeface="Batang" panose="02030600000101010101" pitchFamily="18" charset="-127"/>
+                <a:ea typeface="Batang" panose="02030600000101010101" pitchFamily="18" charset="-127"/>
+                <a:cs typeface="+mj-cs"/>
+              </a:defRPr>
+            </a:lvl1pPr>
+          </a:lstStyle>
+          <a:p>
+            <a:pPr algn="l"/>
+            <a:r>
+              <a:rPr lang="en-US" altLang="ko-KR" b="1" cap="none" dirty="0"/>
+              <a:t>FCN vs. </a:t>
+            </a:r>
+            <a:r>
+              <a:rPr lang="en-US" altLang="ko-KR" b="1" cap="none" dirty="0" err="1"/>
+              <a:t>Depthwise</a:t>
+            </a:r>
+            <a:r>
+              <a:rPr lang="en-US" altLang="ko-KR" b="1" cap="none" dirty="0"/>
+              <a:t> Separable Convolution </a:t>
+            </a:r>
+          </a:p>
+        </p:txBody>
+      </p:sp>
+      <p:sp>
+        <p:nvSpPr>
+          <p:cNvPr id="11" name="AutoShape 2" descr="라이트박스에 표시된 선택된 이미지">
+            <a:extLst>
+              <a:ext uri="{FF2B5EF4-FFF2-40B4-BE49-F238E27FC236}">
+                <a16:creationId xmlns:a16="http://schemas.microsoft.com/office/drawing/2014/main" id="{786EBB61-F4D9-19BF-97E8-D2D6CC513DDD}"/>
+              </a:ext>
+            </a:extLst>
+          </p:cNvPr>
+          <p:cNvSpPr>
+            <a:spLocks noChangeAspect="1" noChangeArrowheads="1"/>
+          </p:cNvSpPr>
+          <p:nvPr/>
+        </p:nvSpPr>
+        <p:spPr bwMode="auto">
+          <a:xfrm>
+            <a:off x="5943600" y="3276600"/>
+            <a:ext cx="304800" cy="304800"/>
+          </a:xfrm>
+          <a:prstGeom prst="rect">
+            <a:avLst/>
+          </a:prstGeom>
+          <a:noFill/>
+          <a:extLst>
+            <a:ext uri="{909E8E84-426E-40DD-AFC4-6F175D3DCCD1}">
+              <a14:hiddenFill xmlns:a14="http://schemas.microsoft.com/office/drawing/2010/main">
+                <a:solidFill>
+                  <a:srgbClr val="FFFFFF"/>
+                </a:solidFill>
+              </a14:hiddenFill>
+            </a:ext>
+          </a:extLst>
+        </p:spPr>
+        <p:txBody>
+          <a:bodyPr vert="horz" wrap="square" lIns="91440" tIns="45720" rIns="91440" bIns="45720" numCol="1" anchor="t" anchorCtr="0" compatLnSpc="1">
+            <a:prstTxWarp prst="textNoShape">
+              <a:avLst/>
+            </a:prstTxWarp>
+          </a:bodyPr>
+          <a:lstStyle/>
+          <a:p>
+            <a:endParaRPr lang="ko-KR" altLang="en-US"/>
+          </a:p>
+        </p:txBody>
+      </p:sp>
+      <p:sp>
+        <p:nvSpPr>
+          <p:cNvPr id="2" name="슬라이드 번호 개체 틀 3">
+            <a:extLst>
+              <a:ext uri="{FF2B5EF4-FFF2-40B4-BE49-F238E27FC236}">
+                <a16:creationId xmlns:a16="http://schemas.microsoft.com/office/drawing/2014/main" id="{035885C9-7CD1-C6F4-01A9-EA8CEB8CB12A}"/>
+              </a:ext>
+            </a:extLst>
+          </p:cNvPr>
+          <p:cNvSpPr txBox="1">
+            <a:spLocks/>
+          </p:cNvSpPr>
+          <p:nvPr/>
+        </p:nvSpPr>
+        <p:spPr>
+          <a:xfrm>
+            <a:off x="11180761" y="299420"/>
+            <a:ext cx="753545" cy="365125"/>
+          </a:xfrm>
+          <a:prstGeom prst="rect">
+            <a:avLst/>
+          </a:prstGeom>
+        </p:spPr>
+        <p:txBody>
+          <a:bodyPr vert="horz" lIns="91440" tIns="45720" rIns="91440" bIns="45720" rtlCol="0" anchor="ctr"/>
+          <a:lstStyle>
+            <a:defPPr rtl="0">
+              <a:defRPr lang="ko-KR"/>
+            </a:defPPr>
+            <a:lvl1pPr marL="0" algn="r" defTabSz="914400" rtl="0" eaLnBrk="1" latinLnBrk="0" hangingPunct="1">
+              <a:defRPr sz="1200" kern="1200" baseline="0">
+                <a:solidFill>
+                  <a:schemeClr val="tx1">
+                    <a:lumMod val="65000"/>
+                    <a:lumOff val="35000"/>
+                  </a:schemeClr>
+                </a:solidFill>
+                <a:latin typeface="맑은 고딕" panose="020B0503020000020004" pitchFamily="50" charset="-127"/>
+                <a:ea typeface="맑은 고딕" panose="020B0503020000020004" pitchFamily="50" charset="-127"/>
+                <a:cs typeface="+mn-cs"/>
+              </a:defRPr>
+            </a:lvl1pPr>
+            <a:lvl2pPr marL="457200" algn="l" defTabSz="914400" rtl="0" eaLnBrk="1" latinLnBrk="0" hangingPunct="1">
+              <a:defRPr sz="1800" kern="1200">
+                <a:solidFill>
+                  <a:schemeClr val="tx1"/>
+                </a:solidFill>
+                <a:latin typeface="+mn-lt"/>
+                <a:ea typeface="+mn-ea"/>
+                <a:cs typeface="+mn-cs"/>
+              </a:defRPr>
+            </a:lvl2pPr>
+            <a:lvl3pPr marL="914400" algn="l" defTabSz="914400" rtl="0" eaLnBrk="1" latinLnBrk="0" hangingPunct="1">
+              <a:defRPr sz="1800" kern="1200">
+                <a:solidFill>
+                  <a:schemeClr val="tx1"/>
+                </a:solidFill>
+                <a:latin typeface="+mn-lt"/>
+                <a:ea typeface="+mn-ea"/>
+                <a:cs typeface="+mn-cs"/>
+              </a:defRPr>
+            </a:lvl3pPr>
+            <a:lvl4pPr marL="1371600" algn="l" defTabSz="914400" rtl="0" eaLnBrk="1" latinLnBrk="0" hangingPunct="1">
+              <a:defRPr sz="1800" kern="1200">
+                <a:solidFill>
+                  <a:schemeClr val="tx1"/>
+                </a:solidFill>
+                <a:latin typeface="+mn-lt"/>
+                <a:ea typeface="+mn-ea"/>
+                <a:cs typeface="+mn-cs"/>
+              </a:defRPr>
+            </a:lvl4pPr>
+            <a:lvl5pPr marL="1828800" algn="l" defTabSz="914400" rtl="0" eaLnBrk="1" latinLnBrk="0" hangingPunct="1">
+              <a:defRPr sz="1800" kern="1200">
+                <a:solidFill>
+                  <a:schemeClr val="tx1"/>
+                </a:solidFill>
+                <a:latin typeface="+mn-lt"/>
+                <a:ea typeface="+mn-ea"/>
+                <a:cs typeface="+mn-cs"/>
+              </a:defRPr>
+            </a:lvl5pPr>
+            <a:lvl6pPr marL="2286000" algn="l" defTabSz="914400" rtl="0" eaLnBrk="1" latinLnBrk="0" hangingPunct="1">
+              <a:defRPr sz="1800" kern="1200">
+                <a:solidFill>
+                  <a:schemeClr val="tx1"/>
+                </a:solidFill>
+                <a:latin typeface="+mn-lt"/>
+                <a:ea typeface="+mn-ea"/>
+                <a:cs typeface="+mn-cs"/>
+              </a:defRPr>
+            </a:lvl6pPr>
+            <a:lvl7pPr marL="2743200" algn="l" defTabSz="914400" rtl="0" eaLnBrk="1" latinLnBrk="0" hangingPunct="1">
+              <a:defRPr sz="1800" kern="1200">
+                <a:solidFill>
+                  <a:schemeClr val="tx1"/>
+                </a:solidFill>
+                <a:latin typeface="+mn-lt"/>
+                <a:ea typeface="+mn-ea"/>
+                <a:cs typeface="+mn-cs"/>
+              </a:defRPr>
+            </a:lvl7pPr>
+            <a:lvl8pPr marL="3200400" algn="l" defTabSz="914400" rtl="0" eaLnBrk="1" latinLnBrk="0" hangingPunct="1">
+              <a:defRPr sz="1800" kern="1200">
+                <a:solidFill>
+                  <a:schemeClr val="tx1"/>
+                </a:solidFill>
+                <a:latin typeface="+mn-lt"/>
+                <a:ea typeface="+mn-ea"/>
+                <a:cs typeface="+mn-cs"/>
+              </a:defRPr>
+            </a:lvl8pPr>
+            <a:lvl9pPr marL="3657600" algn="l" defTabSz="914400" rtl="0" eaLnBrk="1" latinLnBrk="0" hangingPunct="1">
+              <a:defRPr sz="1800" kern="1200">
+                <a:solidFill>
+                  <a:schemeClr val="tx1"/>
+                </a:solidFill>
+                <a:latin typeface="+mn-lt"/>
+                <a:ea typeface="+mn-ea"/>
+                <a:cs typeface="+mn-cs"/>
+              </a:defRPr>
+            </a:lvl9pPr>
+          </a:lstStyle>
+          <a:p>
+            <a:fld id="{D57F1E4F-1CFF-5643-939E-217C01CDF565}" type="slidenum">
+              <a:rPr lang="en-US" b="1" smtClean="0">
+                <a:latin typeface="Segoe UI Emoji" panose="020B0502040204020203" pitchFamily="34" charset="0"/>
+                <a:ea typeface="Segoe UI Emoji" panose="020B0502040204020203" pitchFamily="34" charset="0"/>
+              </a:rPr>
+              <a:pPr/>
+              <a:t>16</a:t>
+            </a:fld>
+            <a:endParaRPr lang="en-US" b="1" dirty="0">
+              <a:latin typeface="Segoe UI Emoji" panose="020B0502040204020203" pitchFamily="34" charset="0"/>
+              <a:ea typeface="Segoe UI Emoji" panose="020B0502040204020203" pitchFamily="34" charset="0"/>
+            </a:endParaRPr>
+          </a:p>
+        </p:txBody>
+      </p:sp>
+      <p:graphicFrame>
+        <p:nvGraphicFramePr>
+          <p:cNvPr id="4" name="표 3">
+            <a:extLst>
+              <a:ext uri="{FF2B5EF4-FFF2-40B4-BE49-F238E27FC236}">
+                <a16:creationId xmlns:a16="http://schemas.microsoft.com/office/drawing/2014/main" id="{F89478B6-AADB-76E0-48DB-DF481BD7E361}"/>
+              </a:ext>
+            </a:extLst>
+          </p:cNvPr>
+          <p:cNvGraphicFramePr>
+            <a:graphicFrameLocks noGrp="1"/>
+          </p:cNvGraphicFramePr>
+          <p:nvPr>
+            <p:extLst>
+              <p:ext uri="{D42A27DB-BD31-4B8C-83A1-F6EECF244321}">
+                <p14:modId xmlns:p14="http://schemas.microsoft.com/office/powerpoint/2010/main" val="1939917914"/>
+              </p:ext>
+            </p:extLst>
+          </p:nvPr>
+        </p:nvGraphicFramePr>
+        <p:xfrm>
+          <a:off x="753385" y="2417433"/>
+          <a:ext cx="10685229" cy="2087890"/>
+        </p:xfrm>
+        <a:graphic>
+          <a:graphicData uri="http://schemas.openxmlformats.org/drawingml/2006/table">
+            <a:tbl>
+              <a:tblPr/>
+              <a:tblGrid>
+                <a:gridCol w="1780950">
+                  <a:extLst>
+                    <a:ext uri="{9D8B030D-6E8A-4147-A177-3AD203B41FA5}">
+                      <a16:colId xmlns:a16="http://schemas.microsoft.com/office/drawing/2014/main" val="700773218"/>
+                    </a:ext>
+                  </a:extLst>
+                </a:gridCol>
+                <a:gridCol w="5342536">
+                  <a:extLst>
+                    <a:ext uri="{9D8B030D-6E8A-4147-A177-3AD203B41FA5}">
+                      <a16:colId xmlns:a16="http://schemas.microsoft.com/office/drawing/2014/main" val="1332139726"/>
+                    </a:ext>
+                  </a:extLst>
+                </a:gridCol>
+                <a:gridCol w="3561743">
+                  <a:extLst>
+                    <a:ext uri="{9D8B030D-6E8A-4147-A177-3AD203B41FA5}">
+                      <a16:colId xmlns:a16="http://schemas.microsoft.com/office/drawing/2014/main" val="2365343045"/>
+                    </a:ext>
+                  </a:extLst>
+                </a:gridCol>
+              </a:tblGrid>
+              <a:tr h="417578">
+                <a:tc>
+                  <a:txBody>
+                    <a:bodyPr/>
+                    <a:lstStyle/>
+                    <a:p>
+                      <a:pPr>
+                        <a:buNone/>
+                      </a:pPr>
+                      <a:endParaRPr lang="ko-KR" altLang="en-US" sz="1500" dirty="0">
+                        <a:latin typeface="D2Coding" panose="020B0609020101020101" pitchFamily="49" charset="-127"/>
+                        <a:ea typeface="D2Coding" panose="020B0609020101020101" pitchFamily="49" charset="-127"/>
+                      </a:endParaRPr>
+                    </a:p>
+                  </a:txBody>
+                  <a:tcPr marL="75062" marR="75062" marT="37531" marB="37531" anchor="ctr">
+                    <a:lnL w="12700" cap="flat" cmpd="sng" algn="ctr">
+                      <a:solidFill>
+                        <a:schemeClr val="tx1"/>
+                      </a:solidFill>
+                      <a:prstDash val="solid"/>
+                      <a:round/>
+                      <a:headEnd type="none" w="med" len="med"/>
+                      <a:tailEnd type="none" w="med" len="med"/>
+                    </a:lnL>
+                    <a:lnR w="12700" cap="flat" cmpd="sng" algn="ctr">
+                      <a:solidFill>
+                        <a:schemeClr val="tx1"/>
+                      </a:solidFill>
+                      <a:prstDash val="solid"/>
+                      <a:round/>
+                      <a:headEnd type="none" w="med" len="med"/>
+                      <a:tailEnd type="none" w="med" len="med"/>
+                    </a:lnR>
+                    <a:lnT w="12700" cap="flat" cmpd="sng" algn="ctr">
+                      <a:solidFill>
+                        <a:schemeClr val="tx1"/>
+                      </a:solidFill>
+                      <a:prstDash val="solid"/>
+                      <a:round/>
+                      <a:headEnd type="none" w="med" len="med"/>
+                      <a:tailEnd type="none" w="med" len="med"/>
+                    </a:lnT>
+                    <a:lnB w="12700" cap="flat" cmpd="sng" algn="ctr">
+                      <a:solidFill>
+                        <a:schemeClr val="tx1"/>
+                      </a:solidFill>
+                      <a:prstDash val="solid"/>
+                      <a:round/>
+                      <a:headEnd type="none" w="med" len="med"/>
+                      <a:tailEnd type="none" w="med" len="med"/>
+                    </a:lnB>
+                    <a:solidFill>
+                      <a:schemeClr val="bg1">
+                        <a:lumMod val="85000"/>
+                      </a:schemeClr>
+                    </a:solidFill>
+                  </a:tcPr>
+                </a:tc>
+                <a:tc>
+                  <a:txBody>
+                    <a:bodyPr/>
+                    <a:lstStyle/>
+                    <a:p>
+                      <a:pPr>
+                        <a:buNone/>
+                      </a:pPr>
+                      <a:r>
+                        <a:rPr lang="en-US" sz="1500" dirty="0">
+                          <a:latin typeface="D2Coding" panose="020B0609020101020101" pitchFamily="49" charset="-127"/>
+                          <a:ea typeface="D2Coding" panose="020B0609020101020101" pitchFamily="49" charset="-127"/>
+                        </a:rPr>
+                        <a:t>FCN(Fully Convolutional Network)</a:t>
+                      </a:r>
+                    </a:p>
+                  </a:txBody>
+                  <a:tcPr marL="75062" marR="75062" marT="37531" marB="37531" anchor="ctr">
+                    <a:lnL w="12700" cap="flat" cmpd="sng" algn="ctr">
+                      <a:solidFill>
+                        <a:schemeClr val="tx1"/>
+                      </a:solidFill>
+                      <a:prstDash val="solid"/>
+                      <a:round/>
+                      <a:headEnd type="none" w="med" len="med"/>
+                      <a:tailEnd type="none" w="med" len="med"/>
+                    </a:lnL>
+                    <a:lnR>
+                      <a:noFill/>
+                    </a:lnR>
+                    <a:lnT w="12700" cap="flat" cmpd="sng" algn="ctr">
+                      <a:solidFill>
+                        <a:schemeClr val="tx1"/>
+                      </a:solidFill>
+                      <a:prstDash val="solid"/>
+                      <a:round/>
+                      <a:headEnd type="none" w="med" len="med"/>
+                      <a:tailEnd type="none" w="med" len="med"/>
+                    </a:lnT>
+                    <a:lnB w="12700" cap="flat" cmpd="sng" algn="ctr">
+                      <a:solidFill>
+                        <a:schemeClr val="tx1"/>
+                      </a:solidFill>
+                      <a:prstDash val="solid"/>
+                      <a:round/>
+                      <a:headEnd type="none" w="med" len="med"/>
+                      <a:tailEnd type="none" w="med" len="med"/>
+                    </a:lnB>
+                    <a:solidFill>
+                      <a:schemeClr val="bg1">
+                        <a:lumMod val="85000"/>
+                      </a:schemeClr>
+                    </a:solidFill>
+                  </a:tcPr>
+                </a:tc>
+                <a:tc>
+                  <a:txBody>
+                    <a:bodyPr/>
+                    <a:lstStyle/>
+                    <a:p>
+                      <a:pPr>
+                        <a:buNone/>
+                      </a:pPr>
+                      <a:r>
+                        <a:rPr lang="en-US" sz="1500" dirty="0" err="1">
+                          <a:latin typeface="D2Coding" panose="020B0609020101020101" pitchFamily="49" charset="-127"/>
+                          <a:ea typeface="D2Coding" panose="020B0609020101020101" pitchFamily="49" charset="-127"/>
+                        </a:rPr>
+                        <a:t>Depthwise</a:t>
+                      </a:r>
+                      <a:r>
+                        <a:rPr lang="en-US" sz="1500" dirty="0">
+                          <a:latin typeface="D2Coding" panose="020B0609020101020101" pitchFamily="49" charset="-127"/>
+                          <a:ea typeface="D2Coding" panose="020B0609020101020101" pitchFamily="49" charset="-127"/>
+                        </a:rPr>
+                        <a:t> Separable Convolution</a:t>
+                      </a:r>
+                    </a:p>
+                  </a:txBody>
+                  <a:tcPr marL="75062" marR="75062" marT="37531" marB="37531" anchor="ctr">
+                    <a:lnL>
+                      <a:noFill/>
+                    </a:lnL>
+                    <a:lnR w="12700" cap="flat" cmpd="sng" algn="ctr">
+                      <a:solidFill>
+                        <a:schemeClr val="tx1"/>
+                      </a:solidFill>
+                      <a:prstDash val="solid"/>
+                      <a:round/>
+                      <a:headEnd type="none" w="med" len="med"/>
+                      <a:tailEnd type="none" w="med" len="med"/>
+                    </a:lnR>
+                    <a:lnT w="12700" cap="flat" cmpd="sng" algn="ctr">
+                      <a:solidFill>
+                        <a:schemeClr val="tx1"/>
+                      </a:solidFill>
+                      <a:prstDash val="solid"/>
+                      <a:round/>
+                      <a:headEnd type="none" w="med" len="med"/>
+                      <a:tailEnd type="none" w="med" len="med"/>
+                    </a:lnT>
+                    <a:lnB w="12700" cap="flat" cmpd="sng" algn="ctr">
+                      <a:solidFill>
+                        <a:schemeClr val="tx1"/>
+                      </a:solidFill>
+                      <a:prstDash val="solid"/>
+                      <a:round/>
+                      <a:headEnd type="none" w="med" len="med"/>
+                      <a:tailEnd type="none" w="med" len="med"/>
+                    </a:lnB>
+                    <a:solidFill>
+                      <a:schemeClr val="bg1">
+                        <a:lumMod val="85000"/>
+                      </a:schemeClr>
+                    </a:solidFill>
+                  </a:tcPr>
+                </a:tc>
+                <a:extLst>
+                  <a:ext uri="{0D108BD9-81ED-4DB2-BD59-A6C34878D82A}">
+                    <a16:rowId xmlns:a16="http://schemas.microsoft.com/office/drawing/2014/main" val="2852452102"/>
+                  </a:ext>
+                </a:extLst>
+              </a:tr>
+              <a:tr h="417578">
+                <a:tc>
+                  <a:txBody>
+                    <a:bodyPr/>
+                    <a:lstStyle/>
+                    <a:p>
+                      <a:pPr>
+                        <a:buNone/>
+                      </a:pPr>
+                      <a:r>
+                        <a:rPr lang="ko-KR" altLang="en-US" sz="1500" dirty="0">
+                          <a:latin typeface="D2Coding" panose="020B0609020101020101" pitchFamily="49" charset="-127"/>
+                          <a:ea typeface="D2Coding" panose="020B0609020101020101" pitchFamily="49" charset="-127"/>
+                        </a:rPr>
+                        <a:t>정체</a:t>
+                      </a:r>
+                    </a:p>
+                  </a:txBody>
+                  <a:tcPr marL="75062" marR="75062" marT="37531" marB="37531" anchor="ctr">
+                    <a:lnL w="12700" cap="flat" cmpd="sng" algn="ctr">
+                      <a:solidFill>
+                        <a:schemeClr val="tx1"/>
+                      </a:solidFill>
+                      <a:prstDash val="solid"/>
+                      <a:round/>
+                      <a:headEnd type="none" w="med" len="med"/>
+                      <a:tailEnd type="none" w="med" len="med"/>
+                    </a:lnL>
+                    <a:lnR w="12700" cap="flat" cmpd="sng" algn="ctr">
+                      <a:solidFill>
+                        <a:schemeClr val="tx1"/>
+                      </a:solidFill>
+                      <a:prstDash val="solid"/>
+                      <a:round/>
+                      <a:headEnd type="none" w="med" len="med"/>
+                      <a:tailEnd type="none" w="med" len="med"/>
+                    </a:lnR>
+                    <a:lnT w="12700" cap="flat" cmpd="sng" algn="ctr">
+                      <a:solidFill>
+                        <a:schemeClr val="tx1"/>
+                      </a:solidFill>
+                      <a:prstDash val="solid"/>
+                      <a:round/>
+                      <a:headEnd type="none" w="med" len="med"/>
+                      <a:tailEnd type="none" w="med" len="med"/>
+                    </a:lnT>
+                    <a:lnB>
+                      <a:noFill/>
+                    </a:lnB>
+                    <a:noFill/>
+                  </a:tcPr>
+                </a:tc>
+                <a:tc>
+                  <a:txBody>
+                    <a:bodyPr/>
+                    <a:lstStyle/>
+                    <a:p>
+                      <a:pPr>
+                        <a:buNone/>
+                      </a:pPr>
+                      <a:r>
+                        <a:rPr lang="ko-KR" altLang="en-US" sz="1500">
+                          <a:latin typeface="D2Coding" panose="020B0609020101020101" pitchFamily="49" charset="-127"/>
+                          <a:ea typeface="D2Coding" panose="020B0609020101020101" pitchFamily="49" charset="-127"/>
+                        </a:rPr>
+                        <a:t>네트워크 </a:t>
+                      </a:r>
+                      <a:r>
+                        <a:rPr lang="ko-KR" altLang="en-US" sz="1500" b="1">
+                          <a:latin typeface="D2Coding" panose="020B0609020101020101" pitchFamily="49" charset="-127"/>
+                          <a:ea typeface="D2Coding" panose="020B0609020101020101" pitchFamily="49" charset="-127"/>
+                        </a:rPr>
+                        <a:t>아키텍처 설계 방식</a:t>
+                      </a:r>
+                      <a:endParaRPr lang="ko-KR" altLang="en-US" sz="1500">
+                        <a:latin typeface="D2Coding" panose="020B0609020101020101" pitchFamily="49" charset="-127"/>
+                        <a:ea typeface="D2Coding" panose="020B0609020101020101" pitchFamily="49" charset="-127"/>
+                      </a:endParaRPr>
+                    </a:p>
+                  </a:txBody>
+                  <a:tcPr marL="75062" marR="75062" marT="37531" marB="37531" anchor="ctr">
+                    <a:lnL w="12700" cap="flat" cmpd="sng" algn="ctr">
+                      <a:solidFill>
+                        <a:schemeClr val="tx1"/>
+                      </a:solidFill>
+                      <a:prstDash val="solid"/>
+                      <a:round/>
+                      <a:headEnd type="none" w="med" len="med"/>
+                      <a:tailEnd type="none" w="med" len="med"/>
+                    </a:lnL>
+                    <a:lnR>
+                      <a:noFill/>
+                    </a:lnR>
+                    <a:lnT w="12700" cap="flat" cmpd="sng" algn="ctr">
+                      <a:solidFill>
+                        <a:schemeClr val="tx1"/>
+                      </a:solidFill>
+                      <a:prstDash val="solid"/>
+                      <a:round/>
+                      <a:headEnd type="none" w="med" len="med"/>
+                      <a:tailEnd type="none" w="med" len="med"/>
+                    </a:lnT>
+                    <a:lnB>
+                      <a:noFill/>
+                    </a:lnB>
+                    <a:noFill/>
+                  </a:tcPr>
+                </a:tc>
+                <a:tc>
+                  <a:txBody>
+                    <a:bodyPr/>
+                    <a:lstStyle/>
+                    <a:p>
+                      <a:pPr>
+                        <a:buNone/>
+                      </a:pPr>
+                      <a:r>
+                        <a:rPr lang="ko-KR" altLang="en-US" sz="1500">
+                          <a:latin typeface="D2Coding" panose="020B0609020101020101" pitchFamily="49" charset="-127"/>
+                          <a:ea typeface="D2Coding" panose="020B0609020101020101" pitchFamily="49" charset="-127"/>
+                        </a:rPr>
+                        <a:t>하나의 </a:t>
+                      </a:r>
+                      <a:r>
+                        <a:rPr lang="ko-KR" altLang="en-US" sz="1500" b="1">
+                          <a:latin typeface="D2Coding" panose="020B0609020101020101" pitchFamily="49" charset="-127"/>
+                          <a:ea typeface="D2Coding" panose="020B0609020101020101" pitchFamily="49" charset="-127"/>
+                        </a:rPr>
+                        <a:t>연산</a:t>
+                      </a:r>
+                      <a:r>
+                        <a:rPr lang="en-US" altLang="ko-KR" sz="1500" b="1">
+                          <a:latin typeface="D2Coding" panose="020B0609020101020101" pitchFamily="49" charset="-127"/>
+                          <a:ea typeface="D2Coding" panose="020B0609020101020101" pitchFamily="49" charset="-127"/>
+                        </a:rPr>
+                        <a:t>(</a:t>
+                      </a:r>
+                      <a:r>
+                        <a:rPr lang="ko-KR" altLang="en-US" sz="1500" b="1">
+                          <a:latin typeface="D2Coding" panose="020B0609020101020101" pitchFamily="49" charset="-127"/>
+                          <a:ea typeface="D2Coding" panose="020B0609020101020101" pitchFamily="49" charset="-127"/>
+                        </a:rPr>
+                        <a:t>레이어</a:t>
+                      </a:r>
+                      <a:r>
+                        <a:rPr lang="en-US" altLang="ko-KR" sz="1500" b="1">
+                          <a:latin typeface="D2Coding" panose="020B0609020101020101" pitchFamily="49" charset="-127"/>
+                          <a:ea typeface="D2Coding" panose="020B0609020101020101" pitchFamily="49" charset="-127"/>
+                        </a:rPr>
+                        <a:t>) </a:t>
+                      </a:r>
+                      <a:r>
+                        <a:rPr lang="ko-KR" altLang="en-US" sz="1500" b="1">
+                          <a:latin typeface="D2Coding" panose="020B0609020101020101" pitchFamily="49" charset="-127"/>
+                          <a:ea typeface="D2Coding" panose="020B0609020101020101" pitchFamily="49" charset="-127"/>
+                        </a:rPr>
+                        <a:t>종류</a:t>
+                      </a:r>
+                      <a:endParaRPr lang="ko-KR" altLang="en-US" sz="1500">
+                        <a:latin typeface="D2Coding" panose="020B0609020101020101" pitchFamily="49" charset="-127"/>
+                        <a:ea typeface="D2Coding" panose="020B0609020101020101" pitchFamily="49" charset="-127"/>
+                      </a:endParaRPr>
+                    </a:p>
+                  </a:txBody>
+                  <a:tcPr marL="75062" marR="75062" marT="37531" marB="37531" anchor="ctr">
+                    <a:lnL>
+                      <a:noFill/>
+                    </a:lnL>
+                    <a:lnR w="12700" cap="flat" cmpd="sng" algn="ctr">
+                      <a:solidFill>
+                        <a:schemeClr val="tx1"/>
+                      </a:solidFill>
+                      <a:prstDash val="solid"/>
+                      <a:round/>
+                      <a:headEnd type="none" w="med" len="med"/>
+                      <a:tailEnd type="none" w="med" len="med"/>
+                    </a:lnR>
+                    <a:lnT w="12700" cap="flat" cmpd="sng" algn="ctr">
+                      <a:solidFill>
+                        <a:schemeClr val="tx1"/>
+                      </a:solidFill>
+                      <a:prstDash val="solid"/>
+                      <a:round/>
+                      <a:headEnd type="none" w="med" len="med"/>
+                      <a:tailEnd type="none" w="med" len="med"/>
+                    </a:lnT>
+                    <a:lnB>
+                      <a:noFill/>
+                    </a:lnB>
+                    <a:noFill/>
+                  </a:tcPr>
+                </a:tc>
+                <a:extLst>
+                  <a:ext uri="{0D108BD9-81ED-4DB2-BD59-A6C34878D82A}">
+                    <a16:rowId xmlns:a16="http://schemas.microsoft.com/office/drawing/2014/main" val="4267520161"/>
+                  </a:ext>
+                </a:extLst>
+              </a:tr>
+              <a:tr h="417578">
+                <a:tc>
+                  <a:txBody>
+                    <a:bodyPr/>
+                    <a:lstStyle/>
+                    <a:p>
+                      <a:pPr>
+                        <a:buNone/>
+                      </a:pPr>
+                      <a:r>
+                        <a:rPr lang="ko-KR" altLang="en-US" sz="1500" dirty="0">
+                          <a:latin typeface="D2Coding" panose="020B0609020101020101" pitchFamily="49" charset="-127"/>
+                          <a:ea typeface="D2Coding" panose="020B0609020101020101" pitchFamily="49" charset="-127"/>
+                        </a:rPr>
+                        <a:t>해결하는 문제</a:t>
+                      </a:r>
+                    </a:p>
+                  </a:txBody>
+                  <a:tcPr marL="75062" marR="75062" marT="37531" marB="37531" anchor="ctr">
+                    <a:lnL w="12700" cap="flat" cmpd="sng" algn="ctr">
+                      <a:solidFill>
+                        <a:schemeClr val="tx1"/>
+                      </a:solidFill>
+                      <a:prstDash val="solid"/>
+                      <a:round/>
+                      <a:headEnd type="none" w="med" len="med"/>
+                      <a:tailEnd type="none" w="med" len="med"/>
+                    </a:lnL>
+                    <a:lnR w="12700" cap="flat" cmpd="sng" algn="ctr">
+                      <a:solidFill>
+                        <a:schemeClr val="tx1"/>
+                      </a:solidFill>
+                      <a:prstDash val="solid"/>
+                      <a:round/>
+                      <a:headEnd type="none" w="med" len="med"/>
+                      <a:tailEnd type="none" w="med" len="med"/>
+                    </a:lnR>
+                    <a:lnT>
+                      <a:noFill/>
+                    </a:lnT>
+                    <a:lnB>
+                      <a:noFill/>
+                    </a:lnB>
+                    <a:noFill/>
+                  </a:tcPr>
+                </a:tc>
+                <a:tc>
+                  <a:txBody>
+                    <a:bodyPr/>
+                    <a:lstStyle/>
+                    <a:p>
+                      <a:pPr>
+                        <a:buNone/>
+                      </a:pPr>
+                      <a:r>
+                        <a:rPr lang="en-US" altLang="ko-KR" sz="1500" dirty="0">
+                          <a:latin typeface="D2Coding" panose="020B0609020101020101" pitchFamily="49" charset="-127"/>
+                          <a:ea typeface="D2Coding" panose="020B0609020101020101" pitchFamily="49" charset="-127"/>
+                        </a:rPr>
+                        <a:t>Dense</a:t>
+                      </a:r>
+                      <a:r>
+                        <a:rPr lang="ko-KR" altLang="en-US" sz="1500" dirty="0">
+                          <a:latin typeface="D2Coding" panose="020B0609020101020101" pitchFamily="49" charset="-127"/>
+                          <a:ea typeface="D2Coding" panose="020B0609020101020101" pitchFamily="49" charset="-127"/>
+                        </a:rPr>
+                        <a:t>층 제거로 임의 크기 입력</a:t>
+                      </a:r>
+                      <a:r>
+                        <a:rPr lang="en-US" altLang="ko-KR" sz="1500" dirty="0">
+                          <a:latin typeface="D2Coding" panose="020B0609020101020101" pitchFamily="49" charset="-127"/>
+                          <a:ea typeface="D2Coding" panose="020B0609020101020101" pitchFamily="49" charset="-127"/>
+                        </a:rPr>
+                        <a:t>/</a:t>
+                      </a:r>
+                      <a:r>
+                        <a:rPr lang="ko-KR" altLang="en-US" sz="1500" dirty="0">
+                          <a:latin typeface="D2Coding" panose="020B0609020101020101" pitchFamily="49" charset="-127"/>
+                          <a:ea typeface="D2Coding" panose="020B0609020101020101" pitchFamily="49" charset="-127"/>
+                        </a:rPr>
+                        <a:t>공간 정보 보존</a:t>
+                      </a:r>
+                    </a:p>
+                  </a:txBody>
+                  <a:tcPr marL="75062" marR="75062" marT="37531" marB="37531" anchor="ctr">
+                    <a:lnL w="12700" cap="flat" cmpd="sng" algn="ctr">
+                      <a:solidFill>
+                        <a:schemeClr val="tx1"/>
+                      </a:solidFill>
+                      <a:prstDash val="solid"/>
+                      <a:round/>
+                      <a:headEnd type="none" w="med" len="med"/>
+                      <a:tailEnd type="none" w="med" len="med"/>
+                    </a:lnL>
+                    <a:lnR>
+                      <a:noFill/>
+                    </a:lnR>
+                    <a:lnT>
+                      <a:noFill/>
+                    </a:lnT>
+                    <a:lnB>
+                      <a:noFill/>
+                    </a:lnB>
+                    <a:noFill/>
+                  </a:tcPr>
+                </a:tc>
+                <a:tc>
+                  <a:txBody>
+                    <a:bodyPr/>
+                    <a:lstStyle/>
+                    <a:p>
+                      <a:pPr>
+                        <a:buNone/>
+                      </a:pPr>
+                      <a:r>
+                        <a:rPr lang="ko-KR" altLang="en-US" sz="1500">
+                          <a:latin typeface="D2Coding" panose="020B0609020101020101" pitchFamily="49" charset="-127"/>
+                          <a:ea typeface="D2Coding" panose="020B0609020101020101" pitchFamily="49" charset="-127"/>
+                        </a:rPr>
+                        <a:t>합성곱 연산량</a:t>
+                      </a:r>
+                      <a:r>
+                        <a:rPr lang="en-US" altLang="ko-KR" sz="1500">
+                          <a:latin typeface="D2Coding" panose="020B0609020101020101" pitchFamily="49" charset="-127"/>
+                          <a:ea typeface="D2Coding" panose="020B0609020101020101" pitchFamily="49" charset="-127"/>
+                        </a:rPr>
+                        <a:t>/</a:t>
+                      </a:r>
+                      <a:r>
+                        <a:rPr lang="ko-KR" altLang="en-US" sz="1500">
+                          <a:latin typeface="D2Coding" panose="020B0609020101020101" pitchFamily="49" charset="-127"/>
+                          <a:ea typeface="D2Coding" panose="020B0609020101020101" pitchFamily="49" charset="-127"/>
+                        </a:rPr>
+                        <a:t>파라미터 수 감소</a:t>
+                      </a:r>
+                    </a:p>
+                  </a:txBody>
+                  <a:tcPr marL="75062" marR="75062" marT="37531" marB="37531" anchor="ctr">
+                    <a:lnL>
+                      <a:noFill/>
+                    </a:lnL>
+                    <a:lnR w="12700" cap="flat" cmpd="sng" algn="ctr">
+                      <a:solidFill>
+                        <a:schemeClr val="tx1"/>
+                      </a:solidFill>
+                      <a:prstDash val="solid"/>
+                      <a:round/>
+                      <a:headEnd type="none" w="med" len="med"/>
+                      <a:tailEnd type="none" w="med" len="med"/>
+                    </a:lnR>
+                    <a:lnT>
+                      <a:noFill/>
+                    </a:lnT>
+                    <a:lnB>
+                      <a:noFill/>
+                    </a:lnB>
+                    <a:noFill/>
+                  </a:tcPr>
+                </a:tc>
+                <a:extLst>
+                  <a:ext uri="{0D108BD9-81ED-4DB2-BD59-A6C34878D82A}">
+                    <a16:rowId xmlns:a16="http://schemas.microsoft.com/office/drawing/2014/main" val="1368266946"/>
+                  </a:ext>
+                </a:extLst>
+              </a:tr>
+              <a:tr h="417578">
+                <a:tc>
+                  <a:txBody>
+                    <a:bodyPr/>
+                    <a:lstStyle/>
+                    <a:p>
+                      <a:pPr>
+                        <a:buNone/>
+                      </a:pPr>
+                      <a:r>
+                        <a:rPr lang="ko-KR" altLang="en-US" sz="1500" dirty="0">
+                          <a:latin typeface="D2Coding" panose="020B0609020101020101" pitchFamily="49" charset="-127"/>
+                          <a:ea typeface="D2Coding" panose="020B0609020101020101" pitchFamily="49" charset="-127"/>
+                        </a:rPr>
+                        <a:t>비교 대상</a:t>
+                      </a:r>
+                    </a:p>
+                  </a:txBody>
+                  <a:tcPr marL="75062" marR="75062" marT="37531" marB="37531" anchor="ctr">
+                    <a:lnL w="12700" cap="flat" cmpd="sng" algn="ctr">
+                      <a:solidFill>
+                        <a:schemeClr val="tx1"/>
+                      </a:solidFill>
+                      <a:prstDash val="solid"/>
+                      <a:round/>
+                      <a:headEnd type="none" w="med" len="med"/>
+                      <a:tailEnd type="none" w="med" len="med"/>
+                    </a:lnL>
+                    <a:lnR w="12700" cap="flat" cmpd="sng" algn="ctr">
+                      <a:solidFill>
+                        <a:schemeClr val="tx1"/>
+                      </a:solidFill>
+                      <a:prstDash val="solid"/>
+                      <a:round/>
+                      <a:headEnd type="none" w="med" len="med"/>
+                      <a:tailEnd type="none" w="med" len="med"/>
+                    </a:lnR>
+                    <a:lnT>
+                      <a:noFill/>
+                    </a:lnT>
+                    <a:lnB>
+                      <a:noFill/>
+                    </a:lnB>
+                    <a:noFill/>
+                  </a:tcPr>
+                </a:tc>
+                <a:tc>
+                  <a:txBody>
+                    <a:bodyPr/>
+                    <a:lstStyle/>
+                    <a:p>
+                      <a:pPr>
+                        <a:buNone/>
+                      </a:pPr>
+                      <a:r>
+                        <a:rPr lang="en-US" altLang="ko-KR" sz="1500">
+                          <a:latin typeface="D2Coding" panose="020B0609020101020101" pitchFamily="49" charset="-127"/>
+                          <a:ea typeface="D2Coding" panose="020B0609020101020101" pitchFamily="49" charset="-127"/>
+                        </a:rPr>
+                        <a:t>Dense(FC)</a:t>
+                      </a:r>
+                      <a:r>
+                        <a:rPr lang="ko-KR" altLang="en-US" sz="1500">
+                          <a:latin typeface="D2Coding" panose="020B0609020101020101" pitchFamily="49" charset="-127"/>
+                          <a:ea typeface="D2Coding" panose="020B0609020101020101" pitchFamily="49" charset="-127"/>
+                        </a:rPr>
+                        <a:t>층을 쓰는 일반 </a:t>
+                      </a:r>
+                      <a:r>
+                        <a:rPr lang="en-US" altLang="ko-KR" sz="1500">
+                          <a:latin typeface="D2Coding" panose="020B0609020101020101" pitchFamily="49" charset="-127"/>
+                          <a:ea typeface="D2Coding" panose="020B0609020101020101" pitchFamily="49" charset="-127"/>
+                        </a:rPr>
+                        <a:t>CNN</a:t>
+                      </a:r>
+                    </a:p>
+                  </a:txBody>
+                  <a:tcPr marL="75062" marR="75062" marT="37531" marB="37531" anchor="ctr">
+                    <a:lnL w="12700" cap="flat" cmpd="sng" algn="ctr">
+                      <a:solidFill>
+                        <a:schemeClr val="tx1"/>
+                      </a:solidFill>
+                      <a:prstDash val="solid"/>
+                      <a:round/>
+                      <a:headEnd type="none" w="med" len="med"/>
+                      <a:tailEnd type="none" w="med" len="med"/>
+                    </a:lnL>
+                    <a:lnR>
+                      <a:noFill/>
+                    </a:lnR>
+                    <a:lnT>
+                      <a:noFill/>
+                    </a:lnT>
+                    <a:lnB>
+                      <a:noFill/>
+                    </a:lnB>
+                    <a:noFill/>
+                  </a:tcPr>
+                </a:tc>
+                <a:tc>
+                  <a:txBody>
+                    <a:bodyPr/>
+                    <a:lstStyle/>
+                    <a:p>
+                      <a:pPr>
+                        <a:buNone/>
+                      </a:pPr>
+                      <a:r>
+                        <a:rPr lang="ko-KR" altLang="en-US" sz="1500">
+                          <a:latin typeface="D2Coding" panose="020B0609020101020101" pitchFamily="49" charset="-127"/>
+                          <a:ea typeface="D2Coding" panose="020B0609020101020101" pitchFamily="49" charset="-127"/>
+                        </a:rPr>
+                        <a:t>일반</a:t>
+                      </a:r>
+                      <a:r>
+                        <a:rPr lang="en-US" altLang="ko-KR" sz="1500">
+                          <a:latin typeface="D2Coding" panose="020B0609020101020101" pitchFamily="49" charset="-127"/>
+                          <a:ea typeface="D2Coding" panose="020B0609020101020101" pitchFamily="49" charset="-127"/>
+                        </a:rPr>
+                        <a:t>(</a:t>
+                      </a:r>
+                      <a:r>
+                        <a:rPr lang="ko-KR" altLang="en-US" sz="1500">
+                          <a:latin typeface="D2Coding" panose="020B0609020101020101" pitchFamily="49" charset="-127"/>
+                          <a:ea typeface="D2Coding" panose="020B0609020101020101" pitchFamily="49" charset="-127"/>
+                        </a:rPr>
+                        <a:t>표준</a:t>
+                      </a:r>
+                      <a:r>
+                        <a:rPr lang="en-US" altLang="ko-KR" sz="1500">
+                          <a:latin typeface="D2Coding" panose="020B0609020101020101" pitchFamily="49" charset="-127"/>
+                          <a:ea typeface="D2Coding" panose="020B0609020101020101" pitchFamily="49" charset="-127"/>
+                        </a:rPr>
+                        <a:t>) </a:t>
+                      </a:r>
+                      <a:r>
+                        <a:rPr lang="en-US" sz="1500">
+                          <a:latin typeface="D2Coding" panose="020B0609020101020101" pitchFamily="49" charset="-127"/>
+                          <a:ea typeface="D2Coding" panose="020B0609020101020101" pitchFamily="49" charset="-127"/>
+                        </a:rPr>
+                        <a:t>Convolution</a:t>
+                      </a:r>
+                    </a:p>
+                  </a:txBody>
+                  <a:tcPr marL="75062" marR="75062" marT="37531" marB="37531" anchor="ctr">
+                    <a:lnL>
+                      <a:noFill/>
+                    </a:lnL>
+                    <a:lnR w="12700" cap="flat" cmpd="sng" algn="ctr">
+                      <a:solidFill>
+                        <a:schemeClr val="tx1"/>
+                      </a:solidFill>
+                      <a:prstDash val="solid"/>
+                      <a:round/>
+                      <a:headEnd type="none" w="med" len="med"/>
+                      <a:tailEnd type="none" w="med" len="med"/>
+                    </a:lnR>
+                    <a:lnT>
+                      <a:noFill/>
+                    </a:lnT>
+                    <a:lnB>
+                      <a:noFill/>
+                    </a:lnB>
+                    <a:noFill/>
+                  </a:tcPr>
+                </a:tc>
+                <a:extLst>
+                  <a:ext uri="{0D108BD9-81ED-4DB2-BD59-A6C34878D82A}">
+                    <a16:rowId xmlns:a16="http://schemas.microsoft.com/office/drawing/2014/main" val="1427650150"/>
+                  </a:ext>
+                </a:extLst>
+              </a:tr>
+              <a:tr h="417578">
+                <a:tc>
+                  <a:txBody>
+                    <a:bodyPr/>
+                    <a:lstStyle/>
+                    <a:p>
+                      <a:pPr>
+                        <a:buNone/>
+                      </a:pPr>
+                      <a:r>
+                        <a:rPr lang="ko-KR" altLang="en-US" sz="1500" dirty="0">
+                          <a:latin typeface="D2Coding" panose="020B0609020101020101" pitchFamily="49" charset="-127"/>
+                          <a:ea typeface="D2Coding" panose="020B0609020101020101" pitchFamily="49" charset="-127"/>
+                        </a:rPr>
+                        <a:t>예시</a:t>
+                      </a:r>
+                    </a:p>
+                  </a:txBody>
+                  <a:tcPr marL="75062" marR="75062" marT="37531" marB="37531" anchor="ctr">
+                    <a:lnL w="12700" cap="flat" cmpd="sng" algn="ctr">
+                      <a:solidFill>
+                        <a:schemeClr val="tx1"/>
+                      </a:solidFill>
+                      <a:prstDash val="solid"/>
+                      <a:round/>
+                      <a:headEnd type="none" w="med" len="med"/>
+                      <a:tailEnd type="none" w="med" len="med"/>
+                    </a:lnL>
+                    <a:lnR w="12700" cap="flat" cmpd="sng" algn="ctr">
+                      <a:solidFill>
+                        <a:schemeClr val="tx1"/>
+                      </a:solidFill>
+                      <a:prstDash val="solid"/>
+                      <a:round/>
+                      <a:headEnd type="none" w="med" len="med"/>
+                      <a:tailEnd type="none" w="med" len="med"/>
+                    </a:lnR>
+                    <a:lnT>
+                      <a:noFill/>
+                    </a:lnT>
+                    <a:lnB w="12700" cap="flat" cmpd="sng" algn="ctr">
+                      <a:solidFill>
+                        <a:schemeClr val="tx1"/>
+                      </a:solidFill>
+                      <a:prstDash val="solid"/>
+                      <a:round/>
+                      <a:headEnd type="none" w="med" len="med"/>
+                      <a:tailEnd type="none" w="med" len="med"/>
+                    </a:lnB>
+                    <a:noFill/>
+                  </a:tcPr>
+                </a:tc>
+                <a:tc>
+                  <a:txBody>
+                    <a:bodyPr/>
+                    <a:lstStyle/>
+                    <a:p>
+                      <a:pPr>
+                        <a:buNone/>
+                      </a:pPr>
+                      <a:r>
+                        <a:rPr lang="en-US" sz="1500" dirty="0">
+                          <a:latin typeface="D2Coding" panose="020B0609020101020101" pitchFamily="49" charset="-127"/>
+                          <a:ea typeface="D2Coding" panose="020B0609020101020101" pitchFamily="49" charset="-127"/>
+                        </a:rPr>
+                        <a:t>FCN, U-Net, YOLO</a:t>
+                      </a:r>
+                      <a:r>
+                        <a:rPr lang="ko-KR" altLang="en-US" sz="1500" dirty="0">
+                          <a:latin typeface="D2Coding" panose="020B0609020101020101" pitchFamily="49" charset="-127"/>
+                          <a:ea typeface="D2Coding" panose="020B0609020101020101" pitchFamily="49" charset="-127"/>
+                        </a:rPr>
+                        <a:t>의 </a:t>
+                      </a:r>
+                      <a:r>
+                        <a:rPr lang="ko-KR" altLang="en-US" sz="1500" dirty="0" err="1">
+                          <a:latin typeface="D2Coding" panose="020B0609020101020101" pitchFamily="49" charset="-127"/>
+                          <a:ea typeface="D2Coding" panose="020B0609020101020101" pitchFamily="49" charset="-127"/>
+                        </a:rPr>
+                        <a:t>출력단</a:t>
+                      </a:r>
+                      <a:endParaRPr lang="ko-KR" altLang="en-US" sz="1500" dirty="0">
+                        <a:latin typeface="D2Coding" panose="020B0609020101020101" pitchFamily="49" charset="-127"/>
+                        <a:ea typeface="D2Coding" panose="020B0609020101020101" pitchFamily="49" charset="-127"/>
+                      </a:endParaRPr>
+                    </a:p>
+                  </a:txBody>
+                  <a:tcPr marL="75062" marR="75062" marT="37531" marB="37531" anchor="ctr">
+                    <a:lnL w="12700" cap="flat" cmpd="sng" algn="ctr">
+                      <a:solidFill>
+                        <a:schemeClr val="tx1"/>
+                      </a:solidFill>
+                      <a:prstDash val="solid"/>
+                      <a:round/>
+                      <a:headEnd type="none" w="med" len="med"/>
+                      <a:tailEnd type="none" w="med" len="med"/>
+                    </a:lnL>
+                    <a:lnR>
+                      <a:noFill/>
+                    </a:lnR>
+                    <a:lnT>
+                      <a:noFill/>
+                    </a:lnT>
+                    <a:lnB w="12700" cap="flat" cmpd="sng" algn="ctr">
+                      <a:solidFill>
+                        <a:schemeClr val="tx1"/>
+                      </a:solidFill>
+                      <a:prstDash val="solid"/>
+                      <a:round/>
+                      <a:headEnd type="none" w="med" len="med"/>
+                      <a:tailEnd type="none" w="med" len="med"/>
+                    </a:lnB>
+                    <a:noFill/>
+                  </a:tcPr>
+                </a:tc>
+                <a:tc>
+                  <a:txBody>
+                    <a:bodyPr/>
+                    <a:lstStyle/>
+                    <a:p>
+                      <a:pPr>
+                        <a:buNone/>
+                      </a:pPr>
+                      <a:r>
+                        <a:rPr lang="en-US" sz="1500" dirty="0" err="1">
+                          <a:latin typeface="D2Coding" panose="020B0609020101020101" pitchFamily="49" charset="-127"/>
+                          <a:ea typeface="D2Coding" panose="020B0609020101020101" pitchFamily="49" charset="-127"/>
+                        </a:rPr>
+                        <a:t>Xception</a:t>
+                      </a:r>
+                      <a:r>
+                        <a:rPr lang="en-US" sz="1500" dirty="0">
+                          <a:latin typeface="D2Coding" panose="020B0609020101020101" pitchFamily="49" charset="-127"/>
+                          <a:ea typeface="D2Coding" panose="020B0609020101020101" pitchFamily="49" charset="-127"/>
+                        </a:rPr>
+                        <a:t>, </a:t>
+                      </a:r>
+                      <a:r>
+                        <a:rPr lang="en-US" sz="1500" dirty="0" err="1">
+                          <a:latin typeface="D2Coding" panose="020B0609020101020101" pitchFamily="49" charset="-127"/>
+                          <a:ea typeface="D2Coding" panose="020B0609020101020101" pitchFamily="49" charset="-127"/>
+                        </a:rPr>
+                        <a:t>MobileNet</a:t>
+                      </a:r>
+                      <a:r>
+                        <a:rPr lang="ko-KR" altLang="en-US" sz="1500" dirty="0">
+                          <a:latin typeface="D2Coding" panose="020B0609020101020101" pitchFamily="49" charset="-127"/>
+                          <a:ea typeface="D2Coding" panose="020B0609020101020101" pitchFamily="49" charset="-127"/>
+                        </a:rPr>
+                        <a:t>의 내부 블록</a:t>
+                      </a:r>
+                    </a:p>
+                  </a:txBody>
+                  <a:tcPr marL="75062" marR="75062" marT="37531" marB="37531" anchor="ctr">
+                    <a:lnL>
+                      <a:noFill/>
+                    </a:lnL>
+                    <a:lnR w="12700" cap="flat" cmpd="sng" algn="ctr">
+                      <a:solidFill>
+                        <a:schemeClr val="tx1"/>
+                      </a:solidFill>
+                      <a:prstDash val="solid"/>
+                      <a:round/>
+                      <a:headEnd type="none" w="med" len="med"/>
+                      <a:tailEnd type="none" w="med" len="med"/>
+                    </a:lnR>
+                    <a:lnT>
+                      <a:noFill/>
+                    </a:lnT>
+                    <a:lnB w="12700" cap="flat" cmpd="sng" algn="ctr">
+                      <a:solidFill>
+                        <a:schemeClr val="tx1"/>
+                      </a:solidFill>
+                      <a:prstDash val="solid"/>
+                      <a:round/>
+                      <a:headEnd type="none" w="med" len="med"/>
+                      <a:tailEnd type="none" w="med" len="med"/>
+                    </a:lnB>
+                    <a:noFill/>
+                  </a:tcPr>
+                </a:tc>
+                <a:extLst>
+                  <a:ext uri="{0D108BD9-81ED-4DB2-BD59-A6C34878D82A}">
+                    <a16:rowId xmlns:a16="http://schemas.microsoft.com/office/drawing/2014/main" val="3382960580"/>
+                  </a:ext>
+                </a:extLst>
+              </a:tr>
+            </a:tbl>
+          </a:graphicData>
+        </a:graphic>
+      </p:graphicFrame>
+      <p:sp>
+        <p:nvSpPr>
+          <p:cNvPr id="6" name="TextBox 5">
+            <a:extLst>
+              <a:ext uri="{FF2B5EF4-FFF2-40B4-BE49-F238E27FC236}">
+                <a16:creationId xmlns:a16="http://schemas.microsoft.com/office/drawing/2014/main" id="{BE9E2B95-F1A3-51E8-BAD6-E1E3366CDAB1}"/>
+              </a:ext>
+            </a:extLst>
+          </p:cNvPr>
+          <p:cNvSpPr txBox="1"/>
+          <p:nvPr/>
+        </p:nvSpPr>
+        <p:spPr>
+          <a:xfrm>
+            <a:off x="753384" y="4848910"/>
+            <a:ext cx="10771865" cy="338554"/>
+          </a:xfrm>
+          <a:prstGeom prst="rect">
+            <a:avLst/>
+          </a:prstGeom>
+          <a:noFill/>
+        </p:spPr>
+        <p:txBody>
+          <a:bodyPr wrap="square">
+            <a:spAutoFit/>
+          </a:bodyPr>
+          <a:lstStyle/>
+          <a:p>
+            <a:r>
+              <a:rPr lang="en-US" altLang="ko-KR" sz="1600" dirty="0" err="1">
+                <a:latin typeface="D2Coding" panose="020B0609020101020101" pitchFamily="49" charset="-127"/>
+                <a:ea typeface="D2Coding" panose="020B0609020101020101" pitchFamily="49" charset="-127"/>
+              </a:rPr>
+              <a:t>Depthwise</a:t>
+            </a:r>
+            <a:r>
+              <a:rPr lang="en-US" altLang="ko-KR" sz="1600" dirty="0">
+                <a:latin typeface="D2Coding" panose="020B0609020101020101" pitchFamily="49" charset="-127"/>
+                <a:ea typeface="D2Coding" panose="020B0609020101020101" pitchFamily="49" charset="-127"/>
+              </a:rPr>
+              <a:t> Separable Conv</a:t>
+            </a:r>
+            <a:r>
+              <a:rPr lang="ko-KR" altLang="en-US" sz="1600" dirty="0">
+                <a:latin typeface="D2Coding" panose="020B0609020101020101" pitchFamily="49" charset="-127"/>
+                <a:ea typeface="D2Coding" panose="020B0609020101020101" pitchFamily="49" charset="-127"/>
+              </a:rPr>
+              <a:t>는 </a:t>
+            </a:r>
+            <a:r>
+              <a:rPr lang="en-US" altLang="ko-KR" sz="1600" dirty="0">
+                <a:latin typeface="D2Coding" panose="020B0609020101020101" pitchFamily="49" charset="-127"/>
+                <a:ea typeface="D2Coding" panose="020B0609020101020101" pitchFamily="49" charset="-127"/>
+              </a:rPr>
+              <a:t>FCN </a:t>
+            </a:r>
+            <a:r>
+              <a:rPr lang="ko-KR" altLang="en-US" sz="1600" dirty="0">
+                <a:latin typeface="D2Coding" panose="020B0609020101020101" pitchFamily="49" charset="-127"/>
+                <a:ea typeface="D2Coding" panose="020B0609020101020101" pitchFamily="49" charset="-127"/>
+              </a:rPr>
+              <a:t>안에서도 사용될 수 있는 레이어</a:t>
+            </a:r>
+          </a:p>
+        </p:txBody>
+      </p:sp>
+    </p:spTree>
+    <p:extLst>
+      <p:ext uri="{BB962C8B-B14F-4D97-AF65-F5344CB8AC3E}">
+        <p14:creationId xmlns:p14="http://schemas.microsoft.com/office/powerpoint/2010/main" val="2760821533"/>
+      </p:ext>
+    </p:extLst>
+  </p:cSld>
+  <p:clrMapOvr>
+    <a:masterClrMapping/>
+  </p:clrMapOvr>
+</p:sld>
+</file>
+
+<file path=ppt/slides/slide17.xml><?xml version="1.0" encoding="utf-8"?>
+<p:sld xmlns:a="http://schemas.openxmlformats.org/drawingml/2006/main" xmlns:r="http://schemas.openxmlformats.org/officeDocument/2006/relationships" xmlns:p="http://schemas.openxmlformats.org/presentationml/2006/main">
+  <p:cSld>
+    <p:spTree>
+      <p:nvGrpSpPr>
+        <p:cNvPr id="1" name="">
+          <a:extLst>
+            <a:ext uri="{FF2B5EF4-FFF2-40B4-BE49-F238E27FC236}">
               <a16:creationId xmlns:a16="http://schemas.microsoft.com/office/drawing/2014/main" id="{A6671E80-DE4E-EAE2-9DB7-EE4210BFFCD2}"/>
             </a:ext>
           </a:extLst>
@@ -8157,7 +9468,7 @@
             <a:fld id="{D57F1E4F-1CFF-5643-939E-217C01CDF565}" type="slidenum">
               <a:rPr lang="en-US" smtClean="0"/>
               <a:pPr/>
-              <a:t>16</a:t>
+              <a:t>17</a:t>
             </a:fld>
             <a:endParaRPr lang="en-US" dirty="0"/>
           </a:p>
@@ -8441,7 +9752,7 @@
 </p:sld>
 </file>
 
-<file path=ppt/slides/slide17.xml><?xml version="1.0" encoding="utf-8"?>
+<file path=ppt/slides/slide18.xml><?xml version="1.0" encoding="utf-8"?>
 <p:sld xmlns:a="http://schemas.openxmlformats.org/drawingml/2006/main" xmlns:r="http://schemas.openxmlformats.org/officeDocument/2006/relationships" xmlns:p="http://schemas.openxmlformats.org/presentationml/2006/main">
   <p:cSld>
     <p:spTree>
@@ -8695,7 +10006,7 @@
                 <a:ea typeface="Segoe UI Emoji" panose="020B0502040204020203" pitchFamily="34" charset="0"/>
               </a:rPr>
               <a:pPr/>
-              <a:t>17</a:t>
+              <a:t>18</a:t>
             </a:fld>
             <a:endParaRPr lang="en-US" b="1" dirty="0">
               <a:latin typeface="Segoe UI Emoji" panose="020B0502040204020203" pitchFamily="34" charset="0"/>
@@ -9211,7 +10522,7 @@
 </p:sld>
 </file>
 
-<file path=ppt/slides/slide18.xml><?xml version="1.0" encoding="utf-8"?>
+<file path=ppt/slides/slide19.xml><?xml version="1.0" encoding="utf-8"?>
 <p:sld xmlns:a="http://schemas.openxmlformats.org/drawingml/2006/main" xmlns:r="http://schemas.openxmlformats.org/officeDocument/2006/relationships" xmlns:p="http://schemas.openxmlformats.org/presentationml/2006/main">
   <p:cSld>
     <p:spTree>
@@ -10619,7 +11930,7 @@
                 <a:ea typeface="Segoe UI Emoji" panose="020B0502040204020203" pitchFamily="34" charset="0"/>
               </a:rPr>
               <a:pPr/>
-              <a:t>18</a:t>
+              <a:t>19</a:t>
             </a:fld>
             <a:endParaRPr lang="en-US" b="1" dirty="0">
               <a:latin typeface="Segoe UI Emoji" panose="020B0502040204020203" pitchFamily="34" charset="0"/>
@@ -10811,7 +12122,319 @@
 </p:sld>
 </file>
 
-<file path=ppt/slides/slide19.xml><?xml version="1.0" encoding="utf-8"?>
+<file path=ppt/slides/slide2.xml><?xml version="1.0" encoding="utf-8"?>
+<p:sld xmlns:a="http://schemas.openxmlformats.org/drawingml/2006/main" xmlns:r="http://schemas.openxmlformats.org/officeDocument/2006/relationships" xmlns:p="http://schemas.openxmlformats.org/presentationml/2006/main">
+  <p:cSld>
+    <p:spTree>
+      <p:nvGrpSpPr>
+        <p:cNvPr id="1" name="">
+          <a:extLst>
+            <a:ext uri="{FF2B5EF4-FFF2-40B4-BE49-F238E27FC236}">
+              <a16:creationId xmlns:a16="http://schemas.microsoft.com/office/drawing/2014/main" id="{13F87C48-2054-356F-D59A-A1610505F4C5}"/>
+            </a:ext>
+          </a:extLst>
+        </p:cNvPr>
+        <p:cNvGrpSpPr/>
+        <p:nvPr/>
+      </p:nvGrpSpPr>
+      <p:grpSpPr>
+        <a:xfrm>
+          <a:off x="0" y="0"/>
+          <a:ext cx="0" cy="0"/>
+          <a:chOff x="0" y="0"/>
+          <a:chExt cx="0" cy="0"/>
+        </a:xfrm>
+      </p:grpSpPr>
+      <p:sp>
+        <p:nvSpPr>
+          <p:cNvPr id="4" name="슬라이드 번호 개체 틀 3">
+            <a:extLst>
+              <a:ext uri="{FF2B5EF4-FFF2-40B4-BE49-F238E27FC236}">
+                <a16:creationId xmlns:a16="http://schemas.microsoft.com/office/drawing/2014/main" id="{7406864E-BC1C-1514-F998-D23C329DC598}"/>
+              </a:ext>
+            </a:extLst>
+          </p:cNvPr>
+          <p:cNvSpPr>
+            <a:spLocks noGrp="1"/>
+          </p:cNvSpPr>
+          <p:nvPr>
+            <p:ph type="sldNum" sz="quarter" idx="12"/>
+          </p:nvPr>
+        </p:nvSpPr>
+        <p:spPr>
+          <a:xfrm>
+            <a:off x="10514011" y="6036261"/>
+            <a:ext cx="753545" cy="365125"/>
+          </a:xfrm>
+        </p:spPr>
+        <p:txBody>
+          <a:bodyPr/>
+          <a:lstStyle/>
+          <a:p>
+            <a:fld id="{D57F1E4F-1CFF-5643-939E-217C01CDF565}" type="slidenum">
+              <a:rPr lang="en-US" smtClean="0"/>
+              <a:pPr/>
+              <a:t>2</a:t>
+            </a:fld>
+            <a:endParaRPr lang="en-US" dirty="0"/>
+          </a:p>
+        </p:txBody>
+      </p:sp>
+      <p:sp>
+        <p:nvSpPr>
+          <p:cNvPr id="3" name="제목 1">
+            <a:extLst>
+              <a:ext uri="{FF2B5EF4-FFF2-40B4-BE49-F238E27FC236}">
+                <a16:creationId xmlns:a16="http://schemas.microsoft.com/office/drawing/2014/main" id="{46F33DF2-9EF9-7B85-A8F1-4E5ECE795362}"/>
+              </a:ext>
+            </a:extLst>
+          </p:cNvPr>
+          <p:cNvSpPr txBox="1">
+            <a:spLocks/>
+          </p:cNvSpPr>
+          <p:nvPr/>
+        </p:nvSpPr>
+        <p:spPr>
+          <a:xfrm>
+            <a:off x="475645" y="481983"/>
+            <a:ext cx="10353762" cy="766439"/>
+          </a:xfrm>
+          <a:prstGeom prst="rect">
+            <a:avLst/>
+          </a:prstGeom>
+        </p:spPr>
+        <p:txBody>
+          <a:bodyPr vert="horz" lIns="91440" tIns="45720" rIns="91440" bIns="45720" rtlCol="0" anchor="ctr">
+            <a:normAutofit/>
+          </a:bodyPr>
+          <a:lstStyle>
+            <a:lvl1pPr algn="ctr" defTabSz="914400" rtl="0" eaLnBrk="1" latinLnBrk="1" hangingPunct="1">
+              <a:lnSpc>
+                <a:spcPct val="90000"/>
+              </a:lnSpc>
+              <a:spcBef>
+                <a:spcPct val="0"/>
+              </a:spcBef>
+              <a:buNone/>
+              <a:defRPr sz="3200" kern="1200" cap="all" baseline="0">
+                <a:solidFill>
+                  <a:schemeClr val="tx1"/>
+                </a:solidFill>
+                <a:effectLst/>
+                <a:latin typeface="Batang" panose="02030600000101010101" pitchFamily="18" charset="-127"/>
+                <a:ea typeface="Batang" panose="02030600000101010101" pitchFamily="18" charset="-127"/>
+                <a:cs typeface="+mj-cs"/>
+              </a:defRPr>
+            </a:lvl1pPr>
+          </a:lstStyle>
+          <a:p>
+            <a:pPr algn="l"/>
+            <a:r>
+              <a:rPr lang="en-US" altLang="ko-KR" b="1" cap="none" dirty="0"/>
+              <a:t>Scopes</a:t>
+            </a:r>
+          </a:p>
+        </p:txBody>
+      </p:sp>
+      <p:sp>
+        <p:nvSpPr>
+          <p:cNvPr id="11" name="AutoShape 2" descr="라이트박스에 표시된 선택된 이미지">
+            <a:extLst>
+              <a:ext uri="{FF2B5EF4-FFF2-40B4-BE49-F238E27FC236}">
+                <a16:creationId xmlns:a16="http://schemas.microsoft.com/office/drawing/2014/main" id="{24A5ED47-BDF3-5C20-B866-F6754BFC48DA}"/>
+              </a:ext>
+            </a:extLst>
+          </p:cNvPr>
+          <p:cNvSpPr>
+            <a:spLocks noChangeAspect="1" noChangeArrowheads="1"/>
+          </p:cNvSpPr>
+          <p:nvPr/>
+        </p:nvSpPr>
+        <p:spPr bwMode="auto">
+          <a:xfrm>
+            <a:off x="5943600" y="3276600"/>
+            <a:ext cx="304800" cy="304800"/>
+          </a:xfrm>
+          <a:prstGeom prst="rect">
+            <a:avLst/>
+          </a:prstGeom>
+          <a:noFill/>
+          <a:extLst>
+            <a:ext uri="{909E8E84-426E-40DD-AFC4-6F175D3DCCD1}">
+              <a14:hiddenFill xmlns:a14="http://schemas.microsoft.com/office/drawing/2010/main">
+                <a:solidFill>
+                  <a:srgbClr val="FFFFFF"/>
+                </a:solidFill>
+              </a14:hiddenFill>
+            </a:ext>
+          </a:extLst>
+        </p:spPr>
+        <p:txBody>
+          <a:bodyPr vert="horz" wrap="square" lIns="91440" tIns="45720" rIns="91440" bIns="45720" numCol="1" anchor="t" anchorCtr="0" compatLnSpc="1">
+            <a:prstTxWarp prst="textNoShape">
+              <a:avLst/>
+            </a:prstTxWarp>
+          </a:bodyPr>
+          <a:lstStyle/>
+          <a:p>
+            <a:endParaRPr lang="ko-KR" altLang="en-US"/>
+          </a:p>
+        </p:txBody>
+      </p:sp>
+      <p:sp>
+        <p:nvSpPr>
+          <p:cNvPr id="5" name="TextBox 4">
+            <a:extLst>
+              <a:ext uri="{FF2B5EF4-FFF2-40B4-BE49-F238E27FC236}">
+                <a16:creationId xmlns:a16="http://schemas.microsoft.com/office/drawing/2014/main" id="{442BACCE-73EC-634D-67DE-20A01E2109F6}"/>
+              </a:ext>
+            </a:extLst>
+          </p:cNvPr>
+          <p:cNvSpPr txBox="1"/>
+          <p:nvPr/>
+        </p:nvSpPr>
+        <p:spPr>
+          <a:xfrm>
+            <a:off x="1053164" y="2132021"/>
+            <a:ext cx="9460847" cy="1889300"/>
+          </a:xfrm>
+          <a:prstGeom prst="rect">
+            <a:avLst/>
+          </a:prstGeom>
+          <a:noFill/>
+        </p:spPr>
+        <p:txBody>
+          <a:bodyPr wrap="square">
+            <a:spAutoFit/>
+          </a:bodyPr>
+          <a:lstStyle/>
+          <a:p>
+            <a:pPr marL="285750" indent="-285750" algn="just">
+              <a:lnSpc>
+                <a:spcPct val="150000"/>
+              </a:lnSpc>
+              <a:buFont typeface="Wingdings" panose="05000000000000000000" pitchFamily="2" charset="2"/>
+              <a:buChar char="v"/>
+            </a:pPr>
+            <a:r>
+              <a:rPr lang="en-US" altLang="ko-KR" sz="2000" dirty="0">
+                <a:latin typeface="Century Gothic" panose="020B0502020202020204" pitchFamily="34" charset="0"/>
+                <a:ea typeface="Calibri Light" panose="020F0302020204030204" pitchFamily="34" charset="0"/>
+                <a:cs typeface="Calibri Light" panose="020F0302020204030204" pitchFamily="34" charset="0"/>
+              </a:rPr>
+              <a:t>“Hands-on Machine Learning with Scikit-Learn, </a:t>
+            </a:r>
+            <a:r>
+              <a:rPr lang="en-US" altLang="ko-KR" sz="2000" dirty="0" err="1">
+                <a:latin typeface="Century Gothic" panose="020B0502020202020204" pitchFamily="34" charset="0"/>
+                <a:ea typeface="Calibri Light" panose="020F0302020204030204" pitchFamily="34" charset="0"/>
+                <a:cs typeface="Calibri Light" panose="020F0302020204030204" pitchFamily="34" charset="0"/>
+              </a:rPr>
+              <a:t>Keras</a:t>
+            </a:r>
+            <a:r>
+              <a:rPr lang="en-US" altLang="ko-KR" sz="2000" dirty="0">
+                <a:latin typeface="Century Gothic" panose="020B0502020202020204" pitchFamily="34" charset="0"/>
+                <a:ea typeface="Calibri Light" panose="020F0302020204030204" pitchFamily="34" charset="0"/>
+                <a:cs typeface="Calibri Light" panose="020F0302020204030204" pitchFamily="34" charset="0"/>
+              </a:rPr>
+              <a:t> &amp; TensorFlow”</a:t>
+            </a:r>
+            <a:r>
+              <a:rPr lang="ko-KR" altLang="en-US" sz="2000" dirty="0">
+                <a:latin typeface="Century Gothic" panose="020B0502020202020204" pitchFamily="34" charset="0"/>
+                <a:ea typeface="D2Coding" panose="020B0609020101020101" pitchFamily="49" charset="-127"/>
+                <a:cs typeface="Calibri Light" panose="020F0302020204030204" pitchFamily="34" charset="0"/>
+              </a:rPr>
+              <a:t>의</a:t>
+            </a:r>
+            <a:r>
+              <a:rPr lang="en-US" altLang="ko-KR" sz="2000" dirty="0">
+                <a:latin typeface="Century Gothic" panose="020B0502020202020204" pitchFamily="34" charset="0"/>
+                <a:ea typeface="Calibri Light" panose="020F0302020204030204" pitchFamily="34" charset="0"/>
+                <a:cs typeface="Calibri Light" panose="020F0302020204030204" pitchFamily="34" charset="0"/>
+              </a:rPr>
+              <a:t> CHAPTER 14 Deep Computer Vision Using Convolutional Neural Networks</a:t>
+            </a:r>
+            <a:r>
+              <a:rPr lang="ko-KR" altLang="en-US" sz="2000" dirty="0">
+                <a:latin typeface="Century Gothic" panose="020B0502020202020204" pitchFamily="34" charset="0"/>
+                <a:ea typeface="D2Coding" panose="020B0609020101020101" pitchFamily="49" charset="-127"/>
+                <a:cs typeface="Calibri Light" panose="020F0302020204030204" pitchFamily="34" charset="0"/>
+              </a:rPr>
+              <a:t>의 </a:t>
+            </a:r>
+            <a:r>
+              <a:rPr lang="en-US" altLang="ko-KR" sz="2000" b="1" dirty="0">
+                <a:latin typeface="Century Gothic" panose="020B0502020202020204" pitchFamily="34" charset="0"/>
+                <a:ea typeface="Calibri Light" panose="020F0302020204030204" pitchFamily="34" charset="0"/>
+                <a:cs typeface="Calibri Light" panose="020F0302020204030204" pitchFamily="34" charset="0"/>
+              </a:rPr>
+              <a:t>Classification and Localization, Object Detection, Fully Convolutional Networks </a:t>
+            </a:r>
+            <a:r>
+              <a:rPr lang="ko-KR" altLang="en-US" sz="2000" dirty="0">
+                <a:latin typeface="Century Gothic" panose="020B0502020202020204" pitchFamily="34" charset="0"/>
+                <a:ea typeface="D2Coding" panose="020B0609020101020101" pitchFamily="49" charset="-127"/>
+                <a:cs typeface="Calibri Light" panose="020F0302020204030204" pitchFamily="34" charset="0"/>
+              </a:rPr>
+              <a:t>의 내용을 </a:t>
+            </a:r>
+            <a:r>
+              <a:rPr lang="en-US" altLang="ko-KR" sz="2000" dirty="0">
+                <a:latin typeface="Century Gothic" panose="020B0502020202020204" pitchFamily="34" charset="0"/>
+                <a:ea typeface="Calibri Light" panose="020F0302020204030204" pitchFamily="34" charset="0"/>
+                <a:cs typeface="Calibri Light" panose="020F0302020204030204" pitchFamily="34" charset="0"/>
+              </a:rPr>
+              <a:t>merge</a:t>
+            </a:r>
+            <a:r>
+              <a:rPr lang="ko-KR" altLang="en-US" sz="2000" dirty="0">
+                <a:latin typeface="Century Gothic" panose="020B0502020202020204" pitchFamily="34" charset="0"/>
+                <a:ea typeface="D2Coding" panose="020B0609020101020101" pitchFamily="49" charset="-127"/>
+                <a:cs typeface="Calibri Light" panose="020F0302020204030204" pitchFamily="34" charset="0"/>
+              </a:rPr>
+              <a:t>하여 구성하였으며 </a:t>
+            </a:r>
+            <a:r>
+              <a:rPr lang="en-US" altLang="ko-KR" sz="2000" dirty="0">
+                <a:latin typeface="Century Gothic" panose="020B0502020202020204" pitchFamily="34" charset="0"/>
+                <a:ea typeface="Calibri Light" panose="020F0302020204030204" pitchFamily="34" charset="0"/>
+                <a:cs typeface="Calibri Light" panose="020F0302020204030204" pitchFamily="34" charset="0"/>
+              </a:rPr>
+              <a:t>YOLO</a:t>
+            </a:r>
+            <a:r>
+              <a:rPr lang="ko-KR" altLang="en-US" sz="2000" dirty="0">
+                <a:latin typeface="Century Gothic" panose="020B0502020202020204" pitchFamily="34" charset="0"/>
+                <a:ea typeface="D2Coding" panose="020B0609020101020101" pitchFamily="49" charset="-127"/>
+                <a:cs typeface="Calibri Light" panose="020F0302020204030204" pitchFamily="34" charset="0"/>
+              </a:rPr>
+              <a:t>는 제외함</a:t>
+            </a:r>
+            <a:endParaRPr lang="en-US" altLang="ko-KR" sz="2000" b="0" i="0" dirty="0">
+              <a:effectLst/>
+              <a:latin typeface="Century Gothic" panose="020B0502020202020204" pitchFamily="34" charset="0"/>
+              <a:ea typeface="Calibri Light" panose="020F0302020204030204" pitchFamily="34" charset="0"/>
+              <a:cs typeface="Calibri Light" panose="020F0302020204030204" pitchFamily="34" charset="0"/>
+            </a:endParaRPr>
+          </a:p>
+        </p:txBody>
+      </p:sp>
+    </p:spTree>
+    <p:extLst>
+      <p:ext uri="{BB962C8B-B14F-4D97-AF65-F5344CB8AC3E}">
+        <p14:creationId xmlns:p14="http://schemas.microsoft.com/office/powerpoint/2010/main" val="3470442587"/>
+      </p:ext>
+    </p:extLst>
+  </p:cSld>
+  <p:clrMapOvr>
+    <a:masterClrMapping/>
+  </p:clrMapOvr>
+</p:sld>
+</file>
+
+<file path=ppt/slides/slide20.xml><?xml version="1.0" encoding="utf-8"?>
 <p:sld xmlns:a="http://schemas.openxmlformats.org/drawingml/2006/main" xmlns:r="http://schemas.openxmlformats.org/officeDocument/2006/relationships" xmlns:p="http://schemas.openxmlformats.org/presentationml/2006/main">
   <p:cSld>
     <p:spTree>
@@ -12077,7 +13700,7 @@
                 <a:ea typeface="Segoe UI Emoji" panose="020B0502040204020203" pitchFamily="34" charset="0"/>
               </a:rPr>
               <a:pPr/>
-              <a:t>19</a:t>
+              <a:t>20</a:t>
             </a:fld>
             <a:endParaRPr lang="en-US" b="1" dirty="0">
               <a:latin typeface="Segoe UI Emoji" panose="020B0502040204020203" pitchFamily="34" charset="0"/>
@@ -12286,319 +13909,7 @@
 </p:sld>
 </file>
 
-<file path=ppt/slides/slide2.xml><?xml version="1.0" encoding="utf-8"?>
-<p:sld xmlns:a="http://schemas.openxmlformats.org/drawingml/2006/main" xmlns:r="http://schemas.openxmlformats.org/officeDocument/2006/relationships" xmlns:p="http://schemas.openxmlformats.org/presentationml/2006/main">
-  <p:cSld>
-    <p:spTree>
-      <p:nvGrpSpPr>
-        <p:cNvPr id="1" name="">
-          <a:extLst>
-            <a:ext uri="{FF2B5EF4-FFF2-40B4-BE49-F238E27FC236}">
-              <a16:creationId xmlns:a16="http://schemas.microsoft.com/office/drawing/2014/main" id="{13F87C48-2054-356F-D59A-A1610505F4C5}"/>
-            </a:ext>
-          </a:extLst>
-        </p:cNvPr>
-        <p:cNvGrpSpPr/>
-        <p:nvPr/>
-      </p:nvGrpSpPr>
-      <p:grpSpPr>
-        <a:xfrm>
-          <a:off x="0" y="0"/>
-          <a:ext cx="0" cy="0"/>
-          <a:chOff x="0" y="0"/>
-          <a:chExt cx="0" cy="0"/>
-        </a:xfrm>
-      </p:grpSpPr>
-      <p:sp>
-        <p:nvSpPr>
-          <p:cNvPr id="4" name="슬라이드 번호 개체 틀 3">
-            <a:extLst>
-              <a:ext uri="{FF2B5EF4-FFF2-40B4-BE49-F238E27FC236}">
-                <a16:creationId xmlns:a16="http://schemas.microsoft.com/office/drawing/2014/main" id="{7406864E-BC1C-1514-F998-D23C329DC598}"/>
-              </a:ext>
-            </a:extLst>
-          </p:cNvPr>
-          <p:cNvSpPr>
-            <a:spLocks noGrp="1"/>
-          </p:cNvSpPr>
-          <p:nvPr>
-            <p:ph type="sldNum" sz="quarter" idx="12"/>
-          </p:nvPr>
-        </p:nvSpPr>
-        <p:spPr>
-          <a:xfrm>
-            <a:off x="10514011" y="6036261"/>
-            <a:ext cx="753545" cy="365125"/>
-          </a:xfrm>
-        </p:spPr>
-        <p:txBody>
-          <a:bodyPr/>
-          <a:lstStyle/>
-          <a:p>
-            <a:fld id="{D57F1E4F-1CFF-5643-939E-217C01CDF565}" type="slidenum">
-              <a:rPr lang="en-US" smtClean="0"/>
-              <a:pPr/>
-              <a:t>2</a:t>
-            </a:fld>
-            <a:endParaRPr lang="en-US" dirty="0"/>
-          </a:p>
-        </p:txBody>
-      </p:sp>
-      <p:sp>
-        <p:nvSpPr>
-          <p:cNvPr id="3" name="제목 1">
-            <a:extLst>
-              <a:ext uri="{FF2B5EF4-FFF2-40B4-BE49-F238E27FC236}">
-                <a16:creationId xmlns:a16="http://schemas.microsoft.com/office/drawing/2014/main" id="{46F33DF2-9EF9-7B85-A8F1-4E5ECE795362}"/>
-              </a:ext>
-            </a:extLst>
-          </p:cNvPr>
-          <p:cNvSpPr txBox="1">
-            <a:spLocks/>
-          </p:cNvSpPr>
-          <p:nvPr/>
-        </p:nvSpPr>
-        <p:spPr>
-          <a:xfrm>
-            <a:off x="475645" y="481983"/>
-            <a:ext cx="10353762" cy="766439"/>
-          </a:xfrm>
-          <a:prstGeom prst="rect">
-            <a:avLst/>
-          </a:prstGeom>
-        </p:spPr>
-        <p:txBody>
-          <a:bodyPr vert="horz" lIns="91440" tIns="45720" rIns="91440" bIns="45720" rtlCol="0" anchor="ctr">
-            <a:normAutofit/>
-          </a:bodyPr>
-          <a:lstStyle>
-            <a:lvl1pPr algn="ctr" defTabSz="914400" rtl="0" eaLnBrk="1" latinLnBrk="1" hangingPunct="1">
-              <a:lnSpc>
-                <a:spcPct val="90000"/>
-              </a:lnSpc>
-              <a:spcBef>
-                <a:spcPct val="0"/>
-              </a:spcBef>
-              <a:buNone/>
-              <a:defRPr sz="3200" kern="1200" cap="all" baseline="0">
-                <a:solidFill>
-                  <a:schemeClr val="tx1"/>
-                </a:solidFill>
-                <a:effectLst/>
-                <a:latin typeface="Batang" panose="02030600000101010101" pitchFamily="18" charset="-127"/>
-                <a:ea typeface="Batang" panose="02030600000101010101" pitchFamily="18" charset="-127"/>
-                <a:cs typeface="+mj-cs"/>
-              </a:defRPr>
-            </a:lvl1pPr>
-          </a:lstStyle>
-          <a:p>
-            <a:pPr algn="l"/>
-            <a:r>
-              <a:rPr lang="en-US" altLang="ko-KR" b="1" cap="none" dirty="0"/>
-              <a:t>Scopes</a:t>
-            </a:r>
-          </a:p>
-        </p:txBody>
-      </p:sp>
-      <p:sp>
-        <p:nvSpPr>
-          <p:cNvPr id="11" name="AutoShape 2" descr="라이트박스에 표시된 선택된 이미지">
-            <a:extLst>
-              <a:ext uri="{FF2B5EF4-FFF2-40B4-BE49-F238E27FC236}">
-                <a16:creationId xmlns:a16="http://schemas.microsoft.com/office/drawing/2014/main" id="{24A5ED47-BDF3-5C20-B866-F6754BFC48DA}"/>
-              </a:ext>
-            </a:extLst>
-          </p:cNvPr>
-          <p:cNvSpPr>
-            <a:spLocks noChangeAspect="1" noChangeArrowheads="1"/>
-          </p:cNvSpPr>
-          <p:nvPr/>
-        </p:nvSpPr>
-        <p:spPr bwMode="auto">
-          <a:xfrm>
-            <a:off x="5943600" y="3276600"/>
-            <a:ext cx="304800" cy="304800"/>
-          </a:xfrm>
-          <a:prstGeom prst="rect">
-            <a:avLst/>
-          </a:prstGeom>
-          <a:noFill/>
-          <a:extLst>
-            <a:ext uri="{909E8E84-426E-40DD-AFC4-6F175D3DCCD1}">
-              <a14:hiddenFill xmlns:a14="http://schemas.microsoft.com/office/drawing/2010/main">
-                <a:solidFill>
-                  <a:srgbClr val="FFFFFF"/>
-                </a:solidFill>
-              </a14:hiddenFill>
-            </a:ext>
-          </a:extLst>
-        </p:spPr>
-        <p:txBody>
-          <a:bodyPr vert="horz" wrap="square" lIns="91440" tIns="45720" rIns="91440" bIns="45720" numCol="1" anchor="t" anchorCtr="0" compatLnSpc="1">
-            <a:prstTxWarp prst="textNoShape">
-              <a:avLst/>
-            </a:prstTxWarp>
-          </a:bodyPr>
-          <a:lstStyle/>
-          <a:p>
-            <a:endParaRPr lang="ko-KR" altLang="en-US"/>
-          </a:p>
-        </p:txBody>
-      </p:sp>
-      <p:sp>
-        <p:nvSpPr>
-          <p:cNvPr id="5" name="TextBox 4">
-            <a:extLst>
-              <a:ext uri="{FF2B5EF4-FFF2-40B4-BE49-F238E27FC236}">
-                <a16:creationId xmlns:a16="http://schemas.microsoft.com/office/drawing/2014/main" id="{442BACCE-73EC-634D-67DE-20A01E2109F6}"/>
-              </a:ext>
-            </a:extLst>
-          </p:cNvPr>
-          <p:cNvSpPr txBox="1"/>
-          <p:nvPr/>
-        </p:nvSpPr>
-        <p:spPr>
-          <a:xfrm>
-            <a:off x="1053164" y="2132021"/>
-            <a:ext cx="9460847" cy="1889300"/>
-          </a:xfrm>
-          <a:prstGeom prst="rect">
-            <a:avLst/>
-          </a:prstGeom>
-          <a:noFill/>
-        </p:spPr>
-        <p:txBody>
-          <a:bodyPr wrap="square">
-            <a:spAutoFit/>
-          </a:bodyPr>
-          <a:lstStyle/>
-          <a:p>
-            <a:pPr marL="285750" indent="-285750" algn="just">
-              <a:lnSpc>
-                <a:spcPct val="150000"/>
-              </a:lnSpc>
-              <a:buFont typeface="Wingdings" panose="05000000000000000000" pitchFamily="2" charset="2"/>
-              <a:buChar char="v"/>
-            </a:pPr>
-            <a:r>
-              <a:rPr lang="en-US" altLang="ko-KR" sz="2000" dirty="0">
-                <a:latin typeface="Century Gothic" panose="020B0502020202020204" pitchFamily="34" charset="0"/>
-                <a:ea typeface="Calibri Light" panose="020F0302020204030204" pitchFamily="34" charset="0"/>
-                <a:cs typeface="Calibri Light" panose="020F0302020204030204" pitchFamily="34" charset="0"/>
-              </a:rPr>
-              <a:t>“Hands-on Machine Learning with Scikit-Learn, </a:t>
-            </a:r>
-            <a:r>
-              <a:rPr lang="en-US" altLang="ko-KR" sz="2000" dirty="0" err="1">
-                <a:latin typeface="Century Gothic" panose="020B0502020202020204" pitchFamily="34" charset="0"/>
-                <a:ea typeface="Calibri Light" panose="020F0302020204030204" pitchFamily="34" charset="0"/>
-                <a:cs typeface="Calibri Light" panose="020F0302020204030204" pitchFamily="34" charset="0"/>
-              </a:rPr>
-              <a:t>Keras</a:t>
-            </a:r>
-            <a:r>
-              <a:rPr lang="en-US" altLang="ko-KR" sz="2000" dirty="0">
-                <a:latin typeface="Century Gothic" panose="020B0502020202020204" pitchFamily="34" charset="0"/>
-                <a:ea typeface="Calibri Light" panose="020F0302020204030204" pitchFamily="34" charset="0"/>
-                <a:cs typeface="Calibri Light" panose="020F0302020204030204" pitchFamily="34" charset="0"/>
-              </a:rPr>
-              <a:t> &amp; TensorFlow”</a:t>
-            </a:r>
-            <a:r>
-              <a:rPr lang="ko-KR" altLang="en-US" sz="2000" dirty="0">
-                <a:latin typeface="Century Gothic" panose="020B0502020202020204" pitchFamily="34" charset="0"/>
-                <a:ea typeface="D2Coding" panose="020B0609020101020101" pitchFamily="49" charset="-127"/>
-                <a:cs typeface="Calibri Light" panose="020F0302020204030204" pitchFamily="34" charset="0"/>
-              </a:rPr>
-              <a:t>의</a:t>
-            </a:r>
-            <a:r>
-              <a:rPr lang="en-US" altLang="ko-KR" sz="2000" dirty="0">
-                <a:latin typeface="Century Gothic" panose="020B0502020202020204" pitchFamily="34" charset="0"/>
-                <a:ea typeface="Calibri Light" panose="020F0302020204030204" pitchFamily="34" charset="0"/>
-                <a:cs typeface="Calibri Light" panose="020F0302020204030204" pitchFamily="34" charset="0"/>
-              </a:rPr>
-              <a:t> CHAPTER 14 Deep Computer Vision Using Convolutional Neural Networks</a:t>
-            </a:r>
-            <a:r>
-              <a:rPr lang="ko-KR" altLang="en-US" sz="2000" dirty="0">
-                <a:latin typeface="Century Gothic" panose="020B0502020202020204" pitchFamily="34" charset="0"/>
-                <a:ea typeface="D2Coding" panose="020B0609020101020101" pitchFamily="49" charset="-127"/>
-                <a:cs typeface="Calibri Light" panose="020F0302020204030204" pitchFamily="34" charset="0"/>
-              </a:rPr>
-              <a:t>의 </a:t>
-            </a:r>
-            <a:r>
-              <a:rPr lang="en-US" altLang="ko-KR" sz="2000" b="1" dirty="0">
-                <a:latin typeface="Century Gothic" panose="020B0502020202020204" pitchFamily="34" charset="0"/>
-                <a:ea typeface="Calibri Light" panose="020F0302020204030204" pitchFamily="34" charset="0"/>
-                <a:cs typeface="Calibri Light" panose="020F0302020204030204" pitchFamily="34" charset="0"/>
-              </a:rPr>
-              <a:t>Classification and Localization, Object Detection, Fully Convolutional Networks </a:t>
-            </a:r>
-            <a:r>
-              <a:rPr lang="ko-KR" altLang="en-US" sz="2000" dirty="0">
-                <a:latin typeface="Century Gothic" panose="020B0502020202020204" pitchFamily="34" charset="0"/>
-                <a:ea typeface="D2Coding" panose="020B0609020101020101" pitchFamily="49" charset="-127"/>
-                <a:cs typeface="Calibri Light" panose="020F0302020204030204" pitchFamily="34" charset="0"/>
-              </a:rPr>
-              <a:t>의 내용을 </a:t>
-            </a:r>
-            <a:r>
-              <a:rPr lang="en-US" altLang="ko-KR" sz="2000" dirty="0">
-                <a:latin typeface="Century Gothic" panose="020B0502020202020204" pitchFamily="34" charset="0"/>
-                <a:ea typeface="Calibri Light" panose="020F0302020204030204" pitchFamily="34" charset="0"/>
-                <a:cs typeface="Calibri Light" panose="020F0302020204030204" pitchFamily="34" charset="0"/>
-              </a:rPr>
-              <a:t>merge</a:t>
-            </a:r>
-            <a:r>
-              <a:rPr lang="ko-KR" altLang="en-US" sz="2000" dirty="0">
-                <a:latin typeface="Century Gothic" panose="020B0502020202020204" pitchFamily="34" charset="0"/>
-                <a:ea typeface="D2Coding" panose="020B0609020101020101" pitchFamily="49" charset="-127"/>
-                <a:cs typeface="Calibri Light" panose="020F0302020204030204" pitchFamily="34" charset="0"/>
-              </a:rPr>
-              <a:t>하여 구성하였으며 </a:t>
-            </a:r>
-            <a:r>
-              <a:rPr lang="en-US" altLang="ko-KR" sz="2000" dirty="0">
-                <a:latin typeface="Century Gothic" panose="020B0502020202020204" pitchFamily="34" charset="0"/>
-                <a:ea typeface="Calibri Light" panose="020F0302020204030204" pitchFamily="34" charset="0"/>
-                <a:cs typeface="Calibri Light" panose="020F0302020204030204" pitchFamily="34" charset="0"/>
-              </a:rPr>
-              <a:t>YOLO</a:t>
-            </a:r>
-            <a:r>
-              <a:rPr lang="ko-KR" altLang="en-US" sz="2000" dirty="0">
-                <a:latin typeface="Century Gothic" panose="020B0502020202020204" pitchFamily="34" charset="0"/>
-                <a:ea typeface="D2Coding" panose="020B0609020101020101" pitchFamily="49" charset="-127"/>
-                <a:cs typeface="Calibri Light" panose="020F0302020204030204" pitchFamily="34" charset="0"/>
-              </a:rPr>
-              <a:t>는 제외함</a:t>
-            </a:r>
-            <a:endParaRPr lang="en-US" altLang="ko-KR" sz="2000" b="0" i="0" dirty="0">
-              <a:effectLst/>
-              <a:latin typeface="Century Gothic" panose="020B0502020202020204" pitchFamily="34" charset="0"/>
-              <a:ea typeface="Calibri Light" panose="020F0302020204030204" pitchFamily="34" charset="0"/>
-              <a:cs typeface="Calibri Light" panose="020F0302020204030204" pitchFamily="34" charset="0"/>
-            </a:endParaRPr>
-          </a:p>
-        </p:txBody>
-      </p:sp>
-    </p:spTree>
-    <p:extLst>
-      <p:ext uri="{BB962C8B-B14F-4D97-AF65-F5344CB8AC3E}">
-        <p14:creationId xmlns:p14="http://schemas.microsoft.com/office/powerpoint/2010/main" val="3470442587"/>
-      </p:ext>
-    </p:extLst>
-  </p:cSld>
-  <p:clrMapOvr>
-    <a:masterClrMapping/>
-  </p:clrMapOvr>
-</p:sld>
-</file>
-
-<file path=ppt/slides/slide20.xml><?xml version="1.0" encoding="utf-8"?>
+<file path=ppt/slides/slide21.xml><?xml version="1.0" encoding="utf-8"?>
 <p:sld xmlns:a="http://schemas.openxmlformats.org/drawingml/2006/main" xmlns:r="http://schemas.openxmlformats.org/officeDocument/2006/relationships" xmlns:p="http://schemas.openxmlformats.org/presentationml/2006/main">
   <p:cSld>
     <p:spTree>
@@ -12704,7 +14015,7 @@
             <a:fld id="{D57F1E4F-1CFF-5643-939E-217C01CDF565}" type="slidenum">
               <a:rPr lang="en-US" smtClean="0"/>
               <a:pPr/>
-              <a:t>20</a:t>
+              <a:t>21</a:t>
             </a:fld>
             <a:endParaRPr lang="en-US" dirty="0"/>
           </a:p>
@@ -13004,7 +14315,7 @@
 </p:sld>
 </file>
 
-<file path=ppt/slides/slide21.xml><?xml version="1.0" encoding="utf-8"?>
+<file path=ppt/slides/slide22.xml><?xml version="1.0" encoding="utf-8"?>
 <p:sld xmlns:a="http://schemas.openxmlformats.org/drawingml/2006/main" xmlns:r="http://schemas.openxmlformats.org/officeDocument/2006/relationships" xmlns:p="http://schemas.openxmlformats.org/presentationml/2006/main">
   <p:cSld>
     <p:spTree>
@@ -13056,7 +14367,7 @@
             <a:fld id="{D57F1E4F-1CFF-5643-939E-217C01CDF565}" type="slidenum">
               <a:rPr lang="en-US" smtClean="0"/>
               <a:pPr/>
-              <a:t>21</a:t>
+              <a:t>22</a:t>
             </a:fld>
             <a:endParaRPr lang="en-US" dirty="0"/>
           </a:p>
@@ -13671,7 +14982,7 @@
                 <a:ea typeface="Segoe UI Emoji" panose="020B0502040204020203" pitchFamily="34" charset="0"/>
               </a:rPr>
               <a:pPr/>
-              <a:t>21</a:t>
+              <a:t>22</a:t>
             </a:fld>
             <a:endParaRPr lang="en-US" b="1" dirty="0">
               <a:latin typeface="Segoe UI Emoji" panose="020B0502040204020203" pitchFamily="34" charset="0"/>
@@ -13693,7 +15004,7 @@
 </p:sld>
 </file>
 
-<file path=ppt/slides/slide22.xml><?xml version="1.0" encoding="utf-8"?>
+<file path=ppt/slides/slide23.xml><?xml version="1.0" encoding="utf-8"?>
 <p:sld xmlns:a="http://schemas.openxmlformats.org/drawingml/2006/main" xmlns:r="http://schemas.openxmlformats.org/officeDocument/2006/relationships" xmlns:p="http://schemas.openxmlformats.org/presentationml/2006/main">
   <p:cSld>
     <p:spTree>
@@ -13745,7 +15056,7 @@
             <a:fld id="{D57F1E4F-1CFF-5643-939E-217C01CDF565}" type="slidenum">
               <a:rPr lang="en-US" smtClean="0"/>
               <a:pPr/>
-              <a:t>22</a:t>
+              <a:t>23</a:t>
             </a:fld>
             <a:endParaRPr lang="en-US" dirty="0"/>
           </a:p>
@@ -14045,7 +15356,7 @@
                 <a:ea typeface="Segoe UI Emoji" panose="020B0502040204020203" pitchFamily="34" charset="0"/>
               </a:rPr>
               <a:pPr/>
-              <a:t>22</a:t>
+              <a:t>23</a:t>
             </a:fld>
             <a:endParaRPr lang="en-US" b="1" dirty="0">
               <a:latin typeface="Segoe UI Emoji" panose="020B0502040204020203" pitchFamily="34" charset="0"/>
@@ -14067,7 +15378,7 @@
 </p:sld>
 </file>
 
-<file path=ppt/slides/slide23.xml><?xml version="1.0" encoding="utf-8"?>
+<file path=ppt/slides/slide24.xml><?xml version="1.0" encoding="utf-8"?>
 <p:sld xmlns:a="http://schemas.openxmlformats.org/drawingml/2006/main" xmlns:r="http://schemas.openxmlformats.org/officeDocument/2006/relationships" xmlns:p="http://schemas.openxmlformats.org/presentationml/2006/main">
   <p:cSld>
     <p:spTree>
@@ -14119,7 +15430,7 @@
             <a:fld id="{D57F1E4F-1CFF-5643-939E-217C01CDF565}" type="slidenum">
               <a:rPr lang="en-US" smtClean="0"/>
               <a:pPr/>
-              <a:t>23</a:t>
+              <a:t>24</a:t>
             </a:fld>
             <a:endParaRPr lang="en-US" dirty="0"/>
           </a:p>
@@ -14795,7 +16106,7 @@
                 <a:ea typeface="Segoe UI Emoji" panose="020B0502040204020203" pitchFamily="34" charset="0"/>
               </a:rPr>
               <a:pPr/>
-              <a:t>23</a:t>
+              <a:t>24</a:t>
             </a:fld>
             <a:endParaRPr lang="en-US" b="1" dirty="0">
               <a:latin typeface="Segoe UI Emoji" panose="020B0502040204020203" pitchFamily="34" charset="0"/>
@@ -14817,7 +16128,7 @@
 </p:sld>
 </file>
 
-<file path=ppt/slides/slide24.xml><?xml version="1.0" encoding="utf-8"?>
+<file path=ppt/slides/slide25.xml><?xml version="1.0" encoding="utf-8"?>
 <p:sld xmlns:a="http://schemas.openxmlformats.org/drawingml/2006/main" xmlns:r="http://schemas.openxmlformats.org/officeDocument/2006/relationships" xmlns:p="http://schemas.openxmlformats.org/presentationml/2006/main">
   <p:cSld>
     <p:spTree>
@@ -15426,7 +16737,7 @@
                 <a:ea typeface="Segoe UI Emoji" panose="020B0502040204020203" pitchFamily="34" charset="0"/>
               </a:rPr>
               <a:pPr/>
-              <a:t>24</a:t>
+              <a:t>25</a:t>
             </a:fld>
             <a:endParaRPr lang="en-US" b="1" dirty="0">
               <a:latin typeface="Segoe UI Emoji" panose="020B0502040204020203" pitchFamily="34" charset="0"/>
@@ -15448,7 +16759,7 @@
 </p:sld>
 </file>
 
-<file path=ppt/slides/slide25.xml><?xml version="1.0" encoding="utf-8"?>
+<file path=ppt/slides/slide26.xml><?xml version="1.0" encoding="utf-8"?>
 <p:sld xmlns:a="http://schemas.openxmlformats.org/drawingml/2006/main" xmlns:r="http://schemas.openxmlformats.org/officeDocument/2006/relationships" xmlns:p="http://schemas.openxmlformats.org/presentationml/2006/main">
   <p:cSld>
     <p:spTree>
@@ -15711,7 +17022,7 @@
                 <a:ea typeface="Segoe UI Emoji" panose="020B0502040204020203" pitchFamily="34" charset="0"/>
               </a:rPr>
               <a:pPr/>
-              <a:t>25</a:t>
+              <a:t>26</a:t>
             </a:fld>
             <a:endParaRPr lang="en-US" b="1" dirty="0">
               <a:latin typeface="Segoe UI Emoji" panose="020B0502040204020203" pitchFamily="34" charset="0"/>
@@ -15733,7 +17044,7 @@
 </p:sld>
 </file>
 
-<file path=ppt/slides/slide26.xml><?xml version="1.0" encoding="utf-8"?>
+<file path=ppt/slides/slide27.xml><?xml version="1.0" encoding="utf-8"?>
 <p:sld xmlns:a="http://schemas.openxmlformats.org/drawingml/2006/main" xmlns:r="http://schemas.openxmlformats.org/officeDocument/2006/relationships" xmlns:p="http://schemas.openxmlformats.org/presentationml/2006/main">
   <p:cSld>
     <p:spTree>
@@ -15996,7 +17307,7 @@
                 <a:ea typeface="Segoe UI Emoji" panose="020B0502040204020203" pitchFamily="34" charset="0"/>
               </a:rPr>
               <a:pPr/>
-              <a:t>26</a:t>
+              <a:t>27</a:t>
             </a:fld>
             <a:endParaRPr lang="en-US" b="1" dirty="0">
               <a:latin typeface="Segoe UI Emoji" panose="020B0502040204020203" pitchFamily="34" charset="0"/>
@@ -16018,7 +17329,7 @@
 </p:sld>
 </file>
 
-<file path=ppt/slides/slide27.xml><?xml version="1.0" encoding="utf-8"?>
+<file path=ppt/slides/slide28.xml><?xml version="1.0" encoding="utf-8"?>
 <p:sld xmlns:a="http://schemas.openxmlformats.org/drawingml/2006/main" xmlns:r="http://schemas.openxmlformats.org/officeDocument/2006/relationships" xmlns:p="http://schemas.openxmlformats.org/presentationml/2006/main">
   <p:cSld>
     <p:spTree>
@@ -16281,7 +17592,7 @@
                 <a:ea typeface="Segoe UI Emoji" panose="020B0502040204020203" pitchFamily="34" charset="0"/>
               </a:rPr>
               <a:pPr/>
-              <a:t>27</a:t>
+              <a:t>28</a:t>
             </a:fld>
             <a:endParaRPr lang="en-US" b="1" dirty="0">
               <a:latin typeface="Segoe UI Emoji" panose="020B0502040204020203" pitchFamily="34" charset="0"/>
@@ -16701,6 +18012,415 @@
         <p:cNvPr id="1" name="">
           <a:extLst>
             <a:ext uri="{FF2B5EF4-FFF2-40B4-BE49-F238E27FC236}">
+              <a16:creationId xmlns:a16="http://schemas.microsoft.com/office/drawing/2014/main" id="{AA8B6F0E-1AD2-0815-9B8B-C08FE5EC3999}"/>
+            </a:ext>
+          </a:extLst>
+        </p:cNvPr>
+        <p:cNvGrpSpPr/>
+        <p:nvPr/>
+      </p:nvGrpSpPr>
+      <p:grpSpPr>
+        <a:xfrm>
+          <a:off x="0" y="0"/>
+          <a:ext cx="0" cy="0"/>
+          <a:chOff x="0" y="0"/>
+          <a:chExt cx="0" cy="0"/>
+        </a:xfrm>
+      </p:grpSpPr>
+      <p:sp>
+        <p:nvSpPr>
+          <p:cNvPr id="2" name="제목 1">
+            <a:extLst>
+              <a:ext uri="{FF2B5EF4-FFF2-40B4-BE49-F238E27FC236}">
+                <a16:creationId xmlns:a16="http://schemas.microsoft.com/office/drawing/2014/main" id="{D0E0034C-D158-9433-3E81-703E2643FB00}"/>
+              </a:ext>
+            </a:extLst>
+          </p:cNvPr>
+          <p:cNvSpPr>
+            <a:spLocks noGrp="1"/>
+          </p:cNvSpPr>
+          <p:nvPr>
+            <p:ph type="ctrTitle"/>
+          </p:nvPr>
+        </p:nvSpPr>
+        <p:spPr>
+          <a:xfrm>
+            <a:off x="838200" y="1164324"/>
+            <a:ext cx="10515600" cy="1712226"/>
+          </a:xfrm>
+        </p:spPr>
+        <p:txBody>
+          <a:bodyPr rtlCol="0" anchor="ctr" anchorCtr="0">
+            <a:normAutofit/>
+          </a:bodyPr>
+          <a:lstStyle/>
+          <a:p>
+            <a:pPr rtl="0"/>
+            <a:r>
+              <a:rPr lang="ko-KR" altLang="en-US" sz="4400" dirty="0">
+                <a:solidFill>
+                  <a:schemeClr val="bg1"/>
+                </a:solidFill>
+              </a:rPr>
+              <a:t>실습하기</a:t>
+            </a:r>
+          </a:p>
+        </p:txBody>
+      </p:sp>
+      <p:sp>
+        <p:nvSpPr>
+          <p:cNvPr id="5" name="부제목 2">
+            <a:extLst>
+              <a:ext uri="{FF2B5EF4-FFF2-40B4-BE49-F238E27FC236}">
+                <a16:creationId xmlns:a16="http://schemas.microsoft.com/office/drawing/2014/main" id="{5E6B5F63-4274-C3E4-9DEB-AAEDABD5730B}"/>
+              </a:ext>
+            </a:extLst>
+          </p:cNvPr>
+          <p:cNvSpPr txBox="1">
+            <a:spLocks/>
+          </p:cNvSpPr>
+          <p:nvPr/>
+        </p:nvSpPr>
+        <p:spPr>
+          <a:xfrm>
+            <a:off x="855620" y="4555883"/>
+            <a:ext cx="9582736" cy="1137793"/>
+          </a:xfrm>
+          <a:prstGeom prst="rect">
+            <a:avLst/>
+          </a:prstGeom>
+        </p:spPr>
+        <p:txBody>
+          <a:bodyPr vert="horz" lIns="91440" tIns="45720" rIns="91440" bIns="45720" rtlCol="0">
+            <a:normAutofit/>
+          </a:bodyPr>
+          <a:lstStyle>
+            <a:lvl1pPr marL="0" indent="0" algn="l" defTabSz="914400" rtl="0" eaLnBrk="1" latinLnBrk="1" hangingPunct="1">
+              <a:lnSpc>
+                <a:spcPct val="150000"/>
+              </a:lnSpc>
+              <a:spcBef>
+                <a:spcPts val="1000"/>
+              </a:spcBef>
+              <a:spcAft>
+                <a:spcPts val="1200"/>
+              </a:spcAft>
+              <a:buFontTx/>
+              <a:buNone/>
+              <a:defRPr lang="en-US" sz="1200" kern="1200" dirty="0">
+                <a:solidFill>
+                  <a:schemeClr val="tx1"/>
+                </a:solidFill>
+                <a:latin typeface="맑은 고딕" panose="020B0503020000020004" pitchFamily="50" charset="-127"/>
+                <a:ea typeface="맑은 고딕" panose="020B0503020000020004" pitchFamily="50" charset="-127"/>
+                <a:cs typeface="+mn-cs"/>
+              </a:defRPr>
+            </a:lvl1pPr>
+            <a:lvl2pPr marL="228600" indent="-228600" algn="l" defTabSz="914400" rtl="0" eaLnBrk="1" latinLnBrk="1" hangingPunct="1">
+              <a:lnSpc>
+                <a:spcPct val="150000"/>
+              </a:lnSpc>
+              <a:spcBef>
+                <a:spcPts val="1000"/>
+              </a:spcBef>
+              <a:spcAft>
+                <a:spcPts val="1200"/>
+              </a:spcAft>
+              <a:buFont typeface="Arial" panose="020B0604020202020204" pitchFamily="34" charset="0"/>
+              <a:buChar char="•"/>
+              <a:defRPr lang="en-US" sz="1200" kern="1200" dirty="0">
+                <a:solidFill>
+                  <a:schemeClr val="tx1"/>
+                </a:solidFill>
+                <a:latin typeface="맑은 고딕" panose="020B0503020000020004" pitchFamily="50" charset="-127"/>
+                <a:ea typeface="맑은 고딕" panose="020B0503020000020004" pitchFamily="50" charset="-127"/>
+                <a:cs typeface="+mn-cs"/>
+              </a:defRPr>
+            </a:lvl2pPr>
+            <a:lvl3pPr marL="685800" indent="-228600" algn="l" defTabSz="914400" rtl="0" eaLnBrk="1" latinLnBrk="1" hangingPunct="1">
+              <a:lnSpc>
+                <a:spcPct val="150000"/>
+              </a:lnSpc>
+              <a:spcBef>
+                <a:spcPts val="1000"/>
+              </a:spcBef>
+              <a:spcAft>
+                <a:spcPts val="1200"/>
+              </a:spcAft>
+              <a:buFont typeface="Arial" panose="020B0604020202020204" pitchFamily="34" charset="0"/>
+              <a:buChar char="•"/>
+              <a:defRPr lang="en-US" sz="1200" kern="1200" dirty="0">
+                <a:solidFill>
+                  <a:schemeClr val="tx1"/>
+                </a:solidFill>
+                <a:latin typeface="맑은 고딕" panose="020B0503020000020004" pitchFamily="50" charset="-127"/>
+                <a:ea typeface="맑은 고딕" panose="020B0503020000020004" pitchFamily="50" charset="-127"/>
+                <a:cs typeface="+mn-cs"/>
+              </a:defRPr>
+            </a:lvl3pPr>
+            <a:lvl4pPr marL="1143000" indent="-228600" algn="l" defTabSz="914400" rtl="0" eaLnBrk="1" latinLnBrk="1" hangingPunct="1">
+              <a:lnSpc>
+                <a:spcPct val="150000"/>
+              </a:lnSpc>
+              <a:spcBef>
+                <a:spcPts val="1000"/>
+              </a:spcBef>
+              <a:spcAft>
+                <a:spcPts val="1200"/>
+              </a:spcAft>
+              <a:buFont typeface="Arial" panose="020B0604020202020204" pitchFamily="34" charset="0"/>
+              <a:buChar char="•"/>
+              <a:defRPr lang="en-US" sz="1200" kern="1200" dirty="0" smtClean="0">
+                <a:solidFill>
+                  <a:schemeClr val="tx1"/>
+                </a:solidFill>
+                <a:latin typeface="맑은 고딕" panose="020B0503020000020004" pitchFamily="50" charset="-127"/>
+                <a:ea typeface="맑은 고딕" panose="020B0503020000020004" pitchFamily="50" charset="-127"/>
+                <a:cs typeface="+mn-cs"/>
+              </a:defRPr>
+            </a:lvl4pPr>
+            <a:lvl5pPr marL="1600200" indent="-228600" algn="l" defTabSz="914400" rtl="0" eaLnBrk="1" latinLnBrk="1" hangingPunct="1">
+              <a:lnSpc>
+                <a:spcPct val="150000"/>
+              </a:lnSpc>
+              <a:spcBef>
+                <a:spcPts val="1000"/>
+              </a:spcBef>
+              <a:spcAft>
+                <a:spcPts val="1200"/>
+              </a:spcAft>
+              <a:buFont typeface="Arial" panose="020B0604020202020204" pitchFamily="34" charset="0"/>
+              <a:buChar char="•"/>
+              <a:defRPr lang="en-US" sz="1200" kern="1200" dirty="0" smtClean="0">
+                <a:solidFill>
+                  <a:schemeClr val="tx1"/>
+                </a:solidFill>
+                <a:latin typeface="맑은 고딕" panose="020B0503020000020004" pitchFamily="50" charset="-127"/>
+                <a:ea typeface="맑은 고딕" panose="020B0503020000020004" pitchFamily="50" charset="-127"/>
+                <a:cs typeface="+mn-cs"/>
+              </a:defRPr>
+            </a:lvl5pPr>
+            <a:lvl6pPr marL="2057400" indent="-228600" algn="l" defTabSz="914400" rtl="0" eaLnBrk="1" latinLnBrk="1" hangingPunct="1">
+              <a:lnSpc>
+                <a:spcPct val="150000"/>
+              </a:lnSpc>
+              <a:spcBef>
+                <a:spcPts val="1000"/>
+              </a:spcBef>
+              <a:spcAft>
+                <a:spcPts val="1200"/>
+              </a:spcAft>
+              <a:buFont typeface="Arial" panose="020B0604020202020204" pitchFamily="34" charset="0"/>
+              <a:buChar char="•"/>
+              <a:defRPr lang="en-US" sz="1200" kern="1200" dirty="0" smtClean="0">
+                <a:solidFill>
+                  <a:schemeClr val="tx1"/>
+                </a:solidFill>
+                <a:latin typeface="+mn-lt"/>
+                <a:ea typeface="+mn-ea"/>
+                <a:cs typeface="+mn-cs"/>
+              </a:defRPr>
+            </a:lvl6pPr>
+            <a:lvl7pPr marL="2514600" indent="-228600" algn="l" defTabSz="914400" rtl="0" eaLnBrk="1" latinLnBrk="1" hangingPunct="1">
+              <a:lnSpc>
+                <a:spcPct val="150000"/>
+              </a:lnSpc>
+              <a:spcBef>
+                <a:spcPts val="1000"/>
+              </a:spcBef>
+              <a:spcAft>
+                <a:spcPts val="1200"/>
+              </a:spcAft>
+              <a:buFont typeface="Arial" panose="020B0604020202020204" pitchFamily="34" charset="0"/>
+              <a:buChar char="•"/>
+              <a:defRPr lang="en-US" sz="1200" kern="1200" dirty="0" smtClean="0">
+                <a:solidFill>
+                  <a:schemeClr val="tx1"/>
+                </a:solidFill>
+                <a:latin typeface="+mn-lt"/>
+                <a:ea typeface="+mn-ea"/>
+                <a:cs typeface="+mn-cs"/>
+              </a:defRPr>
+            </a:lvl7pPr>
+            <a:lvl8pPr marL="2971800" indent="-228600" algn="l" defTabSz="914400" rtl="0" eaLnBrk="1" latinLnBrk="1" hangingPunct="1">
+              <a:lnSpc>
+                <a:spcPct val="150000"/>
+              </a:lnSpc>
+              <a:spcBef>
+                <a:spcPts val="1000"/>
+              </a:spcBef>
+              <a:spcAft>
+                <a:spcPts val="1200"/>
+              </a:spcAft>
+              <a:buFont typeface="Arial" panose="020B0604020202020204" pitchFamily="34" charset="0"/>
+              <a:buChar char="•"/>
+              <a:defRPr lang="en-US" sz="1200" kern="1200" dirty="0" smtClean="0">
+                <a:solidFill>
+                  <a:schemeClr val="tx1"/>
+                </a:solidFill>
+                <a:latin typeface="+mn-lt"/>
+                <a:ea typeface="+mn-ea"/>
+                <a:cs typeface="+mn-cs"/>
+              </a:defRPr>
+            </a:lvl8pPr>
+            <a:lvl9pPr marL="3429000" indent="-228600" algn="l" defTabSz="914400" rtl="0" eaLnBrk="1" latinLnBrk="1" hangingPunct="1">
+              <a:lnSpc>
+                <a:spcPct val="90000"/>
+              </a:lnSpc>
+              <a:spcBef>
+                <a:spcPct val="30000"/>
+              </a:spcBef>
+              <a:buFont typeface="Arial" panose="020B0604020202020204" pitchFamily="34" charset="0"/>
+              <a:buNone/>
+              <a:defRPr sz="1200" kern="1200">
+                <a:solidFill>
+                  <a:schemeClr val="tx1"/>
+                </a:solidFill>
+                <a:latin typeface="+mn-lt"/>
+                <a:ea typeface="+mn-ea"/>
+                <a:cs typeface="+mn-cs"/>
+              </a:defRPr>
+            </a:lvl9pPr>
+          </a:lstStyle>
+          <a:p>
+            <a:r>
+              <a:rPr lang="en-US" altLang="ko-KR" sz="2000" dirty="0">
+                <a:solidFill>
+                  <a:srgbClr val="FFFF00"/>
+                </a:solidFill>
+                <a:latin typeface="D2Coding" panose="020B0609020101020101" pitchFamily="49" charset="-127"/>
+                <a:ea typeface="D2Coding" panose="020B0609020101020101" pitchFamily="49" charset="-127"/>
+                <a:hlinkClick r:id="rId3">
+                  <a:extLst>
+                    <a:ext uri="{A12FA001-AC4F-418D-AE19-62706E023703}">
+                      <ahyp:hlinkClr xmlns:ahyp="http://schemas.microsoft.com/office/drawing/2018/hyperlinkcolor" val="tx"/>
+                    </a:ext>
+                  </a:extLst>
+                </a:hlinkClick>
+              </a:rPr>
+              <a:t>Chapter 14 – Deep Computer Vision Using Convolutional Neural Networks</a:t>
+            </a:r>
+            <a:endParaRPr lang="en-US" altLang="ko-KR" sz="2000" dirty="0">
+              <a:solidFill>
+                <a:srgbClr val="FFFF00"/>
+              </a:solidFill>
+              <a:latin typeface="D2Coding" panose="020B0609020101020101" pitchFamily="49" charset="-127"/>
+              <a:ea typeface="D2Coding" panose="020B0609020101020101" pitchFamily="49" charset="-127"/>
+            </a:endParaRPr>
+          </a:p>
+        </p:txBody>
+      </p:sp>
+      <p:sp>
+        <p:nvSpPr>
+          <p:cNvPr id="4" name="TextBox 3">
+            <a:extLst>
+              <a:ext uri="{FF2B5EF4-FFF2-40B4-BE49-F238E27FC236}">
+                <a16:creationId xmlns:a16="http://schemas.microsoft.com/office/drawing/2014/main" id="{C8D7E844-DE3E-FFCD-004F-B556D9016804}"/>
+              </a:ext>
+            </a:extLst>
+          </p:cNvPr>
+          <p:cNvSpPr txBox="1"/>
+          <p:nvPr/>
+        </p:nvSpPr>
+        <p:spPr>
+          <a:xfrm>
+            <a:off x="838200" y="3507071"/>
+            <a:ext cx="8639175" cy="1077218"/>
+          </a:xfrm>
+          <a:prstGeom prst="rect">
+            <a:avLst/>
+          </a:prstGeom>
+          <a:noFill/>
+        </p:spPr>
+        <p:txBody>
+          <a:bodyPr wrap="square">
+            <a:spAutoFit/>
+          </a:bodyPr>
+          <a:lstStyle/>
+          <a:p>
+            <a:r>
+              <a:rPr lang="en-US" altLang="ko-KR" sz="2400" dirty="0">
+                <a:solidFill>
+                  <a:srgbClr val="FFFF00"/>
+                </a:solidFill>
+                <a:latin typeface="D2Coding" panose="020B0609020101020101" pitchFamily="49" charset="-127"/>
+                <a:ea typeface="D2Coding" panose="020B0609020101020101" pitchFamily="49" charset="-127"/>
+              </a:rPr>
+              <a:t>O’RELLY</a:t>
+            </a:r>
+          </a:p>
+          <a:p>
+            <a:r>
+              <a:rPr lang="en-US" altLang="ko-KR" sz="2000" dirty="0">
+                <a:solidFill>
+                  <a:srgbClr val="FFFF00"/>
+                </a:solidFill>
+                <a:latin typeface="D2Coding" panose="020B0609020101020101" pitchFamily="49" charset="-127"/>
+                <a:ea typeface="D2Coding" panose="020B0609020101020101" pitchFamily="49" charset="-127"/>
+              </a:rPr>
+              <a:t>Hands-on Machine Learning with Scikit-Learn, </a:t>
+            </a:r>
+            <a:r>
+              <a:rPr lang="en-US" altLang="ko-KR" sz="2000" dirty="0" err="1">
+                <a:solidFill>
+                  <a:srgbClr val="FFFF00"/>
+                </a:solidFill>
+                <a:latin typeface="D2Coding" panose="020B0609020101020101" pitchFamily="49" charset="-127"/>
+                <a:ea typeface="D2Coding" panose="020B0609020101020101" pitchFamily="49" charset="-127"/>
+              </a:rPr>
+              <a:t>Keras</a:t>
+            </a:r>
+            <a:r>
+              <a:rPr lang="en-US" altLang="ko-KR" sz="2000" dirty="0">
+                <a:solidFill>
+                  <a:srgbClr val="FFFF00"/>
+                </a:solidFill>
+                <a:latin typeface="D2Coding" panose="020B0609020101020101" pitchFamily="49" charset="-127"/>
+                <a:ea typeface="D2Coding" panose="020B0609020101020101" pitchFamily="49" charset="-127"/>
+              </a:rPr>
+              <a:t> &amp; TensorFlow </a:t>
+            </a:r>
+            <a:r>
+              <a:rPr lang="en-US" altLang="ko-KR" dirty="0">
+                <a:solidFill>
+                  <a:srgbClr val="FFFF00"/>
+                </a:solidFill>
+                <a:latin typeface="D2Coding" panose="020B0609020101020101" pitchFamily="49" charset="-127"/>
+                <a:ea typeface="D2Coding" panose="020B0609020101020101" pitchFamily="49" charset="-127"/>
+              </a:rPr>
+              <a:t>Concepts, Tools, and Techniques to Build Intelligent Systems</a:t>
+            </a:r>
+            <a:endParaRPr lang="ko-KR" altLang="en-US" sz="2000" dirty="0">
+              <a:solidFill>
+                <a:srgbClr val="FFFF00"/>
+              </a:solidFill>
+              <a:latin typeface="D2Coding" panose="020B0609020101020101" pitchFamily="49" charset="-127"/>
+              <a:ea typeface="D2Coding" panose="020B0609020101020101" pitchFamily="49" charset="-127"/>
+            </a:endParaRPr>
+          </a:p>
+        </p:txBody>
+      </p:sp>
+    </p:spTree>
+    <p:extLst>
+      <p:ext uri="{BB962C8B-B14F-4D97-AF65-F5344CB8AC3E}">
+        <p14:creationId xmlns:p14="http://schemas.microsoft.com/office/powerpoint/2010/main" val="3072616533"/>
+      </p:ext>
+    </p:extLst>
+  </p:cSld>
+  <p:clrMapOvr>
+    <a:masterClrMapping/>
+  </p:clrMapOvr>
+</p:sld>
+</file>
+
+<file path=ppt/slides/slide5.xml><?xml version="1.0" encoding="utf-8"?>
+<p:sld xmlns:a="http://schemas.openxmlformats.org/drawingml/2006/main" xmlns:r="http://schemas.openxmlformats.org/officeDocument/2006/relationships" xmlns:p="http://schemas.openxmlformats.org/presentationml/2006/main">
+  <p:cSld>
+    <p:spTree>
+      <p:nvGrpSpPr>
+        <p:cNvPr id="1" name="">
+          <a:extLst>
+            <a:ext uri="{FF2B5EF4-FFF2-40B4-BE49-F238E27FC236}">
               <a16:creationId xmlns:a16="http://schemas.microsoft.com/office/drawing/2014/main" id="{61932AB4-36DC-291C-982B-B4A6CFF9B67B}"/>
             </a:ext>
           </a:extLst>
@@ -16951,7 +18671,7 @@
                 <a:ea typeface="Segoe UI Emoji" panose="020B0502040204020203" pitchFamily="34" charset="0"/>
               </a:rPr>
               <a:pPr/>
-              <a:t>4</a:t>
+              <a:t>5</a:t>
             </a:fld>
             <a:endParaRPr lang="en-US" b="1" dirty="0">
               <a:latin typeface="Segoe UI Emoji" panose="020B0502040204020203" pitchFamily="34" charset="0"/>
@@ -17279,415 +18999,6 @@
     <p:extLst>
       <p:ext uri="{BB962C8B-B14F-4D97-AF65-F5344CB8AC3E}">
         <p14:creationId xmlns:p14="http://schemas.microsoft.com/office/powerpoint/2010/main" val="355296312"/>
-      </p:ext>
-    </p:extLst>
-  </p:cSld>
-  <p:clrMapOvr>
-    <a:masterClrMapping/>
-  </p:clrMapOvr>
-</p:sld>
-</file>
-
-<file path=ppt/slides/slide5.xml><?xml version="1.0" encoding="utf-8"?>
-<p:sld xmlns:a="http://schemas.openxmlformats.org/drawingml/2006/main" xmlns:r="http://schemas.openxmlformats.org/officeDocument/2006/relationships" xmlns:p="http://schemas.openxmlformats.org/presentationml/2006/main">
-  <p:cSld>
-    <p:spTree>
-      <p:nvGrpSpPr>
-        <p:cNvPr id="1" name="">
-          <a:extLst>
-            <a:ext uri="{FF2B5EF4-FFF2-40B4-BE49-F238E27FC236}">
-              <a16:creationId xmlns:a16="http://schemas.microsoft.com/office/drawing/2014/main" id="{AA8B6F0E-1AD2-0815-9B8B-C08FE5EC3999}"/>
-            </a:ext>
-          </a:extLst>
-        </p:cNvPr>
-        <p:cNvGrpSpPr/>
-        <p:nvPr/>
-      </p:nvGrpSpPr>
-      <p:grpSpPr>
-        <a:xfrm>
-          <a:off x="0" y="0"/>
-          <a:ext cx="0" cy="0"/>
-          <a:chOff x="0" y="0"/>
-          <a:chExt cx="0" cy="0"/>
-        </a:xfrm>
-      </p:grpSpPr>
-      <p:sp>
-        <p:nvSpPr>
-          <p:cNvPr id="2" name="제목 1">
-            <a:extLst>
-              <a:ext uri="{FF2B5EF4-FFF2-40B4-BE49-F238E27FC236}">
-                <a16:creationId xmlns:a16="http://schemas.microsoft.com/office/drawing/2014/main" id="{D0E0034C-D158-9433-3E81-703E2643FB00}"/>
-              </a:ext>
-            </a:extLst>
-          </p:cNvPr>
-          <p:cNvSpPr>
-            <a:spLocks noGrp="1"/>
-          </p:cNvSpPr>
-          <p:nvPr>
-            <p:ph type="ctrTitle"/>
-          </p:nvPr>
-        </p:nvSpPr>
-        <p:spPr>
-          <a:xfrm>
-            <a:off x="838200" y="1164324"/>
-            <a:ext cx="10515600" cy="2387600"/>
-          </a:xfrm>
-        </p:spPr>
-        <p:txBody>
-          <a:bodyPr rtlCol="0" anchor="ctr" anchorCtr="0">
-            <a:normAutofit/>
-          </a:bodyPr>
-          <a:lstStyle/>
-          <a:p>
-            <a:pPr rtl="0"/>
-            <a:r>
-              <a:rPr lang="ko-KR" altLang="en-US" sz="4800" dirty="0">
-                <a:solidFill>
-                  <a:schemeClr val="bg1"/>
-                </a:solidFill>
-              </a:rPr>
-              <a:t>실습하기</a:t>
-            </a:r>
-          </a:p>
-        </p:txBody>
-      </p:sp>
-      <p:sp>
-        <p:nvSpPr>
-          <p:cNvPr id="5" name="부제목 2">
-            <a:extLst>
-              <a:ext uri="{FF2B5EF4-FFF2-40B4-BE49-F238E27FC236}">
-                <a16:creationId xmlns:a16="http://schemas.microsoft.com/office/drawing/2014/main" id="{5E6B5F63-4274-C3E4-9DEB-AAEDABD5730B}"/>
-              </a:ext>
-            </a:extLst>
-          </p:cNvPr>
-          <p:cNvSpPr txBox="1">
-            <a:spLocks/>
-          </p:cNvSpPr>
-          <p:nvPr/>
-        </p:nvSpPr>
-        <p:spPr>
-          <a:xfrm>
-            <a:off x="855620" y="4555883"/>
-            <a:ext cx="9582736" cy="1137793"/>
-          </a:xfrm>
-          <a:prstGeom prst="rect">
-            <a:avLst/>
-          </a:prstGeom>
-        </p:spPr>
-        <p:txBody>
-          <a:bodyPr vert="horz" lIns="91440" tIns="45720" rIns="91440" bIns="45720" rtlCol="0">
-            <a:normAutofit/>
-          </a:bodyPr>
-          <a:lstStyle>
-            <a:lvl1pPr marL="0" indent="0" algn="l" defTabSz="914400" rtl="0" eaLnBrk="1" latinLnBrk="1" hangingPunct="1">
-              <a:lnSpc>
-                <a:spcPct val="150000"/>
-              </a:lnSpc>
-              <a:spcBef>
-                <a:spcPts val="1000"/>
-              </a:spcBef>
-              <a:spcAft>
-                <a:spcPts val="1200"/>
-              </a:spcAft>
-              <a:buFontTx/>
-              <a:buNone/>
-              <a:defRPr lang="en-US" sz="1200" kern="1200" dirty="0">
-                <a:solidFill>
-                  <a:schemeClr val="tx1"/>
-                </a:solidFill>
-                <a:latin typeface="맑은 고딕" panose="020B0503020000020004" pitchFamily="50" charset="-127"/>
-                <a:ea typeface="맑은 고딕" panose="020B0503020000020004" pitchFamily="50" charset="-127"/>
-                <a:cs typeface="+mn-cs"/>
-              </a:defRPr>
-            </a:lvl1pPr>
-            <a:lvl2pPr marL="228600" indent="-228600" algn="l" defTabSz="914400" rtl="0" eaLnBrk="1" latinLnBrk="1" hangingPunct="1">
-              <a:lnSpc>
-                <a:spcPct val="150000"/>
-              </a:lnSpc>
-              <a:spcBef>
-                <a:spcPts val="1000"/>
-              </a:spcBef>
-              <a:spcAft>
-                <a:spcPts val="1200"/>
-              </a:spcAft>
-              <a:buFont typeface="Arial" panose="020B0604020202020204" pitchFamily="34" charset="0"/>
-              <a:buChar char="•"/>
-              <a:defRPr lang="en-US" sz="1200" kern="1200" dirty="0">
-                <a:solidFill>
-                  <a:schemeClr val="tx1"/>
-                </a:solidFill>
-                <a:latin typeface="맑은 고딕" panose="020B0503020000020004" pitchFamily="50" charset="-127"/>
-                <a:ea typeface="맑은 고딕" panose="020B0503020000020004" pitchFamily="50" charset="-127"/>
-                <a:cs typeface="+mn-cs"/>
-              </a:defRPr>
-            </a:lvl2pPr>
-            <a:lvl3pPr marL="685800" indent="-228600" algn="l" defTabSz="914400" rtl="0" eaLnBrk="1" latinLnBrk="1" hangingPunct="1">
-              <a:lnSpc>
-                <a:spcPct val="150000"/>
-              </a:lnSpc>
-              <a:spcBef>
-                <a:spcPts val="1000"/>
-              </a:spcBef>
-              <a:spcAft>
-                <a:spcPts val="1200"/>
-              </a:spcAft>
-              <a:buFont typeface="Arial" panose="020B0604020202020204" pitchFamily="34" charset="0"/>
-              <a:buChar char="•"/>
-              <a:defRPr lang="en-US" sz="1200" kern="1200" dirty="0">
-                <a:solidFill>
-                  <a:schemeClr val="tx1"/>
-                </a:solidFill>
-                <a:latin typeface="맑은 고딕" panose="020B0503020000020004" pitchFamily="50" charset="-127"/>
-                <a:ea typeface="맑은 고딕" panose="020B0503020000020004" pitchFamily="50" charset="-127"/>
-                <a:cs typeface="+mn-cs"/>
-              </a:defRPr>
-            </a:lvl3pPr>
-            <a:lvl4pPr marL="1143000" indent="-228600" algn="l" defTabSz="914400" rtl="0" eaLnBrk="1" latinLnBrk="1" hangingPunct="1">
-              <a:lnSpc>
-                <a:spcPct val="150000"/>
-              </a:lnSpc>
-              <a:spcBef>
-                <a:spcPts val="1000"/>
-              </a:spcBef>
-              <a:spcAft>
-                <a:spcPts val="1200"/>
-              </a:spcAft>
-              <a:buFont typeface="Arial" panose="020B0604020202020204" pitchFamily="34" charset="0"/>
-              <a:buChar char="•"/>
-              <a:defRPr lang="en-US" sz="1200" kern="1200" dirty="0" smtClean="0">
-                <a:solidFill>
-                  <a:schemeClr val="tx1"/>
-                </a:solidFill>
-                <a:latin typeface="맑은 고딕" panose="020B0503020000020004" pitchFamily="50" charset="-127"/>
-                <a:ea typeface="맑은 고딕" panose="020B0503020000020004" pitchFamily="50" charset="-127"/>
-                <a:cs typeface="+mn-cs"/>
-              </a:defRPr>
-            </a:lvl4pPr>
-            <a:lvl5pPr marL="1600200" indent="-228600" algn="l" defTabSz="914400" rtl="0" eaLnBrk="1" latinLnBrk="1" hangingPunct="1">
-              <a:lnSpc>
-                <a:spcPct val="150000"/>
-              </a:lnSpc>
-              <a:spcBef>
-                <a:spcPts val="1000"/>
-              </a:spcBef>
-              <a:spcAft>
-                <a:spcPts val="1200"/>
-              </a:spcAft>
-              <a:buFont typeface="Arial" panose="020B0604020202020204" pitchFamily="34" charset="0"/>
-              <a:buChar char="•"/>
-              <a:defRPr lang="en-US" sz="1200" kern="1200" dirty="0" smtClean="0">
-                <a:solidFill>
-                  <a:schemeClr val="tx1"/>
-                </a:solidFill>
-                <a:latin typeface="맑은 고딕" panose="020B0503020000020004" pitchFamily="50" charset="-127"/>
-                <a:ea typeface="맑은 고딕" panose="020B0503020000020004" pitchFamily="50" charset="-127"/>
-                <a:cs typeface="+mn-cs"/>
-              </a:defRPr>
-            </a:lvl5pPr>
-            <a:lvl6pPr marL="2057400" indent="-228600" algn="l" defTabSz="914400" rtl="0" eaLnBrk="1" latinLnBrk="1" hangingPunct="1">
-              <a:lnSpc>
-                <a:spcPct val="150000"/>
-              </a:lnSpc>
-              <a:spcBef>
-                <a:spcPts val="1000"/>
-              </a:spcBef>
-              <a:spcAft>
-                <a:spcPts val="1200"/>
-              </a:spcAft>
-              <a:buFont typeface="Arial" panose="020B0604020202020204" pitchFamily="34" charset="0"/>
-              <a:buChar char="•"/>
-              <a:defRPr lang="en-US" sz="1200" kern="1200" dirty="0" smtClean="0">
-                <a:solidFill>
-                  <a:schemeClr val="tx1"/>
-                </a:solidFill>
-                <a:latin typeface="+mn-lt"/>
-                <a:ea typeface="+mn-ea"/>
-                <a:cs typeface="+mn-cs"/>
-              </a:defRPr>
-            </a:lvl6pPr>
-            <a:lvl7pPr marL="2514600" indent="-228600" algn="l" defTabSz="914400" rtl="0" eaLnBrk="1" latinLnBrk="1" hangingPunct="1">
-              <a:lnSpc>
-                <a:spcPct val="150000"/>
-              </a:lnSpc>
-              <a:spcBef>
-                <a:spcPts val="1000"/>
-              </a:spcBef>
-              <a:spcAft>
-                <a:spcPts val="1200"/>
-              </a:spcAft>
-              <a:buFont typeface="Arial" panose="020B0604020202020204" pitchFamily="34" charset="0"/>
-              <a:buChar char="•"/>
-              <a:defRPr lang="en-US" sz="1200" kern="1200" dirty="0" smtClean="0">
-                <a:solidFill>
-                  <a:schemeClr val="tx1"/>
-                </a:solidFill>
-                <a:latin typeface="+mn-lt"/>
-                <a:ea typeface="+mn-ea"/>
-                <a:cs typeface="+mn-cs"/>
-              </a:defRPr>
-            </a:lvl7pPr>
-            <a:lvl8pPr marL="2971800" indent="-228600" algn="l" defTabSz="914400" rtl="0" eaLnBrk="1" latinLnBrk="1" hangingPunct="1">
-              <a:lnSpc>
-                <a:spcPct val="150000"/>
-              </a:lnSpc>
-              <a:spcBef>
-                <a:spcPts val="1000"/>
-              </a:spcBef>
-              <a:spcAft>
-                <a:spcPts val="1200"/>
-              </a:spcAft>
-              <a:buFont typeface="Arial" panose="020B0604020202020204" pitchFamily="34" charset="0"/>
-              <a:buChar char="•"/>
-              <a:defRPr lang="en-US" sz="1200" kern="1200" dirty="0" smtClean="0">
-                <a:solidFill>
-                  <a:schemeClr val="tx1"/>
-                </a:solidFill>
-                <a:latin typeface="+mn-lt"/>
-                <a:ea typeface="+mn-ea"/>
-                <a:cs typeface="+mn-cs"/>
-              </a:defRPr>
-            </a:lvl8pPr>
-            <a:lvl9pPr marL="3429000" indent="-228600" algn="l" defTabSz="914400" rtl="0" eaLnBrk="1" latinLnBrk="1" hangingPunct="1">
-              <a:lnSpc>
-                <a:spcPct val="90000"/>
-              </a:lnSpc>
-              <a:spcBef>
-                <a:spcPct val="30000"/>
-              </a:spcBef>
-              <a:buFont typeface="Arial" panose="020B0604020202020204" pitchFamily="34" charset="0"/>
-              <a:buNone/>
-              <a:defRPr sz="1200" kern="1200">
-                <a:solidFill>
-                  <a:schemeClr val="tx1"/>
-                </a:solidFill>
-                <a:latin typeface="+mn-lt"/>
-                <a:ea typeface="+mn-ea"/>
-                <a:cs typeface="+mn-cs"/>
-              </a:defRPr>
-            </a:lvl9pPr>
-          </a:lstStyle>
-          <a:p>
-            <a:r>
-              <a:rPr lang="en-US" altLang="ko-KR" sz="2000" dirty="0">
-                <a:solidFill>
-                  <a:srgbClr val="FFFF00"/>
-                </a:solidFill>
-                <a:latin typeface="D2Coding" panose="020B0609020101020101" pitchFamily="49" charset="-127"/>
-                <a:ea typeface="D2Coding" panose="020B0609020101020101" pitchFamily="49" charset="-127"/>
-                <a:hlinkClick r:id="rId3">
-                  <a:extLst>
-                    <a:ext uri="{A12FA001-AC4F-418D-AE19-62706E023703}">
-                      <ahyp:hlinkClr xmlns:ahyp="http://schemas.microsoft.com/office/drawing/2018/hyperlinkcolor" val="tx"/>
-                    </a:ext>
-                  </a:extLst>
-                </a:hlinkClick>
-              </a:rPr>
-              <a:t>Chapter 14 – Deep Computer Vision Using Convolutional Neural Networks</a:t>
-            </a:r>
-            <a:endParaRPr lang="en-US" altLang="ko-KR" sz="2000" dirty="0">
-              <a:solidFill>
-                <a:srgbClr val="FFFF00"/>
-              </a:solidFill>
-              <a:latin typeface="D2Coding" panose="020B0609020101020101" pitchFamily="49" charset="-127"/>
-              <a:ea typeface="D2Coding" panose="020B0609020101020101" pitchFamily="49" charset="-127"/>
-            </a:endParaRPr>
-          </a:p>
-        </p:txBody>
-      </p:sp>
-      <p:sp>
-        <p:nvSpPr>
-          <p:cNvPr id="4" name="TextBox 3">
-            <a:extLst>
-              <a:ext uri="{FF2B5EF4-FFF2-40B4-BE49-F238E27FC236}">
-                <a16:creationId xmlns:a16="http://schemas.microsoft.com/office/drawing/2014/main" id="{C8D7E844-DE3E-FFCD-004F-B556D9016804}"/>
-              </a:ext>
-            </a:extLst>
-          </p:cNvPr>
-          <p:cNvSpPr txBox="1"/>
-          <p:nvPr/>
-        </p:nvSpPr>
-        <p:spPr>
-          <a:xfrm>
-            <a:off x="838200" y="3507071"/>
-            <a:ext cx="8639175" cy="1077218"/>
-          </a:xfrm>
-          <a:prstGeom prst="rect">
-            <a:avLst/>
-          </a:prstGeom>
-          <a:noFill/>
-        </p:spPr>
-        <p:txBody>
-          <a:bodyPr wrap="square">
-            <a:spAutoFit/>
-          </a:bodyPr>
-          <a:lstStyle/>
-          <a:p>
-            <a:r>
-              <a:rPr lang="en-US" altLang="ko-KR" sz="2400" dirty="0">
-                <a:solidFill>
-                  <a:srgbClr val="FFFF00"/>
-                </a:solidFill>
-                <a:latin typeface="D2Coding" panose="020B0609020101020101" pitchFamily="49" charset="-127"/>
-                <a:ea typeface="D2Coding" panose="020B0609020101020101" pitchFamily="49" charset="-127"/>
-              </a:rPr>
-              <a:t>O’RELLY</a:t>
-            </a:r>
-          </a:p>
-          <a:p>
-            <a:r>
-              <a:rPr lang="en-US" altLang="ko-KR" sz="2000" dirty="0">
-                <a:solidFill>
-                  <a:srgbClr val="FFFF00"/>
-                </a:solidFill>
-                <a:latin typeface="D2Coding" panose="020B0609020101020101" pitchFamily="49" charset="-127"/>
-                <a:ea typeface="D2Coding" panose="020B0609020101020101" pitchFamily="49" charset="-127"/>
-              </a:rPr>
-              <a:t>Hands-on Machine Learning with Scikit-Learn, </a:t>
-            </a:r>
-            <a:r>
-              <a:rPr lang="en-US" altLang="ko-KR" sz="2000" dirty="0" err="1">
-                <a:solidFill>
-                  <a:srgbClr val="FFFF00"/>
-                </a:solidFill>
-                <a:latin typeface="D2Coding" panose="020B0609020101020101" pitchFamily="49" charset="-127"/>
-                <a:ea typeface="D2Coding" panose="020B0609020101020101" pitchFamily="49" charset="-127"/>
-              </a:rPr>
-              <a:t>Keras</a:t>
-            </a:r>
-            <a:r>
-              <a:rPr lang="en-US" altLang="ko-KR" sz="2000" dirty="0">
-                <a:solidFill>
-                  <a:srgbClr val="FFFF00"/>
-                </a:solidFill>
-                <a:latin typeface="D2Coding" panose="020B0609020101020101" pitchFamily="49" charset="-127"/>
-                <a:ea typeface="D2Coding" panose="020B0609020101020101" pitchFamily="49" charset="-127"/>
-              </a:rPr>
-              <a:t> &amp; TensorFlow </a:t>
-            </a:r>
-            <a:r>
-              <a:rPr lang="en-US" altLang="ko-KR" dirty="0">
-                <a:solidFill>
-                  <a:srgbClr val="FFFF00"/>
-                </a:solidFill>
-                <a:latin typeface="D2Coding" panose="020B0609020101020101" pitchFamily="49" charset="-127"/>
-                <a:ea typeface="D2Coding" panose="020B0609020101020101" pitchFamily="49" charset="-127"/>
-              </a:rPr>
-              <a:t>Concepts, Tools, and Techniques to Build Intelligent Systems</a:t>
-            </a:r>
-            <a:endParaRPr lang="ko-KR" altLang="en-US" sz="2000" dirty="0">
-              <a:solidFill>
-                <a:srgbClr val="FFFF00"/>
-              </a:solidFill>
-              <a:latin typeface="D2Coding" panose="020B0609020101020101" pitchFamily="49" charset="-127"/>
-              <a:ea typeface="D2Coding" panose="020B0609020101020101" pitchFamily="49" charset="-127"/>
-            </a:endParaRPr>
-          </a:p>
-        </p:txBody>
-      </p:sp>
-    </p:spTree>
-    <p:extLst>
-      <p:ext uri="{BB962C8B-B14F-4D97-AF65-F5344CB8AC3E}">
-        <p14:creationId xmlns:p14="http://schemas.microsoft.com/office/powerpoint/2010/main" val="3072616533"/>
       </p:ext>
     </p:extLst>
   </p:cSld>

--- a/Chapter 11 Image segmentation.pptx
+++ b/Chapter 11 Image segmentation.pptx
@@ -5,10 +5,10 @@
     <p:sldMasterId id="2147483660" r:id="rId1"/>
   </p:sldMasterIdLst>
   <p:notesMasterIdLst>
-    <p:notesMasterId r:id="rId30"/>
+    <p:notesMasterId r:id="rId32"/>
   </p:notesMasterIdLst>
   <p:handoutMasterIdLst>
-    <p:handoutMasterId r:id="rId31"/>
+    <p:handoutMasterId r:id="rId33"/>
   </p:handoutMasterIdLst>
   <p:sldIdLst>
     <p:sldId id="256" r:id="rId2"/>
@@ -36,9 +36,11 @@
     <p:sldId id="1162" r:id="rId24"/>
     <p:sldId id="1143" r:id="rId25"/>
     <p:sldId id="1138" r:id="rId26"/>
-    <p:sldId id="1135" r:id="rId27"/>
-    <p:sldId id="1129" r:id="rId28"/>
-    <p:sldId id="1130" r:id="rId29"/>
+    <p:sldId id="1163" r:id="rId27"/>
+    <p:sldId id="1135" r:id="rId28"/>
+    <p:sldId id="1164" r:id="rId29"/>
+    <p:sldId id="1129" r:id="rId30"/>
+    <p:sldId id="1130" r:id="rId31"/>
   </p:sldIdLst>
   <p:sldSz cx="12192000" cy="6858000"/>
   <p:notesSz cx="6858000" cy="9144000"/>
@@ -171,7 +173,9 @@
             <p14:sldId id="1162"/>
             <p14:sldId id="1143"/>
             <p14:sldId id="1138"/>
+            <p14:sldId id="1163"/>
             <p14:sldId id="1135"/>
+            <p14:sldId id="1164"/>
             <p14:sldId id="1129"/>
             <p14:sldId id="1130"/>
           </p14:sldIdLst>
@@ -298,7 +302,7 @@
                 <a:latin typeface="맑은 고딕" panose="020B0503020000020004" pitchFamily="50" charset="-127"/>
                 <a:ea typeface="맑은 고딕" panose="020B0503020000020004" pitchFamily="50" charset="-127"/>
               </a:rPr>
-              <a:t>2026-08-10</a:t>
+              <a:t>2026-08-12</a:t>
             </a:fld>
             <a:endParaRPr lang="ko-KR" altLang="en-US">
               <a:latin typeface="맑은 고딕" panose="020B0503020000020004" pitchFamily="50" charset="-127"/>
@@ -484,7 +488,7 @@
           <a:p>
             <a:fld id="{43E1C3DD-4A19-441D-907C-380838DB51C4}" type="datetime1">
               <a:rPr lang="ko-KR" altLang="en-US" noProof="0" smtClean="0"/>
-              <a:t>2026-08-10</a:t>
+              <a:t>2026-08-12</a:t>
             </a:fld>
             <a:endParaRPr lang="ko-KR" altLang="en-US" noProof="0"/>
           </a:p>
@@ -1456,7 +1460,7 @@
           <a:p>
             <a:fld id="{990475B5-67CA-4281-BDCA-DA943C3C8EB3}" type="datetime1">
               <a:rPr lang="ko-KR" altLang="en-US" noProof="0" smtClean="0"/>
-              <a:t>2026-08-10</a:t>
+              <a:t>2026-08-12</a:t>
             </a:fld>
             <a:endParaRPr lang="ko-KR" altLang="en-US" noProof="0"/>
           </a:p>
@@ -2110,7 +2114,7 @@
           <a:p>
             <a:fld id="{48A87A34-81AB-432B-8DAE-1953F412C126}" type="datetimeFigureOut">
               <a:rPr lang="en-US" smtClean="0"/>
-              <a:t>8/10/2026</a:t>
+              <a:t>8/12/2026</a:t>
             </a:fld>
             <a:endParaRPr lang="en-US" dirty="0"/>
           </a:p>
@@ -2406,7 +2410,7 @@
           <a:p>
             <a:fld id="{C655C81E-72E7-4D05-94B5-F45B321A525D}" type="datetime1">
               <a:rPr lang="ko-KR" altLang="en-US" noProof="0" smtClean="0"/>
-              <a:t>2026-08-10</a:t>
+              <a:t>2026-08-12</a:t>
             </a:fld>
             <a:endParaRPr lang="ko-KR" altLang="en-US" noProof="0" dirty="0">
               <a:latin typeface="맑은 고딕" panose="020B0503020000020004" pitchFamily="50" charset="-127"/>
@@ -11336,7 +11340,7 @@
         </p:blipFill>
         <p:spPr bwMode="auto">
           <a:xfrm>
-            <a:off x="1104900" y="1962230"/>
+            <a:off x="1104900" y="2790905"/>
             <a:ext cx="3749142" cy="3375963"/>
           </a:xfrm>
           <a:prstGeom prst="rect">
@@ -11383,7 +11387,7 @@
         </p:blipFill>
         <p:spPr bwMode="auto">
           <a:xfrm>
-            <a:off x="6280683" y="1962230"/>
+            <a:off x="6280683" y="2790905"/>
             <a:ext cx="3749142" cy="3375963"/>
           </a:xfrm>
           <a:prstGeom prst="rect">
@@ -11415,7 +11419,7 @@
         </p:nvSpPr>
         <p:spPr>
           <a:xfrm>
-            <a:off x="1981200" y="1615559"/>
+            <a:off x="1981200" y="2444234"/>
             <a:ext cx="1905000" cy="369332"/>
           </a:xfrm>
           <a:prstGeom prst="rect">
@@ -11431,15 +11435,15 @@
           <a:p>
             <a:r>
               <a:rPr lang="en-US" altLang="ko-KR" dirty="0">
-                <a:latin typeface="맑은 고딕 Semilight" panose="020B0502040204020203" pitchFamily="50" charset="-127"/>
-                <a:ea typeface="맑은 고딕 Semilight" panose="020B0502040204020203" pitchFamily="50" charset="-127"/>
+                <a:latin typeface="D2Coding" panose="020B0609020101020101" pitchFamily="49" charset="-127"/>
+                <a:ea typeface="D2Coding" panose="020B0609020101020101" pitchFamily="49" charset="-127"/>
                 <a:cs typeface="맑은 고딕 Semilight" panose="020B0502040204020203" pitchFamily="50" charset="-127"/>
               </a:rPr>
               <a:t>Input(Feature)</a:t>
             </a:r>
             <a:endParaRPr lang="ko-KR" altLang="en-US" dirty="0">
-              <a:latin typeface="맑은 고딕 Semilight" panose="020B0502040204020203" pitchFamily="50" charset="-127"/>
-              <a:ea typeface="맑은 고딕 Semilight" panose="020B0502040204020203" pitchFamily="50" charset="-127"/>
+              <a:latin typeface="D2Coding" panose="020B0609020101020101" pitchFamily="49" charset="-127"/>
+              <a:ea typeface="D2Coding" panose="020B0609020101020101" pitchFamily="49" charset="-127"/>
               <a:cs typeface="맑은 고딕 Semilight" panose="020B0502040204020203" pitchFamily="50" charset="-127"/>
             </a:endParaRPr>
           </a:p>
@@ -11459,8 +11463,8 @@
         </p:nvSpPr>
         <p:spPr>
           <a:xfrm>
-            <a:off x="7105202" y="1650520"/>
-            <a:ext cx="1690527" cy="369332"/>
+            <a:off x="7105202" y="2479195"/>
+            <a:ext cx="1800493" cy="369332"/>
           </a:xfrm>
           <a:prstGeom prst="rect">
             <a:avLst/>
@@ -11475,15 +11479,15 @@
           <a:p>
             <a:r>
               <a:rPr lang="en-US" altLang="ko-KR" dirty="0">
-                <a:latin typeface="맑은 고딕 Semilight" panose="020B0502040204020203" pitchFamily="50" charset="-127"/>
-                <a:ea typeface="맑은 고딕 Semilight" panose="020B0502040204020203" pitchFamily="50" charset="-127"/>
+                <a:latin typeface="D2Coding" panose="020B0609020101020101" pitchFamily="49" charset="-127"/>
+                <a:ea typeface="D2Coding" panose="020B0609020101020101" pitchFamily="49" charset="-127"/>
                 <a:cs typeface="맑은 고딕 Semilight" panose="020B0502040204020203" pitchFamily="50" charset="-127"/>
               </a:rPr>
               <a:t>Output(Target)</a:t>
             </a:r>
             <a:endParaRPr lang="ko-KR" altLang="en-US" dirty="0">
-              <a:latin typeface="맑은 고딕 Semilight" panose="020B0502040204020203" pitchFamily="50" charset="-127"/>
-              <a:ea typeface="맑은 고딕 Semilight" panose="020B0502040204020203" pitchFamily="50" charset="-127"/>
+              <a:latin typeface="D2Coding" panose="020B0609020101020101" pitchFamily="49" charset="-127"/>
+              <a:ea typeface="D2Coding" panose="020B0609020101020101" pitchFamily="49" charset="-127"/>
               <a:cs typeface="맑은 고딕 Semilight" panose="020B0502040204020203" pitchFamily="50" charset="-127"/>
             </a:endParaRPr>
           </a:p>
@@ -11503,7 +11507,7 @@
         </p:nvSpPr>
         <p:spPr>
           <a:xfrm>
-            <a:off x="2057400" y="5465264"/>
+            <a:off x="2057400" y="6236789"/>
             <a:ext cx="1905000" cy="369332"/>
           </a:xfrm>
           <a:prstGeom prst="rect">
@@ -11519,15 +11523,15 @@
           <a:p>
             <a:r>
               <a:rPr lang="en-US" altLang="ko-KR" dirty="0">
-                <a:latin typeface="맑은 고딕 Semilight" panose="020B0502040204020203" pitchFamily="50" charset="-127"/>
-                <a:ea typeface="맑은 고딕 Semilight" panose="020B0502040204020203" pitchFamily="50" charset="-127"/>
+                <a:latin typeface="D2Coding" panose="020B0609020101020101" pitchFamily="49" charset="-127"/>
+                <a:ea typeface="D2Coding" panose="020B0609020101020101" pitchFamily="49" charset="-127"/>
                 <a:cs typeface="맑은 고딕 Semilight" panose="020B0502040204020203" pitchFamily="50" charset="-127"/>
               </a:rPr>
               <a:t>X</a:t>
             </a:r>
             <a:endParaRPr lang="ko-KR" altLang="en-US" dirty="0">
-              <a:latin typeface="맑은 고딕 Semilight" panose="020B0502040204020203" pitchFamily="50" charset="-127"/>
-              <a:ea typeface="맑은 고딕 Semilight" panose="020B0502040204020203" pitchFamily="50" charset="-127"/>
+              <a:latin typeface="D2Coding" panose="020B0609020101020101" pitchFamily="49" charset="-127"/>
+              <a:ea typeface="D2Coding" panose="020B0609020101020101" pitchFamily="49" charset="-127"/>
               <a:cs typeface="맑은 고딕 Semilight" panose="020B0502040204020203" pitchFamily="50" charset="-127"/>
             </a:endParaRPr>
           </a:p>
@@ -11547,8 +11551,8 @@
         </p:nvSpPr>
         <p:spPr>
           <a:xfrm>
-            <a:off x="7264666" y="5408114"/>
-            <a:ext cx="1027845" cy="369332"/>
+            <a:off x="7264666" y="6236789"/>
+            <a:ext cx="1223412" cy="369332"/>
           </a:xfrm>
           <a:prstGeom prst="rect">
             <a:avLst/>
@@ -11563,15 +11567,15 @@
           <a:p>
             <a:r>
               <a:rPr lang="en-US" altLang="ko-KR" dirty="0">
-                <a:latin typeface="맑은 고딕 Semilight" panose="020B0502040204020203" pitchFamily="50" charset="-127"/>
-                <a:ea typeface="맑은 고딕 Semilight" panose="020B0502040204020203" pitchFamily="50" charset="-127"/>
+                <a:latin typeface="D2Coding" panose="020B0609020101020101" pitchFamily="49" charset="-127"/>
+                <a:ea typeface="D2Coding" panose="020B0609020101020101" pitchFamily="49" charset="-127"/>
                 <a:cs typeface="맑은 고딕 Semilight" panose="020B0502040204020203" pitchFamily="50" charset="-127"/>
               </a:rPr>
               <a:t>y=[1,2,3]</a:t>
             </a:r>
             <a:endParaRPr lang="ko-KR" altLang="en-US" dirty="0">
-              <a:latin typeface="맑은 고딕 Semilight" panose="020B0502040204020203" pitchFamily="50" charset="-127"/>
-              <a:ea typeface="맑은 고딕 Semilight" panose="020B0502040204020203" pitchFamily="50" charset="-127"/>
+              <a:latin typeface="D2Coding" panose="020B0609020101020101" pitchFamily="49" charset="-127"/>
+              <a:ea typeface="D2Coding" panose="020B0609020101020101" pitchFamily="49" charset="-127"/>
               <a:cs typeface="맑은 고딕 Semilight" panose="020B0502040204020203" pitchFamily="50" charset="-127"/>
             </a:endParaRPr>
           </a:p>
@@ -11593,7 +11597,7 @@
         </p:nvCxnSpPr>
         <p:spPr>
           <a:xfrm>
-            <a:off x="4966726" y="3794342"/>
+            <a:off x="4966726" y="4623017"/>
             <a:ext cx="1162050" cy="0"/>
           </a:xfrm>
           <a:prstGeom prst="straightConnector1">
@@ -11635,7 +11639,7 @@
         </p:nvSpPr>
         <p:spPr>
           <a:xfrm>
-            <a:off x="5091112" y="3244334"/>
+            <a:off x="5091112" y="4073009"/>
             <a:ext cx="952500" cy="369332"/>
           </a:xfrm>
           <a:prstGeom prst="rect">
@@ -11651,15 +11655,15 @@
           <a:p>
             <a:r>
               <a:rPr lang="en-US" altLang="ko-KR" dirty="0">
-                <a:latin typeface="맑은 고딕 Semilight" panose="020B0502040204020203" pitchFamily="50" charset="-127"/>
-                <a:ea typeface="맑은 고딕 Semilight" panose="020B0502040204020203" pitchFamily="50" charset="-127"/>
+                <a:latin typeface="D2Coding" panose="020B0609020101020101" pitchFamily="49" charset="-127"/>
+                <a:ea typeface="D2Coding" panose="020B0609020101020101" pitchFamily="49" charset="-127"/>
                 <a:cs typeface="맑은 고딕 Semilight" panose="020B0502040204020203" pitchFamily="50" charset="-127"/>
               </a:rPr>
               <a:t>f(X)</a:t>
             </a:r>
             <a:endParaRPr lang="ko-KR" altLang="en-US" dirty="0">
-              <a:latin typeface="맑은 고딕 Semilight" panose="020B0502040204020203" pitchFamily="50" charset="-127"/>
-              <a:ea typeface="맑은 고딕 Semilight" panose="020B0502040204020203" pitchFamily="50" charset="-127"/>
+              <a:latin typeface="D2Coding" panose="020B0609020101020101" pitchFamily="49" charset="-127"/>
+              <a:ea typeface="D2Coding" panose="020B0609020101020101" pitchFamily="49" charset="-127"/>
               <a:cs typeface="맑은 고딕 Semilight" panose="020B0502040204020203" pitchFamily="50" charset="-127"/>
             </a:endParaRPr>
           </a:p>
@@ -11679,7 +11683,7 @@
         </p:nvSpPr>
         <p:spPr>
           <a:xfrm>
-            <a:off x="7467600" y="3543001"/>
+            <a:off x="7467600" y="4371676"/>
             <a:ext cx="1905000" cy="369332"/>
           </a:xfrm>
           <a:prstGeom prst="rect">
@@ -11700,8 +11704,8 @@
                   <a:schemeClr val="bg1"/>
                 </a:solidFill>
                 <a:effectLst/>
-                <a:latin typeface="맑은 고딕 Semilight" panose="020B0502040204020203" pitchFamily="50" charset="-127"/>
-                <a:ea typeface="맑은 고딕 Semilight" panose="020B0502040204020203" pitchFamily="50" charset="-127"/>
+                <a:latin typeface="D2Coding" panose="020B0609020101020101" pitchFamily="49" charset="-127"/>
+                <a:ea typeface="D2Coding" panose="020B0609020101020101" pitchFamily="49" charset="-127"/>
                 <a:cs typeface="맑은 고딕 Semilight" panose="020B0502040204020203" pitchFamily="50" charset="-127"/>
               </a:rPr>
               <a:t>1 (foreground)</a:t>
@@ -11723,7 +11727,7 @@
         </p:nvSpPr>
         <p:spPr>
           <a:xfrm rot="19245108">
-            <a:off x="7909786" y="4467346"/>
+            <a:off x="7909786" y="5296021"/>
             <a:ext cx="1396467" cy="369332"/>
           </a:xfrm>
           <a:prstGeom prst="rect">
@@ -11741,8 +11745,8 @@
             <a:r>
               <a:rPr lang="en-US" altLang="ko-KR" sz="1800" b="0" i="0" dirty="0">
                 <a:effectLst/>
-                <a:latin typeface="맑은 고딕 Semilight" panose="020B0502040204020203" pitchFamily="50" charset="-127"/>
-                <a:ea typeface="맑은 고딕 Semilight" panose="020B0502040204020203" pitchFamily="50" charset="-127"/>
+                <a:latin typeface="D2Coding" panose="020B0609020101020101" pitchFamily="49" charset="-127"/>
+                <a:ea typeface="D2Coding" panose="020B0609020101020101" pitchFamily="49" charset="-127"/>
                 <a:cs typeface="맑은 고딕 Semilight" panose="020B0502040204020203" pitchFamily="50" charset="-127"/>
               </a:rPr>
               <a:t>3 (contour)</a:t>
@@ -11764,7 +11768,7 @@
         </p:nvSpPr>
         <p:spPr>
           <a:xfrm>
-            <a:off x="6473236" y="2117141"/>
+            <a:off x="6473236" y="2945816"/>
             <a:ext cx="1819275" cy="369332"/>
           </a:xfrm>
           <a:prstGeom prst="rect">
@@ -11782,8 +11786,8 @@
             <a:r>
               <a:rPr lang="en-US" altLang="ko-KR" sz="1800" b="0" i="0" dirty="0">
                 <a:effectLst/>
-                <a:latin typeface="맑은 고딕 Semilight" panose="020B0502040204020203" pitchFamily="50" charset="-127"/>
-                <a:ea typeface="맑은 고딕 Semilight" panose="020B0502040204020203" pitchFamily="50" charset="-127"/>
+                <a:latin typeface="D2Coding" panose="020B0609020101020101" pitchFamily="49" charset="-127"/>
+                <a:ea typeface="D2Coding" panose="020B0609020101020101" pitchFamily="49" charset="-127"/>
                 <a:cs typeface="맑은 고딕 Semilight" panose="020B0502040204020203" pitchFamily="50" charset="-127"/>
               </a:rPr>
               <a:t>2 (background)</a:t>
@@ -15389,6 +15393,2087 @@
         <p:cNvPr id="1" name="">
           <a:extLst>
             <a:ext uri="{FF2B5EF4-FFF2-40B4-BE49-F238E27FC236}">
+              <a16:creationId xmlns:a16="http://schemas.microsoft.com/office/drawing/2014/main" id="{69BBE693-3091-B325-C411-E43BD93B159F}"/>
+            </a:ext>
+          </a:extLst>
+        </p:cNvPr>
+        <p:cNvGrpSpPr/>
+        <p:nvPr/>
+      </p:nvGrpSpPr>
+      <p:grpSpPr>
+        <a:xfrm>
+          <a:off x="0" y="0"/>
+          <a:ext cx="0" cy="0"/>
+          <a:chOff x="0" y="0"/>
+          <a:chExt cx="0" cy="0"/>
+        </a:xfrm>
+      </p:grpSpPr>
+      <p:sp>
+        <p:nvSpPr>
+          <p:cNvPr id="3" name="제목 1">
+            <a:extLst>
+              <a:ext uri="{FF2B5EF4-FFF2-40B4-BE49-F238E27FC236}">
+                <a16:creationId xmlns:a16="http://schemas.microsoft.com/office/drawing/2014/main" id="{1F55654F-E98B-9D3E-A328-C8EC2E30DDE1}"/>
+              </a:ext>
+            </a:extLst>
+          </p:cNvPr>
+          <p:cNvSpPr txBox="1">
+            <a:spLocks/>
+          </p:cNvSpPr>
+          <p:nvPr/>
+        </p:nvSpPr>
+        <p:spPr>
+          <a:xfrm>
+            <a:off x="475645" y="481983"/>
+            <a:ext cx="10353762" cy="766439"/>
+          </a:xfrm>
+          <a:prstGeom prst="rect">
+            <a:avLst/>
+          </a:prstGeom>
+        </p:spPr>
+        <p:txBody>
+          <a:bodyPr vert="horz" lIns="91440" tIns="45720" rIns="91440" bIns="45720" rtlCol="0" anchor="ctr">
+            <a:normAutofit/>
+          </a:bodyPr>
+          <a:lstStyle>
+            <a:lvl1pPr algn="ctr" defTabSz="914400" rtl="0" eaLnBrk="1" latinLnBrk="1" hangingPunct="1">
+              <a:lnSpc>
+                <a:spcPct val="90000"/>
+              </a:lnSpc>
+              <a:spcBef>
+                <a:spcPct val="0"/>
+              </a:spcBef>
+              <a:buNone/>
+              <a:defRPr sz="3200" kern="1200" cap="all" baseline="0">
+                <a:solidFill>
+                  <a:schemeClr val="tx1"/>
+                </a:solidFill>
+                <a:effectLst/>
+                <a:latin typeface="Batang" panose="02030600000101010101" pitchFamily="18" charset="-127"/>
+                <a:ea typeface="Batang" panose="02030600000101010101" pitchFamily="18" charset="-127"/>
+                <a:cs typeface="+mj-cs"/>
+              </a:defRPr>
+            </a:lvl1pPr>
+          </a:lstStyle>
+          <a:p>
+            <a:pPr algn="l"/>
+            <a:r>
+              <a:rPr lang="en-US" altLang="ko-KR" b="1" cap="none" dirty="0"/>
+              <a:t>Convnet</a:t>
+            </a:r>
+          </a:p>
+        </p:txBody>
+      </p:sp>
+      <p:sp>
+        <p:nvSpPr>
+          <p:cNvPr id="11" name="AutoShape 2" descr="라이트박스에 표시된 선택된 이미지">
+            <a:extLst>
+              <a:ext uri="{FF2B5EF4-FFF2-40B4-BE49-F238E27FC236}">
+                <a16:creationId xmlns:a16="http://schemas.microsoft.com/office/drawing/2014/main" id="{9D50F0EB-5CEF-1E67-E58B-637B1054BC3F}"/>
+              </a:ext>
+            </a:extLst>
+          </p:cNvPr>
+          <p:cNvSpPr>
+            <a:spLocks noChangeAspect="1" noChangeArrowheads="1"/>
+          </p:cNvSpPr>
+          <p:nvPr/>
+        </p:nvSpPr>
+        <p:spPr bwMode="auto">
+          <a:xfrm>
+            <a:off x="5905500" y="3057525"/>
+            <a:ext cx="304800" cy="304800"/>
+          </a:xfrm>
+          <a:prstGeom prst="rect">
+            <a:avLst/>
+          </a:prstGeom>
+          <a:noFill/>
+          <a:extLst>
+            <a:ext uri="{909E8E84-426E-40DD-AFC4-6F175D3DCCD1}">
+              <a14:hiddenFill xmlns:a14="http://schemas.microsoft.com/office/drawing/2010/main">
+                <a:solidFill>
+                  <a:srgbClr val="FFFFFF"/>
+                </a:solidFill>
+              </a14:hiddenFill>
+            </a:ext>
+          </a:extLst>
+        </p:spPr>
+        <p:txBody>
+          <a:bodyPr vert="horz" wrap="square" lIns="91440" tIns="45720" rIns="91440" bIns="45720" numCol="1" anchor="t" anchorCtr="0" compatLnSpc="1">
+            <a:prstTxWarp prst="textNoShape">
+              <a:avLst/>
+            </a:prstTxWarp>
+          </a:bodyPr>
+          <a:lstStyle/>
+          <a:p>
+            <a:endParaRPr lang="ko-KR" altLang="en-US"/>
+          </a:p>
+        </p:txBody>
+      </p:sp>
+      <p:sp>
+        <p:nvSpPr>
+          <p:cNvPr id="2" name="슬라이드 번호 개체 틀 3">
+            <a:extLst>
+              <a:ext uri="{FF2B5EF4-FFF2-40B4-BE49-F238E27FC236}">
+                <a16:creationId xmlns:a16="http://schemas.microsoft.com/office/drawing/2014/main" id="{5433696F-4C73-8636-CC93-30330B427660}"/>
+              </a:ext>
+            </a:extLst>
+          </p:cNvPr>
+          <p:cNvSpPr txBox="1">
+            <a:spLocks/>
+          </p:cNvSpPr>
+          <p:nvPr/>
+        </p:nvSpPr>
+        <p:spPr>
+          <a:xfrm>
+            <a:off x="11180761" y="299420"/>
+            <a:ext cx="753545" cy="365125"/>
+          </a:xfrm>
+          <a:prstGeom prst="rect">
+            <a:avLst/>
+          </a:prstGeom>
+        </p:spPr>
+        <p:txBody>
+          <a:bodyPr vert="horz" lIns="91440" tIns="45720" rIns="91440" bIns="45720" rtlCol="0" anchor="ctr"/>
+          <a:lstStyle>
+            <a:defPPr rtl="0">
+              <a:defRPr lang="ko-KR"/>
+            </a:defPPr>
+            <a:lvl1pPr marL="0" algn="r" defTabSz="914400" rtl="0" eaLnBrk="1" latinLnBrk="0" hangingPunct="1">
+              <a:defRPr sz="1200" kern="1200" baseline="0">
+                <a:solidFill>
+                  <a:schemeClr val="tx1">
+                    <a:lumMod val="65000"/>
+                    <a:lumOff val="35000"/>
+                  </a:schemeClr>
+                </a:solidFill>
+                <a:latin typeface="맑은 고딕" panose="020B0503020000020004" pitchFamily="50" charset="-127"/>
+                <a:ea typeface="맑은 고딕" panose="020B0503020000020004" pitchFamily="50" charset="-127"/>
+                <a:cs typeface="+mn-cs"/>
+              </a:defRPr>
+            </a:lvl1pPr>
+            <a:lvl2pPr marL="457200" algn="l" defTabSz="914400" rtl="0" eaLnBrk="1" latinLnBrk="0" hangingPunct="1">
+              <a:defRPr sz="1800" kern="1200">
+                <a:solidFill>
+                  <a:schemeClr val="tx1"/>
+                </a:solidFill>
+                <a:latin typeface="+mn-lt"/>
+                <a:ea typeface="+mn-ea"/>
+                <a:cs typeface="+mn-cs"/>
+              </a:defRPr>
+            </a:lvl2pPr>
+            <a:lvl3pPr marL="914400" algn="l" defTabSz="914400" rtl="0" eaLnBrk="1" latinLnBrk="0" hangingPunct="1">
+              <a:defRPr sz="1800" kern="1200">
+                <a:solidFill>
+                  <a:schemeClr val="tx1"/>
+                </a:solidFill>
+                <a:latin typeface="+mn-lt"/>
+                <a:ea typeface="+mn-ea"/>
+                <a:cs typeface="+mn-cs"/>
+              </a:defRPr>
+            </a:lvl3pPr>
+            <a:lvl4pPr marL="1371600" algn="l" defTabSz="914400" rtl="0" eaLnBrk="1" latinLnBrk="0" hangingPunct="1">
+              <a:defRPr sz="1800" kern="1200">
+                <a:solidFill>
+                  <a:schemeClr val="tx1"/>
+                </a:solidFill>
+                <a:latin typeface="+mn-lt"/>
+                <a:ea typeface="+mn-ea"/>
+                <a:cs typeface="+mn-cs"/>
+              </a:defRPr>
+            </a:lvl4pPr>
+            <a:lvl5pPr marL="1828800" algn="l" defTabSz="914400" rtl="0" eaLnBrk="1" latinLnBrk="0" hangingPunct="1">
+              <a:defRPr sz="1800" kern="1200">
+                <a:solidFill>
+                  <a:schemeClr val="tx1"/>
+                </a:solidFill>
+                <a:latin typeface="+mn-lt"/>
+                <a:ea typeface="+mn-ea"/>
+                <a:cs typeface="+mn-cs"/>
+              </a:defRPr>
+            </a:lvl5pPr>
+            <a:lvl6pPr marL="2286000" algn="l" defTabSz="914400" rtl="0" eaLnBrk="1" latinLnBrk="0" hangingPunct="1">
+              <a:defRPr sz="1800" kern="1200">
+                <a:solidFill>
+                  <a:schemeClr val="tx1"/>
+                </a:solidFill>
+                <a:latin typeface="+mn-lt"/>
+                <a:ea typeface="+mn-ea"/>
+                <a:cs typeface="+mn-cs"/>
+              </a:defRPr>
+            </a:lvl6pPr>
+            <a:lvl7pPr marL="2743200" algn="l" defTabSz="914400" rtl="0" eaLnBrk="1" latinLnBrk="0" hangingPunct="1">
+              <a:defRPr sz="1800" kern="1200">
+                <a:solidFill>
+                  <a:schemeClr val="tx1"/>
+                </a:solidFill>
+                <a:latin typeface="+mn-lt"/>
+                <a:ea typeface="+mn-ea"/>
+                <a:cs typeface="+mn-cs"/>
+              </a:defRPr>
+            </a:lvl7pPr>
+            <a:lvl8pPr marL="3200400" algn="l" defTabSz="914400" rtl="0" eaLnBrk="1" latinLnBrk="0" hangingPunct="1">
+              <a:defRPr sz="1800" kern="1200">
+                <a:solidFill>
+                  <a:schemeClr val="tx1"/>
+                </a:solidFill>
+                <a:latin typeface="+mn-lt"/>
+                <a:ea typeface="+mn-ea"/>
+                <a:cs typeface="+mn-cs"/>
+              </a:defRPr>
+            </a:lvl8pPr>
+            <a:lvl9pPr marL="3657600" algn="l" defTabSz="914400" rtl="0" eaLnBrk="1" latinLnBrk="0" hangingPunct="1">
+              <a:defRPr sz="1800" kern="1200">
+                <a:solidFill>
+                  <a:schemeClr val="tx1"/>
+                </a:solidFill>
+                <a:latin typeface="+mn-lt"/>
+                <a:ea typeface="+mn-ea"/>
+                <a:cs typeface="+mn-cs"/>
+              </a:defRPr>
+            </a:lvl9pPr>
+          </a:lstStyle>
+          <a:p>
+            <a:fld id="{D57F1E4F-1CFF-5643-939E-217C01CDF565}" type="slidenum">
+              <a:rPr lang="en-US" b="1" smtClean="0">
+                <a:latin typeface="Segoe UI Emoji" panose="020B0502040204020203" pitchFamily="34" charset="0"/>
+                <a:ea typeface="Segoe UI Emoji" panose="020B0502040204020203" pitchFamily="34" charset="0"/>
+              </a:rPr>
+              <a:pPr/>
+              <a:t>26</a:t>
+            </a:fld>
+            <a:endParaRPr lang="en-US" b="1" dirty="0">
+              <a:latin typeface="Segoe UI Emoji" panose="020B0502040204020203" pitchFamily="34" charset="0"/>
+              <a:ea typeface="Segoe UI Emoji" panose="020B0502040204020203" pitchFamily="34" charset="0"/>
+            </a:endParaRPr>
+          </a:p>
+        </p:txBody>
+      </p:sp>
+      <p:sp>
+        <p:nvSpPr>
+          <p:cNvPr id="10" name="TextBox 9">
+            <a:extLst>
+              <a:ext uri="{FF2B5EF4-FFF2-40B4-BE49-F238E27FC236}">
+                <a16:creationId xmlns:a16="http://schemas.microsoft.com/office/drawing/2014/main" id="{61FFA907-C8AF-C701-6550-AB37A7848C48}"/>
+              </a:ext>
+            </a:extLst>
+          </p:cNvPr>
+          <p:cNvSpPr txBox="1"/>
+          <p:nvPr/>
+        </p:nvSpPr>
+        <p:spPr>
+          <a:xfrm>
+            <a:off x="514350" y="1238856"/>
+            <a:ext cx="6096000" cy="315471"/>
+          </a:xfrm>
+          <a:prstGeom prst="rect">
+            <a:avLst/>
+          </a:prstGeom>
+          <a:noFill/>
+        </p:spPr>
+        <p:txBody>
+          <a:bodyPr wrap="square">
+            <a:spAutoFit/>
+          </a:bodyPr>
+          <a:lstStyle/>
+          <a:p>
+            <a:pPr>
+              <a:lnSpc>
+                <a:spcPts val="1575"/>
+              </a:lnSpc>
+              <a:buNone/>
+            </a:pPr>
+            <a:r>
+              <a:rPr lang="en-US" altLang="ko-KR" b="0" dirty="0" err="1">
+                <a:effectLst/>
+                <a:latin typeface="D2Coding" panose="020B0609020101020101" pitchFamily="49" charset="-127"/>
+                <a:ea typeface="D2Coding" panose="020B0609020101020101" pitchFamily="49" charset="-127"/>
+              </a:rPr>
+              <a:t>cnn_model.summary</a:t>
+            </a:r>
+            <a:r>
+              <a:rPr lang="en-US" altLang="ko-KR" b="0" dirty="0">
+                <a:effectLst/>
+                <a:latin typeface="D2Coding" panose="020B0609020101020101" pitchFamily="49" charset="-127"/>
+                <a:ea typeface="D2Coding" panose="020B0609020101020101" pitchFamily="49" charset="-127"/>
+              </a:rPr>
+              <a:t>()</a:t>
+            </a:r>
+          </a:p>
+        </p:txBody>
+      </p:sp>
+      <p:pic>
+        <p:nvPicPr>
+          <p:cNvPr id="12" name="그림 11">
+            <a:extLst>
+              <a:ext uri="{FF2B5EF4-FFF2-40B4-BE49-F238E27FC236}">
+                <a16:creationId xmlns:a16="http://schemas.microsoft.com/office/drawing/2014/main" id="{7038B90C-C3E9-2D98-4F9B-EB0F4FCA1EAD}"/>
+              </a:ext>
+            </a:extLst>
+          </p:cNvPr>
+          <p:cNvPicPr>
+            <a:picLocks noChangeAspect="1"/>
+          </p:cNvPicPr>
+          <p:nvPr/>
+        </p:nvPicPr>
+        <p:blipFill>
+          <a:blip r:embed="rId2"/>
+          <a:stretch>
+            <a:fillRect/>
+          </a:stretch>
+        </p:blipFill>
+        <p:spPr>
+          <a:xfrm>
+            <a:off x="605522" y="1554327"/>
+            <a:ext cx="4918978" cy="3335928"/>
+          </a:xfrm>
+          <a:prstGeom prst="rect">
+            <a:avLst/>
+          </a:prstGeom>
+        </p:spPr>
+      </p:pic>
+      <p:graphicFrame>
+        <p:nvGraphicFramePr>
+          <p:cNvPr id="13" name="표 12">
+            <a:extLst>
+              <a:ext uri="{FF2B5EF4-FFF2-40B4-BE49-F238E27FC236}">
+                <a16:creationId xmlns:a16="http://schemas.microsoft.com/office/drawing/2014/main" id="{81C04C79-4BD9-BEDC-C377-57AB55250360}"/>
+              </a:ext>
+            </a:extLst>
+          </p:cNvPr>
+          <p:cNvGraphicFramePr>
+            <a:graphicFrameLocks noGrp="1"/>
+          </p:cNvGraphicFramePr>
+          <p:nvPr>
+            <p:extLst>
+              <p:ext uri="{D42A27DB-BD31-4B8C-83A1-F6EECF244321}">
+                <p14:modId xmlns:p14="http://schemas.microsoft.com/office/powerpoint/2010/main" val="369498998"/>
+              </p:ext>
+            </p:extLst>
+          </p:nvPr>
+        </p:nvGraphicFramePr>
+        <p:xfrm>
+          <a:off x="5615672" y="1880288"/>
+          <a:ext cx="6232667" cy="2772992"/>
+        </p:xfrm>
+        <a:graphic>
+          <a:graphicData uri="http://schemas.openxmlformats.org/drawingml/2006/table">
+            <a:tbl>
+              <a:tblPr>
+                <a:tableStyleId>{775DCB02-9BB8-47FD-8907-85C794F793BA}</a:tableStyleId>
+              </a:tblPr>
+              <a:tblGrid>
+                <a:gridCol w="1114935">
+                  <a:extLst>
+                    <a:ext uri="{9D8B030D-6E8A-4147-A177-3AD203B41FA5}">
+                      <a16:colId xmlns:a16="http://schemas.microsoft.com/office/drawing/2014/main" val="2755321600"/>
+                    </a:ext>
+                  </a:extLst>
+                </a:gridCol>
+                <a:gridCol w="596975">
+                  <a:extLst>
+                    <a:ext uri="{9D8B030D-6E8A-4147-A177-3AD203B41FA5}">
+                      <a16:colId xmlns:a16="http://schemas.microsoft.com/office/drawing/2014/main" val="2295146599"/>
+                    </a:ext>
+                  </a:extLst>
+                </a:gridCol>
+                <a:gridCol w="634327">
+                  <a:extLst>
+                    <a:ext uri="{9D8B030D-6E8A-4147-A177-3AD203B41FA5}">
+                      <a16:colId xmlns:a16="http://schemas.microsoft.com/office/drawing/2014/main" val="2307758495"/>
+                    </a:ext>
+                  </a:extLst>
+                </a:gridCol>
+                <a:gridCol w="314542">
+                  <a:extLst>
+                    <a:ext uri="{9D8B030D-6E8A-4147-A177-3AD203B41FA5}">
+                      <a16:colId xmlns:a16="http://schemas.microsoft.com/office/drawing/2014/main" val="2917777080"/>
+                    </a:ext>
+                  </a:extLst>
+                </a:gridCol>
+                <a:gridCol w="2759087">
+                  <a:extLst>
+                    <a:ext uri="{9D8B030D-6E8A-4147-A177-3AD203B41FA5}">
+                      <a16:colId xmlns:a16="http://schemas.microsoft.com/office/drawing/2014/main" val="2995285287"/>
+                    </a:ext>
+                  </a:extLst>
+                </a:gridCol>
+                <a:gridCol w="812801">
+                  <a:extLst>
+                    <a:ext uri="{9D8B030D-6E8A-4147-A177-3AD203B41FA5}">
+                      <a16:colId xmlns:a16="http://schemas.microsoft.com/office/drawing/2014/main" val="2306271437"/>
+                    </a:ext>
+                  </a:extLst>
+                </a:gridCol>
+              </a:tblGrid>
+              <a:tr h="226704">
+                <a:tc>
+                  <a:txBody>
+                    <a:bodyPr/>
+                    <a:lstStyle/>
+                    <a:p>
+                      <a:pPr rtl="0" fontAlgn="b">
+                        <a:buNone/>
+                      </a:pPr>
+                      <a:r>
+                        <a:rPr lang="ko-KR" altLang="en-US" sz="1000" dirty="0">
+                          <a:effectLst/>
+                        </a:rPr>
+                        <a:t>레이어 </a:t>
+                      </a:r>
+                      <a:r>
+                        <a:rPr lang="en-US" altLang="ko-KR" sz="1000" dirty="0">
+                          <a:effectLst/>
+                        </a:rPr>
+                        <a:t>(</a:t>
+                      </a:r>
+                      <a:r>
+                        <a:rPr lang="en-US" sz="1000" dirty="0">
+                          <a:effectLst/>
+                        </a:rPr>
+                        <a:t>Layer)</a:t>
+                      </a:r>
+                    </a:p>
+                  </a:txBody>
+                  <a:tcPr marL="12228" marR="12228" marT="8152" marB="8152" anchor="b">
+                    <a:lnL w="12700" cap="flat" cmpd="sng" algn="ctr">
+                      <a:solidFill>
+                        <a:schemeClr val="tx1"/>
+                      </a:solidFill>
+                      <a:prstDash val="solid"/>
+                      <a:round/>
+                      <a:headEnd type="none" w="med" len="med"/>
+                      <a:tailEnd type="none" w="med" len="med"/>
+                    </a:lnL>
+                    <a:lnT w="12700" cap="flat" cmpd="sng" algn="ctr">
+                      <a:solidFill>
+                        <a:schemeClr val="tx1"/>
+                      </a:solidFill>
+                      <a:prstDash val="solid"/>
+                      <a:round/>
+                      <a:headEnd type="none" w="med" len="med"/>
+                      <a:tailEnd type="none" w="med" len="med"/>
+                    </a:lnT>
+                    <a:lnB w="12700" cap="flat" cmpd="sng" algn="ctr">
+                      <a:solidFill>
+                        <a:schemeClr val="tx1"/>
+                      </a:solidFill>
+                      <a:prstDash val="solid"/>
+                      <a:round/>
+                      <a:headEnd type="none" w="med" len="med"/>
+                      <a:tailEnd type="none" w="med" len="med"/>
+                    </a:lnB>
+                  </a:tcPr>
+                </a:tc>
+                <a:tc>
+                  <a:txBody>
+                    <a:bodyPr/>
+                    <a:lstStyle/>
+                    <a:p>
+                      <a:pPr rtl="0" fontAlgn="b">
+                        <a:buNone/>
+                      </a:pPr>
+                      <a:r>
+                        <a:rPr lang="ko-KR" altLang="en-US" sz="1000" dirty="0">
+                          <a:effectLst/>
+                        </a:rPr>
+                        <a:t>입력 채널</a:t>
+                      </a:r>
+                    </a:p>
+                  </a:txBody>
+                  <a:tcPr marL="12228" marR="12228" marT="8152" marB="8152" anchor="b">
+                    <a:lnT w="12700" cap="flat" cmpd="sng" algn="ctr">
+                      <a:solidFill>
+                        <a:schemeClr val="tx1"/>
+                      </a:solidFill>
+                      <a:prstDash val="solid"/>
+                      <a:round/>
+                      <a:headEnd type="none" w="med" len="med"/>
+                      <a:tailEnd type="none" w="med" len="med"/>
+                    </a:lnT>
+                    <a:lnB w="12700" cap="flat" cmpd="sng" algn="ctr">
+                      <a:solidFill>
+                        <a:schemeClr val="tx1"/>
+                      </a:solidFill>
+                      <a:prstDash val="solid"/>
+                      <a:round/>
+                      <a:headEnd type="none" w="med" len="med"/>
+                      <a:tailEnd type="none" w="med" len="med"/>
+                    </a:lnB>
+                  </a:tcPr>
+                </a:tc>
+                <a:tc>
+                  <a:txBody>
+                    <a:bodyPr/>
+                    <a:lstStyle/>
+                    <a:p>
+                      <a:pPr rtl="0" fontAlgn="b">
+                        <a:buNone/>
+                      </a:pPr>
+                      <a:r>
+                        <a:rPr lang="ko-KR" altLang="en-US" sz="1000" dirty="0">
+                          <a:effectLst/>
+                        </a:rPr>
+                        <a:t>커널 크기</a:t>
+                      </a:r>
+                    </a:p>
+                  </a:txBody>
+                  <a:tcPr marL="12228" marR="12228" marT="8152" marB="8152" anchor="b">
+                    <a:lnT w="12700" cap="flat" cmpd="sng" algn="ctr">
+                      <a:solidFill>
+                        <a:schemeClr val="tx1"/>
+                      </a:solidFill>
+                      <a:prstDash val="solid"/>
+                      <a:round/>
+                      <a:headEnd type="none" w="med" len="med"/>
+                      <a:tailEnd type="none" w="med" len="med"/>
+                    </a:lnT>
+                    <a:lnB w="12700" cap="flat" cmpd="sng" algn="ctr">
+                      <a:solidFill>
+                        <a:schemeClr val="tx1"/>
+                      </a:solidFill>
+                      <a:prstDash val="solid"/>
+                      <a:round/>
+                      <a:headEnd type="none" w="med" len="med"/>
+                      <a:tailEnd type="none" w="med" len="med"/>
+                    </a:lnB>
+                  </a:tcPr>
+                </a:tc>
+                <a:tc>
+                  <a:txBody>
+                    <a:bodyPr/>
+                    <a:lstStyle/>
+                    <a:p>
+                      <a:pPr rtl="0" fontAlgn="b">
+                        <a:buNone/>
+                      </a:pPr>
+                      <a:r>
+                        <a:rPr lang="ko-KR" altLang="en-US" sz="1000" dirty="0">
+                          <a:effectLst/>
+                        </a:rPr>
+                        <a:t>필터 </a:t>
+                      </a:r>
+                    </a:p>
+                  </a:txBody>
+                  <a:tcPr marL="12228" marR="12228" marT="8152" marB="8152" anchor="b">
+                    <a:lnT w="12700" cap="flat" cmpd="sng" algn="ctr">
+                      <a:solidFill>
+                        <a:schemeClr val="tx1"/>
+                      </a:solidFill>
+                      <a:prstDash val="solid"/>
+                      <a:round/>
+                      <a:headEnd type="none" w="med" len="med"/>
+                      <a:tailEnd type="none" w="med" len="med"/>
+                    </a:lnT>
+                    <a:lnB w="12700" cap="flat" cmpd="sng" algn="ctr">
+                      <a:solidFill>
+                        <a:schemeClr val="tx1"/>
+                      </a:solidFill>
+                      <a:prstDash val="solid"/>
+                      <a:round/>
+                      <a:headEnd type="none" w="med" len="med"/>
+                      <a:tailEnd type="none" w="med" len="med"/>
+                    </a:lnB>
+                  </a:tcPr>
+                </a:tc>
+                <a:tc>
+                  <a:txBody>
+                    <a:bodyPr/>
+                    <a:lstStyle/>
+                    <a:p>
+                      <a:pPr rtl="0" fontAlgn="b">
+                        <a:buNone/>
+                      </a:pPr>
+                      <a:r>
+                        <a:rPr lang="ko-KR" altLang="en-US" sz="1000" dirty="0">
+                          <a:effectLst/>
+                        </a:rPr>
+                        <a:t>상세 계산 수식</a:t>
+                      </a:r>
+                    </a:p>
+                  </a:txBody>
+                  <a:tcPr marL="12228" marR="12228" marT="8152" marB="8152" anchor="b">
+                    <a:lnT w="12700" cap="flat" cmpd="sng" algn="ctr">
+                      <a:solidFill>
+                        <a:schemeClr val="tx1"/>
+                      </a:solidFill>
+                      <a:prstDash val="solid"/>
+                      <a:round/>
+                      <a:headEnd type="none" w="med" len="med"/>
+                      <a:tailEnd type="none" w="med" len="med"/>
+                    </a:lnT>
+                    <a:lnB w="12700" cap="flat" cmpd="sng" algn="ctr">
+                      <a:solidFill>
+                        <a:schemeClr val="tx1"/>
+                      </a:solidFill>
+                      <a:prstDash val="solid"/>
+                      <a:round/>
+                      <a:headEnd type="none" w="med" len="med"/>
+                      <a:tailEnd type="none" w="med" len="med"/>
+                    </a:lnB>
+                  </a:tcPr>
+                </a:tc>
+                <a:tc>
+                  <a:txBody>
+                    <a:bodyPr/>
+                    <a:lstStyle/>
+                    <a:p>
+                      <a:pPr rtl="0" fontAlgn="b">
+                        <a:buNone/>
+                      </a:pPr>
+                      <a:r>
+                        <a:rPr lang="ko-KR" altLang="en-US" sz="1000" dirty="0">
+                          <a:effectLst/>
+                        </a:rPr>
+                        <a:t>파라미터 개수</a:t>
+                      </a:r>
+                    </a:p>
+                  </a:txBody>
+                  <a:tcPr marL="0" marR="0" marT="8152" marB="8152" anchor="b">
+                    <a:lnR w="12700" cap="flat" cmpd="sng" algn="ctr">
+                      <a:solidFill>
+                        <a:schemeClr val="tx1"/>
+                      </a:solidFill>
+                      <a:prstDash val="solid"/>
+                      <a:round/>
+                      <a:headEnd type="none" w="med" len="med"/>
+                      <a:tailEnd type="none" w="med" len="med"/>
+                    </a:lnR>
+                    <a:lnT w="12700" cap="flat" cmpd="sng" algn="ctr">
+                      <a:solidFill>
+                        <a:schemeClr val="tx1"/>
+                      </a:solidFill>
+                      <a:prstDash val="solid"/>
+                      <a:round/>
+                      <a:headEnd type="none" w="med" len="med"/>
+                      <a:tailEnd type="none" w="med" len="med"/>
+                    </a:lnT>
+                    <a:lnB w="12700" cap="flat" cmpd="sng" algn="ctr">
+                      <a:solidFill>
+                        <a:schemeClr val="tx1"/>
+                      </a:solidFill>
+                      <a:prstDash val="solid"/>
+                      <a:round/>
+                      <a:headEnd type="none" w="med" len="med"/>
+                      <a:tailEnd type="none" w="med" len="med"/>
+                    </a:lnB>
+                  </a:tcPr>
+                </a:tc>
+                <a:extLst>
+                  <a:ext uri="{0D108BD9-81ED-4DB2-BD59-A6C34878D82A}">
+                    <a16:rowId xmlns:a16="http://schemas.microsoft.com/office/drawing/2014/main" val="939356482"/>
+                  </a:ext>
+                </a:extLst>
+              </a:tr>
+              <a:tr h="280728">
+                <a:tc>
+                  <a:txBody>
+                    <a:bodyPr/>
+                    <a:lstStyle/>
+                    <a:p>
+                      <a:pPr rtl="0" fontAlgn="b">
+                        <a:buNone/>
+                      </a:pPr>
+                      <a:r>
+                        <a:rPr lang="en-US" sz="1000" dirty="0">
+                          <a:effectLst/>
+                        </a:rPr>
+                        <a:t>Conv2D_1</a:t>
+                      </a:r>
+                    </a:p>
+                  </a:txBody>
+                  <a:tcPr marL="12228" marR="12228" marT="8152" marB="8152" anchor="b">
+                    <a:lnL w="12700" cap="flat" cmpd="sng" algn="ctr">
+                      <a:solidFill>
+                        <a:schemeClr val="tx1"/>
+                      </a:solidFill>
+                      <a:prstDash val="solid"/>
+                      <a:round/>
+                      <a:headEnd type="none" w="med" len="med"/>
+                      <a:tailEnd type="none" w="med" len="med"/>
+                    </a:lnL>
+                    <a:lnT w="12700" cap="flat" cmpd="sng" algn="ctr">
+                      <a:solidFill>
+                        <a:schemeClr val="tx1"/>
+                      </a:solidFill>
+                      <a:prstDash val="solid"/>
+                      <a:round/>
+                      <a:headEnd type="none" w="med" len="med"/>
+                      <a:tailEnd type="none" w="med" len="med"/>
+                    </a:lnT>
+                  </a:tcPr>
+                </a:tc>
+                <a:tc>
+                  <a:txBody>
+                    <a:bodyPr/>
+                    <a:lstStyle/>
+                    <a:p>
+                      <a:pPr algn="r" rtl="0" fontAlgn="b">
+                        <a:buNone/>
+                      </a:pPr>
+                      <a:r>
+                        <a:rPr lang="en-US" altLang="ko-KR" sz="1000">
+                          <a:effectLst/>
+                        </a:rPr>
+                        <a:t>1</a:t>
+                      </a:r>
+                    </a:p>
+                  </a:txBody>
+                  <a:tcPr marL="12228" marR="12228" marT="8152" marB="8152" anchor="b">
+                    <a:lnT w="12700" cap="flat" cmpd="sng" algn="ctr">
+                      <a:solidFill>
+                        <a:schemeClr val="tx1"/>
+                      </a:solidFill>
+                      <a:prstDash val="solid"/>
+                      <a:round/>
+                      <a:headEnd type="none" w="med" len="med"/>
+                      <a:tailEnd type="none" w="med" len="med"/>
+                    </a:lnT>
+                  </a:tcPr>
+                </a:tc>
+                <a:tc>
+                  <a:txBody>
+                    <a:bodyPr/>
+                    <a:lstStyle/>
+                    <a:p>
+                      <a:pPr rtl="0" fontAlgn="b">
+                        <a:buNone/>
+                      </a:pPr>
+                      <a:r>
+                        <a:rPr lang="en-US" altLang="ko-KR" sz="1000">
+                          <a:effectLst/>
+                        </a:rPr>
+                        <a:t>5×5</a:t>
+                      </a:r>
+                    </a:p>
+                  </a:txBody>
+                  <a:tcPr marL="12228" marR="12228" marT="8152" marB="8152" anchor="b">
+                    <a:lnT w="12700" cap="flat" cmpd="sng" algn="ctr">
+                      <a:solidFill>
+                        <a:schemeClr val="tx1"/>
+                      </a:solidFill>
+                      <a:prstDash val="solid"/>
+                      <a:round/>
+                      <a:headEnd type="none" w="med" len="med"/>
+                      <a:tailEnd type="none" w="med" len="med"/>
+                    </a:lnT>
+                  </a:tcPr>
+                </a:tc>
+                <a:tc>
+                  <a:txBody>
+                    <a:bodyPr/>
+                    <a:lstStyle/>
+                    <a:p>
+                      <a:pPr algn="r" rtl="0" fontAlgn="b">
+                        <a:buNone/>
+                      </a:pPr>
+                      <a:r>
+                        <a:rPr lang="en-US" altLang="ko-KR" sz="1000">
+                          <a:effectLst/>
+                        </a:rPr>
+                        <a:t>6</a:t>
+                      </a:r>
+                    </a:p>
+                  </a:txBody>
+                  <a:tcPr marL="12228" marR="12228" marT="8152" marB="8152" anchor="b">
+                    <a:lnT w="12700" cap="flat" cmpd="sng" algn="ctr">
+                      <a:solidFill>
+                        <a:schemeClr val="tx1"/>
+                      </a:solidFill>
+                      <a:prstDash val="solid"/>
+                      <a:round/>
+                      <a:headEnd type="none" w="med" len="med"/>
+                      <a:tailEnd type="none" w="med" len="med"/>
+                    </a:lnT>
+                  </a:tcPr>
+                </a:tc>
+                <a:tc>
+                  <a:txBody>
+                    <a:bodyPr/>
+                    <a:lstStyle/>
+                    <a:p>
+                      <a:pPr rtl="0" fontAlgn="b">
+                        <a:buNone/>
+                      </a:pPr>
+                      <a:r>
+                        <a:rPr lang="en-US" altLang="ko-KR" sz="1000">
+                          <a:effectLst/>
+                        </a:rPr>
+                        <a:t>{(5×5×1)+1}×6=(25+1)×6=26×6</a:t>
+                      </a:r>
+                    </a:p>
+                  </a:txBody>
+                  <a:tcPr marL="12228" marR="12228" marT="8152" marB="8152" anchor="b">
+                    <a:lnT w="12700" cap="flat" cmpd="sng" algn="ctr">
+                      <a:solidFill>
+                        <a:schemeClr val="tx1"/>
+                      </a:solidFill>
+                      <a:prstDash val="solid"/>
+                      <a:round/>
+                      <a:headEnd type="none" w="med" len="med"/>
+                      <a:tailEnd type="none" w="med" len="med"/>
+                    </a:lnT>
+                  </a:tcPr>
+                </a:tc>
+                <a:tc>
+                  <a:txBody>
+                    <a:bodyPr/>
+                    <a:lstStyle/>
+                    <a:p>
+                      <a:pPr algn="r" rtl="0" fontAlgn="b">
+                        <a:buNone/>
+                      </a:pPr>
+                      <a:r>
+                        <a:rPr lang="en-US" altLang="ko-KR" sz="1000">
+                          <a:effectLst/>
+                        </a:rPr>
+                        <a:t>156</a:t>
+                      </a:r>
+                    </a:p>
+                  </a:txBody>
+                  <a:tcPr marL="12228" marR="12228" marT="8152" marB="8152" anchor="b">
+                    <a:lnR w="12700" cap="flat" cmpd="sng" algn="ctr">
+                      <a:solidFill>
+                        <a:schemeClr val="tx1"/>
+                      </a:solidFill>
+                      <a:prstDash val="solid"/>
+                      <a:round/>
+                      <a:headEnd type="none" w="med" len="med"/>
+                      <a:tailEnd type="none" w="med" len="med"/>
+                    </a:lnR>
+                    <a:lnT w="12700" cap="flat" cmpd="sng" algn="ctr">
+                      <a:solidFill>
+                        <a:schemeClr val="tx1"/>
+                      </a:solidFill>
+                      <a:prstDash val="solid"/>
+                      <a:round/>
+                      <a:headEnd type="none" w="med" len="med"/>
+                      <a:tailEnd type="none" w="med" len="med"/>
+                    </a:lnT>
+                  </a:tcPr>
+                </a:tc>
+                <a:extLst>
+                  <a:ext uri="{0D108BD9-81ED-4DB2-BD59-A6C34878D82A}">
+                    <a16:rowId xmlns:a16="http://schemas.microsoft.com/office/drawing/2014/main" val="769683759"/>
+                  </a:ext>
+                </a:extLst>
+              </a:tr>
+              <a:tr h="285662">
+                <a:tc>
+                  <a:txBody>
+                    <a:bodyPr/>
+                    <a:lstStyle/>
+                    <a:p>
+                      <a:pPr rtl="0" fontAlgn="b">
+                        <a:buNone/>
+                      </a:pPr>
+                      <a:r>
+                        <a:rPr lang="en-US" sz="1000">
+                          <a:effectLst/>
+                        </a:rPr>
+                        <a:t>MaxPooling2D_1</a:t>
+                      </a:r>
+                    </a:p>
+                  </a:txBody>
+                  <a:tcPr marL="12228" marR="12228" marT="8152" marB="8152" anchor="b">
+                    <a:lnL w="12700" cap="flat" cmpd="sng" algn="ctr">
+                      <a:solidFill>
+                        <a:schemeClr val="tx1"/>
+                      </a:solidFill>
+                      <a:prstDash val="solid"/>
+                      <a:round/>
+                      <a:headEnd type="none" w="med" len="med"/>
+                      <a:tailEnd type="none" w="med" len="med"/>
+                    </a:lnL>
+                  </a:tcPr>
+                </a:tc>
+                <a:tc>
+                  <a:txBody>
+                    <a:bodyPr/>
+                    <a:lstStyle/>
+                    <a:p>
+                      <a:pPr algn="r" rtl="0" fontAlgn="b">
+                        <a:buNone/>
+                      </a:pPr>
+                      <a:r>
+                        <a:rPr lang="en-US" altLang="ko-KR" sz="1000" dirty="0">
+                          <a:effectLst/>
+                        </a:rPr>
+                        <a:t>6</a:t>
+                      </a:r>
+                    </a:p>
+                  </a:txBody>
+                  <a:tcPr marL="12228" marR="12228" marT="8152" marB="8152" anchor="b"/>
+                </a:tc>
+                <a:tc>
+                  <a:txBody>
+                    <a:bodyPr/>
+                    <a:lstStyle/>
+                    <a:p>
+                      <a:pPr rtl="0" fontAlgn="b">
+                        <a:buNone/>
+                      </a:pPr>
+                      <a:r>
+                        <a:rPr lang="en-US" altLang="ko-KR" sz="1000">
+                          <a:effectLst/>
+                        </a:rPr>
+                        <a:t>-</a:t>
+                      </a:r>
+                    </a:p>
+                  </a:txBody>
+                  <a:tcPr marL="12228" marR="12228" marT="8152" marB="8152" anchor="b"/>
+                </a:tc>
+                <a:tc>
+                  <a:txBody>
+                    <a:bodyPr/>
+                    <a:lstStyle/>
+                    <a:p>
+                      <a:pPr rtl="0" fontAlgn="b">
+                        <a:buNone/>
+                      </a:pPr>
+                      <a:r>
+                        <a:rPr lang="en-US" altLang="ko-KR" sz="1000">
+                          <a:effectLst/>
+                        </a:rPr>
+                        <a:t>-</a:t>
+                      </a:r>
+                    </a:p>
+                  </a:txBody>
+                  <a:tcPr marL="12228" marR="12228" marT="8152" marB="8152" anchor="b"/>
+                </a:tc>
+                <a:tc>
+                  <a:txBody>
+                    <a:bodyPr/>
+                    <a:lstStyle/>
+                    <a:p>
+                      <a:pPr rtl="0" fontAlgn="b">
+                        <a:buNone/>
+                      </a:pPr>
+                      <a:r>
+                        <a:rPr lang="ko-KR" altLang="en-US" sz="1000" dirty="0">
+                          <a:effectLst/>
+                        </a:rPr>
+                        <a:t>학습 가중치 없음</a:t>
+                      </a:r>
+                    </a:p>
+                  </a:txBody>
+                  <a:tcPr marL="12228" marR="12228" marT="8152" marB="8152" anchor="b"/>
+                </a:tc>
+                <a:tc>
+                  <a:txBody>
+                    <a:bodyPr/>
+                    <a:lstStyle/>
+                    <a:p>
+                      <a:pPr algn="r" rtl="0" fontAlgn="b">
+                        <a:buNone/>
+                      </a:pPr>
+                      <a:r>
+                        <a:rPr lang="en-US" altLang="ko-KR" sz="1000">
+                          <a:effectLst/>
+                        </a:rPr>
+                        <a:t>0</a:t>
+                      </a:r>
+                    </a:p>
+                  </a:txBody>
+                  <a:tcPr marL="12228" marR="12228" marT="8152" marB="8152" anchor="b">
+                    <a:lnR w="12700" cap="flat" cmpd="sng" algn="ctr">
+                      <a:solidFill>
+                        <a:schemeClr val="tx1"/>
+                      </a:solidFill>
+                      <a:prstDash val="solid"/>
+                      <a:round/>
+                      <a:headEnd type="none" w="med" len="med"/>
+                      <a:tailEnd type="none" w="med" len="med"/>
+                    </a:lnR>
+                  </a:tcPr>
+                </a:tc>
+                <a:extLst>
+                  <a:ext uri="{0D108BD9-81ED-4DB2-BD59-A6C34878D82A}">
+                    <a16:rowId xmlns:a16="http://schemas.microsoft.com/office/drawing/2014/main" val="4022478283"/>
+                  </a:ext>
+                </a:extLst>
+              </a:tr>
+              <a:tr h="280728">
+                <a:tc>
+                  <a:txBody>
+                    <a:bodyPr/>
+                    <a:lstStyle/>
+                    <a:p>
+                      <a:pPr rtl="0" fontAlgn="b">
+                        <a:buNone/>
+                      </a:pPr>
+                      <a:r>
+                        <a:rPr lang="en-US" sz="1000">
+                          <a:effectLst/>
+                        </a:rPr>
+                        <a:t>Conv2D_2</a:t>
+                      </a:r>
+                    </a:p>
+                  </a:txBody>
+                  <a:tcPr marL="12228" marR="12228" marT="8152" marB="8152" anchor="b">
+                    <a:lnL w="12700" cap="flat" cmpd="sng" algn="ctr">
+                      <a:solidFill>
+                        <a:schemeClr val="tx1"/>
+                      </a:solidFill>
+                      <a:prstDash val="solid"/>
+                      <a:round/>
+                      <a:headEnd type="none" w="med" len="med"/>
+                      <a:tailEnd type="none" w="med" len="med"/>
+                    </a:lnL>
+                  </a:tcPr>
+                </a:tc>
+                <a:tc>
+                  <a:txBody>
+                    <a:bodyPr/>
+                    <a:lstStyle/>
+                    <a:p>
+                      <a:pPr algn="r" rtl="0" fontAlgn="b">
+                        <a:buNone/>
+                      </a:pPr>
+                      <a:r>
+                        <a:rPr lang="en-US" altLang="ko-KR" sz="1000" dirty="0">
+                          <a:effectLst/>
+                        </a:rPr>
+                        <a:t>6</a:t>
+                      </a:r>
+                    </a:p>
+                  </a:txBody>
+                  <a:tcPr marL="12228" marR="12228" marT="8152" marB="8152" anchor="b"/>
+                </a:tc>
+                <a:tc>
+                  <a:txBody>
+                    <a:bodyPr/>
+                    <a:lstStyle/>
+                    <a:p>
+                      <a:pPr rtl="0" fontAlgn="b">
+                        <a:buNone/>
+                      </a:pPr>
+                      <a:r>
+                        <a:rPr lang="en-US" altLang="ko-KR" sz="1000" dirty="0">
+                          <a:effectLst/>
+                        </a:rPr>
+                        <a:t>5×5</a:t>
+                      </a:r>
+                    </a:p>
+                  </a:txBody>
+                  <a:tcPr marL="12228" marR="12228" marT="8152" marB="8152" anchor="b"/>
+                </a:tc>
+                <a:tc>
+                  <a:txBody>
+                    <a:bodyPr/>
+                    <a:lstStyle/>
+                    <a:p>
+                      <a:pPr algn="r" rtl="0" fontAlgn="b">
+                        <a:buNone/>
+                      </a:pPr>
+                      <a:r>
+                        <a:rPr lang="en-US" altLang="ko-KR" sz="1000">
+                          <a:effectLst/>
+                        </a:rPr>
+                        <a:t>16</a:t>
+                      </a:r>
+                    </a:p>
+                  </a:txBody>
+                  <a:tcPr marL="12228" marR="12228" marT="8152" marB="8152" anchor="b"/>
+                </a:tc>
+                <a:tc>
+                  <a:txBody>
+                    <a:bodyPr/>
+                    <a:lstStyle/>
+                    <a:p>
+                      <a:pPr rtl="0" fontAlgn="b">
+                        <a:buNone/>
+                      </a:pPr>
+                      <a:r>
+                        <a:rPr lang="en-US" altLang="ko-KR" sz="1000">
+                          <a:effectLst/>
+                        </a:rPr>
+                        <a:t>{(5×5×6)+1}×16=(150+1)×16=151×16</a:t>
+                      </a:r>
+                    </a:p>
+                  </a:txBody>
+                  <a:tcPr marL="12228" marR="12228" marT="8152" marB="8152" anchor="b"/>
+                </a:tc>
+                <a:tc>
+                  <a:txBody>
+                    <a:bodyPr/>
+                    <a:lstStyle/>
+                    <a:p>
+                      <a:pPr algn="r" rtl="0" fontAlgn="b">
+                        <a:buNone/>
+                      </a:pPr>
+                      <a:r>
+                        <a:rPr lang="en-US" altLang="ko-KR" sz="1000">
+                          <a:effectLst/>
+                        </a:rPr>
+                        <a:t>2,416</a:t>
+                      </a:r>
+                    </a:p>
+                  </a:txBody>
+                  <a:tcPr marL="12228" marR="12228" marT="8152" marB="8152" anchor="b">
+                    <a:lnR w="12700" cap="flat" cmpd="sng" algn="ctr">
+                      <a:solidFill>
+                        <a:schemeClr val="tx1"/>
+                      </a:solidFill>
+                      <a:prstDash val="solid"/>
+                      <a:round/>
+                      <a:headEnd type="none" w="med" len="med"/>
+                      <a:tailEnd type="none" w="med" len="med"/>
+                    </a:lnR>
+                  </a:tcPr>
+                </a:tc>
+                <a:extLst>
+                  <a:ext uri="{0D108BD9-81ED-4DB2-BD59-A6C34878D82A}">
+                    <a16:rowId xmlns:a16="http://schemas.microsoft.com/office/drawing/2014/main" val="1427524334"/>
+                  </a:ext>
+                </a:extLst>
+              </a:tr>
+              <a:tr h="285662">
+                <a:tc>
+                  <a:txBody>
+                    <a:bodyPr/>
+                    <a:lstStyle/>
+                    <a:p>
+                      <a:pPr rtl="0" fontAlgn="b">
+                        <a:buNone/>
+                      </a:pPr>
+                      <a:r>
+                        <a:rPr lang="en-US" sz="1000">
+                          <a:effectLst/>
+                        </a:rPr>
+                        <a:t>MaxPooling2D_2</a:t>
+                      </a:r>
+                    </a:p>
+                  </a:txBody>
+                  <a:tcPr marL="12228" marR="12228" marT="8152" marB="8152" anchor="b">
+                    <a:lnL w="12700" cap="flat" cmpd="sng" algn="ctr">
+                      <a:solidFill>
+                        <a:schemeClr val="tx1"/>
+                      </a:solidFill>
+                      <a:prstDash val="solid"/>
+                      <a:round/>
+                      <a:headEnd type="none" w="med" len="med"/>
+                      <a:tailEnd type="none" w="med" len="med"/>
+                    </a:lnL>
+                  </a:tcPr>
+                </a:tc>
+                <a:tc>
+                  <a:txBody>
+                    <a:bodyPr/>
+                    <a:lstStyle/>
+                    <a:p>
+                      <a:pPr algn="r" rtl="0" fontAlgn="b">
+                        <a:buNone/>
+                      </a:pPr>
+                      <a:r>
+                        <a:rPr lang="en-US" altLang="ko-KR" sz="1000">
+                          <a:effectLst/>
+                        </a:rPr>
+                        <a:t>16</a:t>
+                      </a:r>
+                    </a:p>
+                  </a:txBody>
+                  <a:tcPr marL="12228" marR="12228" marT="8152" marB="8152" anchor="b"/>
+                </a:tc>
+                <a:tc>
+                  <a:txBody>
+                    <a:bodyPr/>
+                    <a:lstStyle/>
+                    <a:p>
+                      <a:pPr rtl="0" fontAlgn="b">
+                        <a:buNone/>
+                      </a:pPr>
+                      <a:r>
+                        <a:rPr lang="en-US" altLang="ko-KR" sz="1000" dirty="0">
+                          <a:effectLst/>
+                        </a:rPr>
+                        <a:t>-</a:t>
+                      </a:r>
+                    </a:p>
+                  </a:txBody>
+                  <a:tcPr marL="12228" marR="12228" marT="8152" marB="8152" anchor="b"/>
+                </a:tc>
+                <a:tc>
+                  <a:txBody>
+                    <a:bodyPr/>
+                    <a:lstStyle/>
+                    <a:p>
+                      <a:pPr rtl="0" fontAlgn="b">
+                        <a:buNone/>
+                      </a:pPr>
+                      <a:r>
+                        <a:rPr lang="en-US" altLang="ko-KR" sz="1000" dirty="0">
+                          <a:effectLst/>
+                        </a:rPr>
+                        <a:t>-</a:t>
+                      </a:r>
+                    </a:p>
+                  </a:txBody>
+                  <a:tcPr marL="12228" marR="12228" marT="8152" marB="8152" anchor="b"/>
+                </a:tc>
+                <a:tc>
+                  <a:txBody>
+                    <a:bodyPr/>
+                    <a:lstStyle/>
+                    <a:p>
+                      <a:pPr rtl="0" fontAlgn="b">
+                        <a:buNone/>
+                      </a:pPr>
+                      <a:r>
+                        <a:rPr lang="ko-KR" altLang="en-US" sz="1000">
+                          <a:effectLst/>
+                        </a:rPr>
+                        <a:t>학습 가중치 없음</a:t>
+                      </a:r>
+                    </a:p>
+                  </a:txBody>
+                  <a:tcPr marL="12228" marR="12228" marT="8152" marB="8152" anchor="b"/>
+                </a:tc>
+                <a:tc>
+                  <a:txBody>
+                    <a:bodyPr/>
+                    <a:lstStyle/>
+                    <a:p>
+                      <a:pPr algn="r" rtl="0" fontAlgn="b">
+                        <a:buNone/>
+                      </a:pPr>
+                      <a:r>
+                        <a:rPr lang="en-US" altLang="ko-KR" sz="1000" dirty="0">
+                          <a:effectLst/>
+                        </a:rPr>
+                        <a:t>0</a:t>
+                      </a:r>
+                    </a:p>
+                  </a:txBody>
+                  <a:tcPr marL="12228" marR="12228" marT="8152" marB="8152" anchor="b">
+                    <a:lnR w="12700" cap="flat" cmpd="sng" algn="ctr">
+                      <a:solidFill>
+                        <a:schemeClr val="tx1"/>
+                      </a:solidFill>
+                      <a:prstDash val="solid"/>
+                      <a:round/>
+                      <a:headEnd type="none" w="med" len="med"/>
+                      <a:tailEnd type="none" w="med" len="med"/>
+                    </a:lnR>
+                  </a:tcPr>
+                </a:tc>
+                <a:extLst>
+                  <a:ext uri="{0D108BD9-81ED-4DB2-BD59-A6C34878D82A}">
+                    <a16:rowId xmlns:a16="http://schemas.microsoft.com/office/drawing/2014/main" val="1618839275"/>
+                  </a:ext>
+                </a:extLst>
+              </a:tr>
+              <a:tr h="280728">
+                <a:tc>
+                  <a:txBody>
+                    <a:bodyPr/>
+                    <a:lstStyle/>
+                    <a:p>
+                      <a:pPr rtl="0" fontAlgn="b">
+                        <a:buNone/>
+                      </a:pPr>
+                      <a:r>
+                        <a:rPr lang="en-US" sz="1000">
+                          <a:effectLst/>
+                        </a:rPr>
+                        <a:t>Flatten</a:t>
+                      </a:r>
+                    </a:p>
+                  </a:txBody>
+                  <a:tcPr marL="12228" marR="12228" marT="8152" marB="8152" anchor="b">
+                    <a:lnL w="12700" cap="flat" cmpd="sng" algn="ctr">
+                      <a:solidFill>
+                        <a:schemeClr val="tx1"/>
+                      </a:solidFill>
+                      <a:prstDash val="solid"/>
+                      <a:round/>
+                      <a:headEnd type="none" w="med" len="med"/>
+                      <a:tailEnd type="none" w="med" len="med"/>
+                    </a:lnL>
+                  </a:tcPr>
+                </a:tc>
+                <a:tc>
+                  <a:txBody>
+                    <a:bodyPr/>
+                    <a:lstStyle/>
+                    <a:p>
+                      <a:pPr rtl="0" fontAlgn="b">
+                        <a:buNone/>
+                      </a:pPr>
+                      <a:r>
+                        <a:rPr lang="en-US" altLang="ko-KR" sz="1000">
+                          <a:effectLst/>
+                        </a:rPr>
+                        <a:t>-</a:t>
+                      </a:r>
+                    </a:p>
+                  </a:txBody>
+                  <a:tcPr marL="12228" marR="12228" marT="8152" marB="8152" anchor="b"/>
+                </a:tc>
+                <a:tc>
+                  <a:txBody>
+                    <a:bodyPr/>
+                    <a:lstStyle/>
+                    <a:p>
+                      <a:pPr rtl="0" fontAlgn="b">
+                        <a:buNone/>
+                      </a:pPr>
+                      <a:r>
+                        <a:rPr lang="en-US" altLang="ko-KR" sz="1000">
+                          <a:effectLst/>
+                        </a:rPr>
+                        <a:t>-</a:t>
+                      </a:r>
+                    </a:p>
+                  </a:txBody>
+                  <a:tcPr marL="12228" marR="12228" marT="8152" marB="8152" anchor="b"/>
+                </a:tc>
+                <a:tc>
+                  <a:txBody>
+                    <a:bodyPr/>
+                    <a:lstStyle/>
+                    <a:p>
+                      <a:pPr rtl="0" fontAlgn="b">
+                        <a:buNone/>
+                      </a:pPr>
+                      <a:r>
+                        <a:rPr lang="en-US" altLang="ko-KR" sz="1000" dirty="0">
+                          <a:effectLst/>
+                        </a:rPr>
+                        <a:t>-</a:t>
+                      </a:r>
+                    </a:p>
+                  </a:txBody>
+                  <a:tcPr marL="12228" marR="12228" marT="8152" marB="8152" anchor="b"/>
+                </a:tc>
+                <a:tc>
+                  <a:txBody>
+                    <a:bodyPr/>
+                    <a:lstStyle/>
+                    <a:p>
+                      <a:pPr rtl="0" fontAlgn="b">
+                        <a:buNone/>
+                      </a:pPr>
+                      <a:r>
+                        <a:rPr lang="ko-KR" altLang="en-US" sz="1000">
+                          <a:effectLst/>
+                        </a:rPr>
+                        <a:t>학습 가중치 없음 </a:t>
+                      </a:r>
+                      <a:r>
+                        <a:rPr lang="en-US" altLang="ko-KR" sz="1000">
+                          <a:effectLst/>
+                        </a:rPr>
+                        <a:t>(</a:t>
+                      </a:r>
+                      <a:r>
+                        <a:rPr lang="ko-KR" altLang="en-US" sz="1000">
+                          <a:effectLst/>
+                        </a:rPr>
+                        <a:t>출력 노드 수</a:t>
+                      </a:r>
+                      <a:r>
+                        <a:rPr lang="en-US" altLang="ko-KR" sz="1000">
+                          <a:effectLst/>
+                        </a:rPr>
+                        <a:t>: 2,704</a:t>
+                      </a:r>
+                      <a:r>
+                        <a:rPr lang="ko-KR" altLang="en-US" sz="1000">
+                          <a:effectLst/>
+                        </a:rPr>
+                        <a:t>개</a:t>
+                      </a:r>
+                      <a:r>
+                        <a:rPr lang="en-US" altLang="ko-KR" sz="1000">
+                          <a:effectLst/>
+                        </a:rPr>
+                        <a:t>)</a:t>
+                      </a:r>
+                    </a:p>
+                  </a:txBody>
+                  <a:tcPr marL="12228" marR="12228" marT="8152" marB="8152" anchor="b"/>
+                </a:tc>
+                <a:tc>
+                  <a:txBody>
+                    <a:bodyPr/>
+                    <a:lstStyle/>
+                    <a:p>
+                      <a:pPr algn="r" rtl="0" fontAlgn="b">
+                        <a:buNone/>
+                      </a:pPr>
+                      <a:r>
+                        <a:rPr lang="en-US" altLang="ko-KR" sz="1000">
+                          <a:effectLst/>
+                        </a:rPr>
+                        <a:t>0</a:t>
+                      </a:r>
+                    </a:p>
+                  </a:txBody>
+                  <a:tcPr marL="12228" marR="12228" marT="8152" marB="8152" anchor="b">
+                    <a:lnR w="12700" cap="flat" cmpd="sng" algn="ctr">
+                      <a:solidFill>
+                        <a:schemeClr val="tx1"/>
+                      </a:solidFill>
+                      <a:prstDash val="solid"/>
+                      <a:round/>
+                      <a:headEnd type="none" w="med" len="med"/>
+                      <a:tailEnd type="none" w="med" len="med"/>
+                    </a:lnR>
+                  </a:tcPr>
+                </a:tc>
+                <a:extLst>
+                  <a:ext uri="{0D108BD9-81ED-4DB2-BD59-A6C34878D82A}">
+                    <a16:rowId xmlns:a16="http://schemas.microsoft.com/office/drawing/2014/main" val="1068461832"/>
+                  </a:ext>
+                </a:extLst>
+              </a:tr>
+              <a:tr h="285662">
+                <a:tc>
+                  <a:txBody>
+                    <a:bodyPr/>
+                    <a:lstStyle/>
+                    <a:p>
+                      <a:pPr rtl="0" fontAlgn="b">
+                        <a:buNone/>
+                      </a:pPr>
+                      <a:r>
+                        <a:rPr lang="en-US" sz="1000">
+                          <a:effectLst/>
+                        </a:rPr>
+                        <a:t>Dense_1</a:t>
+                      </a:r>
+                    </a:p>
+                  </a:txBody>
+                  <a:tcPr marL="12228" marR="12228" marT="8152" marB="8152" anchor="b">
+                    <a:lnL w="12700" cap="flat" cmpd="sng" algn="ctr">
+                      <a:solidFill>
+                        <a:schemeClr val="tx1"/>
+                      </a:solidFill>
+                      <a:prstDash val="solid"/>
+                      <a:round/>
+                      <a:headEnd type="none" w="med" len="med"/>
+                      <a:tailEnd type="none" w="med" len="med"/>
+                    </a:lnL>
+                  </a:tcPr>
+                </a:tc>
+                <a:tc>
+                  <a:txBody>
+                    <a:bodyPr/>
+                    <a:lstStyle/>
+                    <a:p>
+                      <a:pPr algn="r" rtl="0" fontAlgn="b">
+                        <a:buNone/>
+                      </a:pPr>
+                      <a:r>
+                        <a:rPr lang="en-US" altLang="ko-KR" sz="1000">
+                          <a:effectLst/>
+                        </a:rPr>
+                        <a:t>2,704</a:t>
+                      </a:r>
+                    </a:p>
+                  </a:txBody>
+                  <a:tcPr marL="12228" marR="12228" marT="8152" marB="8152" anchor="b"/>
+                </a:tc>
+                <a:tc>
+                  <a:txBody>
+                    <a:bodyPr/>
+                    <a:lstStyle/>
+                    <a:p>
+                      <a:pPr rtl="0" fontAlgn="b">
+                        <a:buNone/>
+                      </a:pPr>
+                      <a:r>
+                        <a:rPr lang="en-US" altLang="ko-KR" sz="1000">
+                          <a:effectLst/>
+                        </a:rPr>
+                        <a:t>-</a:t>
+                      </a:r>
+                    </a:p>
+                  </a:txBody>
+                  <a:tcPr marL="12228" marR="12228" marT="8152" marB="8152" anchor="b"/>
+                </a:tc>
+                <a:tc>
+                  <a:txBody>
+                    <a:bodyPr/>
+                    <a:lstStyle/>
+                    <a:p>
+                      <a:pPr algn="r" rtl="0" fontAlgn="b">
+                        <a:buNone/>
+                      </a:pPr>
+                      <a:r>
+                        <a:rPr lang="en-US" altLang="ko-KR" sz="1000">
+                          <a:effectLst/>
+                        </a:rPr>
+                        <a:t>120</a:t>
+                      </a:r>
+                    </a:p>
+                  </a:txBody>
+                  <a:tcPr marL="12228" marR="12228" marT="8152" marB="8152" anchor="b"/>
+                </a:tc>
+                <a:tc>
+                  <a:txBody>
+                    <a:bodyPr/>
+                    <a:lstStyle/>
+                    <a:p>
+                      <a:pPr rtl="0" fontAlgn="b">
+                        <a:buNone/>
+                      </a:pPr>
+                      <a:r>
+                        <a:rPr lang="en-US" altLang="ko-KR" sz="1000">
+                          <a:effectLst/>
+                        </a:rPr>
+                        <a:t>{(2,704×1)+1}×120=(2,704+1)×120=2,705×120</a:t>
+                      </a:r>
+                    </a:p>
+                  </a:txBody>
+                  <a:tcPr marL="12228" marR="12228" marT="8152" marB="8152" anchor="b"/>
+                </a:tc>
+                <a:tc>
+                  <a:txBody>
+                    <a:bodyPr/>
+                    <a:lstStyle/>
+                    <a:p>
+                      <a:pPr algn="r" rtl="0" fontAlgn="b">
+                        <a:buNone/>
+                      </a:pPr>
+                      <a:r>
+                        <a:rPr lang="en-US" altLang="ko-KR" sz="1000">
+                          <a:effectLst/>
+                        </a:rPr>
+                        <a:t>324,600</a:t>
+                      </a:r>
+                    </a:p>
+                  </a:txBody>
+                  <a:tcPr marL="12228" marR="12228" marT="8152" marB="8152" anchor="b">
+                    <a:lnR w="12700" cap="flat" cmpd="sng" algn="ctr">
+                      <a:solidFill>
+                        <a:schemeClr val="tx1"/>
+                      </a:solidFill>
+                      <a:prstDash val="solid"/>
+                      <a:round/>
+                      <a:headEnd type="none" w="med" len="med"/>
+                      <a:tailEnd type="none" w="med" len="med"/>
+                    </a:lnR>
+                  </a:tcPr>
+                </a:tc>
+                <a:extLst>
+                  <a:ext uri="{0D108BD9-81ED-4DB2-BD59-A6C34878D82A}">
+                    <a16:rowId xmlns:a16="http://schemas.microsoft.com/office/drawing/2014/main" val="2146647530"/>
+                  </a:ext>
+                </a:extLst>
+              </a:tr>
+              <a:tr h="280728">
+                <a:tc>
+                  <a:txBody>
+                    <a:bodyPr/>
+                    <a:lstStyle/>
+                    <a:p>
+                      <a:pPr rtl="0" fontAlgn="b">
+                        <a:buNone/>
+                      </a:pPr>
+                      <a:r>
+                        <a:rPr lang="en-US" sz="1000">
+                          <a:effectLst/>
+                        </a:rPr>
+                        <a:t>Dense_2</a:t>
+                      </a:r>
+                    </a:p>
+                  </a:txBody>
+                  <a:tcPr marL="12228" marR="12228" marT="8152" marB="8152" anchor="b">
+                    <a:lnL w="12700" cap="flat" cmpd="sng" algn="ctr">
+                      <a:solidFill>
+                        <a:schemeClr val="tx1"/>
+                      </a:solidFill>
+                      <a:prstDash val="solid"/>
+                      <a:round/>
+                      <a:headEnd type="none" w="med" len="med"/>
+                      <a:tailEnd type="none" w="med" len="med"/>
+                    </a:lnL>
+                  </a:tcPr>
+                </a:tc>
+                <a:tc>
+                  <a:txBody>
+                    <a:bodyPr/>
+                    <a:lstStyle/>
+                    <a:p>
+                      <a:pPr algn="r" rtl="0" fontAlgn="b">
+                        <a:buNone/>
+                      </a:pPr>
+                      <a:r>
+                        <a:rPr lang="en-US" altLang="ko-KR" sz="1000">
+                          <a:effectLst/>
+                        </a:rPr>
+                        <a:t>120</a:t>
+                      </a:r>
+                    </a:p>
+                  </a:txBody>
+                  <a:tcPr marL="12228" marR="12228" marT="8152" marB="8152" anchor="b"/>
+                </a:tc>
+                <a:tc>
+                  <a:txBody>
+                    <a:bodyPr/>
+                    <a:lstStyle/>
+                    <a:p>
+                      <a:pPr rtl="0" fontAlgn="b">
+                        <a:buNone/>
+                      </a:pPr>
+                      <a:r>
+                        <a:rPr lang="en-US" altLang="ko-KR" sz="1000">
+                          <a:effectLst/>
+                        </a:rPr>
+                        <a:t>-</a:t>
+                      </a:r>
+                    </a:p>
+                  </a:txBody>
+                  <a:tcPr marL="12228" marR="12228" marT="8152" marB="8152" anchor="b"/>
+                </a:tc>
+                <a:tc>
+                  <a:txBody>
+                    <a:bodyPr/>
+                    <a:lstStyle/>
+                    <a:p>
+                      <a:pPr algn="r" rtl="0" fontAlgn="b">
+                        <a:buNone/>
+                      </a:pPr>
+                      <a:r>
+                        <a:rPr lang="en-US" altLang="ko-KR" sz="1000">
+                          <a:effectLst/>
+                        </a:rPr>
+                        <a:t>84</a:t>
+                      </a:r>
+                    </a:p>
+                  </a:txBody>
+                  <a:tcPr marL="12228" marR="12228" marT="8152" marB="8152" anchor="b"/>
+                </a:tc>
+                <a:tc>
+                  <a:txBody>
+                    <a:bodyPr/>
+                    <a:lstStyle/>
+                    <a:p>
+                      <a:pPr rtl="0" fontAlgn="b">
+                        <a:buNone/>
+                      </a:pPr>
+                      <a:r>
+                        <a:rPr lang="en-US" altLang="ko-KR" sz="1000">
+                          <a:effectLst/>
+                        </a:rPr>
+                        <a:t>{(120×1)+1}×84=(120+1)×84=121×84</a:t>
+                      </a:r>
+                    </a:p>
+                  </a:txBody>
+                  <a:tcPr marL="12228" marR="12228" marT="8152" marB="8152" anchor="b"/>
+                </a:tc>
+                <a:tc>
+                  <a:txBody>
+                    <a:bodyPr/>
+                    <a:lstStyle/>
+                    <a:p>
+                      <a:pPr algn="r" rtl="0" fontAlgn="b">
+                        <a:buNone/>
+                      </a:pPr>
+                      <a:r>
+                        <a:rPr lang="en-US" altLang="ko-KR" sz="1000">
+                          <a:effectLst/>
+                        </a:rPr>
+                        <a:t>10,164</a:t>
+                      </a:r>
+                    </a:p>
+                  </a:txBody>
+                  <a:tcPr marL="12228" marR="12228" marT="8152" marB="8152" anchor="b">
+                    <a:lnR w="12700" cap="flat" cmpd="sng" algn="ctr">
+                      <a:solidFill>
+                        <a:schemeClr val="tx1"/>
+                      </a:solidFill>
+                      <a:prstDash val="solid"/>
+                      <a:round/>
+                      <a:headEnd type="none" w="med" len="med"/>
+                      <a:tailEnd type="none" w="med" len="med"/>
+                    </a:lnR>
+                  </a:tcPr>
+                </a:tc>
+                <a:extLst>
+                  <a:ext uri="{0D108BD9-81ED-4DB2-BD59-A6C34878D82A}">
+                    <a16:rowId xmlns:a16="http://schemas.microsoft.com/office/drawing/2014/main" val="3652859773"/>
+                  </a:ext>
+                </a:extLst>
+              </a:tr>
+              <a:tr h="285662">
+                <a:tc>
+                  <a:txBody>
+                    <a:bodyPr/>
+                    <a:lstStyle/>
+                    <a:p>
+                      <a:pPr rtl="0" fontAlgn="b">
+                        <a:buNone/>
+                      </a:pPr>
+                      <a:r>
+                        <a:rPr lang="en-US" sz="1000">
+                          <a:effectLst/>
+                        </a:rPr>
+                        <a:t>Dense_3 (</a:t>
+                      </a:r>
+                      <a:r>
+                        <a:rPr lang="ko-KR" altLang="en-US" sz="1000">
+                          <a:effectLst/>
+                        </a:rPr>
+                        <a:t>출력층</a:t>
+                      </a:r>
+                      <a:r>
+                        <a:rPr lang="en-US" altLang="ko-KR" sz="1000">
+                          <a:effectLst/>
+                        </a:rPr>
+                        <a:t>)</a:t>
+                      </a:r>
+                    </a:p>
+                  </a:txBody>
+                  <a:tcPr marL="12228" marR="12228" marT="8152" marB="8152" anchor="b">
+                    <a:lnL w="12700" cap="flat" cmpd="sng" algn="ctr">
+                      <a:solidFill>
+                        <a:schemeClr val="tx1"/>
+                      </a:solidFill>
+                      <a:prstDash val="solid"/>
+                      <a:round/>
+                      <a:headEnd type="none" w="med" len="med"/>
+                      <a:tailEnd type="none" w="med" len="med"/>
+                    </a:lnL>
+                  </a:tcPr>
+                </a:tc>
+                <a:tc>
+                  <a:txBody>
+                    <a:bodyPr/>
+                    <a:lstStyle/>
+                    <a:p>
+                      <a:pPr algn="r" rtl="0" fontAlgn="b">
+                        <a:buNone/>
+                      </a:pPr>
+                      <a:r>
+                        <a:rPr lang="en-US" altLang="ko-KR" sz="1000">
+                          <a:effectLst/>
+                        </a:rPr>
+                        <a:t>84</a:t>
+                      </a:r>
+                    </a:p>
+                  </a:txBody>
+                  <a:tcPr marL="12228" marR="12228" marT="8152" marB="8152" anchor="b"/>
+                </a:tc>
+                <a:tc>
+                  <a:txBody>
+                    <a:bodyPr/>
+                    <a:lstStyle/>
+                    <a:p>
+                      <a:pPr rtl="0" fontAlgn="b">
+                        <a:buNone/>
+                      </a:pPr>
+                      <a:r>
+                        <a:rPr lang="en-US" altLang="ko-KR" sz="1000">
+                          <a:effectLst/>
+                        </a:rPr>
+                        <a:t>-</a:t>
+                      </a:r>
+                    </a:p>
+                  </a:txBody>
+                  <a:tcPr marL="12228" marR="12228" marT="8152" marB="8152" anchor="b"/>
+                </a:tc>
+                <a:tc>
+                  <a:txBody>
+                    <a:bodyPr/>
+                    <a:lstStyle/>
+                    <a:p>
+                      <a:pPr algn="r" rtl="0" fontAlgn="b">
+                        <a:buNone/>
+                      </a:pPr>
+                      <a:r>
+                        <a:rPr lang="en-US" altLang="ko-KR" sz="1000">
+                          <a:effectLst/>
+                        </a:rPr>
+                        <a:t>10</a:t>
+                      </a:r>
+                    </a:p>
+                  </a:txBody>
+                  <a:tcPr marL="12228" marR="12228" marT="8152" marB="8152" anchor="b"/>
+                </a:tc>
+                <a:tc>
+                  <a:txBody>
+                    <a:bodyPr/>
+                    <a:lstStyle/>
+                    <a:p>
+                      <a:pPr rtl="0" fontAlgn="b">
+                        <a:buNone/>
+                      </a:pPr>
+                      <a:r>
+                        <a:rPr lang="en-US" altLang="ko-KR" sz="1000">
+                          <a:effectLst/>
+                        </a:rPr>
+                        <a:t>{(84×1)+1}×10=(84+1)×10=85×10</a:t>
+                      </a:r>
+                    </a:p>
+                  </a:txBody>
+                  <a:tcPr marL="12228" marR="12228" marT="8152" marB="8152" anchor="b"/>
+                </a:tc>
+                <a:tc>
+                  <a:txBody>
+                    <a:bodyPr/>
+                    <a:lstStyle/>
+                    <a:p>
+                      <a:pPr algn="r" rtl="0" fontAlgn="b">
+                        <a:buNone/>
+                      </a:pPr>
+                      <a:r>
+                        <a:rPr lang="en-US" altLang="ko-KR" sz="1000">
+                          <a:effectLst/>
+                        </a:rPr>
+                        <a:t>850</a:t>
+                      </a:r>
+                    </a:p>
+                  </a:txBody>
+                  <a:tcPr marL="12228" marR="12228" marT="8152" marB="8152" anchor="b">
+                    <a:lnR w="12700" cap="flat" cmpd="sng" algn="ctr">
+                      <a:solidFill>
+                        <a:schemeClr val="tx1"/>
+                      </a:solidFill>
+                      <a:prstDash val="solid"/>
+                      <a:round/>
+                      <a:headEnd type="none" w="med" len="med"/>
+                      <a:tailEnd type="none" w="med" len="med"/>
+                    </a:lnR>
+                  </a:tcPr>
+                </a:tc>
+                <a:extLst>
+                  <a:ext uri="{0D108BD9-81ED-4DB2-BD59-A6C34878D82A}">
+                    <a16:rowId xmlns:a16="http://schemas.microsoft.com/office/drawing/2014/main" val="315712732"/>
+                  </a:ext>
+                </a:extLst>
+              </a:tr>
+              <a:tr h="280728">
+                <a:tc>
+                  <a:txBody>
+                    <a:bodyPr/>
+                    <a:lstStyle/>
+                    <a:p>
+                      <a:pPr rtl="0" fontAlgn="b">
+                        <a:buNone/>
+                      </a:pPr>
+                      <a:r>
+                        <a:rPr lang="ko-KR" altLang="en-US" sz="1000">
+                          <a:effectLst/>
+                        </a:rPr>
+                        <a:t>총계 </a:t>
+                      </a:r>
+                      <a:r>
+                        <a:rPr lang="en-US" altLang="ko-KR" sz="1000">
+                          <a:effectLst/>
+                        </a:rPr>
+                        <a:t>(</a:t>
+                      </a:r>
+                      <a:r>
+                        <a:rPr lang="en-US" sz="1000">
+                          <a:effectLst/>
+                        </a:rPr>
+                        <a:t>Total)</a:t>
+                      </a:r>
+                    </a:p>
+                  </a:txBody>
+                  <a:tcPr marL="12228" marR="12228" marT="8152" marB="8152" anchor="b">
+                    <a:lnL w="12700" cap="flat" cmpd="sng" algn="ctr">
+                      <a:solidFill>
+                        <a:schemeClr val="tx1"/>
+                      </a:solidFill>
+                      <a:prstDash val="solid"/>
+                      <a:round/>
+                      <a:headEnd type="none" w="med" len="med"/>
+                      <a:tailEnd type="none" w="med" len="med"/>
+                    </a:lnL>
+                    <a:lnB w="12700" cap="flat" cmpd="sng" algn="ctr">
+                      <a:solidFill>
+                        <a:schemeClr val="tx1"/>
+                      </a:solidFill>
+                      <a:prstDash val="solid"/>
+                      <a:round/>
+                      <a:headEnd type="none" w="med" len="med"/>
+                      <a:tailEnd type="none" w="med" len="med"/>
+                    </a:lnB>
+                  </a:tcPr>
+                </a:tc>
+                <a:tc>
+                  <a:txBody>
+                    <a:bodyPr/>
+                    <a:lstStyle/>
+                    <a:p>
+                      <a:pPr rtl="0" fontAlgn="b">
+                        <a:buNone/>
+                      </a:pPr>
+                      <a:r>
+                        <a:rPr lang="en-US" altLang="ko-KR" sz="1000">
+                          <a:effectLst/>
+                        </a:rPr>
+                        <a:t>-</a:t>
+                      </a:r>
+                    </a:p>
+                  </a:txBody>
+                  <a:tcPr marL="12228" marR="12228" marT="8152" marB="8152" anchor="b">
+                    <a:lnB w="12700" cap="flat" cmpd="sng" algn="ctr">
+                      <a:solidFill>
+                        <a:schemeClr val="tx1"/>
+                      </a:solidFill>
+                      <a:prstDash val="solid"/>
+                      <a:round/>
+                      <a:headEnd type="none" w="med" len="med"/>
+                      <a:tailEnd type="none" w="med" len="med"/>
+                    </a:lnB>
+                  </a:tcPr>
+                </a:tc>
+                <a:tc>
+                  <a:txBody>
+                    <a:bodyPr/>
+                    <a:lstStyle/>
+                    <a:p>
+                      <a:pPr rtl="0" fontAlgn="b">
+                        <a:buNone/>
+                      </a:pPr>
+                      <a:r>
+                        <a:rPr lang="en-US" altLang="ko-KR" sz="1000">
+                          <a:effectLst/>
+                        </a:rPr>
+                        <a:t>-</a:t>
+                      </a:r>
+                    </a:p>
+                  </a:txBody>
+                  <a:tcPr marL="12228" marR="12228" marT="8152" marB="8152" anchor="b">
+                    <a:lnB w="12700" cap="flat" cmpd="sng" algn="ctr">
+                      <a:solidFill>
+                        <a:schemeClr val="tx1"/>
+                      </a:solidFill>
+                      <a:prstDash val="solid"/>
+                      <a:round/>
+                      <a:headEnd type="none" w="med" len="med"/>
+                      <a:tailEnd type="none" w="med" len="med"/>
+                    </a:lnB>
+                  </a:tcPr>
+                </a:tc>
+                <a:tc>
+                  <a:txBody>
+                    <a:bodyPr/>
+                    <a:lstStyle/>
+                    <a:p>
+                      <a:pPr rtl="0" fontAlgn="b">
+                        <a:buNone/>
+                      </a:pPr>
+                      <a:r>
+                        <a:rPr lang="en-US" altLang="ko-KR" sz="1000">
+                          <a:effectLst/>
+                        </a:rPr>
+                        <a:t>-</a:t>
+                      </a:r>
+                    </a:p>
+                  </a:txBody>
+                  <a:tcPr marL="12228" marR="12228" marT="8152" marB="8152" anchor="b">
+                    <a:lnB w="12700" cap="flat" cmpd="sng" algn="ctr">
+                      <a:solidFill>
+                        <a:schemeClr val="tx1"/>
+                      </a:solidFill>
+                      <a:prstDash val="solid"/>
+                      <a:round/>
+                      <a:headEnd type="none" w="med" len="med"/>
+                      <a:tailEnd type="none" w="med" len="med"/>
+                    </a:lnB>
+                  </a:tcPr>
+                </a:tc>
+                <a:tc>
+                  <a:txBody>
+                    <a:bodyPr/>
+                    <a:lstStyle/>
+                    <a:p>
+                      <a:pPr rtl="0" fontAlgn="b">
+                        <a:buNone/>
+                      </a:pPr>
+                      <a:r>
+                        <a:rPr lang="en-US" altLang="ko-KR" sz="1000" dirty="0">
+                          <a:effectLst/>
+                        </a:rPr>
+                        <a:t>156+2,416+324,600+10,164+850</a:t>
+                      </a:r>
+                    </a:p>
+                  </a:txBody>
+                  <a:tcPr marL="12228" marR="12228" marT="8152" marB="8152" anchor="b">
+                    <a:lnB w="12700" cap="flat" cmpd="sng" algn="ctr">
+                      <a:solidFill>
+                        <a:schemeClr val="tx1"/>
+                      </a:solidFill>
+                      <a:prstDash val="solid"/>
+                      <a:round/>
+                      <a:headEnd type="none" w="med" len="med"/>
+                      <a:tailEnd type="none" w="med" len="med"/>
+                    </a:lnB>
+                  </a:tcPr>
+                </a:tc>
+                <a:tc>
+                  <a:txBody>
+                    <a:bodyPr/>
+                    <a:lstStyle/>
+                    <a:p>
+                      <a:pPr algn="r" rtl="0" fontAlgn="b">
+                        <a:buNone/>
+                      </a:pPr>
+                      <a:r>
+                        <a:rPr lang="en-US" altLang="ko-KR" sz="1000" dirty="0">
+                          <a:effectLst/>
+                        </a:rPr>
+                        <a:t>338,186</a:t>
+                      </a:r>
+                    </a:p>
+                  </a:txBody>
+                  <a:tcPr marL="12228" marR="12228" marT="8152" marB="8152" anchor="b">
+                    <a:lnR w="12700" cap="flat" cmpd="sng" algn="ctr">
+                      <a:solidFill>
+                        <a:schemeClr val="tx1"/>
+                      </a:solidFill>
+                      <a:prstDash val="solid"/>
+                      <a:round/>
+                      <a:headEnd type="none" w="med" len="med"/>
+                      <a:tailEnd type="none" w="med" len="med"/>
+                    </a:lnR>
+                    <a:lnB w="12700" cap="flat" cmpd="sng" algn="ctr">
+                      <a:solidFill>
+                        <a:schemeClr val="tx1"/>
+                      </a:solidFill>
+                      <a:prstDash val="solid"/>
+                      <a:round/>
+                      <a:headEnd type="none" w="med" len="med"/>
+                      <a:tailEnd type="none" w="med" len="med"/>
+                    </a:lnB>
+                  </a:tcPr>
+                </a:tc>
+                <a:extLst>
+                  <a:ext uri="{0D108BD9-81ED-4DB2-BD59-A6C34878D82A}">
+                    <a16:rowId xmlns:a16="http://schemas.microsoft.com/office/drawing/2014/main" val="1125065565"/>
+                  </a:ext>
+                </a:extLst>
+              </a:tr>
+            </a:tbl>
+          </a:graphicData>
+        </a:graphic>
+      </p:graphicFrame>
+    </p:spTree>
+    <p:extLst>
+      <p:ext uri="{BB962C8B-B14F-4D97-AF65-F5344CB8AC3E}">
+        <p14:creationId xmlns:p14="http://schemas.microsoft.com/office/powerpoint/2010/main" val="951263948"/>
+      </p:ext>
+    </p:extLst>
+  </p:cSld>
+  <p:clrMapOvr>
+    <a:masterClrMapping/>
+  </p:clrMapOvr>
+</p:sld>
+</file>
+
+<file path=ppt/slides/slide27.xml><?xml version="1.0" encoding="utf-8"?>
+<p:sld xmlns:a="http://schemas.openxmlformats.org/drawingml/2006/main" xmlns:r="http://schemas.openxmlformats.org/officeDocument/2006/relationships" xmlns:p="http://schemas.openxmlformats.org/presentationml/2006/main">
+  <p:cSld>
+    <p:spTree>
+      <p:nvGrpSpPr>
+        <p:cNvPr id="1" name="">
+          <a:extLst>
+            <a:ext uri="{FF2B5EF4-FFF2-40B4-BE49-F238E27FC236}">
               <a16:creationId xmlns:a16="http://schemas.microsoft.com/office/drawing/2014/main" id="{22AEEC00-2CE5-3A47-71C2-446F304CD1C6}"/>
             </a:ext>
           </a:extLst>
@@ -16333,8 +18418,8 @@
         </p:nvSpPr>
         <p:spPr>
           <a:xfrm>
-            <a:off x="9415464" y="4204508"/>
-            <a:ext cx="2200275" cy="1692771"/>
+            <a:off x="9367839" y="4879995"/>
+            <a:ext cx="2518843" cy="1492716"/>
           </a:xfrm>
           <a:prstGeom prst="rect">
             <a:avLst/>
@@ -16647,7 +18732,7 @@
                 <a:ea typeface="Segoe UI Emoji" panose="020B0502040204020203" pitchFamily="34" charset="0"/>
               </a:rPr>
               <a:pPr/>
-              <a:t>26</a:t>
+              <a:t>27</a:t>
             </a:fld>
             <a:endParaRPr lang="en-US" b="1" dirty="0">
               <a:latin typeface="Segoe UI Emoji" panose="020B0502040204020203" pitchFamily="34" charset="0"/>
@@ -16724,8 +18809,8 @@
         </p:nvSpPr>
         <p:spPr bwMode="auto">
           <a:xfrm>
-            <a:off x="9415464" y="1814800"/>
-            <a:ext cx="2200274" cy="1892826"/>
+            <a:off x="9367839" y="1316113"/>
+            <a:ext cx="2518842" cy="1692771"/>
           </a:xfrm>
           <a:prstGeom prst="rect">
             <a:avLst/>
@@ -16856,7 +18941,3543 @@
 </p:sld>
 </file>
 
-<file path=ppt/slides/slide27.xml><?xml version="1.0" encoding="utf-8"?>
+<file path=ppt/slides/slide28.xml><?xml version="1.0" encoding="utf-8"?>
+<p:sld xmlns:a="http://schemas.openxmlformats.org/drawingml/2006/main" xmlns:r="http://schemas.openxmlformats.org/officeDocument/2006/relationships" xmlns:p="http://schemas.openxmlformats.org/presentationml/2006/main">
+  <p:cSld>
+    <p:spTree>
+      <p:nvGrpSpPr>
+        <p:cNvPr id="1" name="">
+          <a:extLst>
+            <a:ext uri="{FF2B5EF4-FFF2-40B4-BE49-F238E27FC236}">
+              <a16:creationId xmlns:a16="http://schemas.microsoft.com/office/drawing/2014/main" id="{EBE46EC4-B367-B617-1D8E-1F58E3B0AB5F}"/>
+            </a:ext>
+          </a:extLst>
+        </p:cNvPr>
+        <p:cNvGrpSpPr/>
+        <p:nvPr/>
+      </p:nvGrpSpPr>
+      <p:grpSpPr>
+        <a:xfrm>
+          <a:off x="0" y="0"/>
+          <a:ext cx="0" cy="0"/>
+          <a:chOff x="0" y="0"/>
+          <a:chExt cx="0" cy="0"/>
+        </a:xfrm>
+      </p:grpSpPr>
+      <p:sp>
+        <p:nvSpPr>
+          <p:cNvPr id="3" name="제목 1">
+            <a:extLst>
+              <a:ext uri="{FF2B5EF4-FFF2-40B4-BE49-F238E27FC236}">
+                <a16:creationId xmlns:a16="http://schemas.microsoft.com/office/drawing/2014/main" id="{0DE6937E-1188-477D-3D5E-9BF1644CFED7}"/>
+              </a:ext>
+            </a:extLst>
+          </p:cNvPr>
+          <p:cNvSpPr txBox="1">
+            <a:spLocks/>
+          </p:cNvSpPr>
+          <p:nvPr/>
+        </p:nvSpPr>
+        <p:spPr>
+          <a:xfrm>
+            <a:off x="475645" y="481983"/>
+            <a:ext cx="10353762" cy="766439"/>
+          </a:xfrm>
+          <a:prstGeom prst="rect">
+            <a:avLst/>
+          </a:prstGeom>
+        </p:spPr>
+        <p:txBody>
+          <a:bodyPr vert="horz" lIns="91440" tIns="45720" rIns="91440" bIns="45720" rtlCol="0" anchor="ctr">
+            <a:normAutofit/>
+          </a:bodyPr>
+          <a:lstStyle>
+            <a:lvl1pPr algn="ctr" defTabSz="914400" rtl="0" eaLnBrk="1" latinLnBrk="1" hangingPunct="1">
+              <a:lnSpc>
+                <a:spcPct val="90000"/>
+              </a:lnSpc>
+              <a:spcBef>
+                <a:spcPct val="0"/>
+              </a:spcBef>
+              <a:buNone/>
+              <a:defRPr sz="3200" kern="1200" cap="all" baseline="0">
+                <a:solidFill>
+                  <a:schemeClr val="tx1"/>
+                </a:solidFill>
+                <a:effectLst/>
+                <a:latin typeface="Batang" panose="02030600000101010101" pitchFamily="18" charset="-127"/>
+                <a:ea typeface="Batang" panose="02030600000101010101" pitchFamily="18" charset="-127"/>
+                <a:cs typeface="+mj-cs"/>
+              </a:defRPr>
+            </a:lvl1pPr>
+          </a:lstStyle>
+          <a:p>
+            <a:pPr algn="l"/>
+            <a:r>
+              <a:rPr lang="en-US" altLang="ko-KR" b="1" cap="none" dirty="0"/>
+              <a:t>FCN(Fully Convolutional Network)</a:t>
+            </a:r>
+          </a:p>
+        </p:txBody>
+      </p:sp>
+      <p:sp>
+        <p:nvSpPr>
+          <p:cNvPr id="11" name="AutoShape 2" descr="라이트박스에 표시된 선택된 이미지">
+            <a:extLst>
+              <a:ext uri="{FF2B5EF4-FFF2-40B4-BE49-F238E27FC236}">
+                <a16:creationId xmlns:a16="http://schemas.microsoft.com/office/drawing/2014/main" id="{8B188ADE-2F9A-8127-1D51-68AFD92D095C}"/>
+              </a:ext>
+            </a:extLst>
+          </p:cNvPr>
+          <p:cNvSpPr>
+            <a:spLocks noChangeAspect="1" noChangeArrowheads="1"/>
+          </p:cNvSpPr>
+          <p:nvPr/>
+        </p:nvSpPr>
+        <p:spPr bwMode="auto">
+          <a:xfrm>
+            <a:off x="5838825" y="2828925"/>
+            <a:ext cx="304800" cy="304800"/>
+          </a:xfrm>
+          <a:prstGeom prst="rect">
+            <a:avLst/>
+          </a:prstGeom>
+          <a:noFill/>
+          <a:extLst>
+            <a:ext uri="{909E8E84-426E-40DD-AFC4-6F175D3DCCD1}">
+              <a14:hiddenFill xmlns:a14="http://schemas.microsoft.com/office/drawing/2010/main">
+                <a:solidFill>
+                  <a:srgbClr val="FFFFFF"/>
+                </a:solidFill>
+              </a14:hiddenFill>
+            </a:ext>
+          </a:extLst>
+        </p:spPr>
+        <p:txBody>
+          <a:bodyPr vert="horz" wrap="square" lIns="91440" tIns="45720" rIns="91440" bIns="45720" numCol="1" anchor="t" anchorCtr="0" compatLnSpc="1">
+            <a:prstTxWarp prst="textNoShape">
+              <a:avLst/>
+            </a:prstTxWarp>
+          </a:bodyPr>
+          <a:lstStyle/>
+          <a:p>
+            <a:endParaRPr lang="ko-KR" altLang="en-US"/>
+          </a:p>
+        </p:txBody>
+      </p:sp>
+      <p:sp>
+        <p:nvSpPr>
+          <p:cNvPr id="2" name="슬라이드 번호 개체 틀 3">
+            <a:extLst>
+              <a:ext uri="{FF2B5EF4-FFF2-40B4-BE49-F238E27FC236}">
+                <a16:creationId xmlns:a16="http://schemas.microsoft.com/office/drawing/2014/main" id="{1E649C9B-E7B2-5444-3BEE-F381AD5327F9}"/>
+              </a:ext>
+            </a:extLst>
+          </p:cNvPr>
+          <p:cNvSpPr txBox="1">
+            <a:spLocks/>
+          </p:cNvSpPr>
+          <p:nvPr/>
+        </p:nvSpPr>
+        <p:spPr>
+          <a:xfrm>
+            <a:off x="11180761" y="299420"/>
+            <a:ext cx="753545" cy="365125"/>
+          </a:xfrm>
+          <a:prstGeom prst="rect">
+            <a:avLst/>
+          </a:prstGeom>
+        </p:spPr>
+        <p:txBody>
+          <a:bodyPr vert="horz" lIns="91440" tIns="45720" rIns="91440" bIns="45720" rtlCol="0" anchor="ctr"/>
+          <a:lstStyle>
+            <a:defPPr rtl="0">
+              <a:defRPr lang="ko-KR"/>
+            </a:defPPr>
+            <a:lvl1pPr marL="0" algn="r" defTabSz="914400" rtl="0" eaLnBrk="1" latinLnBrk="0" hangingPunct="1">
+              <a:defRPr sz="1200" kern="1200" baseline="0">
+                <a:solidFill>
+                  <a:schemeClr val="tx1">
+                    <a:lumMod val="65000"/>
+                    <a:lumOff val="35000"/>
+                  </a:schemeClr>
+                </a:solidFill>
+                <a:latin typeface="맑은 고딕" panose="020B0503020000020004" pitchFamily="50" charset="-127"/>
+                <a:ea typeface="맑은 고딕" panose="020B0503020000020004" pitchFamily="50" charset="-127"/>
+                <a:cs typeface="+mn-cs"/>
+              </a:defRPr>
+            </a:lvl1pPr>
+            <a:lvl2pPr marL="457200" algn="l" defTabSz="914400" rtl="0" eaLnBrk="1" latinLnBrk="0" hangingPunct="1">
+              <a:defRPr sz="1800" kern="1200">
+                <a:solidFill>
+                  <a:schemeClr val="tx1"/>
+                </a:solidFill>
+                <a:latin typeface="+mn-lt"/>
+                <a:ea typeface="+mn-ea"/>
+                <a:cs typeface="+mn-cs"/>
+              </a:defRPr>
+            </a:lvl2pPr>
+            <a:lvl3pPr marL="914400" algn="l" defTabSz="914400" rtl="0" eaLnBrk="1" latinLnBrk="0" hangingPunct="1">
+              <a:defRPr sz="1800" kern="1200">
+                <a:solidFill>
+                  <a:schemeClr val="tx1"/>
+                </a:solidFill>
+                <a:latin typeface="+mn-lt"/>
+                <a:ea typeface="+mn-ea"/>
+                <a:cs typeface="+mn-cs"/>
+              </a:defRPr>
+            </a:lvl3pPr>
+            <a:lvl4pPr marL="1371600" algn="l" defTabSz="914400" rtl="0" eaLnBrk="1" latinLnBrk="0" hangingPunct="1">
+              <a:defRPr sz="1800" kern="1200">
+                <a:solidFill>
+                  <a:schemeClr val="tx1"/>
+                </a:solidFill>
+                <a:latin typeface="+mn-lt"/>
+                <a:ea typeface="+mn-ea"/>
+                <a:cs typeface="+mn-cs"/>
+              </a:defRPr>
+            </a:lvl4pPr>
+            <a:lvl5pPr marL="1828800" algn="l" defTabSz="914400" rtl="0" eaLnBrk="1" latinLnBrk="0" hangingPunct="1">
+              <a:defRPr sz="1800" kern="1200">
+                <a:solidFill>
+                  <a:schemeClr val="tx1"/>
+                </a:solidFill>
+                <a:latin typeface="+mn-lt"/>
+                <a:ea typeface="+mn-ea"/>
+                <a:cs typeface="+mn-cs"/>
+              </a:defRPr>
+            </a:lvl5pPr>
+            <a:lvl6pPr marL="2286000" algn="l" defTabSz="914400" rtl="0" eaLnBrk="1" latinLnBrk="0" hangingPunct="1">
+              <a:defRPr sz="1800" kern="1200">
+                <a:solidFill>
+                  <a:schemeClr val="tx1"/>
+                </a:solidFill>
+                <a:latin typeface="+mn-lt"/>
+                <a:ea typeface="+mn-ea"/>
+                <a:cs typeface="+mn-cs"/>
+              </a:defRPr>
+            </a:lvl6pPr>
+            <a:lvl7pPr marL="2743200" algn="l" defTabSz="914400" rtl="0" eaLnBrk="1" latinLnBrk="0" hangingPunct="1">
+              <a:defRPr sz="1800" kern="1200">
+                <a:solidFill>
+                  <a:schemeClr val="tx1"/>
+                </a:solidFill>
+                <a:latin typeface="+mn-lt"/>
+                <a:ea typeface="+mn-ea"/>
+                <a:cs typeface="+mn-cs"/>
+              </a:defRPr>
+            </a:lvl7pPr>
+            <a:lvl8pPr marL="3200400" algn="l" defTabSz="914400" rtl="0" eaLnBrk="1" latinLnBrk="0" hangingPunct="1">
+              <a:defRPr sz="1800" kern="1200">
+                <a:solidFill>
+                  <a:schemeClr val="tx1"/>
+                </a:solidFill>
+                <a:latin typeface="+mn-lt"/>
+                <a:ea typeface="+mn-ea"/>
+                <a:cs typeface="+mn-cs"/>
+              </a:defRPr>
+            </a:lvl8pPr>
+            <a:lvl9pPr marL="3657600" algn="l" defTabSz="914400" rtl="0" eaLnBrk="1" latinLnBrk="0" hangingPunct="1">
+              <a:defRPr sz="1800" kern="1200">
+                <a:solidFill>
+                  <a:schemeClr val="tx1"/>
+                </a:solidFill>
+                <a:latin typeface="+mn-lt"/>
+                <a:ea typeface="+mn-ea"/>
+                <a:cs typeface="+mn-cs"/>
+              </a:defRPr>
+            </a:lvl9pPr>
+          </a:lstStyle>
+          <a:p>
+            <a:fld id="{D57F1E4F-1CFF-5643-939E-217C01CDF565}" type="slidenum">
+              <a:rPr lang="en-US" b="1" smtClean="0">
+                <a:latin typeface="Segoe UI Emoji" panose="020B0502040204020203" pitchFamily="34" charset="0"/>
+                <a:ea typeface="Segoe UI Emoji" panose="020B0502040204020203" pitchFamily="34" charset="0"/>
+              </a:rPr>
+              <a:pPr/>
+              <a:t>28</a:t>
+            </a:fld>
+            <a:endParaRPr lang="en-US" b="1" dirty="0">
+              <a:latin typeface="Segoe UI Emoji" panose="020B0502040204020203" pitchFamily="34" charset="0"/>
+              <a:ea typeface="Segoe UI Emoji" panose="020B0502040204020203" pitchFamily="34" charset="0"/>
+            </a:endParaRPr>
+          </a:p>
+        </p:txBody>
+      </p:sp>
+      <p:pic>
+        <p:nvPicPr>
+          <p:cNvPr id="14" name="그림 13">
+            <a:extLst>
+              <a:ext uri="{FF2B5EF4-FFF2-40B4-BE49-F238E27FC236}">
+                <a16:creationId xmlns:a16="http://schemas.microsoft.com/office/drawing/2014/main" id="{CFA9E6E0-2810-40A9-F605-954A057207D9}"/>
+              </a:ext>
+            </a:extLst>
+          </p:cNvPr>
+          <p:cNvPicPr>
+            <a:picLocks noChangeAspect="1"/>
+          </p:cNvPicPr>
+          <p:nvPr/>
+        </p:nvPicPr>
+        <p:blipFill>
+          <a:blip r:embed="rId2"/>
+          <a:stretch>
+            <a:fillRect/>
+          </a:stretch>
+        </p:blipFill>
+        <p:spPr>
+          <a:xfrm>
+            <a:off x="575994" y="1829859"/>
+            <a:ext cx="5041780" cy="3198282"/>
+          </a:xfrm>
+          <a:prstGeom prst="rect">
+            <a:avLst/>
+          </a:prstGeom>
+        </p:spPr>
+      </p:pic>
+      <p:sp>
+        <p:nvSpPr>
+          <p:cNvPr id="16" name="TextBox 15">
+            <a:extLst>
+              <a:ext uri="{FF2B5EF4-FFF2-40B4-BE49-F238E27FC236}">
+                <a16:creationId xmlns:a16="http://schemas.microsoft.com/office/drawing/2014/main" id="{6F4F9D1E-9110-B139-ECC9-5FF49AB52F1B}"/>
+              </a:ext>
+            </a:extLst>
+          </p:cNvPr>
+          <p:cNvSpPr txBox="1"/>
+          <p:nvPr/>
+        </p:nvSpPr>
+        <p:spPr>
+          <a:xfrm>
+            <a:off x="475645" y="1407832"/>
+            <a:ext cx="6096000" cy="315471"/>
+          </a:xfrm>
+          <a:prstGeom prst="rect">
+            <a:avLst/>
+          </a:prstGeom>
+          <a:noFill/>
+        </p:spPr>
+        <p:txBody>
+          <a:bodyPr wrap="square">
+            <a:spAutoFit/>
+          </a:bodyPr>
+          <a:lstStyle/>
+          <a:p>
+            <a:pPr>
+              <a:lnSpc>
+                <a:spcPts val="1575"/>
+              </a:lnSpc>
+              <a:buNone/>
+            </a:pPr>
+            <a:r>
+              <a:rPr lang="en-US" altLang="ko-KR" b="0" dirty="0" err="1">
+                <a:effectLst/>
+                <a:latin typeface="D2Coding" panose="020B0609020101020101" pitchFamily="49" charset="-127"/>
+                <a:ea typeface="D2Coding" panose="020B0609020101020101" pitchFamily="49" charset="-127"/>
+              </a:rPr>
+              <a:t>fcn_model.summary</a:t>
+            </a:r>
+            <a:r>
+              <a:rPr lang="en-US" altLang="ko-KR" b="0" dirty="0">
+                <a:effectLst/>
+                <a:latin typeface="D2Coding" panose="020B0609020101020101" pitchFamily="49" charset="-127"/>
+                <a:ea typeface="D2Coding" panose="020B0609020101020101" pitchFamily="49" charset="-127"/>
+              </a:rPr>
+              <a:t>()</a:t>
+            </a:r>
+          </a:p>
+        </p:txBody>
+      </p:sp>
+      <p:graphicFrame>
+        <p:nvGraphicFramePr>
+          <p:cNvPr id="17" name="표 16">
+            <a:extLst>
+              <a:ext uri="{FF2B5EF4-FFF2-40B4-BE49-F238E27FC236}">
+                <a16:creationId xmlns:a16="http://schemas.microsoft.com/office/drawing/2014/main" id="{CD3AAC76-CB6E-E7E4-263C-35835ED27EDA}"/>
+              </a:ext>
+            </a:extLst>
+          </p:cNvPr>
+          <p:cNvGraphicFramePr>
+            <a:graphicFrameLocks noGrp="1"/>
+          </p:cNvGraphicFramePr>
+          <p:nvPr>
+            <p:extLst>
+              <p:ext uri="{D42A27DB-BD31-4B8C-83A1-F6EECF244321}">
+                <p14:modId xmlns:p14="http://schemas.microsoft.com/office/powerpoint/2010/main" val="2784715122"/>
+              </p:ext>
+            </p:extLst>
+          </p:nvPr>
+        </p:nvGraphicFramePr>
+        <p:xfrm>
+          <a:off x="5652526" y="2049610"/>
+          <a:ext cx="6165841" cy="2758780"/>
+        </p:xfrm>
+        <a:graphic>
+          <a:graphicData uri="http://schemas.openxmlformats.org/drawingml/2006/table">
+            <a:tbl>
+              <a:tblPr>
+                <a:tableStyleId>{775DCB02-9BB8-47FD-8907-85C794F793BA}</a:tableStyleId>
+              </a:tblPr>
+              <a:tblGrid>
+                <a:gridCol w="1319774">
+                  <a:extLst>
+                    <a:ext uri="{9D8B030D-6E8A-4147-A177-3AD203B41FA5}">
+                      <a16:colId xmlns:a16="http://schemas.microsoft.com/office/drawing/2014/main" val="4007595343"/>
+                    </a:ext>
+                  </a:extLst>
+                </a:gridCol>
+                <a:gridCol w="590550">
+                  <a:extLst>
+                    <a:ext uri="{9D8B030D-6E8A-4147-A177-3AD203B41FA5}">
+                      <a16:colId xmlns:a16="http://schemas.microsoft.com/office/drawing/2014/main" val="2846901273"/>
+                    </a:ext>
+                  </a:extLst>
+                </a:gridCol>
+                <a:gridCol w="647700">
+                  <a:extLst>
+                    <a:ext uri="{9D8B030D-6E8A-4147-A177-3AD203B41FA5}">
+                      <a16:colId xmlns:a16="http://schemas.microsoft.com/office/drawing/2014/main" val="2627887502"/>
+                    </a:ext>
+                  </a:extLst>
+                </a:gridCol>
+                <a:gridCol w="495300">
+                  <a:extLst>
+                    <a:ext uri="{9D8B030D-6E8A-4147-A177-3AD203B41FA5}">
+                      <a16:colId xmlns:a16="http://schemas.microsoft.com/office/drawing/2014/main" val="2982397368"/>
+                    </a:ext>
+                  </a:extLst>
+                </a:gridCol>
+                <a:gridCol w="2486025">
+                  <a:extLst>
+                    <a:ext uri="{9D8B030D-6E8A-4147-A177-3AD203B41FA5}">
+                      <a16:colId xmlns:a16="http://schemas.microsoft.com/office/drawing/2014/main" val="3133557278"/>
+                    </a:ext>
+                  </a:extLst>
+                </a:gridCol>
+                <a:gridCol w="626492">
+                  <a:extLst>
+                    <a:ext uri="{9D8B030D-6E8A-4147-A177-3AD203B41FA5}">
+                      <a16:colId xmlns:a16="http://schemas.microsoft.com/office/drawing/2014/main" val="2349011138"/>
+                    </a:ext>
+                  </a:extLst>
+                </a:gridCol>
+              </a:tblGrid>
+              <a:tr h="347132">
+                <a:tc>
+                  <a:txBody>
+                    <a:bodyPr/>
+                    <a:lstStyle/>
+                    <a:p>
+                      <a:pPr algn="l" rtl="0" fontAlgn="b">
+                        <a:buNone/>
+                      </a:pPr>
+                      <a:r>
+                        <a:rPr lang="ko-KR" altLang="en-US" sz="1000" dirty="0">
+                          <a:effectLst/>
+                        </a:rPr>
+                        <a:t>레이어 </a:t>
+                      </a:r>
+                      <a:r>
+                        <a:rPr lang="en-US" altLang="ko-KR" sz="1000" dirty="0">
+                          <a:effectLst/>
+                        </a:rPr>
+                        <a:t>(</a:t>
+                      </a:r>
+                      <a:r>
+                        <a:rPr lang="en-US" sz="1000" dirty="0">
+                          <a:effectLst/>
+                        </a:rPr>
+                        <a:t>Layer)</a:t>
+                      </a:r>
+                      <a:endParaRPr lang="en-US" sz="1000" dirty="0">
+                        <a:effectLst/>
+                        <a:latin typeface="D2Coding" panose="020B0609020101020101" pitchFamily="49" charset="-127"/>
+                        <a:ea typeface="D2Coding" panose="020B0609020101020101" pitchFamily="49" charset="-127"/>
+                      </a:endParaRPr>
+                    </a:p>
+                  </a:txBody>
+                  <a:tcPr marL="13813" marR="13813" marT="9209" marB="9209" anchor="b">
+                    <a:lnL w="12700" cap="flat" cmpd="sng" algn="ctr">
+                      <a:solidFill>
+                        <a:schemeClr val="tx1"/>
+                      </a:solidFill>
+                      <a:prstDash val="solid"/>
+                      <a:round/>
+                      <a:headEnd type="none" w="med" len="med"/>
+                      <a:tailEnd type="none" w="med" len="med"/>
+                    </a:lnL>
+                    <a:lnR w="6350" cap="flat" cmpd="sng" algn="ctr">
+                      <a:noFill/>
+                      <a:prstDash val="solid"/>
+                      <a:miter lim="800000"/>
+                    </a:lnR>
+                    <a:lnT w="12700" cap="flat" cmpd="sng" algn="ctr">
+                      <a:solidFill>
+                        <a:schemeClr val="tx1"/>
+                      </a:solidFill>
+                      <a:prstDash val="solid"/>
+                      <a:round/>
+                      <a:headEnd type="none" w="med" len="med"/>
+                      <a:tailEnd type="none" w="med" len="med"/>
+                    </a:lnT>
+                    <a:lnB w="12700" cap="flat" cmpd="sng" algn="ctr">
+                      <a:solidFill>
+                        <a:schemeClr val="tx1"/>
+                      </a:solidFill>
+                      <a:prstDash val="solid"/>
+                      <a:round/>
+                      <a:headEnd type="none" w="med" len="med"/>
+                      <a:tailEnd type="none" w="med" len="med"/>
+                    </a:lnB>
+                    <a:lnTlToBr w="12700" cmpd="sng">
+                      <a:noFill/>
+                      <a:prstDash val="solid"/>
+                    </a:lnTlToBr>
+                    <a:lnBlToTr w="12700" cmpd="sng">
+                      <a:noFill/>
+                      <a:prstDash val="solid"/>
+                    </a:lnBlToTr>
+                  </a:tcPr>
+                </a:tc>
+                <a:tc>
+                  <a:txBody>
+                    <a:bodyPr/>
+                    <a:lstStyle/>
+                    <a:p>
+                      <a:pPr algn="l" rtl="0" fontAlgn="b">
+                        <a:buNone/>
+                      </a:pPr>
+                      <a:r>
+                        <a:rPr lang="ko-KR" altLang="en-US" sz="1000" dirty="0">
+                          <a:effectLst/>
+                        </a:rPr>
+                        <a:t>입력 채널</a:t>
+                      </a:r>
+                      <a:endParaRPr lang="ko-KR" altLang="en-US" sz="1000" dirty="0">
+                        <a:effectLst/>
+                        <a:latin typeface="D2Coding" panose="020B0609020101020101" pitchFamily="49" charset="-127"/>
+                        <a:ea typeface="D2Coding" panose="020B0609020101020101" pitchFamily="49" charset="-127"/>
+                      </a:endParaRPr>
+                    </a:p>
+                  </a:txBody>
+                  <a:tcPr marL="13813" marR="13813" marT="9209" marB="9209" anchor="b">
+                    <a:lnL w="6350" cap="flat" cmpd="sng" algn="ctr">
+                      <a:noFill/>
+                      <a:prstDash val="solid"/>
+                      <a:miter lim="800000"/>
+                    </a:lnL>
+                    <a:lnR w="6350" cap="flat" cmpd="sng" algn="ctr">
+                      <a:noFill/>
+                      <a:prstDash val="solid"/>
+                      <a:miter lim="800000"/>
+                    </a:lnR>
+                    <a:lnT w="12700" cap="flat" cmpd="sng" algn="ctr">
+                      <a:solidFill>
+                        <a:schemeClr val="tx1"/>
+                      </a:solidFill>
+                      <a:prstDash val="solid"/>
+                      <a:round/>
+                      <a:headEnd type="none" w="med" len="med"/>
+                      <a:tailEnd type="none" w="med" len="med"/>
+                    </a:lnT>
+                    <a:lnB w="12700" cap="flat" cmpd="sng" algn="ctr">
+                      <a:solidFill>
+                        <a:schemeClr val="tx1"/>
+                      </a:solidFill>
+                      <a:prstDash val="solid"/>
+                      <a:round/>
+                      <a:headEnd type="none" w="med" len="med"/>
+                      <a:tailEnd type="none" w="med" len="med"/>
+                    </a:lnB>
+                    <a:lnTlToBr w="12700" cmpd="sng">
+                      <a:noFill/>
+                      <a:prstDash val="solid"/>
+                    </a:lnTlToBr>
+                    <a:lnBlToTr w="12700" cmpd="sng">
+                      <a:noFill/>
+                      <a:prstDash val="solid"/>
+                    </a:lnBlToTr>
+                  </a:tcPr>
+                </a:tc>
+                <a:tc>
+                  <a:txBody>
+                    <a:bodyPr/>
+                    <a:lstStyle/>
+                    <a:p>
+                      <a:pPr algn="l" rtl="0" fontAlgn="b">
+                        <a:buNone/>
+                      </a:pPr>
+                      <a:r>
+                        <a:rPr lang="ko-KR" altLang="en-US" sz="1000" dirty="0">
+                          <a:effectLst/>
+                        </a:rPr>
+                        <a:t>커널 크기</a:t>
+                      </a:r>
+                      <a:endParaRPr lang="ko-KR" altLang="en-US" sz="1000" dirty="0">
+                        <a:effectLst/>
+                        <a:latin typeface="D2Coding" panose="020B0609020101020101" pitchFamily="49" charset="-127"/>
+                        <a:ea typeface="D2Coding" panose="020B0609020101020101" pitchFamily="49" charset="-127"/>
+                      </a:endParaRPr>
+                    </a:p>
+                  </a:txBody>
+                  <a:tcPr marL="13813" marR="13813" marT="9209" marB="9209" anchor="b">
+                    <a:lnL w="6350" cap="flat" cmpd="sng" algn="ctr">
+                      <a:noFill/>
+                      <a:prstDash val="solid"/>
+                      <a:miter lim="800000"/>
+                    </a:lnL>
+                    <a:lnR w="6350" cap="flat" cmpd="sng" algn="ctr">
+                      <a:noFill/>
+                      <a:prstDash val="solid"/>
+                      <a:miter lim="800000"/>
+                    </a:lnR>
+                    <a:lnT w="12700" cap="flat" cmpd="sng" algn="ctr">
+                      <a:solidFill>
+                        <a:schemeClr val="tx1"/>
+                      </a:solidFill>
+                      <a:prstDash val="solid"/>
+                      <a:round/>
+                      <a:headEnd type="none" w="med" len="med"/>
+                      <a:tailEnd type="none" w="med" len="med"/>
+                    </a:lnT>
+                    <a:lnB w="12700" cap="flat" cmpd="sng" algn="ctr">
+                      <a:solidFill>
+                        <a:schemeClr val="tx1"/>
+                      </a:solidFill>
+                      <a:prstDash val="solid"/>
+                      <a:round/>
+                      <a:headEnd type="none" w="med" len="med"/>
+                      <a:tailEnd type="none" w="med" len="med"/>
+                    </a:lnB>
+                    <a:lnTlToBr w="12700" cmpd="sng">
+                      <a:noFill/>
+                      <a:prstDash val="solid"/>
+                    </a:lnTlToBr>
+                    <a:lnBlToTr w="12700" cmpd="sng">
+                      <a:noFill/>
+                      <a:prstDash val="solid"/>
+                    </a:lnBlToTr>
+                  </a:tcPr>
+                </a:tc>
+                <a:tc>
+                  <a:txBody>
+                    <a:bodyPr/>
+                    <a:lstStyle/>
+                    <a:p>
+                      <a:pPr algn="l" rtl="0" fontAlgn="b">
+                        <a:buNone/>
+                      </a:pPr>
+                      <a:r>
+                        <a:rPr lang="ko-KR" altLang="en-US" sz="1000">
+                          <a:effectLst/>
+                        </a:rPr>
+                        <a:t>필터 수</a:t>
+                      </a:r>
+                      <a:endParaRPr lang="ko-KR" altLang="en-US" sz="1000">
+                        <a:effectLst/>
+                        <a:latin typeface="D2Coding" panose="020B0609020101020101" pitchFamily="49" charset="-127"/>
+                        <a:ea typeface="D2Coding" panose="020B0609020101020101" pitchFamily="49" charset="-127"/>
+                      </a:endParaRPr>
+                    </a:p>
+                  </a:txBody>
+                  <a:tcPr marL="13813" marR="13813" marT="9209" marB="9209" anchor="b">
+                    <a:lnL w="6350" cap="flat" cmpd="sng" algn="ctr">
+                      <a:noFill/>
+                      <a:prstDash val="solid"/>
+                      <a:miter lim="800000"/>
+                    </a:lnL>
+                    <a:lnR w="6350" cap="flat" cmpd="sng" algn="ctr">
+                      <a:noFill/>
+                      <a:prstDash val="solid"/>
+                      <a:miter lim="800000"/>
+                    </a:lnR>
+                    <a:lnT w="12700" cap="flat" cmpd="sng" algn="ctr">
+                      <a:solidFill>
+                        <a:schemeClr val="tx1"/>
+                      </a:solidFill>
+                      <a:prstDash val="solid"/>
+                      <a:round/>
+                      <a:headEnd type="none" w="med" len="med"/>
+                      <a:tailEnd type="none" w="med" len="med"/>
+                    </a:lnT>
+                    <a:lnB w="12700" cap="flat" cmpd="sng" algn="ctr">
+                      <a:solidFill>
+                        <a:schemeClr val="tx1"/>
+                      </a:solidFill>
+                      <a:prstDash val="solid"/>
+                      <a:round/>
+                      <a:headEnd type="none" w="med" len="med"/>
+                      <a:tailEnd type="none" w="med" len="med"/>
+                    </a:lnB>
+                    <a:lnTlToBr w="12700" cmpd="sng">
+                      <a:noFill/>
+                      <a:prstDash val="solid"/>
+                    </a:lnTlToBr>
+                    <a:lnBlToTr w="12700" cmpd="sng">
+                      <a:noFill/>
+                      <a:prstDash val="solid"/>
+                    </a:lnBlToTr>
+                  </a:tcPr>
+                </a:tc>
+                <a:tc>
+                  <a:txBody>
+                    <a:bodyPr/>
+                    <a:lstStyle/>
+                    <a:p>
+                      <a:pPr algn="l" rtl="0" fontAlgn="b">
+                        <a:buNone/>
+                      </a:pPr>
+                      <a:r>
+                        <a:rPr lang="ko-KR" altLang="en-US" sz="1000" dirty="0">
+                          <a:effectLst/>
+                        </a:rPr>
+                        <a:t>상세 계산 수식</a:t>
+                      </a:r>
+                      <a:endParaRPr lang="ko-KR" altLang="en-US" sz="1000" dirty="0">
+                        <a:effectLst/>
+                        <a:latin typeface="D2Coding" panose="020B0609020101020101" pitchFamily="49" charset="-127"/>
+                        <a:ea typeface="D2Coding" panose="020B0609020101020101" pitchFamily="49" charset="-127"/>
+                      </a:endParaRPr>
+                    </a:p>
+                  </a:txBody>
+                  <a:tcPr marL="13813" marR="13813" marT="9209" marB="9209" anchor="b">
+                    <a:lnL w="6350" cap="flat" cmpd="sng" algn="ctr">
+                      <a:noFill/>
+                      <a:prstDash val="solid"/>
+                      <a:miter lim="800000"/>
+                    </a:lnL>
+                    <a:lnR w="6350" cap="flat" cmpd="sng" algn="ctr">
+                      <a:noFill/>
+                      <a:prstDash val="solid"/>
+                      <a:miter lim="800000"/>
+                    </a:lnR>
+                    <a:lnT w="12700" cap="flat" cmpd="sng" algn="ctr">
+                      <a:solidFill>
+                        <a:schemeClr val="tx1"/>
+                      </a:solidFill>
+                      <a:prstDash val="solid"/>
+                      <a:round/>
+                      <a:headEnd type="none" w="med" len="med"/>
+                      <a:tailEnd type="none" w="med" len="med"/>
+                    </a:lnT>
+                    <a:lnB w="12700" cap="flat" cmpd="sng" algn="ctr">
+                      <a:solidFill>
+                        <a:schemeClr val="tx1"/>
+                      </a:solidFill>
+                      <a:prstDash val="solid"/>
+                      <a:round/>
+                      <a:headEnd type="none" w="med" len="med"/>
+                      <a:tailEnd type="none" w="med" len="med"/>
+                    </a:lnB>
+                    <a:lnTlToBr w="12700" cmpd="sng">
+                      <a:noFill/>
+                      <a:prstDash val="solid"/>
+                    </a:lnTlToBr>
+                    <a:lnBlToTr w="12700" cmpd="sng">
+                      <a:noFill/>
+                      <a:prstDash val="solid"/>
+                    </a:lnBlToTr>
+                  </a:tcPr>
+                </a:tc>
+                <a:tc>
+                  <a:txBody>
+                    <a:bodyPr/>
+                    <a:lstStyle/>
+                    <a:p>
+                      <a:pPr algn="l" rtl="0" fontAlgn="b">
+                        <a:buNone/>
+                      </a:pPr>
+                      <a:r>
+                        <a:rPr lang="ko-KR" altLang="en-US" sz="1000" dirty="0">
+                          <a:effectLst/>
+                        </a:rPr>
+                        <a:t>파라미터 개수</a:t>
+                      </a:r>
+                      <a:endParaRPr lang="ko-KR" altLang="en-US" sz="1000" dirty="0">
+                        <a:effectLst/>
+                        <a:latin typeface="D2Coding" panose="020B0609020101020101" pitchFamily="49" charset="-127"/>
+                        <a:ea typeface="D2Coding" panose="020B0609020101020101" pitchFamily="49" charset="-127"/>
+                      </a:endParaRPr>
+                    </a:p>
+                  </a:txBody>
+                  <a:tcPr marL="13813" marR="13813" marT="9209" marB="9209" anchor="b">
+                    <a:lnL w="6350" cap="flat" cmpd="sng" algn="ctr">
+                      <a:noFill/>
+                      <a:prstDash val="solid"/>
+                      <a:miter lim="800000"/>
+                    </a:lnL>
+                    <a:lnR w="12700" cap="flat" cmpd="sng" algn="ctr">
+                      <a:solidFill>
+                        <a:schemeClr val="tx1"/>
+                      </a:solidFill>
+                      <a:prstDash val="solid"/>
+                      <a:round/>
+                      <a:headEnd type="none" w="med" len="med"/>
+                      <a:tailEnd type="none" w="med" len="med"/>
+                    </a:lnR>
+                    <a:lnT w="12700" cap="flat" cmpd="sng" algn="ctr">
+                      <a:solidFill>
+                        <a:schemeClr val="tx1"/>
+                      </a:solidFill>
+                      <a:prstDash val="solid"/>
+                      <a:round/>
+                      <a:headEnd type="none" w="med" len="med"/>
+                      <a:tailEnd type="none" w="med" len="med"/>
+                    </a:lnT>
+                    <a:lnB w="12700" cap="flat" cmpd="sng" algn="ctr">
+                      <a:solidFill>
+                        <a:schemeClr val="tx1"/>
+                      </a:solidFill>
+                      <a:prstDash val="solid"/>
+                      <a:round/>
+                      <a:headEnd type="none" w="med" len="med"/>
+                      <a:tailEnd type="none" w="med" len="med"/>
+                    </a:lnB>
+                    <a:lnTlToBr w="12700" cmpd="sng">
+                      <a:noFill/>
+                      <a:prstDash val="solid"/>
+                    </a:lnTlToBr>
+                    <a:lnBlToTr w="12700" cmpd="sng">
+                      <a:noFill/>
+                      <a:prstDash val="solid"/>
+                    </a:lnBlToTr>
+                  </a:tcPr>
+                </a:tc>
+                <a:extLst>
+                  <a:ext uri="{0D108BD9-81ED-4DB2-BD59-A6C34878D82A}">
+                    <a16:rowId xmlns:a16="http://schemas.microsoft.com/office/drawing/2014/main" val="3063701322"/>
+                  </a:ext>
+                </a:extLst>
+              </a:tr>
+              <a:tr h="301456">
+                <a:tc>
+                  <a:txBody>
+                    <a:bodyPr/>
+                    <a:lstStyle/>
+                    <a:p>
+                      <a:pPr algn="l" rtl="0" fontAlgn="b">
+                        <a:buNone/>
+                      </a:pPr>
+                      <a:r>
+                        <a:rPr lang="en-US" sz="1000" dirty="0">
+                          <a:effectLst/>
+                        </a:rPr>
+                        <a:t>Conv2D_1</a:t>
+                      </a:r>
+                      <a:endParaRPr lang="en-US" sz="1000" dirty="0">
+                        <a:effectLst/>
+                        <a:latin typeface="D2Coding" panose="020B0609020101020101" pitchFamily="49" charset="-127"/>
+                        <a:ea typeface="D2Coding" panose="020B0609020101020101" pitchFamily="49" charset="-127"/>
+                      </a:endParaRPr>
+                    </a:p>
+                  </a:txBody>
+                  <a:tcPr marL="13813" marR="13813" marT="9209" marB="9209" anchor="b">
+                    <a:lnL w="12700" cap="flat" cmpd="sng" algn="ctr">
+                      <a:solidFill>
+                        <a:schemeClr val="tx1"/>
+                      </a:solidFill>
+                      <a:prstDash val="solid"/>
+                      <a:round/>
+                      <a:headEnd type="none" w="med" len="med"/>
+                      <a:tailEnd type="none" w="med" len="med"/>
+                    </a:lnL>
+                    <a:lnR w="6350" cap="flat" cmpd="sng" algn="ctr">
+                      <a:noFill/>
+                      <a:prstDash val="solid"/>
+                      <a:miter lim="800000"/>
+                    </a:lnR>
+                    <a:lnT w="12700" cap="flat" cmpd="sng" algn="ctr">
+                      <a:solidFill>
+                        <a:schemeClr val="tx1"/>
+                      </a:solidFill>
+                      <a:prstDash val="solid"/>
+                      <a:round/>
+                      <a:headEnd type="none" w="med" len="med"/>
+                      <a:tailEnd type="none" w="med" len="med"/>
+                    </a:lnT>
+                    <a:lnB w="6350" cap="flat" cmpd="sng" algn="ctr">
+                      <a:noFill/>
+                      <a:prstDash val="solid"/>
+                      <a:miter lim="800000"/>
+                    </a:lnB>
+                    <a:lnTlToBr w="12700" cmpd="sng">
+                      <a:noFill/>
+                      <a:prstDash val="solid"/>
+                    </a:lnTlToBr>
+                    <a:lnBlToTr w="12700" cmpd="sng">
+                      <a:noFill/>
+                      <a:prstDash val="solid"/>
+                    </a:lnBlToTr>
+                  </a:tcPr>
+                </a:tc>
+                <a:tc>
+                  <a:txBody>
+                    <a:bodyPr/>
+                    <a:lstStyle/>
+                    <a:p>
+                      <a:pPr algn="l" rtl="0" fontAlgn="b">
+                        <a:buNone/>
+                      </a:pPr>
+                      <a:r>
+                        <a:rPr lang="en-US" altLang="ko-KR" sz="1000">
+                          <a:effectLst/>
+                        </a:rPr>
+                        <a:t>1</a:t>
+                      </a:r>
+                      <a:endParaRPr lang="en-US" altLang="ko-KR" sz="1000">
+                        <a:effectLst/>
+                        <a:latin typeface="D2Coding" panose="020B0609020101020101" pitchFamily="49" charset="-127"/>
+                        <a:ea typeface="D2Coding" panose="020B0609020101020101" pitchFamily="49" charset="-127"/>
+                      </a:endParaRPr>
+                    </a:p>
+                  </a:txBody>
+                  <a:tcPr marL="13813" marR="13813" marT="9209" marB="9209" anchor="b">
+                    <a:lnL w="6350" cap="flat" cmpd="sng" algn="ctr">
+                      <a:noFill/>
+                      <a:prstDash val="solid"/>
+                      <a:miter lim="800000"/>
+                    </a:lnL>
+                    <a:lnR w="6350" cap="flat" cmpd="sng" algn="ctr">
+                      <a:noFill/>
+                      <a:prstDash val="solid"/>
+                      <a:miter lim="800000"/>
+                    </a:lnR>
+                    <a:lnT w="12700" cap="flat" cmpd="sng" algn="ctr">
+                      <a:solidFill>
+                        <a:schemeClr val="tx1"/>
+                      </a:solidFill>
+                      <a:prstDash val="solid"/>
+                      <a:round/>
+                      <a:headEnd type="none" w="med" len="med"/>
+                      <a:tailEnd type="none" w="med" len="med"/>
+                    </a:lnT>
+                    <a:lnB w="6350" cap="flat" cmpd="sng" algn="ctr">
+                      <a:noFill/>
+                      <a:prstDash val="solid"/>
+                      <a:miter lim="800000"/>
+                    </a:lnB>
+                    <a:lnTlToBr w="12700" cmpd="sng">
+                      <a:noFill/>
+                      <a:prstDash val="solid"/>
+                    </a:lnTlToBr>
+                    <a:lnBlToTr w="12700" cmpd="sng">
+                      <a:noFill/>
+                      <a:prstDash val="solid"/>
+                    </a:lnBlToTr>
+                  </a:tcPr>
+                </a:tc>
+                <a:tc>
+                  <a:txBody>
+                    <a:bodyPr/>
+                    <a:lstStyle/>
+                    <a:p>
+                      <a:pPr algn="l" rtl="0" fontAlgn="b">
+                        <a:buNone/>
+                      </a:pPr>
+                      <a:r>
+                        <a:rPr lang="en-US" altLang="ko-KR" sz="1000">
+                          <a:effectLst/>
+                        </a:rPr>
+                        <a:t>5×5</a:t>
+                      </a:r>
+                      <a:endParaRPr lang="en-US" altLang="ko-KR" sz="1000">
+                        <a:effectLst/>
+                        <a:latin typeface="D2Coding" panose="020B0609020101020101" pitchFamily="49" charset="-127"/>
+                        <a:ea typeface="D2Coding" panose="020B0609020101020101" pitchFamily="49" charset="-127"/>
+                      </a:endParaRPr>
+                    </a:p>
+                  </a:txBody>
+                  <a:tcPr marL="13813" marR="13813" marT="9209" marB="9209" anchor="b">
+                    <a:lnL w="6350" cap="flat" cmpd="sng" algn="ctr">
+                      <a:noFill/>
+                      <a:prstDash val="solid"/>
+                      <a:miter lim="800000"/>
+                    </a:lnL>
+                    <a:lnR w="6350" cap="flat" cmpd="sng" algn="ctr">
+                      <a:noFill/>
+                      <a:prstDash val="solid"/>
+                      <a:miter lim="800000"/>
+                    </a:lnR>
+                    <a:lnT w="12700" cap="flat" cmpd="sng" algn="ctr">
+                      <a:solidFill>
+                        <a:schemeClr val="tx1"/>
+                      </a:solidFill>
+                      <a:prstDash val="solid"/>
+                      <a:round/>
+                      <a:headEnd type="none" w="med" len="med"/>
+                      <a:tailEnd type="none" w="med" len="med"/>
+                    </a:lnT>
+                    <a:lnB w="6350" cap="flat" cmpd="sng" algn="ctr">
+                      <a:noFill/>
+                      <a:prstDash val="solid"/>
+                      <a:miter lim="800000"/>
+                    </a:lnB>
+                    <a:lnTlToBr w="12700" cmpd="sng">
+                      <a:noFill/>
+                      <a:prstDash val="solid"/>
+                    </a:lnTlToBr>
+                    <a:lnBlToTr w="12700" cmpd="sng">
+                      <a:noFill/>
+                      <a:prstDash val="solid"/>
+                    </a:lnBlToTr>
+                  </a:tcPr>
+                </a:tc>
+                <a:tc>
+                  <a:txBody>
+                    <a:bodyPr/>
+                    <a:lstStyle/>
+                    <a:p>
+                      <a:pPr algn="l" rtl="0" fontAlgn="b">
+                        <a:buNone/>
+                      </a:pPr>
+                      <a:r>
+                        <a:rPr lang="en-US" altLang="ko-KR" sz="1000">
+                          <a:effectLst/>
+                        </a:rPr>
+                        <a:t>6</a:t>
+                      </a:r>
+                      <a:endParaRPr lang="en-US" altLang="ko-KR" sz="1000">
+                        <a:effectLst/>
+                        <a:latin typeface="D2Coding" panose="020B0609020101020101" pitchFamily="49" charset="-127"/>
+                        <a:ea typeface="D2Coding" panose="020B0609020101020101" pitchFamily="49" charset="-127"/>
+                      </a:endParaRPr>
+                    </a:p>
+                  </a:txBody>
+                  <a:tcPr marL="13813" marR="13813" marT="9209" marB="9209" anchor="b">
+                    <a:lnL w="6350" cap="flat" cmpd="sng" algn="ctr">
+                      <a:noFill/>
+                      <a:prstDash val="solid"/>
+                      <a:miter lim="800000"/>
+                    </a:lnL>
+                    <a:lnR w="6350" cap="flat" cmpd="sng" algn="ctr">
+                      <a:noFill/>
+                      <a:prstDash val="solid"/>
+                      <a:miter lim="800000"/>
+                    </a:lnR>
+                    <a:lnT w="12700" cap="flat" cmpd="sng" algn="ctr">
+                      <a:solidFill>
+                        <a:schemeClr val="tx1"/>
+                      </a:solidFill>
+                      <a:prstDash val="solid"/>
+                      <a:round/>
+                      <a:headEnd type="none" w="med" len="med"/>
+                      <a:tailEnd type="none" w="med" len="med"/>
+                    </a:lnT>
+                    <a:lnB w="6350" cap="flat" cmpd="sng" algn="ctr">
+                      <a:noFill/>
+                      <a:prstDash val="solid"/>
+                      <a:miter lim="800000"/>
+                    </a:lnB>
+                    <a:lnTlToBr w="12700" cmpd="sng">
+                      <a:noFill/>
+                      <a:prstDash val="solid"/>
+                    </a:lnTlToBr>
+                    <a:lnBlToTr w="12700" cmpd="sng">
+                      <a:noFill/>
+                      <a:prstDash val="solid"/>
+                    </a:lnBlToTr>
+                  </a:tcPr>
+                </a:tc>
+                <a:tc>
+                  <a:txBody>
+                    <a:bodyPr/>
+                    <a:lstStyle/>
+                    <a:p>
+                      <a:pPr algn="l" rtl="0" fontAlgn="b">
+                        <a:buNone/>
+                      </a:pPr>
+                      <a:r>
+                        <a:rPr lang="en-US" altLang="ko-KR" sz="1000" dirty="0">
+                          <a:effectLst/>
+                        </a:rPr>
+                        <a:t>{(5×5×1)+1}×6=(25+1)×6=26×6</a:t>
+                      </a:r>
+                      <a:endParaRPr lang="en-US" altLang="ko-KR" sz="1000" dirty="0">
+                        <a:effectLst/>
+                        <a:latin typeface="D2Coding" panose="020B0609020101020101" pitchFamily="49" charset="-127"/>
+                        <a:ea typeface="D2Coding" panose="020B0609020101020101" pitchFamily="49" charset="-127"/>
+                      </a:endParaRPr>
+                    </a:p>
+                  </a:txBody>
+                  <a:tcPr marL="13813" marR="13813" marT="9209" marB="9209" anchor="b">
+                    <a:lnL w="6350" cap="flat" cmpd="sng" algn="ctr">
+                      <a:noFill/>
+                      <a:prstDash val="solid"/>
+                      <a:miter lim="800000"/>
+                    </a:lnL>
+                    <a:lnR w="6350" cap="flat" cmpd="sng" algn="ctr">
+                      <a:noFill/>
+                      <a:prstDash val="solid"/>
+                      <a:miter lim="800000"/>
+                    </a:lnR>
+                    <a:lnT w="12700" cap="flat" cmpd="sng" algn="ctr">
+                      <a:solidFill>
+                        <a:schemeClr val="tx1"/>
+                      </a:solidFill>
+                      <a:prstDash val="solid"/>
+                      <a:round/>
+                      <a:headEnd type="none" w="med" len="med"/>
+                      <a:tailEnd type="none" w="med" len="med"/>
+                    </a:lnT>
+                    <a:lnB w="6350" cap="flat" cmpd="sng" algn="ctr">
+                      <a:noFill/>
+                      <a:prstDash val="solid"/>
+                      <a:miter lim="800000"/>
+                    </a:lnB>
+                    <a:lnTlToBr w="12700" cmpd="sng">
+                      <a:noFill/>
+                      <a:prstDash val="solid"/>
+                    </a:lnTlToBr>
+                    <a:lnBlToTr w="12700" cmpd="sng">
+                      <a:noFill/>
+                      <a:prstDash val="solid"/>
+                    </a:lnBlToTr>
+                  </a:tcPr>
+                </a:tc>
+                <a:tc>
+                  <a:txBody>
+                    <a:bodyPr/>
+                    <a:lstStyle/>
+                    <a:p>
+                      <a:pPr algn="l" rtl="0" fontAlgn="b">
+                        <a:buNone/>
+                      </a:pPr>
+                      <a:r>
+                        <a:rPr lang="en-US" altLang="ko-KR" sz="1000">
+                          <a:effectLst/>
+                        </a:rPr>
+                        <a:t>156</a:t>
+                      </a:r>
+                      <a:endParaRPr lang="en-US" altLang="ko-KR" sz="1000">
+                        <a:effectLst/>
+                        <a:latin typeface="D2Coding" panose="020B0609020101020101" pitchFamily="49" charset="-127"/>
+                        <a:ea typeface="D2Coding" panose="020B0609020101020101" pitchFamily="49" charset="-127"/>
+                      </a:endParaRPr>
+                    </a:p>
+                  </a:txBody>
+                  <a:tcPr marL="13813" marR="13813" marT="9209" marB="9209" anchor="b">
+                    <a:lnL w="6350" cap="flat" cmpd="sng" algn="ctr">
+                      <a:noFill/>
+                      <a:prstDash val="solid"/>
+                      <a:miter lim="800000"/>
+                    </a:lnL>
+                    <a:lnR w="12700" cap="flat" cmpd="sng" algn="ctr">
+                      <a:solidFill>
+                        <a:schemeClr val="tx1"/>
+                      </a:solidFill>
+                      <a:prstDash val="solid"/>
+                      <a:round/>
+                      <a:headEnd type="none" w="med" len="med"/>
+                      <a:tailEnd type="none" w="med" len="med"/>
+                    </a:lnR>
+                    <a:lnT w="12700" cap="flat" cmpd="sng" algn="ctr">
+                      <a:solidFill>
+                        <a:schemeClr val="tx1"/>
+                      </a:solidFill>
+                      <a:prstDash val="solid"/>
+                      <a:round/>
+                      <a:headEnd type="none" w="med" len="med"/>
+                      <a:tailEnd type="none" w="med" len="med"/>
+                    </a:lnT>
+                    <a:lnB w="6350" cap="flat" cmpd="sng" algn="ctr">
+                      <a:noFill/>
+                      <a:prstDash val="solid"/>
+                      <a:miter lim="800000"/>
+                    </a:lnB>
+                    <a:lnTlToBr w="12700" cmpd="sng">
+                      <a:noFill/>
+                      <a:prstDash val="solid"/>
+                    </a:lnTlToBr>
+                    <a:lnBlToTr w="12700" cmpd="sng">
+                      <a:noFill/>
+                      <a:prstDash val="solid"/>
+                    </a:lnBlToTr>
+                  </a:tcPr>
+                </a:tc>
+                <a:extLst>
+                  <a:ext uri="{0D108BD9-81ED-4DB2-BD59-A6C34878D82A}">
+                    <a16:rowId xmlns:a16="http://schemas.microsoft.com/office/drawing/2014/main" val="3176151833"/>
+                  </a:ext>
+                </a:extLst>
+              </a:tr>
+              <a:tr h="301456">
+                <a:tc>
+                  <a:txBody>
+                    <a:bodyPr/>
+                    <a:lstStyle/>
+                    <a:p>
+                      <a:pPr algn="l" rtl="0" fontAlgn="b">
+                        <a:buNone/>
+                      </a:pPr>
+                      <a:r>
+                        <a:rPr lang="en-US" sz="1000">
+                          <a:effectLst/>
+                        </a:rPr>
+                        <a:t>MaxPooling2D_1</a:t>
+                      </a:r>
+                      <a:endParaRPr lang="en-US" sz="1000">
+                        <a:effectLst/>
+                        <a:latin typeface="D2Coding" panose="020B0609020101020101" pitchFamily="49" charset="-127"/>
+                        <a:ea typeface="D2Coding" panose="020B0609020101020101" pitchFamily="49" charset="-127"/>
+                      </a:endParaRPr>
+                    </a:p>
+                  </a:txBody>
+                  <a:tcPr marL="13813" marR="13813" marT="9209" marB="9209" anchor="b">
+                    <a:lnL w="12700" cap="flat" cmpd="sng" algn="ctr">
+                      <a:solidFill>
+                        <a:schemeClr val="tx1"/>
+                      </a:solidFill>
+                      <a:prstDash val="solid"/>
+                      <a:round/>
+                      <a:headEnd type="none" w="med" len="med"/>
+                      <a:tailEnd type="none" w="med" len="med"/>
+                    </a:lnL>
+                    <a:lnR w="6350" cap="flat" cmpd="sng" algn="ctr">
+                      <a:noFill/>
+                      <a:prstDash val="solid"/>
+                      <a:miter lim="800000"/>
+                    </a:lnR>
+                    <a:lnT w="6350" cap="flat" cmpd="sng" algn="ctr">
+                      <a:noFill/>
+                      <a:prstDash val="solid"/>
+                      <a:miter lim="800000"/>
+                    </a:lnT>
+                    <a:lnB w="6350" cap="flat" cmpd="sng" algn="ctr">
+                      <a:noFill/>
+                      <a:prstDash val="solid"/>
+                      <a:miter lim="800000"/>
+                    </a:lnB>
+                    <a:lnTlToBr w="12700" cmpd="sng">
+                      <a:noFill/>
+                      <a:prstDash val="solid"/>
+                    </a:lnTlToBr>
+                    <a:lnBlToTr w="12700" cmpd="sng">
+                      <a:noFill/>
+                      <a:prstDash val="solid"/>
+                    </a:lnBlToTr>
+                  </a:tcPr>
+                </a:tc>
+                <a:tc>
+                  <a:txBody>
+                    <a:bodyPr/>
+                    <a:lstStyle/>
+                    <a:p>
+                      <a:pPr algn="l" rtl="0" fontAlgn="b">
+                        <a:buNone/>
+                      </a:pPr>
+                      <a:r>
+                        <a:rPr lang="en-US" altLang="ko-KR" sz="1000">
+                          <a:effectLst/>
+                        </a:rPr>
+                        <a:t>6</a:t>
+                      </a:r>
+                      <a:endParaRPr lang="en-US" altLang="ko-KR" sz="1000">
+                        <a:effectLst/>
+                        <a:latin typeface="D2Coding" panose="020B0609020101020101" pitchFamily="49" charset="-127"/>
+                        <a:ea typeface="D2Coding" panose="020B0609020101020101" pitchFamily="49" charset="-127"/>
+                      </a:endParaRPr>
+                    </a:p>
+                  </a:txBody>
+                  <a:tcPr marL="13813" marR="13813" marT="9209" marB="9209" anchor="b">
+                    <a:lnL w="6350" cap="flat" cmpd="sng" algn="ctr">
+                      <a:noFill/>
+                      <a:prstDash val="solid"/>
+                      <a:miter lim="800000"/>
+                    </a:lnL>
+                    <a:lnR w="6350" cap="flat" cmpd="sng" algn="ctr">
+                      <a:noFill/>
+                      <a:prstDash val="solid"/>
+                      <a:miter lim="800000"/>
+                    </a:lnR>
+                    <a:lnT w="6350" cap="flat" cmpd="sng" algn="ctr">
+                      <a:noFill/>
+                      <a:prstDash val="solid"/>
+                      <a:miter lim="800000"/>
+                    </a:lnT>
+                    <a:lnB w="6350" cap="flat" cmpd="sng" algn="ctr">
+                      <a:noFill/>
+                      <a:prstDash val="solid"/>
+                      <a:miter lim="800000"/>
+                    </a:lnB>
+                    <a:lnTlToBr w="12700" cmpd="sng">
+                      <a:noFill/>
+                      <a:prstDash val="solid"/>
+                    </a:lnTlToBr>
+                    <a:lnBlToTr w="12700" cmpd="sng">
+                      <a:noFill/>
+                      <a:prstDash val="solid"/>
+                    </a:lnBlToTr>
+                  </a:tcPr>
+                </a:tc>
+                <a:tc>
+                  <a:txBody>
+                    <a:bodyPr/>
+                    <a:lstStyle/>
+                    <a:p>
+                      <a:pPr algn="l" rtl="0" fontAlgn="b">
+                        <a:buNone/>
+                      </a:pPr>
+                      <a:r>
+                        <a:rPr lang="en-US" altLang="ko-KR" sz="1000">
+                          <a:effectLst/>
+                        </a:rPr>
+                        <a:t>-</a:t>
+                      </a:r>
+                      <a:endParaRPr lang="en-US" altLang="ko-KR" sz="1000">
+                        <a:effectLst/>
+                        <a:latin typeface="D2Coding" panose="020B0609020101020101" pitchFamily="49" charset="-127"/>
+                        <a:ea typeface="D2Coding" panose="020B0609020101020101" pitchFamily="49" charset="-127"/>
+                      </a:endParaRPr>
+                    </a:p>
+                  </a:txBody>
+                  <a:tcPr marL="13813" marR="13813" marT="9209" marB="9209" anchor="b">
+                    <a:lnL w="6350" cap="flat" cmpd="sng" algn="ctr">
+                      <a:noFill/>
+                      <a:prstDash val="solid"/>
+                      <a:miter lim="800000"/>
+                    </a:lnL>
+                    <a:lnR w="6350" cap="flat" cmpd="sng" algn="ctr">
+                      <a:noFill/>
+                      <a:prstDash val="solid"/>
+                      <a:miter lim="800000"/>
+                    </a:lnR>
+                    <a:lnT w="6350" cap="flat" cmpd="sng" algn="ctr">
+                      <a:noFill/>
+                      <a:prstDash val="solid"/>
+                      <a:miter lim="800000"/>
+                    </a:lnT>
+                    <a:lnB w="6350" cap="flat" cmpd="sng" algn="ctr">
+                      <a:noFill/>
+                      <a:prstDash val="solid"/>
+                      <a:miter lim="800000"/>
+                    </a:lnB>
+                    <a:lnTlToBr w="12700" cmpd="sng">
+                      <a:noFill/>
+                      <a:prstDash val="solid"/>
+                    </a:lnTlToBr>
+                    <a:lnBlToTr w="12700" cmpd="sng">
+                      <a:noFill/>
+                      <a:prstDash val="solid"/>
+                    </a:lnBlToTr>
+                  </a:tcPr>
+                </a:tc>
+                <a:tc>
+                  <a:txBody>
+                    <a:bodyPr/>
+                    <a:lstStyle/>
+                    <a:p>
+                      <a:pPr algn="l" rtl="0" fontAlgn="b">
+                        <a:buNone/>
+                      </a:pPr>
+                      <a:r>
+                        <a:rPr lang="en-US" altLang="ko-KR" sz="1000" dirty="0">
+                          <a:effectLst/>
+                        </a:rPr>
+                        <a:t>-</a:t>
+                      </a:r>
+                      <a:endParaRPr lang="en-US" altLang="ko-KR" sz="1000" dirty="0">
+                        <a:effectLst/>
+                        <a:latin typeface="D2Coding" panose="020B0609020101020101" pitchFamily="49" charset="-127"/>
+                        <a:ea typeface="D2Coding" panose="020B0609020101020101" pitchFamily="49" charset="-127"/>
+                      </a:endParaRPr>
+                    </a:p>
+                  </a:txBody>
+                  <a:tcPr marL="13813" marR="13813" marT="9209" marB="9209" anchor="b">
+                    <a:lnL w="6350" cap="flat" cmpd="sng" algn="ctr">
+                      <a:noFill/>
+                      <a:prstDash val="solid"/>
+                      <a:miter lim="800000"/>
+                    </a:lnL>
+                    <a:lnR w="6350" cap="flat" cmpd="sng" algn="ctr">
+                      <a:noFill/>
+                      <a:prstDash val="solid"/>
+                      <a:miter lim="800000"/>
+                    </a:lnR>
+                    <a:lnT w="6350" cap="flat" cmpd="sng" algn="ctr">
+                      <a:noFill/>
+                      <a:prstDash val="solid"/>
+                      <a:miter lim="800000"/>
+                    </a:lnT>
+                    <a:lnB w="6350" cap="flat" cmpd="sng" algn="ctr">
+                      <a:noFill/>
+                      <a:prstDash val="solid"/>
+                      <a:miter lim="800000"/>
+                    </a:lnB>
+                    <a:lnTlToBr w="12700" cmpd="sng">
+                      <a:noFill/>
+                      <a:prstDash val="solid"/>
+                    </a:lnTlToBr>
+                    <a:lnBlToTr w="12700" cmpd="sng">
+                      <a:noFill/>
+                      <a:prstDash val="solid"/>
+                    </a:lnBlToTr>
+                  </a:tcPr>
+                </a:tc>
+                <a:tc>
+                  <a:txBody>
+                    <a:bodyPr/>
+                    <a:lstStyle/>
+                    <a:p>
+                      <a:pPr algn="l" rtl="0" fontAlgn="b">
+                        <a:buNone/>
+                      </a:pPr>
+                      <a:r>
+                        <a:rPr lang="ko-KR" altLang="en-US" sz="1000" dirty="0">
+                          <a:effectLst/>
+                        </a:rPr>
+                        <a:t>학습 가중치 없음</a:t>
+                      </a:r>
+                      <a:endParaRPr lang="ko-KR" altLang="en-US" sz="1000" dirty="0">
+                        <a:effectLst/>
+                        <a:latin typeface="D2Coding" panose="020B0609020101020101" pitchFamily="49" charset="-127"/>
+                        <a:ea typeface="D2Coding" panose="020B0609020101020101" pitchFamily="49" charset="-127"/>
+                      </a:endParaRPr>
+                    </a:p>
+                  </a:txBody>
+                  <a:tcPr marL="13813" marR="13813" marT="9209" marB="9209" anchor="b">
+                    <a:lnL w="6350" cap="flat" cmpd="sng" algn="ctr">
+                      <a:noFill/>
+                      <a:prstDash val="solid"/>
+                      <a:miter lim="800000"/>
+                    </a:lnL>
+                    <a:lnR w="6350" cap="flat" cmpd="sng" algn="ctr">
+                      <a:noFill/>
+                      <a:prstDash val="solid"/>
+                      <a:miter lim="800000"/>
+                    </a:lnR>
+                    <a:lnT w="6350" cap="flat" cmpd="sng" algn="ctr">
+                      <a:noFill/>
+                      <a:prstDash val="solid"/>
+                      <a:miter lim="800000"/>
+                    </a:lnT>
+                    <a:lnB w="6350" cap="flat" cmpd="sng" algn="ctr">
+                      <a:noFill/>
+                      <a:prstDash val="solid"/>
+                      <a:miter lim="800000"/>
+                    </a:lnB>
+                    <a:lnTlToBr w="12700" cmpd="sng">
+                      <a:noFill/>
+                      <a:prstDash val="solid"/>
+                    </a:lnTlToBr>
+                    <a:lnBlToTr w="12700" cmpd="sng">
+                      <a:noFill/>
+                      <a:prstDash val="solid"/>
+                    </a:lnBlToTr>
+                  </a:tcPr>
+                </a:tc>
+                <a:tc>
+                  <a:txBody>
+                    <a:bodyPr/>
+                    <a:lstStyle/>
+                    <a:p>
+                      <a:pPr algn="l" rtl="0" fontAlgn="b">
+                        <a:buNone/>
+                      </a:pPr>
+                      <a:r>
+                        <a:rPr lang="en-US" altLang="ko-KR" sz="1000">
+                          <a:effectLst/>
+                        </a:rPr>
+                        <a:t>0</a:t>
+                      </a:r>
+                      <a:endParaRPr lang="en-US" altLang="ko-KR" sz="1000">
+                        <a:effectLst/>
+                        <a:latin typeface="D2Coding" panose="020B0609020101020101" pitchFamily="49" charset="-127"/>
+                        <a:ea typeface="D2Coding" panose="020B0609020101020101" pitchFamily="49" charset="-127"/>
+                      </a:endParaRPr>
+                    </a:p>
+                  </a:txBody>
+                  <a:tcPr marL="13813" marR="13813" marT="9209" marB="9209" anchor="b">
+                    <a:lnL w="6350" cap="flat" cmpd="sng" algn="ctr">
+                      <a:noFill/>
+                      <a:prstDash val="solid"/>
+                      <a:miter lim="800000"/>
+                    </a:lnL>
+                    <a:lnR w="12700" cap="flat" cmpd="sng" algn="ctr">
+                      <a:solidFill>
+                        <a:schemeClr val="tx1"/>
+                      </a:solidFill>
+                      <a:prstDash val="solid"/>
+                      <a:round/>
+                      <a:headEnd type="none" w="med" len="med"/>
+                      <a:tailEnd type="none" w="med" len="med"/>
+                    </a:lnR>
+                    <a:lnT w="6350" cap="flat" cmpd="sng" algn="ctr">
+                      <a:noFill/>
+                      <a:prstDash val="solid"/>
+                      <a:miter lim="800000"/>
+                    </a:lnT>
+                    <a:lnB w="6350" cap="flat" cmpd="sng" algn="ctr">
+                      <a:noFill/>
+                      <a:prstDash val="solid"/>
+                      <a:miter lim="800000"/>
+                    </a:lnB>
+                    <a:lnTlToBr w="12700" cmpd="sng">
+                      <a:noFill/>
+                      <a:prstDash val="solid"/>
+                    </a:lnTlToBr>
+                    <a:lnBlToTr w="12700" cmpd="sng">
+                      <a:noFill/>
+                      <a:prstDash val="solid"/>
+                    </a:lnBlToTr>
+                  </a:tcPr>
+                </a:tc>
+                <a:extLst>
+                  <a:ext uri="{0D108BD9-81ED-4DB2-BD59-A6C34878D82A}">
+                    <a16:rowId xmlns:a16="http://schemas.microsoft.com/office/drawing/2014/main" val="1104298932"/>
+                  </a:ext>
+                </a:extLst>
+              </a:tr>
+              <a:tr h="301456">
+                <a:tc>
+                  <a:txBody>
+                    <a:bodyPr/>
+                    <a:lstStyle/>
+                    <a:p>
+                      <a:pPr algn="l" rtl="0" fontAlgn="b">
+                        <a:buNone/>
+                      </a:pPr>
+                      <a:r>
+                        <a:rPr lang="en-US" sz="1000" dirty="0">
+                          <a:effectLst/>
+                        </a:rPr>
+                        <a:t>Conv2D_2</a:t>
+                      </a:r>
+                      <a:endParaRPr lang="en-US" sz="1000" dirty="0">
+                        <a:effectLst/>
+                        <a:latin typeface="D2Coding" panose="020B0609020101020101" pitchFamily="49" charset="-127"/>
+                        <a:ea typeface="D2Coding" panose="020B0609020101020101" pitchFamily="49" charset="-127"/>
+                      </a:endParaRPr>
+                    </a:p>
+                  </a:txBody>
+                  <a:tcPr marL="13813" marR="13813" marT="9209" marB="9209" anchor="b">
+                    <a:lnL w="12700" cap="flat" cmpd="sng" algn="ctr">
+                      <a:solidFill>
+                        <a:schemeClr val="tx1"/>
+                      </a:solidFill>
+                      <a:prstDash val="solid"/>
+                      <a:round/>
+                      <a:headEnd type="none" w="med" len="med"/>
+                      <a:tailEnd type="none" w="med" len="med"/>
+                    </a:lnL>
+                    <a:lnR w="6350" cap="flat" cmpd="sng" algn="ctr">
+                      <a:noFill/>
+                      <a:prstDash val="solid"/>
+                      <a:miter lim="800000"/>
+                    </a:lnR>
+                    <a:lnT w="6350" cap="flat" cmpd="sng" algn="ctr">
+                      <a:noFill/>
+                      <a:prstDash val="solid"/>
+                      <a:miter lim="800000"/>
+                    </a:lnT>
+                    <a:lnB w="6350" cap="flat" cmpd="sng" algn="ctr">
+                      <a:noFill/>
+                      <a:prstDash val="solid"/>
+                      <a:miter lim="800000"/>
+                    </a:lnB>
+                    <a:lnTlToBr w="12700" cmpd="sng">
+                      <a:noFill/>
+                      <a:prstDash val="solid"/>
+                    </a:lnTlToBr>
+                    <a:lnBlToTr w="12700" cmpd="sng">
+                      <a:noFill/>
+                      <a:prstDash val="solid"/>
+                    </a:lnBlToTr>
+                  </a:tcPr>
+                </a:tc>
+                <a:tc>
+                  <a:txBody>
+                    <a:bodyPr/>
+                    <a:lstStyle/>
+                    <a:p>
+                      <a:pPr algn="l" rtl="0" fontAlgn="b">
+                        <a:buNone/>
+                      </a:pPr>
+                      <a:r>
+                        <a:rPr lang="en-US" altLang="ko-KR" sz="1000" dirty="0">
+                          <a:effectLst/>
+                        </a:rPr>
+                        <a:t>6</a:t>
+                      </a:r>
+                      <a:endParaRPr lang="en-US" altLang="ko-KR" sz="1000" dirty="0">
+                        <a:effectLst/>
+                        <a:latin typeface="D2Coding" panose="020B0609020101020101" pitchFamily="49" charset="-127"/>
+                        <a:ea typeface="D2Coding" panose="020B0609020101020101" pitchFamily="49" charset="-127"/>
+                      </a:endParaRPr>
+                    </a:p>
+                  </a:txBody>
+                  <a:tcPr marL="13813" marR="13813" marT="9209" marB="9209" anchor="b">
+                    <a:lnL w="6350" cap="flat" cmpd="sng" algn="ctr">
+                      <a:noFill/>
+                      <a:prstDash val="solid"/>
+                      <a:miter lim="800000"/>
+                    </a:lnL>
+                    <a:lnR w="6350" cap="flat" cmpd="sng" algn="ctr">
+                      <a:noFill/>
+                      <a:prstDash val="solid"/>
+                      <a:miter lim="800000"/>
+                    </a:lnR>
+                    <a:lnT w="6350" cap="flat" cmpd="sng" algn="ctr">
+                      <a:noFill/>
+                      <a:prstDash val="solid"/>
+                      <a:miter lim="800000"/>
+                    </a:lnT>
+                    <a:lnB w="6350" cap="flat" cmpd="sng" algn="ctr">
+                      <a:noFill/>
+                      <a:prstDash val="solid"/>
+                      <a:miter lim="800000"/>
+                    </a:lnB>
+                    <a:lnTlToBr w="12700" cmpd="sng">
+                      <a:noFill/>
+                      <a:prstDash val="solid"/>
+                    </a:lnTlToBr>
+                    <a:lnBlToTr w="12700" cmpd="sng">
+                      <a:noFill/>
+                      <a:prstDash val="solid"/>
+                    </a:lnBlToTr>
+                  </a:tcPr>
+                </a:tc>
+                <a:tc>
+                  <a:txBody>
+                    <a:bodyPr/>
+                    <a:lstStyle/>
+                    <a:p>
+                      <a:pPr algn="l" rtl="0" fontAlgn="b">
+                        <a:buNone/>
+                      </a:pPr>
+                      <a:r>
+                        <a:rPr lang="en-US" altLang="ko-KR" sz="1000">
+                          <a:effectLst/>
+                        </a:rPr>
+                        <a:t>5×5</a:t>
+                      </a:r>
+                      <a:endParaRPr lang="en-US" altLang="ko-KR" sz="1000">
+                        <a:effectLst/>
+                        <a:latin typeface="D2Coding" panose="020B0609020101020101" pitchFamily="49" charset="-127"/>
+                        <a:ea typeface="D2Coding" panose="020B0609020101020101" pitchFamily="49" charset="-127"/>
+                      </a:endParaRPr>
+                    </a:p>
+                  </a:txBody>
+                  <a:tcPr marL="13813" marR="13813" marT="9209" marB="9209" anchor="b">
+                    <a:lnL w="6350" cap="flat" cmpd="sng" algn="ctr">
+                      <a:noFill/>
+                      <a:prstDash val="solid"/>
+                      <a:miter lim="800000"/>
+                    </a:lnL>
+                    <a:lnR w="6350" cap="flat" cmpd="sng" algn="ctr">
+                      <a:noFill/>
+                      <a:prstDash val="solid"/>
+                      <a:miter lim="800000"/>
+                    </a:lnR>
+                    <a:lnT w="6350" cap="flat" cmpd="sng" algn="ctr">
+                      <a:noFill/>
+                      <a:prstDash val="solid"/>
+                      <a:miter lim="800000"/>
+                    </a:lnT>
+                    <a:lnB w="6350" cap="flat" cmpd="sng" algn="ctr">
+                      <a:noFill/>
+                      <a:prstDash val="solid"/>
+                      <a:miter lim="800000"/>
+                    </a:lnB>
+                    <a:lnTlToBr w="12700" cmpd="sng">
+                      <a:noFill/>
+                      <a:prstDash val="solid"/>
+                    </a:lnTlToBr>
+                    <a:lnBlToTr w="12700" cmpd="sng">
+                      <a:noFill/>
+                      <a:prstDash val="solid"/>
+                    </a:lnBlToTr>
+                  </a:tcPr>
+                </a:tc>
+                <a:tc>
+                  <a:txBody>
+                    <a:bodyPr/>
+                    <a:lstStyle/>
+                    <a:p>
+                      <a:pPr algn="l" rtl="0" fontAlgn="b">
+                        <a:buNone/>
+                      </a:pPr>
+                      <a:r>
+                        <a:rPr lang="en-US" altLang="ko-KR" sz="1000">
+                          <a:effectLst/>
+                        </a:rPr>
+                        <a:t>16</a:t>
+                      </a:r>
+                      <a:endParaRPr lang="en-US" altLang="ko-KR" sz="1000">
+                        <a:effectLst/>
+                        <a:latin typeface="D2Coding" panose="020B0609020101020101" pitchFamily="49" charset="-127"/>
+                        <a:ea typeface="D2Coding" panose="020B0609020101020101" pitchFamily="49" charset="-127"/>
+                      </a:endParaRPr>
+                    </a:p>
+                  </a:txBody>
+                  <a:tcPr marL="13813" marR="13813" marT="9209" marB="9209" anchor="b">
+                    <a:lnL w="6350" cap="flat" cmpd="sng" algn="ctr">
+                      <a:noFill/>
+                      <a:prstDash val="solid"/>
+                      <a:miter lim="800000"/>
+                    </a:lnL>
+                    <a:lnR w="6350" cap="flat" cmpd="sng" algn="ctr">
+                      <a:noFill/>
+                      <a:prstDash val="solid"/>
+                      <a:miter lim="800000"/>
+                    </a:lnR>
+                    <a:lnT w="6350" cap="flat" cmpd="sng" algn="ctr">
+                      <a:noFill/>
+                      <a:prstDash val="solid"/>
+                      <a:miter lim="800000"/>
+                    </a:lnT>
+                    <a:lnB w="6350" cap="flat" cmpd="sng" algn="ctr">
+                      <a:noFill/>
+                      <a:prstDash val="solid"/>
+                      <a:miter lim="800000"/>
+                    </a:lnB>
+                    <a:lnTlToBr w="12700" cmpd="sng">
+                      <a:noFill/>
+                      <a:prstDash val="solid"/>
+                    </a:lnTlToBr>
+                    <a:lnBlToTr w="12700" cmpd="sng">
+                      <a:noFill/>
+                      <a:prstDash val="solid"/>
+                    </a:lnBlToTr>
+                  </a:tcPr>
+                </a:tc>
+                <a:tc>
+                  <a:txBody>
+                    <a:bodyPr/>
+                    <a:lstStyle/>
+                    <a:p>
+                      <a:pPr algn="l" rtl="0" fontAlgn="b">
+                        <a:buNone/>
+                      </a:pPr>
+                      <a:r>
+                        <a:rPr lang="en-US" altLang="ko-KR" sz="1000" dirty="0">
+                          <a:effectLst/>
+                        </a:rPr>
+                        <a:t>{(5×5×6)+1}×16=(150+1)×16=151×16</a:t>
+                      </a:r>
+                      <a:endParaRPr lang="en-US" altLang="ko-KR" sz="1000" dirty="0">
+                        <a:effectLst/>
+                        <a:latin typeface="D2Coding" panose="020B0609020101020101" pitchFamily="49" charset="-127"/>
+                        <a:ea typeface="D2Coding" panose="020B0609020101020101" pitchFamily="49" charset="-127"/>
+                      </a:endParaRPr>
+                    </a:p>
+                  </a:txBody>
+                  <a:tcPr marL="13813" marR="13813" marT="9209" marB="9209" anchor="b">
+                    <a:lnL w="6350" cap="flat" cmpd="sng" algn="ctr">
+                      <a:noFill/>
+                      <a:prstDash val="solid"/>
+                      <a:miter lim="800000"/>
+                    </a:lnL>
+                    <a:lnR w="6350" cap="flat" cmpd="sng" algn="ctr">
+                      <a:noFill/>
+                      <a:prstDash val="solid"/>
+                      <a:miter lim="800000"/>
+                    </a:lnR>
+                    <a:lnT w="6350" cap="flat" cmpd="sng" algn="ctr">
+                      <a:noFill/>
+                      <a:prstDash val="solid"/>
+                      <a:miter lim="800000"/>
+                    </a:lnT>
+                    <a:lnB w="6350" cap="flat" cmpd="sng" algn="ctr">
+                      <a:noFill/>
+                      <a:prstDash val="solid"/>
+                      <a:miter lim="800000"/>
+                    </a:lnB>
+                    <a:lnTlToBr w="12700" cmpd="sng">
+                      <a:noFill/>
+                      <a:prstDash val="solid"/>
+                    </a:lnTlToBr>
+                    <a:lnBlToTr w="12700" cmpd="sng">
+                      <a:noFill/>
+                      <a:prstDash val="solid"/>
+                    </a:lnBlToTr>
+                  </a:tcPr>
+                </a:tc>
+                <a:tc>
+                  <a:txBody>
+                    <a:bodyPr/>
+                    <a:lstStyle/>
+                    <a:p>
+                      <a:pPr algn="l" rtl="0" fontAlgn="b">
+                        <a:buNone/>
+                      </a:pPr>
+                      <a:r>
+                        <a:rPr lang="en-US" altLang="ko-KR" sz="1000">
+                          <a:effectLst/>
+                        </a:rPr>
+                        <a:t>2,416</a:t>
+                      </a:r>
+                      <a:endParaRPr lang="en-US" altLang="ko-KR" sz="1000">
+                        <a:effectLst/>
+                        <a:latin typeface="D2Coding" panose="020B0609020101020101" pitchFamily="49" charset="-127"/>
+                        <a:ea typeface="D2Coding" panose="020B0609020101020101" pitchFamily="49" charset="-127"/>
+                      </a:endParaRPr>
+                    </a:p>
+                  </a:txBody>
+                  <a:tcPr marL="13813" marR="13813" marT="9209" marB="9209" anchor="b">
+                    <a:lnL w="6350" cap="flat" cmpd="sng" algn="ctr">
+                      <a:noFill/>
+                      <a:prstDash val="solid"/>
+                      <a:miter lim="800000"/>
+                    </a:lnL>
+                    <a:lnR w="12700" cap="flat" cmpd="sng" algn="ctr">
+                      <a:solidFill>
+                        <a:schemeClr val="tx1"/>
+                      </a:solidFill>
+                      <a:prstDash val="solid"/>
+                      <a:round/>
+                      <a:headEnd type="none" w="med" len="med"/>
+                      <a:tailEnd type="none" w="med" len="med"/>
+                    </a:lnR>
+                    <a:lnT w="6350" cap="flat" cmpd="sng" algn="ctr">
+                      <a:noFill/>
+                      <a:prstDash val="solid"/>
+                      <a:miter lim="800000"/>
+                    </a:lnT>
+                    <a:lnB w="6350" cap="flat" cmpd="sng" algn="ctr">
+                      <a:noFill/>
+                      <a:prstDash val="solid"/>
+                      <a:miter lim="800000"/>
+                    </a:lnB>
+                    <a:lnTlToBr w="12700" cmpd="sng">
+                      <a:noFill/>
+                      <a:prstDash val="solid"/>
+                    </a:lnTlToBr>
+                    <a:lnBlToTr w="12700" cmpd="sng">
+                      <a:noFill/>
+                      <a:prstDash val="solid"/>
+                    </a:lnBlToTr>
+                  </a:tcPr>
+                </a:tc>
+                <a:extLst>
+                  <a:ext uri="{0D108BD9-81ED-4DB2-BD59-A6C34878D82A}">
+                    <a16:rowId xmlns:a16="http://schemas.microsoft.com/office/drawing/2014/main" val="535425684"/>
+                  </a:ext>
+                </a:extLst>
+              </a:tr>
+              <a:tr h="301456">
+                <a:tc>
+                  <a:txBody>
+                    <a:bodyPr/>
+                    <a:lstStyle/>
+                    <a:p>
+                      <a:pPr algn="l" rtl="0" fontAlgn="b">
+                        <a:buNone/>
+                      </a:pPr>
+                      <a:r>
+                        <a:rPr lang="en-US" sz="1000">
+                          <a:effectLst/>
+                        </a:rPr>
+                        <a:t>MaxPooling2D_2</a:t>
+                      </a:r>
+                      <a:endParaRPr lang="en-US" sz="1000">
+                        <a:effectLst/>
+                        <a:latin typeface="D2Coding" panose="020B0609020101020101" pitchFamily="49" charset="-127"/>
+                        <a:ea typeface="D2Coding" panose="020B0609020101020101" pitchFamily="49" charset="-127"/>
+                      </a:endParaRPr>
+                    </a:p>
+                  </a:txBody>
+                  <a:tcPr marL="13813" marR="13813" marT="9209" marB="9209" anchor="b">
+                    <a:lnL w="12700" cap="flat" cmpd="sng" algn="ctr">
+                      <a:solidFill>
+                        <a:schemeClr val="tx1"/>
+                      </a:solidFill>
+                      <a:prstDash val="solid"/>
+                      <a:round/>
+                      <a:headEnd type="none" w="med" len="med"/>
+                      <a:tailEnd type="none" w="med" len="med"/>
+                    </a:lnL>
+                    <a:lnR w="6350" cap="flat" cmpd="sng" algn="ctr">
+                      <a:noFill/>
+                      <a:prstDash val="solid"/>
+                      <a:miter lim="800000"/>
+                    </a:lnR>
+                    <a:lnT w="6350" cap="flat" cmpd="sng" algn="ctr">
+                      <a:noFill/>
+                      <a:prstDash val="solid"/>
+                      <a:miter lim="800000"/>
+                    </a:lnT>
+                    <a:lnB w="6350" cap="flat" cmpd="sng" algn="ctr">
+                      <a:noFill/>
+                      <a:prstDash val="solid"/>
+                      <a:miter lim="800000"/>
+                    </a:lnB>
+                    <a:lnTlToBr w="12700" cmpd="sng">
+                      <a:noFill/>
+                      <a:prstDash val="solid"/>
+                    </a:lnTlToBr>
+                    <a:lnBlToTr w="12700" cmpd="sng">
+                      <a:noFill/>
+                      <a:prstDash val="solid"/>
+                    </a:lnBlToTr>
+                  </a:tcPr>
+                </a:tc>
+                <a:tc>
+                  <a:txBody>
+                    <a:bodyPr/>
+                    <a:lstStyle/>
+                    <a:p>
+                      <a:pPr algn="l" rtl="0" fontAlgn="b">
+                        <a:buNone/>
+                      </a:pPr>
+                      <a:r>
+                        <a:rPr lang="en-US" altLang="ko-KR" sz="1000">
+                          <a:effectLst/>
+                        </a:rPr>
+                        <a:t>16</a:t>
+                      </a:r>
+                      <a:endParaRPr lang="en-US" altLang="ko-KR" sz="1000">
+                        <a:effectLst/>
+                        <a:latin typeface="D2Coding" panose="020B0609020101020101" pitchFamily="49" charset="-127"/>
+                        <a:ea typeface="D2Coding" panose="020B0609020101020101" pitchFamily="49" charset="-127"/>
+                      </a:endParaRPr>
+                    </a:p>
+                  </a:txBody>
+                  <a:tcPr marL="13813" marR="13813" marT="9209" marB="9209" anchor="b">
+                    <a:lnL w="6350" cap="flat" cmpd="sng" algn="ctr">
+                      <a:noFill/>
+                      <a:prstDash val="solid"/>
+                      <a:miter lim="800000"/>
+                    </a:lnL>
+                    <a:lnR w="6350" cap="flat" cmpd="sng" algn="ctr">
+                      <a:noFill/>
+                      <a:prstDash val="solid"/>
+                      <a:miter lim="800000"/>
+                    </a:lnR>
+                    <a:lnT w="6350" cap="flat" cmpd="sng" algn="ctr">
+                      <a:noFill/>
+                      <a:prstDash val="solid"/>
+                      <a:miter lim="800000"/>
+                    </a:lnT>
+                    <a:lnB w="6350" cap="flat" cmpd="sng" algn="ctr">
+                      <a:noFill/>
+                      <a:prstDash val="solid"/>
+                      <a:miter lim="800000"/>
+                    </a:lnB>
+                    <a:lnTlToBr w="12700" cmpd="sng">
+                      <a:noFill/>
+                      <a:prstDash val="solid"/>
+                    </a:lnTlToBr>
+                    <a:lnBlToTr w="12700" cmpd="sng">
+                      <a:noFill/>
+                      <a:prstDash val="solid"/>
+                    </a:lnBlToTr>
+                  </a:tcPr>
+                </a:tc>
+                <a:tc>
+                  <a:txBody>
+                    <a:bodyPr/>
+                    <a:lstStyle/>
+                    <a:p>
+                      <a:pPr algn="l" rtl="0" fontAlgn="b">
+                        <a:buNone/>
+                      </a:pPr>
+                      <a:r>
+                        <a:rPr lang="en-US" altLang="ko-KR" sz="1000">
+                          <a:effectLst/>
+                        </a:rPr>
+                        <a:t>-</a:t>
+                      </a:r>
+                      <a:endParaRPr lang="en-US" altLang="ko-KR" sz="1000">
+                        <a:effectLst/>
+                        <a:latin typeface="D2Coding" panose="020B0609020101020101" pitchFamily="49" charset="-127"/>
+                        <a:ea typeface="D2Coding" panose="020B0609020101020101" pitchFamily="49" charset="-127"/>
+                      </a:endParaRPr>
+                    </a:p>
+                  </a:txBody>
+                  <a:tcPr marL="13813" marR="13813" marT="9209" marB="9209" anchor="b">
+                    <a:lnL w="6350" cap="flat" cmpd="sng" algn="ctr">
+                      <a:noFill/>
+                      <a:prstDash val="solid"/>
+                      <a:miter lim="800000"/>
+                    </a:lnL>
+                    <a:lnR w="6350" cap="flat" cmpd="sng" algn="ctr">
+                      <a:noFill/>
+                      <a:prstDash val="solid"/>
+                      <a:miter lim="800000"/>
+                    </a:lnR>
+                    <a:lnT w="6350" cap="flat" cmpd="sng" algn="ctr">
+                      <a:noFill/>
+                      <a:prstDash val="solid"/>
+                      <a:miter lim="800000"/>
+                    </a:lnT>
+                    <a:lnB w="6350" cap="flat" cmpd="sng" algn="ctr">
+                      <a:noFill/>
+                      <a:prstDash val="solid"/>
+                      <a:miter lim="800000"/>
+                    </a:lnB>
+                    <a:lnTlToBr w="12700" cmpd="sng">
+                      <a:noFill/>
+                      <a:prstDash val="solid"/>
+                    </a:lnTlToBr>
+                    <a:lnBlToTr w="12700" cmpd="sng">
+                      <a:noFill/>
+                      <a:prstDash val="solid"/>
+                    </a:lnBlToTr>
+                  </a:tcPr>
+                </a:tc>
+                <a:tc>
+                  <a:txBody>
+                    <a:bodyPr/>
+                    <a:lstStyle/>
+                    <a:p>
+                      <a:pPr algn="l" rtl="0" fontAlgn="b">
+                        <a:buNone/>
+                      </a:pPr>
+                      <a:r>
+                        <a:rPr lang="en-US" altLang="ko-KR" sz="1000">
+                          <a:effectLst/>
+                        </a:rPr>
+                        <a:t>-</a:t>
+                      </a:r>
+                      <a:endParaRPr lang="en-US" altLang="ko-KR" sz="1000">
+                        <a:effectLst/>
+                        <a:latin typeface="D2Coding" panose="020B0609020101020101" pitchFamily="49" charset="-127"/>
+                        <a:ea typeface="D2Coding" panose="020B0609020101020101" pitchFamily="49" charset="-127"/>
+                      </a:endParaRPr>
+                    </a:p>
+                  </a:txBody>
+                  <a:tcPr marL="13813" marR="13813" marT="9209" marB="9209" anchor="b">
+                    <a:lnL w="6350" cap="flat" cmpd="sng" algn="ctr">
+                      <a:noFill/>
+                      <a:prstDash val="solid"/>
+                      <a:miter lim="800000"/>
+                    </a:lnL>
+                    <a:lnR w="6350" cap="flat" cmpd="sng" algn="ctr">
+                      <a:noFill/>
+                      <a:prstDash val="solid"/>
+                      <a:miter lim="800000"/>
+                    </a:lnR>
+                    <a:lnT w="6350" cap="flat" cmpd="sng" algn="ctr">
+                      <a:noFill/>
+                      <a:prstDash val="solid"/>
+                      <a:miter lim="800000"/>
+                    </a:lnT>
+                    <a:lnB w="6350" cap="flat" cmpd="sng" algn="ctr">
+                      <a:noFill/>
+                      <a:prstDash val="solid"/>
+                      <a:miter lim="800000"/>
+                    </a:lnB>
+                    <a:lnTlToBr w="12700" cmpd="sng">
+                      <a:noFill/>
+                      <a:prstDash val="solid"/>
+                    </a:lnTlToBr>
+                    <a:lnBlToTr w="12700" cmpd="sng">
+                      <a:noFill/>
+                      <a:prstDash val="solid"/>
+                    </a:lnBlToTr>
+                  </a:tcPr>
+                </a:tc>
+                <a:tc>
+                  <a:txBody>
+                    <a:bodyPr/>
+                    <a:lstStyle/>
+                    <a:p>
+                      <a:pPr algn="l" rtl="0" fontAlgn="b">
+                        <a:buNone/>
+                      </a:pPr>
+                      <a:r>
+                        <a:rPr lang="ko-KR" altLang="en-US" sz="1000">
+                          <a:effectLst/>
+                        </a:rPr>
+                        <a:t>학습 가중치 없음</a:t>
+                      </a:r>
+                      <a:endParaRPr lang="ko-KR" altLang="en-US" sz="1000">
+                        <a:effectLst/>
+                        <a:latin typeface="D2Coding" panose="020B0609020101020101" pitchFamily="49" charset="-127"/>
+                        <a:ea typeface="D2Coding" panose="020B0609020101020101" pitchFamily="49" charset="-127"/>
+                      </a:endParaRPr>
+                    </a:p>
+                  </a:txBody>
+                  <a:tcPr marL="13813" marR="13813" marT="9209" marB="9209" anchor="b">
+                    <a:lnL w="6350" cap="flat" cmpd="sng" algn="ctr">
+                      <a:noFill/>
+                      <a:prstDash val="solid"/>
+                      <a:miter lim="800000"/>
+                    </a:lnL>
+                    <a:lnR w="6350" cap="flat" cmpd="sng" algn="ctr">
+                      <a:noFill/>
+                      <a:prstDash val="solid"/>
+                      <a:miter lim="800000"/>
+                    </a:lnR>
+                    <a:lnT w="6350" cap="flat" cmpd="sng" algn="ctr">
+                      <a:noFill/>
+                      <a:prstDash val="solid"/>
+                      <a:miter lim="800000"/>
+                    </a:lnT>
+                    <a:lnB w="6350" cap="flat" cmpd="sng" algn="ctr">
+                      <a:noFill/>
+                      <a:prstDash val="solid"/>
+                      <a:miter lim="800000"/>
+                    </a:lnB>
+                    <a:lnTlToBr w="12700" cmpd="sng">
+                      <a:noFill/>
+                      <a:prstDash val="solid"/>
+                    </a:lnTlToBr>
+                    <a:lnBlToTr w="12700" cmpd="sng">
+                      <a:noFill/>
+                      <a:prstDash val="solid"/>
+                    </a:lnBlToTr>
+                  </a:tcPr>
+                </a:tc>
+                <a:tc>
+                  <a:txBody>
+                    <a:bodyPr/>
+                    <a:lstStyle/>
+                    <a:p>
+                      <a:pPr algn="l" rtl="0" fontAlgn="b">
+                        <a:buNone/>
+                      </a:pPr>
+                      <a:r>
+                        <a:rPr lang="en-US" altLang="ko-KR" sz="1000">
+                          <a:effectLst/>
+                        </a:rPr>
+                        <a:t>0</a:t>
+                      </a:r>
+                      <a:endParaRPr lang="en-US" altLang="ko-KR" sz="1000">
+                        <a:effectLst/>
+                        <a:latin typeface="D2Coding" panose="020B0609020101020101" pitchFamily="49" charset="-127"/>
+                        <a:ea typeface="D2Coding" panose="020B0609020101020101" pitchFamily="49" charset="-127"/>
+                      </a:endParaRPr>
+                    </a:p>
+                  </a:txBody>
+                  <a:tcPr marL="13813" marR="13813" marT="9209" marB="9209" anchor="b">
+                    <a:lnL w="6350" cap="flat" cmpd="sng" algn="ctr">
+                      <a:noFill/>
+                      <a:prstDash val="solid"/>
+                      <a:miter lim="800000"/>
+                    </a:lnL>
+                    <a:lnR w="12700" cap="flat" cmpd="sng" algn="ctr">
+                      <a:solidFill>
+                        <a:schemeClr val="tx1"/>
+                      </a:solidFill>
+                      <a:prstDash val="solid"/>
+                      <a:round/>
+                      <a:headEnd type="none" w="med" len="med"/>
+                      <a:tailEnd type="none" w="med" len="med"/>
+                    </a:lnR>
+                    <a:lnT w="6350" cap="flat" cmpd="sng" algn="ctr">
+                      <a:noFill/>
+                      <a:prstDash val="solid"/>
+                      <a:miter lim="800000"/>
+                    </a:lnT>
+                    <a:lnB w="6350" cap="flat" cmpd="sng" algn="ctr">
+                      <a:noFill/>
+                      <a:prstDash val="solid"/>
+                      <a:miter lim="800000"/>
+                    </a:lnB>
+                    <a:lnTlToBr w="12700" cmpd="sng">
+                      <a:noFill/>
+                      <a:prstDash val="solid"/>
+                    </a:lnTlToBr>
+                    <a:lnBlToTr w="12700" cmpd="sng">
+                      <a:noFill/>
+                      <a:prstDash val="solid"/>
+                    </a:lnBlToTr>
+                  </a:tcPr>
+                </a:tc>
+                <a:extLst>
+                  <a:ext uri="{0D108BD9-81ED-4DB2-BD59-A6C34878D82A}">
+                    <a16:rowId xmlns:a16="http://schemas.microsoft.com/office/drawing/2014/main" val="2845835728"/>
+                  </a:ext>
+                </a:extLst>
+              </a:tr>
+              <a:tr h="301456">
+                <a:tc>
+                  <a:txBody>
+                    <a:bodyPr/>
+                    <a:lstStyle/>
+                    <a:p>
+                      <a:pPr algn="l" rtl="0" fontAlgn="b">
+                        <a:buNone/>
+                      </a:pPr>
+                      <a:r>
+                        <a:rPr lang="en-US" sz="1000" dirty="0">
+                          <a:effectLst/>
+                        </a:rPr>
+                        <a:t>Conv2D_3 (Dense </a:t>
+                      </a:r>
+                      <a:r>
+                        <a:rPr lang="ko-KR" altLang="en-US" sz="1000" dirty="0">
+                          <a:effectLst/>
+                        </a:rPr>
+                        <a:t>대체</a:t>
+                      </a:r>
+                      <a:r>
+                        <a:rPr lang="en-US" altLang="ko-KR" sz="1000" dirty="0">
+                          <a:effectLst/>
+                        </a:rPr>
+                        <a:t>)</a:t>
+                      </a:r>
+                      <a:endParaRPr lang="en-US" altLang="ko-KR" sz="1000" dirty="0">
+                        <a:effectLst/>
+                        <a:latin typeface="D2Coding" panose="020B0609020101020101" pitchFamily="49" charset="-127"/>
+                        <a:ea typeface="D2Coding" panose="020B0609020101020101" pitchFamily="49" charset="-127"/>
+                      </a:endParaRPr>
+                    </a:p>
+                  </a:txBody>
+                  <a:tcPr marL="13813" marR="13813" marT="9209" marB="9209" anchor="b">
+                    <a:lnL w="12700" cap="flat" cmpd="sng" algn="ctr">
+                      <a:solidFill>
+                        <a:schemeClr val="tx1"/>
+                      </a:solidFill>
+                      <a:prstDash val="solid"/>
+                      <a:round/>
+                      <a:headEnd type="none" w="med" len="med"/>
+                      <a:tailEnd type="none" w="med" len="med"/>
+                    </a:lnL>
+                    <a:lnR w="6350" cap="flat" cmpd="sng" algn="ctr">
+                      <a:noFill/>
+                      <a:prstDash val="solid"/>
+                      <a:miter lim="800000"/>
+                    </a:lnR>
+                    <a:lnT w="6350" cap="flat" cmpd="sng" algn="ctr">
+                      <a:noFill/>
+                      <a:prstDash val="solid"/>
+                      <a:miter lim="800000"/>
+                    </a:lnT>
+                    <a:lnB w="6350" cap="flat" cmpd="sng" algn="ctr">
+                      <a:noFill/>
+                      <a:prstDash val="solid"/>
+                      <a:miter lim="800000"/>
+                    </a:lnB>
+                    <a:lnTlToBr w="12700" cmpd="sng">
+                      <a:noFill/>
+                      <a:prstDash val="solid"/>
+                    </a:lnTlToBr>
+                    <a:lnBlToTr w="12700" cmpd="sng">
+                      <a:noFill/>
+                      <a:prstDash val="solid"/>
+                    </a:lnBlToTr>
+                  </a:tcPr>
+                </a:tc>
+                <a:tc>
+                  <a:txBody>
+                    <a:bodyPr/>
+                    <a:lstStyle/>
+                    <a:p>
+                      <a:pPr algn="l" rtl="0" fontAlgn="b">
+                        <a:buNone/>
+                      </a:pPr>
+                      <a:r>
+                        <a:rPr lang="en-US" altLang="ko-KR" sz="1000">
+                          <a:effectLst/>
+                        </a:rPr>
+                        <a:t>16</a:t>
+                      </a:r>
+                      <a:endParaRPr lang="en-US" altLang="ko-KR" sz="1000">
+                        <a:effectLst/>
+                        <a:latin typeface="D2Coding" panose="020B0609020101020101" pitchFamily="49" charset="-127"/>
+                        <a:ea typeface="D2Coding" panose="020B0609020101020101" pitchFamily="49" charset="-127"/>
+                      </a:endParaRPr>
+                    </a:p>
+                  </a:txBody>
+                  <a:tcPr marL="13813" marR="13813" marT="9209" marB="9209" anchor="b">
+                    <a:lnL w="6350" cap="flat" cmpd="sng" algn="ctr">
+                      <a:noFill/>
+                      <a:prstDash val="solid"/>
+                      <a:miter lim="800000"/>
+                    </a:lnL>
+                    <a:lnR w="6350" cap="flat" cmpd="sng" algn="ctr">
+                      <a:noFill/>
+                      <a:prstDash val="solid"/>
+                      <a:miter lim="800000"/>
+                    </a:lnR>
+                    <a:lnT w="6350" cap="flat" cmpd="sng" algn="ctr">
+                      <a:noFill/>
+                      <a:prstDash val="solid"/>
+                      <a:miter lim="800000"/>
+                    </a:lnT>
+                    <a:lnB w="6350" cap="flat" cmpd="sng" algn="ctr">
+                      <a:noFill/>
+                      <a:prstDash val="solid"/>
+                      <a:miter lim="800000"/>
+                    </a:lnB>
+                    <a:lnTlToBr w="12700" cmpd="sng">
+                      <a:noFill/>
+                      <a:prstDash val="solid"/>
+                    </a:lnTlToBr>
+                    <a:lnBlToTr w="12700" cmpd="sng">
+                      <a:noFill/>
+                      <a:prstDash val="solid"/>
+                    </a:lnBlToTr>
+                  </a:tcPr>
+                </a:tc>
+                <a:tc>
+                  <a:txBody>
+                    <a:bodyPr/>
+                    <a:lstStyle/>
+                    <a:p>
+                      <a:pPr algn="l" rtl="0" fontAlgn="b">
+                        <a:buNone/>
+                      </a:pPr>
+                      <a:r>
+                        <a:rPr lang="en-US" altLang="ko-KR" sz="1000">
+                          <a:effectLst/>
+                        </a:rPr>
+                        <a:t>5×5</a:t>
+                      </a:r>
+                      <a:endParaRPr lang="en-US" altLang="ko-KR" sz="1000">
+                        <a:effectLst/>
+                        <a:latin typeface="D2Coding" panose="020B0609020101020101" pitchFamily="49" charset="-127"/>
+                        <a:ea typeface="D2Coding" panose="020B0609020101020101" pitchFamily="49" charset="-127"/>
+                      </a:endParaRPr>
+                    </a:p>
+                  </a:txBody>
+                  <a:tcPr marL="13813" marR="13813" marT="9209" marB="9209" anchor="b">
+                    <a:lnL w="6350" cap="flat" cmpd="sng" algn="ctr">
+                      <a:noFill/>
+                      <a:prstDash val="solid"/>
+                      <a:miter lim="800000"/>
+                    </a:lnL>
+                    <a:lnR w="6350" cap="flat" cmpd="sng" algn="ctr">
+                      <a:noFill/>
+                      <a:prstDash val="solid"/>
+                      <a:miter lim="800000"/>
+                    </a:lnR>
+                    <a:lnT w="6350" cap="flat" cmpd="sng" algn="ctr">
+                      <a:noFill/>
+                      <a:prstDash val="solid"/>
+                      <a:miter lim="800000"/>
+                    </a:lnT>
+                    <a:lnB w="6350" cap="flat" cmpd="sng" algn="ctr">
+                      <a:noFill/>
+                      <a:prstDash val="solid"/>
+                      <a:miter lim="800000"/>
+                    </a:lnB>
+                    <a:lnTlToBr w="12700" cmpd="sng">
+                      <a:noFill/>
+                      <a:prstDash val="solid"/>
+                    </a:lnTlToBr>
+                    <a:lnBlToTr w="12700" cmpd="sng">
+                      <a:noFill/>
+                      <a:prstDash val="solid"/>
+                    </a:lnBlToTr>
+                  </a:tcPr>
+                </a:tc>
+                <a:tc>
+                  <a:txBody>
+                    <a:bodyPr/>
+                    <a:lstStyle/>
+                    <a:p>
+                      <a:pPr algn="l" rtl="0" fontAlgn="b">
+                        <a:buNone/>
+                      </a:pPr>
+                      <a:r>
+                        <a:rPr lang="en-US" altLang="ko-KR" sz="1000">
+                          <a:effectLst/>
+                        </a:rPr>
+                        <a:t>120</a:t>
+                      </a:r>
+                      <a:endParaRPr lang="en-US" altLang="ko-KR" sz="1000">
+                        <a:effectLst/>
+                        <a:latin typeface="D2Coding" panose="020B0609020101020101" pitchFamily="49" charset="-127"/>
+                        <a:ea typeface="D2Coding" panose="020B0609020101020101" pitchFamily="49" charset="-127"/>
+                      </a:endParaRPr>
+                    </a:p>
+                  </a:txBody>
+                  <a:tcPr marL="13813" marR="13813" marT="9209" marB="9209" anchor="b">
+                    <a:lnL w="6350" cap="flat" cmpd="sng" algn="ctr">
+                      <a:noFill/>
+                      <a:prstDash val="solid"/>
+                      <a:miter lim="800000"/>
+                    </a:lnL>
+                    <a:lnR w="6350" cap="flat" cmpd="sng" algn="ctr">
+                      <a:noFill/>
+                      <a:prstDash val="solid"/>
+                      <a:miter lim="800000"/>
+                    </a:lnR>
+                    <a:lnT w="6350" cap="flat" cmpd="sng" algn="ctr">
+                      <a:noFill/>
+                      <a:prstDash val="solid"/>
+                      <a:miter lim="800000"/>
+                    </a:lnT>
+                    <a:lnB w="6350" cap="flat" cmpd="sng" algn="ctr">
+                      <a:noFill/>
+                      <a:prstDash val="solid"/>
+                      <a:miter lim="800000"/>
+                    </a:lnB>
+                    <a:lnTlToBr w="12700" cmpd="sng">
+                      <a:noFill/>
+                      <a:prstDash val="solid"/>
+                    </a:lnTlToBr>
+                    <a:lnBlToTr w="12700" cmpd="sng">
+                      <a:noFill/>
+                      <a:prstDash val="solid"/>
+                    </a:lnBlToTr>
+                  </a:tcPr>
+                </a:tc>
+                <a:tc>
+                  <a:txBody>
+                    <a:bodyPr/>
+                    <a:lstStyle/>
+                    <a:p>
+                      <a:pPr algn="l" rtl="0" fontAlgn="b">
+                        <a:buNone/>
+                      </a:pPr>
+                      <a:r>
+                        <a:rPr lang="en-US" altLang="ko-KR" sz="1000">
+                          <a:effectLst/>
+                        </a:rPr>
+                        <a:t>{(5×5×16)+1}×120=(400+1)×120=401×120</a:t>
+                      </a:r>
+                      <a:endParaRPr lang="en-US" altLang="ko-KR" sz="1000">
+                        <a:effectLst/>
+                        <a:latin typeface="D2Coding" panose="020B0609020101020101" pitchFamily="49" charset="-127"/>
+                        <a:ea typeface="D2Coding" panose="020B0609020101020101" pitchFamily="49" charset="-127"/>
+                      </a:endParaRPr>
+                    </a:p>
+                  </a:txBody>
+                  <a:tcPr marL="13813" marR="13813" marT="9209" marB="9209" anchor="b">
+                    <a:lnL w="6350" cap="flat" cmpd="sng" algn="ctr">
+                      <a:noFill/>
+                      <a:prstDash val="solid"/>
+                      <a:miter lim="800000"/>
+                    </a:lnL>
+                    <a:lnR w="6350" cap="flat" cmpd="sng" algn="ctr">
+                      <a:noFill/>
+                      <a:prstDash val="solid"/>
+                      <a:miter lim="800000"/>
+                    </a:lnR>
+                    <a:lnT w="6350" cap="flat" cmpd="sng" algn="ctr">
+                      <a:noFill/>
+                      <a:prstDash val="solid"/>
+                      <a:miter lim="800000"/>
+                    </a:lnT>
+                    <a:lnB w="6350" cap="flat" cmpd="sng" algn="ctr">
+                      <a:noFill/>
+                      <a:prstDash val="solid"/>
+                      <a:miter lim="800000"/>
+                    </a:lnB>
+                    <a:lnTlToBr w="12700" cmpd="sng">
+                      <a:noFill/>
+                      <a:prstDash val="solid"/>
+                    </a:lnTlToBr>
+                    <a:lnBlToTr w="12700" cmpd="sng">
+                      <a:noFill/>
+                      <a:prstDash val="solid"/>
+                    </a:lnBlToTr>
+                  </a:tcPr>
+                </a:tc>
+                <a:tc>
+                  <a:txBody>
+                    <a:bodyPr/>
+                    <a:lstStyle/>
+                    <a:p>
+                      <a:pPr algn="l" rtl="0" fontAlgn="b">
+                        <a:buNone/>
+                      </a:pPr>
+                      <a:r>
+                        <a:rPr lang="en-US" altLang="ko-KR" sz="1000">
+                          <a:effectLst/>
+                        </a:rPr>
+                        <a:t>48,120</a:t>
+                      </a:r>
+                      <a:endParaRPr lang="en-US" altLang="ko-KR" sz="1000">
+                        <a:effectLst/>
+                        <a:latin typeface="D2Coding" panose="020B0609020101020101" pitchFamily="49" charset="-127"/>
+                        <a:ea typeface="D2Coding" panose="020B0609020101020101" pitchFamily="49" charset="-127"/>
+                      </a:endParaRPr>
+                    </a:p>
+                  </a:txBody>
+                  <a:tcPr marL="13813" marR="13813" marT="9209" marB="9209" anchor="b">
+                    <a:lnL w="6350" cap="flat" cmpd="sng" algn="ctr">
+                      <a:noFill/>
+                      <a:prstDash val="solid"/>
+                      <a:miter lim="800000"/>
+                    </a:lnL>
+                    <a:lnR w="12700" cap="flat" cmpd="sng" algn="ctr">
+                      <a:solidFill>
+                        <a:schemeClr val="tx1"/>
+                      </a:solidFill>
+                      <a:prstDash val="solid"/>
+                      <a:round/>
+                      <a:headEnd type="none" w="med" len="med"/>
+                      <a:tailEnd type="none" w="med" len="med"/>
+                    </a:lnR>
+                    <a:lnT w="6350" cap="flat" cmpd="sng" algn="ctr">
+                      <a:noFill/>
+                      <a:prstDash val="solid"/>
+                      <a:miter lim="800000"/>
+                    </a:lnT>
+                    <a:lnB w="6350" cap="flat" cmpd="sng" algn="ctr">
+                      <a:noFill/>
+                      <a:prstDash val="solid"/>
+                      <a:miter lim="800000"/>
+                    </a:lnB>
+                    <a:lnTlToBr w="12700" cmpd="sng">
+                      <a:noFill/>
+                      <a:prstDash val="solid"/>
+                    </a:lnTlToBr>
+                    <a:lnBlToTr w="12700" cmpd="sng">
+                      <a:noFill/>
+                      <a:prstDash val="solid"/>
+                    </a:lnBlToTr>
+                  </a:tcPr>
+                </a:tc>
+                <a:extLst>
+                  <a:ext uri="{0D108BD9-81ED-4DB2-BD59-A6C34878D82A}">
+                    <a16:rowId xmlns:a16="http://schemas.microsoft.com/office/drawing/2014/main" val="2788446111"/>
+                  </a:ext>
+                </a:extLst>
+              </a:tr>
+              <a:tr h="301456">
+                <a:tc>
+                  <a:txBody>
+                    <a:bodyPr/>
+                    <a:lstStyle/>
+                    <a:p>
+                      <a:pPr algn="l" rtl="0" fontAlgn="b">
+                        <a:buNone/>
+                      </a:pPr>
+                      <a:r>
+                        <a:rPr lang="en-US" sz="1000" dirty="0">
+                          <a:effectLst/>
+                        </a:rPr>
+                        <a:t>Conv2D_4 (Dense </a:t>
+                      </a:r>
+                      <a:r>
+                        <a:rPr lang="ko-KR" altLang="en-US" sz="1000" dirty="0">
+                          <a:effectLst/>
+                        </a:rPr>
+                        <a:t>대체</a:t>
+                      </a:r>
+                      <a:r>
+                        <a:rPr lang="en-US" altLang="ko-KR" sz="1000" dirty="0">
+                          <a:effectLst/>
+                        </a:rPr>
+                        <a:t>)</a:t>
+                      </a:r>
+                      <a:endParaRPr lang="en-US" altLang="ko-KR" sz="1000" dirty="0">
+                        <a:effectLst/>
+                        <a:latin typeface="D2Coding" panose="020B0609020101020101" pitchFamily="49" charset="-127"/>
+                        <a:ea typeface="D2Coding" panose="020B0609020101020101" pitchFamily="49" charset="-127"/>
+                      </a:endParaRPr>
+                    </a:p>
+                  </a:txBody>
+                  <a:tcPr marL="13813" marR="13813" marT="9209" marB="9209" anchor="b">
+                    <a:lnL w="12700" cap="flat" cmpd="sng" algn="ctr">
+                      <a:solidFill>
+                        <a:schemeClr val="tx1"/>
+                      </a:solidFill>
+                      <a:prstDash val="solid"/>
+                      <a:round/>
+                      <a:headEnd type="none" w="med" len="med"/>
+                      <a:tailEnd type="none" w="med" len="med"/>
+                    </a:lnL>
+                    <a:lnR w="6350" cap="flat" cmpd="sng" algn="ctr">
+                      <a:noFill/>
+                      <a:prstDash val="solid"/>
+                      <a:miter lim="800000"/>
+                    </a:lnR>
+                    <a:lnT w="6350" cap="flat" cmpd="sng" algn="ctr">
+                      <a:noFill/>
+                      <a:prstDash val="solid"/>
+                      <a:miter lim="800000"/>
+                    </a:lnT>
+                    <a:lnB w="6350" cap="flat" cmpd="sng" algn="ctr">
+                      <a:noFill/>
+                      <a:prstDash val="solid"/>
+                      <a:miter lim="800000"/>
+                    </a:lnB>
+                    <a:lnTlToBr w="12700" cmpd="sng">
+                      <a:noFill/>
+                      <a:prstDash val="solid"/>
+                    </a:lnTlToBr>
+                    <a:lnBlToTr w="12700" cmpd="sng">
+                      <a:noFill/>
+                      <a:prstDash val="solid"/>
+                    </a:lnBlToTr>
+                  </a:tcPr>
+                </a:tc>
+                <a:tc>
+                  <a:txBody>
+                    <a:bodyPr/>
+                    <a:lstStyle/>
+                    <a:p>
+                      <a:pPr algn="l" rtl="0" fontAlgn="b">
+                        <a:buNone/>
+                      </a:pPr>
+                      <a:r>
+                        <a:rPr lang="en-US" altLang="ko-KR" sz="1000">
+                          <a:effectLst/>
+                        </a:rPr>
+                        <a:t>120</a:t>
+                      </a:r>
+                      <a:endParaRPr lang="en-US" altLang="ko-KR" sz="1000">
+                        <a:effectLst/>
+                        <a:latin typeface="D2Coding" panose="020B0609020101020101" pitchFamily="49" charset="-127"/>
+                        <a:ea typeface="D2Coding" panose="020B0609020101020101" pitchFamily="49" charset="-127"/>
+                      </a:endParaRPr>
+                    </a:p>
+                  </a:txBody>
+                  <a:tcPr marL="13813" marR="13813" marT="9209" marB="9209" anchor="b">
+                    <a:lnL w="6350" cap="flat" cmpd="sng" algn="ctr">
+                      <a:noFill/>
+                      <a:prstDash val="solid"/>
+                      <a:miter lim="800000"/>
+                    </a:lnL>
+                    <a:lnR w="6350" cap="flat" cmpd="sng" algn="ctr">
+                      <a:noFill/>
+                      <a:prstDash val="solid"/>
+                      <a:miter lim="800000"/>
+                    </a:lnR>
+                    <a:lnT w="6350" cap="flat" cmpd="sng" algn="ctr">
+                      <a:noFill/>
+                      <a:prstDash val="solid"/>
+                      <a:miter lim="800000"/>
+                    </a:lnT>
+                    <a:lnB w="6350" cap="flat" cmpd="sng" algn="ctr">
+                      <a:noFill/>
+                      <a:prstDash val="solid"/>
+                      <a:miter lim="800000"/>
+                    </a:lnB>
+                    <a:lnTlToBr w="12700" cmpd="sng">
+                      <a:noFill/>
+                      <a:prstDash val="solid"/>
+                    </a:lnTlToBr>
+                    <a:lnBlToTr w="12700" cmpd="sng">
+                      <a:noFill/>
+                      <a:prstDash val="solid"/>
+                    </a:lnBlToTr>
+                  </a:tcPr>
+                </a:tc>
+                <a:tc>
+                  <a:txBody>
+                    <a:bodyPr/>
+                    <a:lstStyle/>
+                    <a:p>
+                      <a:pPr algn="l" rtl="0" fontAlgn="b">
+                        <a:buNone/>
+                      </a:pPr>
+                      <a:r>
+                        <a:rPr lang="en-US" altLang="ko-KR" sz="1000">
+                          <a:effectLst/>
+                        </a:rPr>
+                        <a:t>1×1</a:t>
+                      </a:r>
+                      <a:endParaRPr lang="en-US" altLang="ko-KR" sz="1000">
+                        <a:effectLst/>
+                        <a:latin typeface="D2Coding" panose="020B0609020101020101" pitchFamily="49" charset="-127"/>
+                        <a:ea typeface="D2Coding" panose="020B0609020101020101" pitchFamily="49" charset="-127"/>
+                      </a:endParaRPr>
+                    </a:p>
+                  </a:txBody>
+                  <a:tcPr marL="13813" marR="13813" marT="9209" marB="9209" anchor="b">
+                    <a:lnL w="6350" cap="flat" cmpd="sng" algn="ctr">
+                      <a:noFill/>
+                      <a:prstDash val="solid"/>
+                      <a:miter lim="800000"/>
+                    </a:lnL>
+                    <a:lnR w="6350" cap="flat" cmpd="sng" algn="ctr">
+                      <a:noFill/>
+                      <a:prstDash val="solid"/>
+                      <a:miter lim="800000"/>
+                    </a:lnR>
+                    <a:lnT w="6350" cap="flat" cmpd="sng" algn="ctr">
+                      <a:noFill/>
+                      <a:prstDash val="solid"/>
+                      <a:miter lim="800000"/>
+                    </a:lnT>
+                    <a:lnB w="6350" cap="flat" cmpd="sng" algn="ctr">
+                      <a:noFill/>
+                      <a:prstDash val="solid"/>
+                      <a:miter lim="800000"/>
+                    </a:lnB>
+                    <a:lnTlToBr w="12700" cmpd="sng">
+                      <a:noFill/>
+                      <a:prstDash val="solid"/>
+                    </a:lnTlToBr>
+                    <a:lnBlToTr w="12700" cmpd="sng">
+                      <a:noFill/>
+                      <a:prstDash val="solid"/>
+                    </a:lnBlToTr>
+                  </a:tcPr>
+                </a:tc>
+                <a:tc>
+                  <a:txBody>
+                    <a:bodyPr/>
+                    <a:lstStyle/>
+                    <a:p>
+                      <a:pPr algn="l" rtl="0" fontAlgn="b">
+                        <a:buNone/>
+                      </a:pPr>
+                      <a:r>
+                        <a:rPr lang="en-US" altLang="ko-KR" sz="1000">
+                          <a:effectLst/>
+                        </a:rPr>
+                        <a:t>84</a:t>
+                      </a:r>
+                      <a:endParaRPr lang="en-US" altLang="ko-KR" sz="1000">
+                        <a:effectLst/>
+                        <a:latin typeface="D2Coding" panose="020B0609020101020101" pitchFamily="49" charset="-127"/>
+                        <a:ea typeface="D2Coding" panose="020B0609020101020101" pitchFamily="49" charset="-127"/>
+                      </a:endParaRPr>
+                    </a:p>
+                  </a:txBody>
+                  <a:tcPr marL="13813" marR="13813" marT="9209" marB="9209" anchor="b">
+                    <a:lnL w="6350" cap="flat" cmpd="sng" algn="ctr">
+                      <a:noFill/>
+                      <a:prstDash val="solid"/>
+                      <a:miter lim="800000"/>
+                    </a:lnL>
+                    <a:lnR w="6350" cap="flat" cmpd="sng" algn="ctr">
+                      <a:noFill/>
+                      <a:prstDash val="solid"/>
+                      <a:miter lim="800000"/>
+                    </a:lnR>
+                    <a:lnT w="6350" cap="flat" cmpd="sng" algn="ctr">
+                      <a:noFill/>
+                      <a:prstDash val="solid"/>
+                      <a:miter lim="800000"/>
+                    </a:lnT>
+                    <a:lnB w="6350" cap="flat" cmpd="sng" algn="ctr">
+                      <a:noFill/>
+                      <a:prstDash val="solid"/>
+                      <a:miter lim="800000"/>
+                    </a:lnB>
+                    <a:lnTlToBr w="12700" cmpd="sng">
+                      <a:noFill/>
+                      <a:prstDash val="solid"/>
+                    </a:lnTlToBr>
+                    <a:lnBlToTr w="12700" cmpd="sng">
+                      <a:noFill/>
+                      <a:prstDash val="solid"/>
+                    </a:lnBlToTr>
+                  </a:tcPr>
+                </a:tc>
+                <a:tc>
+                  <a:txBody>
+                    <a:bodyPr/>
+                    <a:lstStyle/>
+                    <a:p>
+                      <a:pPr algn="l" rtl="0" fontAlgn="b">
+                        <a:buNone/>
+                      </a:pPr>
+                      <a:r>
+                        <a:rPr lang="en-US" altLang="ko-KR" sz="1000" dirty="0">
+                          <a:effectLst/>
+                        </a:rPr>
+                        <a:t>{(1×1×120)+1}×84=(120+1)×84=121×84</a:t>
+                      </a:r>
+                      <a:endParaRPr lang="en-US" altLang="ko-KR" sz="1000" dirty="0">
+                        <a:effectLst/>
+                        <a:latin typeface="D2Coding" panose="020B0609020101020101" pitchFamily="49" charset="-127"/>
+                        <a:ea typeface="D2Coding" panose="020B0609020101020101" pitchFamily="49" charset="-127"/>
+                      </a:endParaRPr>
+                    </a:p>
+                  </a:txBody>
+                  <a:tcPr marL="13813" marR="13813" marT="9209" marB="9209" anchor="b">
+                    <a:lnL w="6350" cap="flat" cmpd="sng" algn="ctr">
+                      <a:noFill/>
+                      <a:prstDash val="solid"/>
+                      <a:miter lim="800000"/>
+                    </a:lnL>
+                    <a:lnR w="6350" cap="flat" cmpd="sng" algn="ctr">
+                      <a:noFill/>
+                      <a:prstDash val="solid"/>
+                      <a:miter lim="800000"/>
+                    </a:lnR>
+                    <a:lnT w="6350" cap="flat" cmpd="sng" algn="ctr">
+                      <a:noFill/>
+                      <a:prstDash val="solid"/>
+                      <a:miter lim="800000"/>
+                    </a:lnT>
+                    <a:lnB w="6350" cap="flat" cmpd="sng" algn="ctr">
+                      <a:noFill/>
+                      <a:prstDash val="solid"/>
+                      <a:miter lim="800000"/>
+                    </a:lnB>
+                    <a:lnTlToBr w="12700" cmpd="sng">
+                      <a:noFill/>
+                      <a:prstDash val="solid"/>
+                    </a:lnTlToBr>
+                    <a:lnBlToTr w="12700" cmpd="sng">
+                      <a:noFill/>
+                      <a:prstDash val="solid"/>
+                    </a:lnBlToTr>
+                  </a:tcPr>
+                </a:tc>
+                <a:tc>
+                  <a:txBody>
+                    <a:bodyPr/>
+                    <a:lstStyle/>
+                    <a:p>
+                      <a:pPr algn="l" rtl="0" fontAlgn="b">
+                        <a:buNone/>
+                      </a:pPr>
+                      <a:r>
+                        <a:rPr lang="en-US" altLang="ko-KR" sz="1000">
+                          <a:effectLst/>
+                        </a:rPr>
+                        <a:t>10,164</a:t>
+                      </a:r>
+                      <a:endParaRPr lang="en-US" altLang="ko-KR" sz="1000">
+                        <a:effectLst/>
+                        <a:latin typeface="D2Coding" panose="020B0609020101020101" pitchFamily="49" charset="-127"/>
+                        <a:ea typeface="D2Coding" panose="020B0609020101020101" pitchFamily="49" charset="-127"/>
+                      </a:endParaRPr>
+                    </a:p>
+                  </a:txBody>
+                  <a:tcPr marL="13813" marR="13813" marT="9209" marB="9209" anchor="b">
+                    <a:lnL w="6350" cap="flat" cmpd="sng" algn="ctr">
+                      <a:noFill/>
+                      <a:prstDash val="solid"/>
+                      <a:miter lim="800000"/>
+                    </a:lnL>
+                    <a:lnR w="12700" cap="flat" cmpd="sng" algn="ctr">
+                      <a:solidFill>
+                        <a:schemeClr val="tx1"/>
+                      </a:solidFill>
+                      <a:prstDash val="solid"/>
+                      <a:round/>
+                      <a:headEnd type="none" w="med" len="med"/>
+                      <a:tailEnd type="none" w="med" len="med"/>
+                    </a:lnR>
+                    <a:lnT w="6350" cap="flat" cmpd="sng" algn="ctr">
+                      <a:noFill/>
+                      <a:prstDash val="solid"/>
+                      <a:miter lim="800000"/>
+                    </a:lnT>
+                    <a:lnB w="6350" cap="flat" cmpd="sng" algn="ctr">
+                      <a:noFill/>
+                      <a:prstDash val="solid"/>
+                      <a:miter lim="800000"/>
+                    </a:lnB>
+                    <a:lnTlToBr w="12700" cmpd="sng">
+                      <a:noFill/>
+                      <a:prstDash val="solid"/>
+                    </a:lnTlToBr>
+                    <a:lnBlToTr w="12700" cmpd="sng">
+                      <a:noFill/>
+                      <a:prstDash val="solid"/>
+                    </a:lnBlToTr>
+                  </a:tcPr>
+                </a:tc>
+                <a:extLst>
+                  <a:ext uri="{0D108BD9-81ED-4DB2-BD59-A6C34878D82A}">
+                    <a16:rowId xmlns:a16="http://schemas.microsoft.com/office/drawing/2014/main" val="1587652098"/>
+                  </a:ext>
+                </a:extLst>
+              </a:tr>
+              <a:tr h="301456">
+                <a:tc>
+                  <a:txBody>
+                    <a:bodyPr/>
+                    <a:lstStyle/>
+                    <a:p>
+                      <a:pPr algn="l" rtl="0" fontAlgn="b">
+                        <a:buNone/>
+                      </a:pPr>
+                      <a:r>
+                        <a:rPr lang="en-US" sz="1000" dirty="0">
+                          <a:effectLst/>
+                        </a:rPr>
+                        <a:t>Conv2D_5 (</a:t>
+                      </a:r>
+                      <a:r>
+                        <a:rPr lang="ko-KR" altLang="en-US" sz="1000" dirty="0" err="1">
+                          <a:effectLst/>
+                        </a:rPr>
+                        <a:t>출력층</a:t>
+                      </a:r>
+                      <a:r>
+                        <a:rPr lang="en-US" altLang="ko-KR" sz="1000" dirty="0">
+                          <a:effectLst/>
+                        </a:rPr>
+                        <a:t>)</a:t>
+                      </a:r>
+                      <a:endParaRPr lang="en-US" altLang="ko-KR" sz="1000" dirty="0">
+                        <a:effectLst/>
+                        <a:latin typeface="D2Coding" panose="020B0609020101020101" pitchFamily="49" charset="-127"/>
+                        <a:ea typeface="D2Coding" panose="020B0609020101020101" pitchFamily="49" charset="-127"/>
+                      </a:endParaRPr>
+                    </a:p>
+                  </a:txBody>
+                  <a:tcPr marL="13813" marR="13813" marT="9209" marB="9209" anchor="b">
+                    <a:lnL w="12700" cap="flat" cmpd="sng" algn="ctr">
+                      <a:solidFill>
+                        <a:schemeClr val="tx1"/>
+                      </a:solidFill>
+                      <a:prstDash val="solid"/>
+                      <a:round/>
+                      <a:headEnd type="none" w="med" len="med"/>
+                      <a:tailEnd type="none" w="med" len="med"/>
+                    </a:lnL>
+                    <a:lnR w="6350" cap="flat" cmpd="sng" algn="ctr">
+                      <a:noFill/>
+                      <a:prstDash val="solid"/>
+                      <a:miter lim="800000"/>
+                    </a:lnR>
+                    <a:lnT w="6350" cap="flat" cmpd="sng" algn="ctr">
+                      <a:noFill/>
+                      <a:prstDash val="solid"/>
+                      <a:miter lim="800000"/>
+                    </a:lnT>
+                    <a:lnB w="6350" cap="flat" cmpd="sng" algn="ctr">
+                      <a:noFill/>
+                      <a:prstDash val="solid"/>
+                      <a:miter lim="800000"/>
+                    </a:lnB>
+                    <a:lnTlToBr w="12700" cmpd="sng">
+                      <a:noFill/>
+                      <a:prstDash val="solid"/>
+                    </a:lnTlToBr>
+                    <a:lnBlToTr w="12700" cmpd="sng">
+                      <a:noFill/>
+                      <a:prstDash val="solid"/>
+                    </a:lnBlToTr>
+                  </a:tcPr>
+                </a:tc>
+                <a:tc>
+                  <a:txBody>
+                    <a:bodyPr/>
+                    <a:lstStyle/>
+                    <a:p>
+                      <a:pPr algn="l" rtl="0" fontAlgn="b">
+                        <a:buNone/>
+                      </a:pPr>
+                      <a:r>
+                        <a:rPr lang="en-US" altLang="ko-KR" sz="1000">
+                          <a:effectLst/>
+                        </a:rPr>
+                        <a:t>84</a:t>
+                      </a:r>
+                      <a:endParaRPr lang="en-US" altLang="ko-KR" sz="1000">
+                        <a:effectLst/>
+                        <a:latin typeface="D2Coding" panose="020B0609020101020101" pitchFamily="49" charset="-127"/>
+                        <a:ea typeface="D2Coding" panose="020B0609020101020101" pitchFamily="49" charset="-127"/>
+                      </a:endParaRPr>
+                    </a:p>
+                  </a:txBody>
+                  <a:tcPr marL="13813" marR="13813" marT="9209" marB="9209" anchor="b">
+                    <a:lnL w="6350" cap="flat" cmpd="sng" algn="ctr">
+                      <a:noFill/>
+                      <a:prstDash val="solid"/>
+                      <a:miter lim="800000"/>
+                    </a:lnL>
+                    <a:lnR w="6350" cap="flat" cmpd="sng" algn="ctr">
+                      <a:noFill/>
+                      <a:prstDash val="solid"/>
+                      <a:miter lim="800000"/>
+                    </a:lnR>
+                    <a:lnT w="6350" cap="flat" cmpd="sng" algn="ctr">
+                      <a:noFill/>
+                      <a:prstDash val="solid"/>
+                      <a:miter lim="800000"/>
+                    </a:lnT>
+                    <a:lnB w="6350" cap="flat" cmpd="sng" algn="ctr">
+                      <a:noFill/>
+                      <a:prstDash val="solid"/>
+                      <a:miter lim="800000"/>
+                    </a:lnB>
+                    <a:lnTlToBr w="12700" cmpd="sng">
+                      <a:noFill/>
+                      <a:prstDash val="solid"/>
+                    </a:lnTlToBr>
+                    <a:lnBlToTr w="12700" cmpd="sng">
+                      <a:noFill/>
+                      <a:prstDash val="solid"/>
+                    </a:lnBlToTr>
+                  </a:tcPr>
+                </a:tc>
+                <a:tc>
+                  <a:txBody>
+                    <a:bodyPr/>
+                    <a:lstStyle/>
+                    <a:p>
+                      <a:pPr algn="l" rtl="0" fontAlgn="b">
+                        <a:buNone/>
+                      </a:pPr>
+                      <a:r>
+                        <a:rPr lang="en-US" altLang="ko-KR" sz="1000">
+                          <a:effectLst/>
+                        </a:rPr>
+                        <a:t>1×1</a:t>
+                      </a:r>
+                      <a:endParaRPr lang="en-US" altLang="ko-KR" sz="1000">
+                        <a:effectLst/>
+                        <a:latin typeface="D2Coding" panose="020B0609020101020101" pitchFamily="49" charset="-127"/>
+                        <a:ea typeface="D2Coding" panose="020B0609020101020101" pitchFamily="49" charset="-127"/>
+                      </a:endParaRPr>
+                    </a:p>
+                  </a:txBody>
+                  <a:tcPr marL="13813" marR="13813" marT="9209" marB="9209" anchor="b">
+                    <a:lnL w="6350" cap="flat" cmpd="sng" algn="ctr">
+                      <a:noFill/>
+                      <a:prstDash val="solid"/>
+                      <a:miter lim="800000"/>
+                    </a:lnL>
+                    <a:lnR w="6350" cap="flat" cmpd="sng" algn="ctr">
+                      <a:noFill/>
+                      <a:prstDash val="solid"/>
+                      <a:miter lim="800000"/>
+                    </a:lnR>
+                    <a:lnT w="6350" cap="flat" cmpd="sng" algn="ctr">
+                      <a:noFill/>
+                      <a:prstDash val="solid"/>
+                      <a:miter lim="800000"/>
+                    </a:lnT>
+                    <a:lnB w="6350" cap="flat" cmpd="sng" algn="ctr">
+                      <a:noFill/>
+                      <a:prstDash val="solid"/>
+                      <a:miter lim="800000"/>
+                    </a:lnB>
+                    <a:lnTlToBr w="12700" cmpd="sng">
+                      <a:noFill/>
+                      <a:prstDash val="solid"/>
+                    </a:lnTlToBr>
+                    <a:lnBlToTr w="12700" cmpd="sng">
+                      <a:noFill/>
+                      <a:prstDash val="solid"/>
+                    </a:lnBlToTr>
+                  </a:tcPr>
+                </a:tc>
+                <a:tc>
+                  <a:txBody>
+                    <a:bodyPr/>
+                    <a:lstStyle/>
+                    <a:p>
+                      <a:pPr algn="l" rtl="0" fontAlgn="b">
+                        <a:buNone/>
+                      </a:pPr>
+                      <a:r>
+                        <a:rPr lang="en-US" altLang="ko-KR" sz="1000">
+                          <a:effectLst/>
+                        </a:rPr>
+                        <a:t>10</a:t>
+                      </a:r>
+                      <a:endParaRPr lang="en-US" altLang="ko-KR" sz="1000">
+                        <a:effectLst/>
+                        <a:latin typeface="D2Coding" panose="020B0609020101020101" pitchFamily="49" charset="-127"/>
+                        <a:ea typeface="D2Coding" panose="020B0609020101020101" pitchFamily="49" charset="-127"/>
+                      </a:endParaRPr>
+                    </a:p>
+                  </a:txBody>
+                  <a:tcPr marL="13813" marR="13813" marT="9209" marB="9209" anchor="b">
+                    <a:lnL w="6350" cap="flat" cmpd="sng" algn="ctr">
+                      <a:noFill/>
+                      <a:prstDash val="solid"/>
+                      <a:miter lim="800000"/>
+                    </a:lnL>
+                    <a:lnR w="6350" cap="flat" cmpd="sng" algn="ctr">
+                      <a:noFill/>
+                      <a:prstDash val="solid"/>
+                      <a:miter lim="800000"/>
+                    </a:lnR>
+                    <a:lnT w="6350" cap="flat" cmpd="sng" algn="ctr">
+                      <a:noFill/>
+                      <a:prstDash val="solid"/>
+                      <a:miter lim="800000"/>
+                    </a:lnT>
+                    <a:lnB w="6350" cap="flat" cmpd="sng" algn="ctr">
+                      <a:noFill/>
+                      <a:prstDash val="solid"/>
+                      <a:miter lim="800000"/>
+                    </a:lnB>
+                    <a:lnTlToBr w="12700" cmpd="sng">
+                      <a:noFill/>
+                      <a:prstDash val="solid"/>
+                    </a:lnTlToBr>
+                    <a:lnBlToTr w="12700" cmpd="sng">
+                      <a:noFill/>
+                      <a:prstDash val="solid"/>
+                    </a:lnBlToTr>
+                  </a:tcPr>
+                </a:tc>
+                <a:tc>
+                  <a:txBody>
+                    <a:bodyPr/>
+                    <a:lstStyle/>
+                    <a:p>
+                      <a:pPr algn="l" rtl="0" fontAlgn="b">
+                        <a:buNone/>
+                      </a:pPr>
+                      <a:r>
+                        <a:rPr lang="en-US" altLang="ko-KR" sz="1000" dirty="0">
+                          <a:effectLst/>
+                        </a:rPr>
+                        <a:t>{(1×1×84)+1}×10=(84+1)×10=85×10</a:t>
+                      </a:r>
+                      <a:endParaRPr lang="en-US" altLang="ko-KR" sz="1000" dirty="0">
+                        <a:effectLst/>
+                        <a:latin typeface="D2Coding" panose="020B0609020101020101" pitchFamily="49" charset="-127"/>
+                        <a:ea typeface="D2Coding" panose="020B0609020101020101" pitchFamily="49" charset="-127"/>
+                      </a:endParaRPr>
+                    </a:p>
+                  </a:txBody>
+                  <a:tcPr marL="13813" marR="13813" marT="9209" marB="9209" anchor="b">
+                    <a:lnL w="6350" cap="flat" cmpd="sng" algn="ctr">
+                      <a:noFill/>
+                      <a:prstDash val="solid"/>
+                      <a:miter lim="800000"/>
+                    </a:lnL>
+                    <a:lnR w="6350" cap="flat" cmpd="sng" algn="ctr">
+                      <a:noFill/>
+                      <a:prstDash val="solid"/>
+                      <a:miter lim="800000"/>
+                    </a:lnR>
+                    <a:lnT w="6350" cap="flat" cmpd="sng" algn="ctr">
+                      <a:noFill/>
+                      <a:prstDash val="solid"/>
+                      <a:miter lim="800000"/>
+                    </a:lnT>
+                    <a:lnB w="6350" cap="flat" cmpd="sng" algn="ctr">
+                      <a:noFill/>
+                      <a:prstDash val="solid"/>
+                      <a:miter lim="800000"/>
+                    </a:lnB>
+                    <a:lnTlToBr w="12700" cmpd="sng">
+                      <a:noFill/>
+                      <a:prstDash val="solid"/>
+                    </a:lnTlToBr>
+                    <a:lnBlToTr w="12700" cmpd="sng">
+                      <a:noFill/>
+                      <a:prstDash val="solid"/>
+                    </a:lnBlToTr>
+                  </a:tcPr>
+                </a:tc>
+                <a:tc>
+                  <a:txBody>
+                    <a:bodyPr/>
+                    <a:lstStyle/>
+                    <a:p>
+                      <a:pPr algn="l" rtl="0" fontAlgn="b">
+                        <a:buNone/>
+                      </a:pPr>
+                      <a:r>
+                        <a:rPr lang="en-US" altLang="ko-KR" sz="1000" dirty="0">
+                          <a:effectLst/>
+                        </a:rPr>
+                        <a:t>850</a:t>
+                      </a:r>
+                      <a:endParaRPr lang="en-US" altLang="ko-KR" sz="1000" dirty="0">
+                        <a:effectLst/>
+                        <a:latin typeface="D2Coding" panose="020B0609020101020101" pitchFamily="49" charset="-127"/>
+                        <a:ea typeface="D2Coding" panose="020B0609020101020101" pitchFamily="49" charset="-127"/>
+                      </a:endParaRPr>
+                    </a:p>
+                  </a:txBody>
+                  <a:tcPr marL="13813" marR="13813" marT="9209" marB="9209" anchor="b">
+                    <a:lnL w="6350" cap="flat" cmpd="sng" algn="ctr">
+                      <a:noFill/>
+                      <a:prstDash val="solid"/>
+                      <a:miter lim="800000"/>
+                    </a:lnL>
+                    <a:lnR w="12700" cap="flat" cmpd="sng" algn="ctr">
+                      <a:solidFill>
+                        <a:schemeClr val="tx1"/>
+                      </a:solidFill>
+                      <a:prstDash val="solid"/>
+                      <a:round/>
+                      <a:headEnd type="none" w="med" len="med"/>
+                      <a:tailEnd type="none" w="med" len="med"/>
+                    </a:lnR>
+                    <a:lnT w="6350" cap="flat" cmpd="sng" algn="ctr">
+                      <a:noFill/>
+                      <a:prstDash val="solid"/>
+                      <a:miter lim="800000"/>
+                    </a:lnT>
+                    <a:lnB w="6350" cap="flat" cmpd="sng" algn="ctr">
+                      <a:noFill/>
+                      <a:prstDash val="solid"/>
+                      <a:miter lim="800000"/>
+                    </a:lnB>
+                    <a:lnTlToBr w="12700" cmpd="sng">
+                      <a:noFill/>
+                      <a:prstDash val="solid"/>
+                    </a:lnTlToBr>
+                    <a:lnBlToTr w="12700" cmpd="sng">
+                      <a:noFill/>
+                      <a:prstDash val="solid"/>
+                    </a:lnBlToTr>
+                  </a:tcPr>
+                </a:tc>
+                <a:extLst>
+                  <a:ext uri="{0D108BD9-81ED-4DB2-BD59-A6C34878D82A}">
+                    <a16:rowId xmlns:a16="http://schemas.microsoft.com/office/drawing/2014/main" val="1324892668"/>
+                  </a:ext>
+                </a:extLst>
+              </a:tr>
+              <a:tr h="301456">
+                <a:tc>
+                  <a:txBody>
+                    <a:bodyPr/>
+                    <a:lstStyle/>
+                    <a:p>
+                      <a:pPr algn="l" rtl="0" fontAlgn="b">
+                        <a:buNone/>
+                      </a:pPr>
+                      <a:r>
+                        <a:rPr lang="ko-KR" altLang="en-US" sz="1000">
+                          <a:effectLst/>
+                        </a:rPr>
+                        <a:t>총계 </a:t>
+                      </a:r>
+                      <a:r>
+                        <a:rPr lang="en-US" altLang="ko-KR" sz="1000">
+                          <a:effectLst/>
+                        </a:rPr>
+                        <a:t>(</a:t>
+                      </a:r>
+                      <a:r>
+                        <a:rPr lang="en-US" sz="1000">
+                          <a:effectLst/>
+                        </a:rPr>
+                        <a:t>Total)</a:t>
+                      </a:r>
+                      <a:endParaRPr lang="en-US" sz="1000">
+                        <a:effectLst/>
+                        <a:latin typeface="D2Coding" panose="020B0609020101020101" pitchFamily="49" charset="-127"/>
+                        <a:ea typeface="D2Coding" panose="020B0609020101020101" pitchFamily="49" charset="-127"/>
+                      </a:endParaRPr>
+                    </a:p>
+                  </a:txBody>
+                  <a:tcPr marL="13813" marR="13813" marT="9209" marB="9209" anchor="b">
+                    <a:lnL w="12700" cap="flat" cmpd="sng" algn="ctr">
+                      <a:solidFill>
+                        <a:schemeClr val="tx1"/>
+                      </a:solidFill>
+                      <a:prstDash val="solid"/>
+                      <a:round/>
+                      <a:headEnd type="none" w="med" len="med"/>
+                      <a:tailEnd type="none" w="med" len="med"/>
+                    </a:lnL>
+                    <a:lnR w="6350" cap="flat" cmpd="sng" algn="ctr">
+                      <a:noFill/>
+                      <a:prstDash val="solid"/>
+                      <a:miter lim="800000"/>
+                    </a:lnR>
+                    <a:lnT w="6350" cap="flat" cmpd="sng" algn="ctr">
+                      <a:noFill/>
+                      <a:prstDash val="solid"/>
+                      <a:miter lim="800000"/>
+                    </a:lnT>
+                    <a:lnB w="12700" cap="flat" cmpd="sng" algn="ctr">
+                      <a:solidFill>
+                        <a:schemeClr val="tx1"/>
+                      </a:solidFill>
+                      <a:prstDash val="solid"/>
+                      <a:round/>
+                      <a:headEnd type="none" w="med" len="med"/>
+                      <a:tailEnd type="none" w="med" len="med"/>
+                    </a:lnB>
+                    <a:lnTlToBr w="12700" cmpd="sng">
+                      <a:noFill/>
+                      <a:prstDash val="solid"/>
+                    </a:lnTlToBr>
+                    <a:lnBlToTr w="12700" cmpd="sng">
+                      <a:noFill/>
+                      <a:prstDash val="solid"/>
+                    </a:lnBlToTr>
+                  </a:tcPr>
+                </a:tc>
+                <a:tc>
+                  <a:txBody>
+                    <a:bodyPr/>
+                    <a:lstStyle/>
+                    <a:p>
+                      <a:pPr algn="l" rtl="0" fontAlgn="b">
+                        <a:buNone/>
+                      </a:pPr>
+                      <a:r>
+                        <a:rPr lang="en-US" altLang="ko-KR" sz="1000">
+                          <a:effectLst/>
+                        </a:rPr>
+                        <a:t>-</a:t>
+                      </a:r>
+                      <a:endParaRPr lang="en-US" altLang="ko-KR" sz="1000">
+                        <a:effectLst/>
+                        <a:latin typeface="D2Coding" panose="020B0609020101020101" pitchFamily="49" charset="-127"/>
+                        <a:ea typeface="D2Coding" panose="020B0609020101020101" pitchFamily="49" charset="-127"/>
+                      </a:endParaRPr>
+                    </a:p>
+                  </a:txBody>
+                  <a:tcPr marL="13813" marR="13813" marT="9209" marB="9209" anchor="b">
+                    <a:lnL w="6350" cap="flat" cmpd="sng" algn="ctr">
+                      <a:noFill/>
+                      <a:prstDash val="solid"/>
+                      <a:miter lim="800000"/>
+                    </a:lnL>
+                    <a:lnR w="6350" cap="flat" cmpd="sng" algn="ctr">
+                      <a:noFill/>
+                      <a:prstDash val="solid"/>
+                      <a:miter lim="800000"/>
+                    </a:lnR>
+                    <a:lnT w="6350" cap="flat" cmpd="sng" algn="ctr">
+                      <a:noFill/>
+                      <a:prstDash val="solid"/>
+                      <a:miter lim="800000"/>
+                    </a:lnT>
+                    <a:lnB w="12700" cap="flat" cmpd="sng" algn="ctr">
+                      <a:solidFill>
+                        <a:schemeClr val="tx1"/>
+                      </a:solidFill>
+                      <a:prstDash val="solid"/>
+                      <a:round/>
+                      <a:headEnd type="none" w="med" len="med"/>
+                      <a:tailEnd type="none" w="med" len="med"/>
+                    </a:lnB>
+                    <a:lnTlToBr w="12700" cmpd="sng">
+                      <a:noFill/>
+                      <a:prstDash val="solid"/>
+                    </a:lnTlToBr>
+                    <a:lnBlToTr w="12700" cmpd="sng">
+                      <a:noFill/>
+                      <a:prstDash val="solid"/>
+                    </a:lnBlToTr>
+                  </a:tcPr>
+                </a:tc>
+                <a:tc>
+                  <a:txBody>
+                    <a:bodyPr/>
+                    <a:lstStyle/>
+                    <a:p>
+                      <a:pPr algn="l" rtl="0" fontAlgn="b">
+                        <a:buNone/>
+                      </a:pPr>
+                      <a:r>
+                        <a:rPr lang="en-US" altLang="ko-KR" sz="1000">
+                          <a:effectLst/>
+                        </a:rPr>
+                        <a:t>-</a:t>
+                      </a:r>
+                      <a:endParaRPr lang="en-US" altLang="ko-KR" sz="1000">
+                        <a:effectLst/>
+                        <a:latin typeface="D2Coding" panose="020B0609020101020101" pitchFamily="49" charset="-127"/>
+                        <a:ea typeface="D2Coding" panose="020B0609020101020101" pitchFamily="49" charset="-127"/>
+                      </a:endParaRPr>
+                    </a:p>
+                  </a:txBody>
+                  <a:tcPr marL="13813" marR="13813" marT="9209" marB="9209" anchor="b">
+                    <a:lnL w="6350" cap="flat" cmpd="sng" algn="ctr">
+                      <a:noFill/>
+                      <a:prstDash val="solid"/>
+                      <a:miter lim="800000"/>
+                    </a:lnL>
+                    <a:lnR w="6350" cap="flat" cmpd="sng" algn="ctr">
+                      <a:noFill/>
+                      <a:prstDash val="solid"/>
+                      <a:miter lim="800000"/>
+                    </a:lnR>
+                    <a:lnT w="6350" cap="flat" cmpd="sng" algn="ctr">
+                      <a:noFill/>
+                      <a:prstDash val="solid"/>
+                      <a:miter lim="800000"/>
+                    </a:lnT>
+                    <a:lnB w="12700" cap="flat" cmpd="sng" algn="ctr">
+                      <a:solidFill>
+                        <a:schemeClr val="tx1"/>
+                      </a:solidFill>
+                      <a:prstDash val="solid"/>
+                      <a:round/>
+                      <a:headEnd type="none" w="med" len="med"/>
+                      <a:tailEnd type="none" w="med" len="med"/>
+                    </a:lnB>
+                    <a:lnTlToBr w="12700" cmpd="sng">
+                      <a:noFill/>
+                      <a:prstDash val="solid"/>
+                    </a:lnTlToBr>
+                    <a:lnBlToTr w="12700" cmpd="sng">
+                      <a:noFill/>
+                      <a:prstDash val="solid"/>
+                    </a:lnBlToTr>
+                  </a:tcPr>
+                </a:tc>
+                <a:tc>
+                  <a:txBody>
+                    <a:bodyPr/>
+                    <a:lstStyle/>
+                    <a:p>
+                      <a:pPr algn="l" rtl="0" fontAlgn="b">
+                        <a:buNone/>
+                      </a:pPr>
+                      <a:r>
+                        <a:rPr lang="en-US" altLang="ko-KR" sz="1000" dirty="0">
+                          <a:effectLst/>
+                        </a:rPr>
+                        <a:t>-</a:t>
+                      </a:r>
+                      <a:endParaRPr lang="en-US" altLang="ko-KR" sz="1000" dirty="0">
+                        <a:effectLst/>
+                        <a:latin typeface="D2Coding" panose="020B0609020101020101" pitchFamily="49" charset="-127"/>
+                        <a:ea typeface="D2Coding" panose="020B0609020101020101" pitchFamily="49" charset="-127"/>
+                      </a:endParaRPr>
+                    </a:p>
+                  </a:txBody>
+                  <a:tcPr marL="13813" marR="13813" marT="9209" marB="9209" anchor="b">
+                    <a:lnL w="6350" cap="flat" cmpd="sng" algn="ctr">
+                      <a:noFill/>
+                      <a:prstDash val="solid"/>
+                      <a:miter lim="800000"/>
+                    </a:lnL>
+                    <a:lnR w="6350" cap="flat" cmpd="sng" algn="ctr">
+                      <a:noFill/>
+                      <a:prstDash val="solid"/>
+                      <a:miter lim="800000"/>
+                    </a:lnR>
+                    <a:lnT w="6350" cap="flat" cmpd="sng" algn="ctr">
+                      <a:noFill/>
+                      <a:prstDash val="solid"/>
+                      <a:miter lim="800000"/>
+                    </a:lnT>
+                    <a:lnB w="12700" cap="flat" cmpd="sng" algn="ctr">
+                      <a:solidFill>
+                        <a:schemeClr val="tx1"/>
+                      </a:solidFill>
+                      <a:prstDash val="solid"/>
+                      <a:round/>
+                      <a:headEnd type="none" w="med" len="med"/>
+                      <a:tailEnd type="none" w="med" len="med"/>
+                    </a:lnB>
+                    <a:lnTlToBr w="12700" cmpd="sng">
+                      <a:noFill/>
+                      <a:prstDash val="solid"/>
+                    </a:lnTlToBr>
+                    <a:lnBlToTr w="12700" cmpd="sng">
+                      <a:noFill/>
+                      <a:prstDash val="solid"/>
+                    </a:lnBlToTr>
+                  </a:tcPr>
+                </a:tc>
+                <a:tc>
+                  <a:txBody>
+                    <a:bodyPr/>
+                    <a:lstStyle/>
+                    <a:p>
+                      <a:pPr algn="l" rtl="0" fontAlgn="b">
+                        <a:buNone/>
+                      </a:pPr>
+                      <a:r>
+                        <a:rPr lang="en-US" altLang="ko-KR" sz="1000">
+                          <a:effectLst/>
+                        </a:rPr>
+                        <a:t>156+2,416+48,120+10,164+850</a:t>
+                      </a:r>
+                      <a:endParaRPr lang="en-US" altLang="ko-KR" sz="1000">
+                        <a:effectLst/>
+                        <a:latin typeface="D2Coding" panose="020B0609020101020101" pitchFamily="49" charset="-127"/>
+                        <a:ea typeface="D2Coding" panose="020B0609020101020101" pitchFamily="49" charset="-127"/>
+                      </a:endParaRPr>
+                    </a:p>
+                  </a:txBody>
+                  <a:tcPr marL="13813" marR="13813" marT="9209" marB="9209" anchor="b">
+                    <a:lnL w="6350" cap="flat" cmpd="sng" algn="ctr">
+                      <a:noFill/>
+                      <a:prstDash val="solid"/>
+                      <a:miter lim="800000"/>
+                    </a:lnL>
+                    <a:lnR w="6350" cap="flat" cmpd="sng" algn="ctr">
+                      <a:noFill/>
+                      <a:prstDash val="solid"/>
+                      <a:miter lim="800000"/>
+                    </a:lnR>
+                    <a:lnT w="6350" cap="flat" cmpd="sng" algn="ctr">
+                      <a:noFill/>
+                      <a:prstDash val="solid"/>
+                      <a:miter lim="800000"/>
+                    </a:lnT>
+                    <a:lnB w="12700" cap="flat" cmpd="sng" algn="ctr">
+                      <a:solidFill>
+                        <a:schemeClr val="tx1"/>
+                      </a:solidFill>
+                      <a:prstDash val="solid"/>
+                      <a:round/>
+                      <a:headEnd type="none" w="med" len="med"/>
+                      <a:tailEnd type="none" w="med" len="med"/>
+                    </a:lnB>
+                    <a:lnTlToBr w="12700" cmpd="sng">
+                      <a:noFill/>
+                      <a:prstDash val="solid"/>
+                    </a:lnTlToBr>
+                    <a:lnBlToTr w="12700" cmpd="sng">
+                      <a:noFill/>
+                      <a:prstDash val="solid"/>
+                    </a:lnBlToTr>
+                  </a:tcPr>
+                </a:tc>
+                <a:tc>
+                  <a:txBody>
+                    <a:bodyPr/>
+                    <a:lstStyle/>
+                    <a:p>
+                      <a:pPr algn="l" rtl="0" fontAlgn="b">
+                        <a:buNone/>
+                      </a:pPr>
+                      <a:r>
+                        <a:rPr lang="en-US" altLang="ko-KR" sz="1000" dirty="0">
+                          <a:effectLst/>
+                        </a:rPr>
+                        <a:t>61,706</a:t>
+                      </a:r>
+                      <a:endParaRPr lang="en-US" altLang="ko-KR" sz="1000" dirty="0">
+                        <a:effectLst/>
+                        <a:latin typeface="D2Coding" panose="020B0609020101020101" pitchFamily="49" charset="-127"/>
+                        <a:ea typeface="D2Coding" panose="020B0609020101020101" pitchFamily="49" charset="-127"/>
+                      </a:endParaRPr>
+                    </a:p>
+                  </a:txBody>
+                  <a:tcPr marL="13813" marR="13813" marT="9209" marB="9209" anchor="b">
+                    <a:lnL w="6350" cap="flat" cmpd="sng" algn="ctr">
+                      <a:noFill/>
+                      <a:prstDash val="solid"/>
+                      <a:miter lim="800000"/>
+                    </a:lnL>
+                    <a:lnR w="12700" cap="flat" cmpd="sng" algn="ctr">
+                      <a:solidFill>
+                        <a:schemeClr val="tx1"/>
+                      </a:solidFill>
+                      <a:prstDash val="solid"/>
+                      <a:round/>
+                      <a:headEnd type="none" w="med" len="med"/>
+                      <a:tailEnd type="none" w="med" len="med"/>
+                    </a:lnR>
+                    <a:lnT w="6350" cap="flat" cmpd="sng" algn="ctr">
+                      <a:noFill/>
+                      <a:prstDash val="solid"/>
+                      <a:miter lim="800000"/>
+                    </a:lnT>
+                    <a:lnB w="12700" cap="flat" cmpd="sng" algn="ctr">
+                      <a:solidFill>
+                        <a:schemeClr val="tx1"/>
+                      </a:solidFill>
+                      <a:prstDash val="solid"/>
+                      <a:round/>
+                      <a:headEnd type="none" w="med" len="med"/>
+                      <a:tailEnd type="none" w="med" len="med"/>
+                    </a:lnB>
+                    <a:lnTlToBr w="12700" cmpd="sng">
+                      <a:noFill/>
+                      <a:prstDash val="solid"/>
+                    </a:lnTlToBr>
+                    <a:lnBlToTr w="12700" cmpd="sng">
+                      <a:noFill/>
+                      <a:prstDash val="solid"/>
+                    </a:lnBlToTr>
+                  </a:tcPr>
+                </a:tc>
+                <a:extLst>
+                  <a:ext uri="{0D108BD9-81ED-4DB2-BD59-A6C34878D82A}">
+                    <a16:rowId xmlns:a16="http://schemas.microsoft.com/office/drawing/2014/main" val="2468719061"/>
+                  </a:ext>
+                </a:extLst>
+              </a:tr>
+            </a:tbl>
+          </a:graphicData>
+        </a:graphic>
+      </p:graphicFrame>
+    </p:spTree>
+    <p:extLst>
+      <p:ext uri="{BB962C8B-B14F-4D97-AF65-F5344CB8AC3E}">
+        <p14:creationId xmlns:p14="http://schemas.microsoft.com/office/powerpoint/2010/main" val="2998085262"/>
+      </p:ext>
+    </p:extLst>
+  </p:cSld>
+  <p:clrMapOvr>
+    <a:masterClrMapping/>
+  </p:clrMapOvr>
+</p:sld>
+</file>
+
+<file path=ppt/slides/slide29.xml><?xml version="1.0" encoding="utf-8"?>
 <p:sld xmlns:a="http://schemas.openxmlformats.org/drawingml/2006/main" xmlns:r="http://schemas.openxmlformats.org/officeDocument/2006/relationships" xmlns:p="http://schemas.openxmlformats.org/presentationml/2006/main">
   <p:cSld>
     <p:spTree>
@@ -16908,7 +22529,7 @@
             <a:fld id="{D57F1E4F-1CFF-5643-939E-217C01CDF565}" type="slidenum">
               <a:rPr lang="en-US" smtClean="0"/>
               <a:pPr/>
-              <a:t>27</a:t>
+              <a:t>29</a:t>
             </a:fld>
             <a:endParaRPr lang="en-US" dirty="0"/>
           </a:p>
@@ -17523,7 +23144,7 @@
                 <a:ea typeface="Segoe UI Emoji" panose="020B0502040204020203" pitchFamily="34" charset="0"/>
               </a:rPr>
               <a:pPr/>
-              <a:t>27</a:t>
+              <a:t>29</a:t>
             </a:fld>
             <a:endParaRPr lang="en-US" b="1" dirty="0">
               <a:latin typeface="Segoe UI Emoji" panose="020B0502040204020203" pitchFamily="34" charset="0"/>
@@ -17536,380 +23157,6 @@
     <p:extLst>
       <p:ext uri="{BB962C8B-B14F-4D97-AF65-F5344CB8AC3E}">
         <p14:creationId xmlns:p14="http://schemas.microsoft.com/office/powerpoint/2010/main" val="2073843253"/>
-      </p:ext>
-    </p:extLst>
-  </p:cSld>
-  <p:clrMapOvr>
-    <a:masterClrMapping/>
-  </p:clrMapOvr>
-</p:sld>
-</file>
-
-<file path=ppt/slides/slide28.xml><?xml version="1.0" encoding="utf-8"?>
-<p:sld xmlns:a="http://schemas.openxmlformats.org/drawingml/2006/main" xmlns:r="http://schemas.openxmlformats.org/officeDocument/2006/relationships" xmlns:p="http://schemas.openxmlformats.org/presentationml/2006/main">
-  <p:cSld>
-    <p:spTree>
-      <p:nvGrpSpPr>
-        <p:cNvPr id="1" name="">
-          <a:extLst>
-            <a:ext uri="{FF2B5EF4-FFF2-40B4-BE49-F238E27FC236}">
-              <a16:creationId xmlns:a16="http://schemas.microsoft.com/office/drawing/2014/main" id="{20B969A9-4F04-718A-5AEF-7E99F11A4B03}"/>
-            </a:ext>
-          </a:extLst>
-        </p:cNvPr>
-        <p:cNvGrpSpPr/>
-        <p:nvPr/>
-      </p:nvGrpSpPr>
-      <p:grpSpPr>
-        <a:xfrm>
-          <a:off x="0" y="0"/>
-          <a:ext cx="0" cy="0"/>
-          <a:chOff x="0" y="0"/>
-          <a:chExt cx="0" cy="0"/>
-        </a:xfrm>
-      </p:grpSpPr>
-      <p:sp>
-        <p:nvSpPr>
-          <p:cNvPr id="4" name="슬라이드 번호 개체 틀 3">
-            <a:extLst>
-              <a:ext uri="{FF2B5EF4-FFF2-40B4-BE49-F238E27FC236}">
-                <a16:creationId xmlns:a16="http://schemas.microsoft.com/office/drawing/2014/main" id="{DE903B85-7A47-27F7-9AE1-D7D3668480BA}"/>
-              </a:ext>
-            </a:extLst>
-          </p:cNvPr>
-          <p:cNvSpPr>
-            <a:spLocks noGrp="1"/>
-          </p:cNvSpPr>
-          <p:nvPr>
-            <p:ph type="sldNum" sz="quarter" idx="12"/>
-          </p:nvPr>
-        </p:nvSpPr>
-        <p:spPr>
-          <a:xfrm>
-            <a:off x="10514011" y="6036261"/>
-            <a:ext cx="753545" cy="365125"/>
-          </a:xfrm>
-        </p:spPr>
-        <p:txBody>
-          <a:bodyPr/>
-          <a:lstStyle/>
-          <a:p>
-            <a:fld id="{D57F1E4F-1CFF-5643-939E-217C01CDF565}" type="slidenum">
-              <a:rPr lang="en-US" smtClean="0"/>
-              <a:pPr/>
-              <a:t>28</a:t>
-            </a:fld>
-            <a:endParaRPr lang="en-US" dirty="0"/>
-          </a:p>
-        </p:txBody>
-      </p:sp>
-      <p:sp>
-        <p:nvSpPr>
-          <p:cNvPr id="3" name="제목 1">
-            <a:extLst>
-              <a:ext uri="{FF2B5EF4-FFF2-40B4-BE49-F238E27FC236}">
-                <a16:creationId xmlns:a16="http://schemas.microsoft.com/office/drawing/2014/main" id="{F251CB9C-2FC1-374C-0EDA-DC9AE809DFFE}"/>
-              </a:ext>
-            </a:extLst>
-          </p:cNvPr>
-          <p:cNvSpPr txBox="1">
-            <a:spLocks/>
-          </p:cNvSpPr>
-          <p:nvPr/>
-        </p:nvSpPr>
-        <p:spPr>
-          <a:xfrm>
-            <a:off x="475645" y="481983"/>
-            <a:ext cx="10353762" cy="766439"/>
-          </a:xfrm>
-          <a:prstGeom prst="rect">
-            <a:avLst/>
-          </a:prstGeom>
-        </p:spPr>
-        <p:txBody>
-          <a:bodyPr vert="horz" lIns="91440" tIns="45720" rIns="91440" bIns="45720" rtlCol="0" anchor="ctr">
-            <a:normAutofit/>
-          </a:bodyPr>
-          <a:lstStyle>
-            <a:lvl1pPr algn="ctr" defTabSz="914400" rtl="0" eaLnBrk="1" latinLnBrk="1" hangingPunct="1">
-              <a:lnSpc>
-                <a:spcPct val="90000"/>
-              </a:lnSpc>
-              <a:spcBef>
-                <a:spcPct val="0"/>
-              </a:spcBef>
-              <a:buNone/>
-              <a:defRPr sz="3200" kern="1200" cap="all" baseline="0">
-                <a:solidFill>
-                  <a:schemeClr val="tx1"/>
-                </a:solidFill>
-                <a:effectLst/>
-                <a:latin typeface="Batang" panose="02030600000101010101" pitchFamily="18" charset="-127"/>
-                <a:ea typeface="Batang" panose="02030600000101010101" pitchFamily="18" charset="-127"/>
-                <a:cs typeface="+mj-cs"/>
-              </a:defRPr>
-            </a:lvl1pPr>
-          </a:lstStyle>
-          <a:p>
-            <a:pPr algn="l"/>
-            <a:r>
-              <a:rPr lang="en-US" altLang="ko-KR" b="1" cap="none" dirty="0"/>
-              <a:t>Image Segmentation</a:t>
-            </a:r>
-          </a:p>
-        </p:txBody>
-      </p:sp>
-      <p:pic>
-        <p:nvPicPr>
-          <p:cNvPr id="5" name="그림 4">
-            <a:extLst>
-              <a:ext uri="{FF2B5EF4-FFF2-40B4-BE49-F238E27FC236}">
-                <a16:creationId xmlns:a16="http://schemas.microsoft.com/office/drawing/2014/main" id="{BF07FDF2-1C66-6ADC-C706-F8EC2BFDCAFF}"/>
-              </a:ext>
-            </a:extLst>
-          </p:cNvPr>
-          <p:cNvPicPr>
-            <a:picLocks noChangeAspect="1"/>
-          </p:cNvPicPr>
-          <p:nvPr/>
-        </p:nvPicPr>
-        <p:blipFill>
-          <a:blip r:embed="rId2"/>
-          <a:stretch>
-            <a:fillRect/>
-          </a:stretch>
-        </p:blipFill>
-        <p:spPr>
-          <a:xfrm>
-            <a:off x="5186518" y="2091967"/>
-            <a:ext cx="5090957" cy="4309419"/>
-          </a:xfrm>
-          <a:prstGeom prst="rect">
-            <a:avLst/>
-          </a:prstGeom>
-        </p:spPr>
-      </p:pic>
-      <p:sp>
-        <p:nvSpPr>
-          <p:cNvPr id="2" name="TextBox 1">
-            <a:extLst>
-              <a:ext uri="{FF2B5EF4-FFF2-40B4-BE49-F238E27FC236}">
-                <a16:creationId xmlns:a16="http://schemas.microsoft.com/office/drawing/2014/main" id="{1B3A10FE-64CB-2E00-71D1-DC1362550BBC}"/>
-              </a:ext>
-            </a:extLst>
-          </p:cNvPr>
-          <p:cNvSpPr txBox="1"/>
-          <p:nvPr/>
-        </p:nvSpPr>
-        <p:spPr>
-          <a:xfrm>
-            <a:off x="609600" y="1384566"/>
-            <a:ext cx="8518679" cy="369332"/>
-          </a:xfrm>
-          <a:prstGeom prst="rect">
-            <a:avLst/>
-          </a:prstGeom>
-          <a:noFill/>
-        </p:spPr>
-        <p:txBody>
-          <a:bodyPr wrap="none" rtlCol="0">
-            <a:spAutoFit/>
-          </a:bodyPr>
-          <a:lstStyle/>
-          <a:p>
-            <a:r>
-              <a:rPr lang="en-US" altLang="ko-KR" dirty="0">
-                <a:latin typeface="맑은 고딕 Semilight" panose="020B0502040204020203" pitchFamily="50" charset="-127"/>
-                <a:ea typeface="맑은 고딕 Semilight" panose="020B0502040204020203" pitchFamily="50" charset="-127"/>
-                <a:cs typeface="맑은 고딕 Semilight" panose="020B0502040204020203" pitchFamily="50" charset="-127"/>
-                <a:hlinkClick r:id="rId3">
-                  <a:extLst>
-                    <a:ext uri="{A12FA001-AC4F-418D-AE19-62706E023703}">
-                      <ahyp:hlinkClr xmlns:ahyp="http://schemas.microsoft.com/office/drawing/2018/hyperlinkcolor" val="tx"/>
-                    </a:ext>
-                  </a:extLst>
-                </a:hlinkClick>
-              </a:rPr>
-              <a:t>Deep Learning with Python : chapter11_image-segmentation</a:t>
-            </a:r>
-            <a:r>
-              <a:rPr lang="en-US" altLang="ko-KR" dirty="0">
-                <a:latin typeface="맑은 고딕 Semilight" panose="020B0502040204020203" pitchFamily="50" charset="-127"/>
-                <a:ea typeface="맑은 고딕 Semilight" panose="020B0502040204020203" pitchFamily="50" charset="-127"/>
-                <a:cs typeface="맑은 고딕 Semilight" panose="020B0502040204020203" pitchFamily="50" charset="-127"/>
-              </a:rPr>
-              <a:t> </a:t>
-            </a:r>
-            <a:r>
-              <a:rPr lang="ko-KR" altLang="en-US" dirty="0">
-                <a:latin typeface="맑은 고딕 Semilight" panose="020B0502040204020203" pitchFamily="50" charset="-127"/>
-                <a:ea typeface="맑은 고딕 Semilight" panose="020B0502040204020203" pitchFamily="50" charset="-127"/>
-                <a:cs typeface="맑은 고딕 Semilight" panose="020B0502040204020203" pitchFamily="50" charset="-127"/>
-              </a:rPr>
-              <a:t>을 참고하여 </a:t>
-            </a:r>
-            <a:r>
-              <a:rPr lang="en-US" altLang="ko-KR" dirty="0">
-                <a:latin typeface="맑은 고딕 Semilight" panose="020B0502040204020203" pitchFamily="50" charset="-127"/>
-                <a:ea typeface="맑은 고딕 Semilight" panose="020B0502040204020203" pitchFamily="50" charset="-127"/>
-                <a:cs typeface="맑은 고딕 Semilight" panose="020B0502040204020203" pitchFamily="50" charset="-127"/>
-              </a:rPr>
-              <a:t>slide</a:t>
-            </a:r>
-            <a:r>
-              <a:rPr lang="ko-KR" altLang="en-US" dirty="0">
-                <a:latin typeface="맑은 고딕 Semilight" panose="020B0502040204020203" pitchFamily="50" charset="-127"/>
-                <a:ea typeface="맑은 고딕 Semilight" panose="020B0502040204020203" pitchFamily="50" charset="-127"/>
-                <a:cs typeface="맑은 고딕 Semilight" panose="020B0502040204020203" pitchFamily="50" charset="-127"/>
-              </a:rPr>
-              <a:t> 작성</a:t>
-            </a:r>
-          </a:p>
-        </p:txBody>
-      </p:sp>
-      <p:sp>
-        <p:nvSpPr>
-          <p:cNvPr id="6" name="슬라이드 번호 개체 틀 3">
-            <a:extLst>
-              <a:ext uri="{FF2B5EF4-FFF2-40B4-BE49-F238E27FC236}">
-                <a16:creationId xmlns:a16="http://schemas.microsoft.com/office/drawing/2014/main" id="{FDF81F09-31E2-BFCA-A33A-12AA850BA995}"/>
-              </a:ext>
-            </a:extLst>
-          </p:cNvPr>
-          <p:cNvSpPr txBox="1">
-            <a:spLocks/>
-          </p:cNvSpPr>
-          <p:nvPr/>
-        </p:nvSpPr>
-        <p:spPr>
-          <a:xfrm>
-            <a:off x="11180761" y="299420"/>
-            <a:ext cx="753545" cy="365125"/>
-          </a:xfrm>
-          <a:prstGeom prst="rect">
-            <a:avLst/>
-          </a:prstGeom>
-        </p:spPr>
-        <p:txBody>
-          <a:bodyPr vert="horz" lIns="91440" tIns="45720" rIns="91440" bIns="45720" rtlCol="0" anchor="ctr"/>
-          <a:lstStyle>
-            <a:defPPr rtl="0">
-              <a:defRPr lang="ko-KR"/>
-            </a:defPPr>
-            <a:lvl1pPr marL="0" algn="r" defTabSz="914400" rtl="0" eaLnBrk="1" latinLnBrk="0" hangingPunct="1">
-              <a:defRPr sz="1200" kern="1200" baseline="0">
-                <a:solidFill>
-                  <a:schemeClr val="tx1">
-                    <a:lumMod val="65000"/>
-                    <a:lumOff val="35000"/>
-                  </a:schemeClr>
-                </a:solidFill>
-                <a:latin typeface="맑은 고딕" panose="020B0503020000020004" pitchFamily="50" charset="-127"/>
-                <a:ea typeface="맑은 고딕" panose="020B0503020000020004" pitchFamily="50" charset="-127"/>
-                <a:cs typeface="+mn-cs"/>
-              </a:defRPr>
-            </a:lvl1pPr>
-            <a:lvl2pPr marL="457200" algn="l" defTabSz="914400" rtl="0" eaLnBrk="1" latinLnBrk="0" hangingPunct="1">
-              <a:defRPr sz="1800" kern="1200">
-                <a:solidFill>
-                  <a:schemeClr val="tx1"/>
-                </a:solidFill>
-                <a:latin typeface="+mn-lt"/>
-                <a:ea typeface="+mn-ea"/>
-                <a:cs typeface="+mn-cs"/>
-              </a:defRPr>
-            </a:lvl2pPr>
-            <a:lvl3pPr marL="914400" algn="l" defTabSz="914400" rtl="0" eaLnBrk="1" latinLnBrk="0" hangingPunct="1">
-              <a:defRPr sz="1800" kern="1200">
-                <a:solidFill>
-                  <a:schemeClr val="tx1"/>
-                </a:solidFill>
-                <a:latin typeface="+mn-lt"/>
-                <a:ea typeface="+mn-ea"/>
-                <a:cs typeface="+mn-cs"/>
-              </a:defRPr>
-            </a:lvl3pPr>
-            <a:lvl4pPr marL="1371600" algn="l" defTabSz="914400" rtl="0" eaLnBrk="1" latinLnBrk="0" hangingPunct="1">
-              <a:defRPr sz="1800" kern="1200">
-                <a:solidFill>
-                  <a:schemeClr val="tx1"/>
-                </a:solidFill>
-                <a:latin typeface="+mn-lt"/>
-                <a:ea typeface="+mn-ea"/>
-                <a:cs typeface="+mn-cs"/>
-              </a:defRPr>
-            </a:lvl4pPr>
-            <a:lvl5pPr marL="1828800" algn="l" defTabSz="914400" rtl="0" eaLnBrk="1" latinLnBrk="0" hangingPunct="1">
-              <a:defRPr sz="1800" kern="1200">
-                <a:solidFill>
-                  <a:schemeClr val="tx1"/>
-                </a:solidFill>
-                <a:latin typeface="+mn-lt"/>
-                <a:ea typeface="+mn-ea"/>
-                <a:cs typeface="+mn-cs"/>
-              </a:defRPr>
-            </a:lvl5pPr>
-            <a:lvl6pPr marL="2286000" algn="l" defTabSz="914400" rtl="0" eaLnBrk="1" latinLnBrk="0" hangingPunct="1">
-              <a:defRPr sz="1800" kern="1200">
-                <a:solidFill>
-                  <a:schemeClr val="tx1"/>
-                </a:solidFill>
-                <a:latin typeface="+mn-lt"/>
-                <a:ea typeface="+mn-ea"/>
-                <a:cs typeface="+mn-cs"/>
-              </a:defRPr>
-            </a:lvl6pPr>
-            <a:lvl7pPr marL="2743200" algn="l" defTabSz="914400" rtl="0" eaLnBrk="1" latinLnBrk="0" hangingPunct="1">
-              <a:defRPr sz="1800" kern="1200">
-                <a:solidFill>
-                  <a:schemeClr val="tx1"/>
-                </a:solidFill>
-                <a:latin typeface="+mn-lt"/>
-                <a:ea typeface="+mn-ea"/>
-                <a:cs typeface="+mn-cs"/>
-              </a:defRPr>
-            </a:lvl7pPr>
-            <a:lvl8pPr marL="3200400" algn="l" defTabSz="914400" rtl="0" eaLnBrk="1" latinLnBrk="0" hangingPunct="1">
-              <a:defRPr sz="1800" kern="1200">
-                <a:solidFill>
-                  <a:schemeClr val="tx1"/>
-                </a:solidFill>
-                <a:latin typeface="+mn-lt"/>
-                <a:ea typeface="+mn-ea"/>
-                <a:cs typeface="+mn-cs"/>
-              </a:defRPr>
-            </a:lvl8pPr>
-            <a:lvl9pPr marL="3657600" algn="l" defTabSz="914400" rtl="0" eaLnBrk="1" latinLnBrk="0" hangingPunct="1">
-              <a:defRPr sz="1800" kern="1200">
-                <a:solidFill>
-                  <a:schemeClr val="tx1"/>
-                </a:solidFill>
-                <a:latin typeface="+mn-lt"/>
-                <a:ea typeface="+mn-ea"/>
-                <a:cs typeface="+mn-cs"/>
-              </a:defRPr>
-            </a:lvl9pPr>
-          </a:lstStyle>
-          <a:p>
-            <a:fld id="{D57F1E4F-1CFF-5643-939E-217C01CDF565}" type="slidenum">
-              <a:rPr lang="en-US" b="1" smtClean="0">
-                <a:latin typeface="Segoe UI Emoji" panose="020B0502040204020203" pitchFamily="34" charset="0"/>
-                <a:ea typeface="Segoe UI Emoji" panose="020B0502040204020203" pitchFamily="34" charset="0"/>
-              </a:rPr>
-              <a:pPr/>
-              <a:t>28</a:t>
-            </a:fld>
-            <a:endParaRPr lang="en-US" b="1" dirty="0">
-              <a:latin typeface="Segoe UI Emoji" panose="020B0502040204020203" pitchFamily="34" charset="0"/>
-              <a:ea typeface="Segoe UI Emoji" panose="020B0502040204020203" pitchFamily="34" charset="0"/>
-            </a:endParaRPr>
-          </a:p>
-        </p:txBody>
-      </p:sp>
-    </p:spTree>
-    <p:extLst>
-      <p:ext uri="{BB962C8B-B14F-4D97-AF65-F5344CB8AC3E}">
-        <p14:creationId xmlns:p14="http://schemas.microsoft.com/office/powerpoint/2010/main" val="2873145862"/>
       </p:ext>
     </p:extLst>
   </p:cSld>
@@ -18347,6 +23594,380 @@
     <p:extLst>
       <p:ext uri="{BB962C8B-B14F-4D97-AF65-F5344CB8AC3E}">
         <p14:creationId xmlns:p14="http://schemas.microsoft.com/office/powerpoint/2010/main" val="3815810867"/>
+      </p:ext>
+    </p:extLst>
+  </p:cSld>
+  <p:clrMapOvr>
+    <a:masterClrMapping/>
+  </p:clrMapOvr>
+</p:sld>
+</file>
+
+<file path=ppt/slides/slide30.xml><?xml version="1.0" encoding="utf-8"?>
+<p:sld xmlns:a="http://schemas.openxmlformats.org/drawingml/2006/main" xmlns:r="http://schemas.openxmlformats.org/officeDocument/2006/relationships" xmlns:p="http://schemas.openxmlformats.org/presentationml/2006/main">
+  <p:cSld>
+    <p:spTree>
+      <p:nvGrpSpPr>
+        <p:cNvPr id="1" name="">
+          <a:extLst>
+            <a:ext uri="{FF2B5EF4-FFF2-40B4-BE49-F238E27FC236}">
+              <a16:creationId xmlns:a16="http://schemas.microsoft.com/office/drawing/2014/main" id="{20B969A9-4F04-718A-5AEF-7E99F11A4B03}"/>
+            </a:ext>
+          </a:extLst>
+        </p:cNvPr>
+        <p:cNvGrpSpPr/>
+        <p:nvPr/>
+      </p:nvGrpSpPr>
+      <p:grpSpPr>
+        <a:xfrm>
+          <a:off x="0" y="0"/>
+          <a:ext cx="0" cy="0"/>
+          <a:chOff x="0" y="0"/>
+          <a:chExt cx="0" cy="0"/>
+        </a:xfrm>
+      </p:grpSpPr>
+      <p:sp>
+        <p:nvSpPr>
+          <p:cNvPr id="4" name="슬라이드 번호 개체 틀 3">
+            <a:extLst>
+              <a:ext uri="{FF2B5EF4-FFF2-40B4-BE49-F238E27FC236}">
+                <a16:creationId xmlns:a16="http://schemas.microsoft.com/office/drawing/2014/main" id="{DE903B85-7A47-27F7-9AE1-D7D3668480BA}"/>
+              </a:ext>
+            </a:extLst>
+          </p:cNvPr>
+          <p:cNvSpPr>
+            <a:spLocks noGrp="1"/>
+          </p:cNvSpPr>
+          <p:nvPr>
+            <p:ph type="sldNum" sz="quarter" idx="12"/>
+          </p:nvPr>
+        </p:nvSpPr>
+        <p:spPr>
+          <a:xfrm>
+            <a:off x="10514011" y="6036261"/>
+            <a:ext cx="753545" cy="365125"/>
+          </a:xfrm>
+        </p:spPr>
+        <p:txBody>
+          <a:bodyPr/>
+          <a:lstStyle/>
+          <a:p>
+            <a:fld id="{D57F1E4F-1CFF-5643-939E-217C01CDF565}" type="slidenum">
+              <a:rPr lang="en-US" smtClean="0"/>
+              <a:pPr/>
+              <a:t>30</a:t>
+            </a:fld>
+            <a:endParaRPr lang="en-US" dirty="0"/>
+          </a:p>
+        </p:txBody>
+      </p:sp>
+      <p:sp>
+        <p:nvSpPr>
+          <p:cNvPr id="3" name="제목 1">
+            <a:extLst>
+              <a:ext uri="{FF2B5EF4-FFF2-40B4-BE49-F238E27FC236}">
+                <a16:creationId xmlns:a16="http://schemas.microsoft.com/office/drawing/2014/main" id="{F251CB9C-2FC1-374C-0EDA-DC9AE809DFFE}"/>
+              </a:ext>
+            </a:extLst>
+          </p:cNvPr>
+          <p:cNvSpPr txBox="1">
+            <a:spLocks/>
+          </p:cNvSpPr>
+          <p:nvPr/>
+        </p:nvSpPr>
+        <p:spPr>
+          <a:xfrm>
+            <a:off x="475645" y="481983"/>
+            <a:ext cx="10353762" cy="766439"/>
+          </a:xfrm>
+          <a:prstGeom prst="rect">
+            <a:avLst/>
+          </a:prstGeom>
+        </p:spPr>
+        <p:txBody>
+          <a:bodyPr vert="horz" lIns="91440" tIns="45720" rIns="91440" bIns="45720" rtlCol="0" anchor="ctr">
+            <a:normAutofit/>
+          </a:bodyPr>
+          <a:lstStyle>
+            <a:lvl1pPr algn="ctr" defTabSz="914400" rtl="0" eaLnBrk="1" latinLnBrk="1" hangingPunct="1">
+              <a:lnSpc>
+                <a:spcPct val="90000"/>
+              </a:lnSpc>
+              <a:spcBef>
+                <a:spcPct val="0"/>
+              </a:spcBef>
+              <a:buNone/>
+              <a:defRPr sz="3200" kern="1200" cap="all" baseline="0">
+                <a:solidFill>
+                  <a:schemeClr val="tx1"/>
+                </a:solidFill>
+                <a:effectLst/>
+                <a:latin typeface="Batang" panose="02030600000101010101" pitchFamily="18" charset="-127"/>
+                <a:ea typeface="Batang" panose="02030600000101010101" pitchFamily="18" charset="-127"/>
+                <a:cs typeface="+mj-cs"/>
+              </a:defRPr>
+            </a:lvl1pPr>
+          </a:lstStyle>
+          <a:p>
+            <a:pPr algn="l"/>
+            <a:r>
+              <a:rPr lang="en-US" altLang="ko-KR" b="1" cap="none" dirty="0"/>
+              <a:t>Image Segmentation</a:t>
+            </a:r>
+          </a:p>
+        </p:txBody>
+      </p:sp>
+      <p:pic>
+        <p:nvPicPr>
+          <p:cNvPr id="5" name="그림 4">
+            <a:extLst>
+              <a:ext uri="{FF2B5EF4-FFF2-40B4-BE49-F238E27FC236}">
+                <a16:creationId xmlns:a16="http://schemas.microsoft.com/office/drawing/2014/main" id="{BF07FDF2-1C66-6ADC-C706-F8EC2BFDCAFF}"/>
+              </a:ext>
+            </a:extLst>
+          </p:cNvPr>
+          <p:cNvPicPr>
+            <a:picLocks noChangeAspect="1"/>
+          </p:cNvPicPr>
+          <p:nvPr/>
+        </p:nvPicPr>
+        <p:blipFill>
+          <a:blip r:embed="rId2"/>
+          <a:stretch>
+            <a:fillRect/>
+          </a:stretch>
+        </p:blipFill>
+        <p:spPr>
+          <a:xfrm>
+            <a:off x="5186518" y="2091967"/>
+            <a:ext cx="5090957" cy="4309419"/>
+          </a:xfrm>
+          <a:prstGeom prst="rect">
+            <a:avLst/>
+          </a:prstGeom>
+        </p:spPr>
+      </p:pic>
+      <p:sp>
+        <p:nvSpPr>
+          <p:cNvPr id="2" name="TextBox 1">
+            <a:extLst>
+              <a:ext uri="{FF2B5EF4-FFF2-40B4-BE49-F238E27FC236}">
+                <a16:creationId xmlns:a16="http://schemas.microsoft.com/office/drawing/2014/main" id="{1B3A10FE-64CB-2E00-71D1-DC1362550BBC}"/>
+              </a:ext>
+            </a:extLst>
+          </p:cNvPr>
+          <p:cNvSpPr txBox="1"/>
+          <p:nvPr/>
+        </p:nvSpPr>
+        <p:spPr>
+          <a:xfrm>
+            <a:off x="609600" y="1384566"/>
+            <a:ext cx="8518679" cy="369332"/>
+          </a:xfrm>
+          <a:prstGeom prst="rect">
+            <a:avLst/>
+          </a:prstGeom>
+          <a:noFill/>
+        </p:spPr>
+        <p:txBody>
+          <a:bodyPr wrap="none" rtlCol="0">
+            <a:spAutoFit/>
+          </a:bodyPr>
+          <a:lstStyle/>
+          <a:p>
+            <a:r>
+              <a:rPr lang="en-US" altLang="ko-KR" dirty="0">
+                <a:latin typeface="맑은 고딕 Semilight" panose="020B0502040204020203" pitchFamily="50" charset="-127"/>
+                <a:ea typeface="맑은 고딕 Semilight" panose="020B0502040204020203" pitchFamily="50" charset="-127"/>
+                <a:cs typeface="맑은 고딕 Semilight" panose="020B0502040204020203" pitchFamily="50" charset="-127"/>
+                <a:hlinkClick r:id="rId3">
+                  <a:extLst>
+                    <a:ext uri="{A12FA001-AC4F-418D-AE19-62706E023703}">
+                      <ahyp:hlinkClr xmlns:ahyp="http://schemas.microsoft.com/office/drawing/2018/hyperlinkcolor" val="tx"/>
+                    </a:ext>
+                  </a:extLst>
+                </a:hlinkClick>
+              </a:rPr>
+              <a:t>Deep Learning with Python : chapter11_image-segmentation</a:t>
+            </a:r>
+            <a:r>
+              <a:rPr lang="en-US" altLang="ko-KR" dirty="0">
+                <a:latin typeface="맑은 고딕 Semilight" panose="020B0502040204020203" pitchFamily="50" charset="-127"/>
+                <a:ea typeface="맑은 고딕 Semilight" panose="020B0502040204020203" pitchFamily="50" charset="-127"/>
+                <a:cs typeface="맑은 고딕 Semilight" panose="020B0502040204020203" pitchFamily="50" charset="-127"/>
+              </a:rPr>
+              <a:t> </a:t>
+            </a:r>
+            <a:r>
+              <a:rPr lang="ko-KR" altLang="en-US" dirty="0">
+                <a:latin typeface="맑은 고딕 Semilight" panose="020B0502040204020203" pitchFamily="50" charset="-127"/>
+                <a:ea typeface="맑은 고딕 Semilight" panose="020B0502040204020203" pitchFamily="50" charset="-127"/>
+                <a:cs typeface="맑은 고딕 Semilight" panose="020B0502040204020203" pitchFamily="50" charset="-127"/>
+              </a:rPr>
+              <a:t>을 참고하여 </a:t>
+            </a:r>
+            <a:r>
+              <a:rPr lang="en-US" altLang="ko-KR" dirty="0">
+                <a:latin typeface="맑은 고딕 Semilight" panose="020B0502040204020203" pitchFamily="50" charset="-127"/>
+                <a:ea typeface="맑은 고딕 Semilight" panose="020B0502040204020203" pitchFamily="50" charset="-127"/>
+                <a:cs typeface="맑은 고딕 Semilight" panose="020B0502040204020203" pitchFamily="50" charset="-127"/>
+              </a:rPr>
+              <a:t>slide</a:t>
+            </a:r>
+            <a:r>
+              <a:rPr lang="ko-KR" altLang="en-US" dirty="0">
+                <a:latin typeface="맑은 고딕 Semilight" panose="020B0502040204020203" pitchFamily="50" charset="-127"/>
+                <a:ea typeface="맑은 고딕 Semilight" panose="020B0502040204020203" pitchFamily="50" charset="-127"/>
+                <a:cs typeface="맑은 고딕 Semilight" panose="020B0502040204020203" pitchFamily="50" charset="-127"/>
+              </a:rPr>
+              <a:t> 작성</a:t>
+            </a:r>
+          </a:p>
+        </p:txBody>
+      </p:sp>
+      <p:sp>
+        <p:nvSpPr>
+          <p:cNvPr id="6" name="슬라이드 번호 개체 틀 3">
+            <a:extLst>
+              <a:ext uri="{FF2B5EF4-FFF2-40B4-BE49-F238E27FC236}">
+                <a16:creationId xmlns:a16="http://schemas.microsoft.com/office/drawing/2014/main" id="{FDF81F09-31E2-BFCA-A33A-12AA850BA995}"/>
+              </a:ext>
+            </a:extLst>
+          </p:cNvPr>
+          <p:cNvSpPr txBox="1">
+            <a:spLocks/>
+          </p:cNvSpPr>
+          <p:nvPr/>
+        </p:nvSpPr>
+        <p:spPr>
+          <a:xfrm>
+            <a:off x="11180761" y="299420"/>
+            <a:ext cx="753545" cy="365125"/>
+          </a:xfrm>
+          <a:prstGeom prst="rect">
+            <a:avLst/>
+          </a:prstGeom>
+        </p:spPr>
+        <p:txBody>
+          <a:bodyPr vert="horz" lIns="91440" tIns="45720" rIns="91440" bIns="45720" rtlCol="0" anchor="ctr"/>
+          <a:lstStyle>
+            <a:defPPr rtl="0">
+              <a:defRPr lang="ko-KR"/>
+            </a:defPPr>
+            <a:lvl1pPr marL="0" algn="r" defTabSz="914400" rtl="0" eaLnBrk="1" latinLnBrk="0" hangingPunct="1">
+              <a:defRPr sz="1200" kern="1200" baseline="0">
+                <a:solidFill>
+                  <a:schemeClr val="tx1">
+                    <a:lumMod val="65000"/>
+                    <a:lumOff val="35000"/>
+                  </a:schemeClr>
+                </a:solidFill>
+                <a:latin typeface="맑은 고딕" panose="020B0503020000020004" pitchFamily="50" charset="-127"/>
+                <a:ea typeface="맑은 고딕" panose="020B0503020000020004" pitchFamily="50" charset="-127"/>
+                <a:cs typeface="+mn-cs"/>
+              </a:defRPr>
+            </a:lvl1pPr>
+            <a:lvl2pPr marL="457200" algn="l" defTabSz="914400" rtl="0" eaLnBrk="1" latinLnBrk="0" hangingPunct="1">
+              <a:defRPr sz="1800" kern="1200">
+                <a:solidFill>
+                  <a:schemeClr val="tx1"/>
+                </a:solidFill>
+                <a:latin typeface="+mn-lt"/>
+                <a:ea typeface="+mn-ea"/>
+                <a:cs typeface="+mn-cs"/>
+              </a:defRPr>
+            </a:lvl2pPr>
+            <a:lvl3pPr marL="914400" algn="l" defTabSz="914400" rtl="0" eaLnBrk="1" latinLnBrk="0" hangingPunct="1">
+              <a:defRPr sz="1800" kern="1200">
+                <a:solidFill>
+                  <a:schemeClr val="tx1"/>
+                </a:solidFill>
+                <a:latin typeface="+mn-lt"/>
+                <a:ea typeface="+mn-ea"/>
+                <a:cs typeface="+mn-cs"/>
+              </a:defRPr>
+            </a:lvl3pPr>
+            <a:lvl4pPr marL="1371600" algn="l" defTabSz="914400" rtl="0" eaLnBrk="1" latinLnBrk="0" hangingPunct="1">
+              <a:defRPr sz="1800" kern="1200">
+                <a:solidFill>
+                  <a:schemeClr val="tx1"/>
+                </a:solidFill>
+                <a:latin typeface="+mn-lt"/>
+                <a:ea typeface="+mn-ea"/>
+                <a:cs typeface="+mn-cs"/>
+              </a:defRPr>
+            </a:lvl4pPr>
+            <a:lvl5pPr marL="1828800" algn="l" defTabSz="914400" rtl="0" eaLnBrk="1" latinLnBrk="0" hangingPunct="1">
+              <a:defRPr sz="1800" kern="1200">
+                <a:solidFill>
+                  <a:schemeClr val="tx1"/>
+                </a:solidFill>
+                <a:latin typeface="+mn-lt"/>
+                <a:ea typeface="+mn-ea"/>
+                <a:cs typeface="+mn-cs"/>
+              </a:defRPr>
+            </a:lvl5pPr>
+            <a:lvl6pPr marL="2286000" algn="l" defTabSz="914400" rtl="0" eaLnBrk="1" latinLnBrk="0" hangingPunct="1">
+              <a:defRPr sz="1800" kern="1200">
+                <a:solidFill>
+                  <a:schemeClr val="tx1"/>
+                </a:solidFill>
+                <a:latin typeface="+mn-lt"/>
+                <a:ea typeface="+mn-ea"/>
+                <a:cs typeface="+mn-cs"/>
+              </a:defRPr>
+            </a:lvl6pPr>
+            <a:lvl7pPr marL="2743200" algn="l" defTabSz="914400" rtl="0" eaLnBrk="1" latinLnBrk="0" hangingPunct="1">
+              <a:defRPr sz="1800" kern="1200">
+                <a:solidFill>
+                  <a:schemeClr val="tx1"/>
+                </a:solidFill>
+                <a:latin typeface="+mn-lt"/>
+                <a:ea typeface="+mn-ea"/>
+                <a:cs typeface="+mn-cs"/>
+              </a:defRPr>
+            </a:lvl7pPr>
+            <a:lvl8pPr marL="3200400" algn="l" defTabSz="914400" rtl="0" eaLnBrk="1" latinLnBrk="0" hangingPunct="1">
+              <a:defRPr sz="1800" kern="1200">
+                <a:solidFill>
+                  <a:schemeClr val="tx1"/>
+                </a:solidFill>
+                <a:latin typeface="+mn-lt"/>
+                <a:ea typeface="+mn-ea"/>
+                <a:cs typeface="+mn-cs"/>
+              </a:defRPr>
+            </a:lvl8pPr>
+            <a:lvl9pPr marL="3657600" algn="l" defTabSz="914400" rtl="0" eaLnBrk="1" latinLnBrk="0" hangingPunct="1">
+              <a:defRPr sz="1800" kern="1200">
+                <a:solidFill>
+                  <a:schemeClr val="tx1"/>
+                </a:solidFill>
+                <a:latin typeface="+mn-lt"/>
+                <a:ea typeface="+mn-ea"/>
+                <a:cs typeface="+mn-cs"/>
+              </a:defRPr>
+            </a:lvl9pPr>
+          </a:lstStyle>
+          <a:p>
+            <a:fld id="{D57F1E4F-1CFF-5643-939E-217C01CDF565}" type="slidenum">
+              <a:rPr lang="en-US" b="1" smtClean="0">
+                <a:latin typeface="Segoe UI Emoji" panose="020B0502040204020203" pitchFamily="34" charset="0"/>
+                <a:ea typeface="Segoe UI Emoji" panose="020B0502040204020203" pitchFamily="34" charset="0"/>
+              </a:rPr>
+              <a:pPr/>
+              <a:t>30</a:t>
+            </a:fld>
+            <a:endParaRPr lang="en-US" b="1" dirty="0">
+              <a:latin typeface="Segoe UI Emoji" panose="020B0502040204020203" pitchFamily="34" charset="0"/>
+              <a:ea typeface="Segoe UI Emoji" panose="020B0502040204020203" pitchFamily="34" charset="0"/>
+            </a:endParaRPr>
+          </a:p>
+        </p:txBody>
+      </p:sp>
+    </p:spTree>
+    <p:extLst>
+      <p:ext uri="{BB962C8B-B14F-4D97-AF65-F5344CB8AC3E}">
+        <p14:creationId xmlns:p14="http://schemas.microsoft.com/office/powerpoint/2010/main" val="2873145862"/>
       </p:ext>
     </p:extLst>
   </p:cSld>
